--- a/Relatórios/ASMA/PPT/PPT_ASMA _v1.pptx
+++ b/Relatórios/ASMA/PPT/PPT_ASMA _v1.pptx
@@ -1,35 +1,35 @@
 
 <file path=ppt/presentation.xml><?xml version="1.0" encoding="utf-8"?>
-<p:presentation xmlns:a="http://schemas.openxmlformats.org/drawingml/2006/main" xmlns:r="http://schemas.openxmlformats.org/officeDocument/2006/relationships" xmlns:mc="http://schemas.openxmlformats.org/markup-compatibility/2006" xmlns:mv="urn:schemas-microsoft-com:mac:vml" xmlns:p="http://schemas.openxmlformats.org/presentationml/2006/main" xmlns:c="http://schemas.openxmlformats.org/drawingml/2006/chart" xmlns:dgm="http://schemas.openxmlformats.org/drawingml/2006/diagram" xmlns:o="urn:schemas-microsoft-com:office:office" xmlns:v="urn:schemas-microsoft-com:vml" xmlns:pvml="urn:schemas-microsoft-com:office:powerpoint" xmlns:com="http://schemas.openxmlformats.org/drawingml/2006/compatibility" xmlns:p14="http://schemas.microsoft.com/office/powerpoint/2010/main" xmlns:p15="http://schemas.microsoft.com/office/powerpoint/2012/main" xmlns:ahyp="http://schemas.microsoft.com/office/drawing/2018/hyperlinkcolor" autoCompressPictures="0" strictFirstAndLastChars="0" saveSubsetFonts="1">
+<p:presentation xmlns:a="http://schemas.openxmlformats.org/drawingml/2006/main" xmlns:r="http://schemas.openxmlformats.org/officeDocument/2006/relationships" xmlns:p="http://schemas.openxmlformats.org/presentationml/2006/main" strictFirstAndLastChars="0" saveSubsetFonts="1" autoCompressPictures="0">
   <p:sldMasterIdLst>
-    <p:sldMasterId id="2147483659" r:id="rId4"/>
+    <p:sldMasterId id="2147483659" r:id="rId1"/>
   </p:sldMasterIdLst>
   <p:notesMasterIdLst>
-    <p:notesMasterId r:id="rId5"/>
+    <p:notesMasterId r:id="rId19"/>
   </p:notesMasterIdLst>
   <p:sldIdLst>
-    <p:sldId id="256" r:id="rId6"/>
-    <p:sldId id="257" r:id="rId7"/>
-    <p:sldId id="258" r:id="rId8"/>
-    <p:sldId id="259" r:id="rId9"/>
-    <p:sldId id="260" r:id="rId10"/>
-    <p:sldId id="261" r:id="rId11"/>
-    <p:sldId id="262" r:id="rId12"/>
-    <p:sldId id="263" r:id="rId13"/>
-    <p:sldId id="264" r:id="rId14"/>
-    <p:sldId id="265" r:id="rId15"/>
-    <p:sldId id="266" r:id="rId16"/>
-    <p:sldId id="267" r:id="rId17"/>
-    <p:sldId id="268" r:id="rId18"/>
-    <p:sldId id="269" r:id="rId19"/>
-    <p:sldId id="270" r:id="rId20"/>
-    <p:sldId id="271" r:id="rId21"/>
-    <p:sldId id="272" r:id="rId22"/>
+    <p:sldId id="256" r:id="rId2"/>
+    <p:sldId id="257" r:id="rId3"/>
+    <p:sldId id="258" r:id="rId4"/>
+    <p:sldId id="259" r:id="rId5"/>
+    <p:sldId id="260" r:id="rId6"/>
+    <p:sldId id="261" r:id="rId7"/>
+    <p:sldId id="262" r:id="rId8"/>
+    <p:sldId id="263" r:id="rId9"/>
+    <p:sldId id="264" r:id="rId10"/>
+    <p:sldId id="265" r:id="rId11"/>
+    <p:sldId id="266" r:id="rId12"/>
+    <p:sldId id="267" r:id="rId13"/>
+    <p:sldId id="268" r:id="rId14"/>
+    <p:sldId id="269" r:id="rId15"/>
+    <p:sldId id="270" r:id="rId16"/>
+    <p:sldId id="271" r:id="rId17"/>
+    <p:sldId id="272" r:id="rId18"/>
   </p:sldIdLst>
-  <p:sldSz cy="5143500" cx="9144000"/>
+  <p:sldSz cx="9144000" cy="5143500" type="screen16x9"/>
   <p:notesSz cx="6858000" cy="9144000"/>
   <p:defaultTextStyle>
-    <a:defPPr lvl="0" marR="0" rtl="0" algn="l">
+    <a:defPPr marR="0" lvl="0" algn="l" rtl="0">
       <a:lnSpc>
         <a:spcPct val="100000"/>
       </a:lnSpc>
@@ -40,7 +40,7 @@
         <a:spcPts val="0"/>
       </a:spcAft>
     </a:defPPr>
-    <a:lvl1pPr lvl="0" marR="0" rtl="0" algn="l">
+    <a:lvl1pPr marR="0" lvl="0" algn="l" rtl="0">
       <a:lnSpc>
         <a:spcPct val="100000"/>
       </a:lnSpc>
@@ -54,7 +54,7 @@
         <a:srgbClr val="000000"/>
       </a:buClr>
       <a:buFont typeface="Arial"/>
-      <a:defRPr b="0" i="0" sz="1400" u="none" cap="none" strike="noStrike">
+      <a:defRPr sz="1400" b="0" i="0" u="none" strike="noStrike" cap="none">
         <a:solidFill>
           <a:srgbClr val="000000"/>
         </a:solidFill>
@@ -64,7 +64,7 @@
         <a:sym typeface="Arial"/>
       </a:defRPr>
     </a:lvl1pPr>
-    <a:lvl2pPr lvl="1" marR="0" rtl="0" algn="l">
+    <a:lvl2pPr marR="0" lvl="1" algn="l" rtl="0">
       <a:lnSpc>
         <a:spcPct val="100000"/>
       </a:lnSpc>
@@ -78,7 +78,7 @@
         <a:srgbClr val="000000"/>
       </a:buClr>
       <a:buFont typeface="Arial"/>
-      <a:defRPr b="0" i="0" sz="1400" u="none" cap="none" strike="noStrike">
+      <a:defRPr sz="1400" b="0" i="0" u="none" strike="noStrike" cap="none">
         <a:solidFill>
           <a:srgbClr val="000000"/>
         </a:solidFill>
@@ -88,7 +88,7 @@
         <a:sym typeface="Arial"/>
       </a:defRPr>
     </a:lvl2pPr>
-    <a:lvl3pPr lvl="2" marR="0" rtl="0" algn="l">
+    <a:lvl3pPr marR="0" lvl="2" algn="l" rtl="0">
       <a:lnSpc>
         <a:spcPct val="100000"/>
       </a:lnSpc>
@@ -102,7 +102,7 @@
         <a:srgbClr val="000000"/>
       </a:buClr>
       <a:buFont typeface="Arial"/>
-      <a:defRPr b="0" i="0" sz="1400" u="none" cap="none" strike="noStrike">
+      <a:defRPr sz="1400" b="0" i="0" u="none" strike="noStrike" cap="none">
         <a:solidFill>
           <a:srgbClr val="000000"/>
         </a:solidFill>
@@ -112,7 +112,7 @@
         <a:sym typeface="Arial"/>
       </a:defRPr>
     </a:lvl3pPr>
-    <a:lvl4pPr lvl="3" marR="0" rtl="0" algn="l">
+    <a:lvl4pPr marR="0" lvl="3" algn="l" rtl="0">
       <a:lnSpc>
         <a:spcPct val="100000"/>
       </a:lnSpc>
@@ -126,7 +126,7 @@
         <a:srgbClr val="000000"/>
       </a:buClr>
       <a:buFont typeface="Arial"/>
-      <a:defRPr b="0" i="0" sz="1400" u="none" cap="none" strike="noStrike">
+      <a:defRPr sz="1400" b="0" i="0" u="none" strike="noStrike" cap="none">
         <a:solidFill>
           <a:srgbClr val="000000"/>
         </a:solidFill>
@@ -136,7 +136,7 @@
         <a:sym typeface="Arial"/>
       </a:defRPr>
     </a:lvl4pPr>
-    <a:lvl5pPr lvl="4" marR="0" rtl="0" algn="l">
+    <a:lvl5pPr marR="0" lvl="4" algn="l" rtl="0">
       <a:lnSpc>
         <a:spcPct val="100000"/>
       </a:lnSpc>
@@ -150,7 +150,7 @@
         <a:srgbClr val="000000"/>
       </a:buClr>
       <a:buFont typeface="Arial"/>
-      <a:defRPr b="0" i="0" sz="1400" u="none" cap="none" strike="noStrike">
+      <a:defRPr sz="1400" b="0" i="0" u="none" strike="noStrike" cap="none">
         <a:solidFill>
           <a:srgbClr val="000000"/>
         </a:solidFill>
@@ -160,7 +160,7 @@
         <a:sym typeface="Arial"/>
       </a:defRPr>
     </a:lvl5pPr>
-    <a:lvl6pPr lvl="5" marR="0" rtl="0" algn="l">
+    <a:lvl6pPr marR="0" lvl="5" algn="l" rtl="0">
       <a:lnSpc>
         <a:spcPct val="100000"/>
       </a:lnSpc>
@@ -174,7 +174,7 @@
         <a:srgbClr val="000000"/>
       </a:buClr>
       <a:buFont typeface="Arial"/>
-      <a:defRPr b="0" i="0" sz="1400" u="none" cap="none" strike="noStrike">
+      <a:defRPr sz="1400" b="0" i="0" u="none" strike="noStrike" cap="none">
         <a:solidFill>
           <a:srgbClr val="000000"/>
         </a:solidFill>
@@ -184,7 +184,7 @@
         <a:sym typeface="Arial"/>
       </a:defRPr>
     </a:lvl6pPr>
-    <a:lvl7pPr lvl="6" marR="0" rtl="0" algn="l">
+    <a:lvl7pPr marR="0" lvl="6" algn="l" rtl="0">
       <a:lnSpc>
         <a:spcPct val="100000"/>
       </a:lnSpc>
@@ -198,7 +198,7 @@
         <a:srgbClr val="000000"/>
       </a:buClr>
       <a:buFont typeface="Arial"/>
-      <a:defRPr b="0" i="0" sz="1400" u="none" cap="none" strike="noStrike">
+      <a:defRPr sz="1400" b="0" i="0" u="none" strike="noStrike" cap="none">
         <a:solidFill>
           <a:srgbClr val="000000"/>
         </a:solidFill>
@@ -208,7 +208,7 @@
         <a:sym typeface="Arial"/>
       </a:defRPr>
     </a:lvl7pPr>
-    <a:lvl8pPr lvl="7" marR="0" rtl="0" algn="l">
+    <a:lvl8pPr marR="0" lvl="7" algn="l" rtl="0">
       <a:lnSpc>
         <a:spcPct val="100000"/>
       </a:lnSpc>
@@ -222,7 +222,7 @@
         <a:srgbClr val="000000"/>
       </a:buClr>
       <a:buFont typeface="Arial"/>
-      <a:defRPr b="0" i="0" sz="1400" u="none" cap="none" strike="noStrike">
+      <a:defRPr sz="1400" b="0" i="0" u="none" strike="noStrike" cap="none">
         <a:solidFill>
           <a:srgbClr val="000000"/>
         </a:solidFill>
@@ -232,7 +232,7 @@
         <a:sym typeface="Arial"/>
       </a:defRPr>
     </a:lvl8pPr>
-    <a:lvl9pPr lvl="8" marR="0" rtl="0" algn="l">
+    <a:lvl9pPr marR="0" lvl="8" algn="l" rtl="0">
       <a:lnSpc>
         <a:spcPct val="100000"/>
       </a:lnSpc>
@@ -246,7 +246,7 @@
         <a:srgbClr val="000000"/>
       </a:buClr>
       <a:buFont typeface="Arial"/>
-      <a:defRPr b="0" i="0" sz="1400" u="none" cap="none" strike="noStrike">
+      <a:defRPr sz="1400" b="0" i="0" u="none" strike="noStrike" cap="none">
         <a:solidFill>
           <a:srgbClr val="000000"/>
         </a:solidFill>
@@ -259,7 +259,7 @@
   </p:defaultTextStyle>
   <p:extLst>
     <p:ext uri="{EFAFB233-063F-42B5-8137-9DF3F51BA10A}">
-      <p15:sldGuideLst>
+      <p15:sldGuideLst xmlns:p15="http://schemas.microsoft.com/office/powerpoint/2012/main">
         <p15:guide id="1" orient="horz" pos="1620">
           <p15:clr>
             <a:srgbClr val="747775"/>
@@ -277,11 +277,16 @@
 </file>
 
 <file path=ppt/notesMasters/notesMaster1.xml><?xml version="1.0" encoding="utf-8"?>
-<p:notesMaster xmlns:a="http://schemas.openxmlformats.org/drawingml/2006/main" xmlns:r="http://schemas.openxmlformats.org/officeDocument/2006/relationships" xmlns:mc="http://schemas.openxmlformats.org/markup-compatibility/2006" xmlns:mv="urn:schemas-microsoft-com:mac:vml" xmlns:p="http://schemas.openxmlformats.org/presentationml/2006/main" xmlns:c="http://schemas.openxmlformats.org/drawingml/2006/chart" xmlns:dgm="http://schemas.openxmlformats.org/drawingml/2006/diagram" xmlns:o="urn:schemas-microsoft-com:office:office" xmlns:v="urn:schemas-microsoft-com:vml" xmlns:pvml="urn:schemas-microsoft-com:office:powerpoint" xmlns:com="http://schemas.openxmlformats.org/drawingml/2006/compatibility" xmlns:p14="http://schemas.microsoft.com/office/powerpoint/2010/main" xmlns:p15="http://schemas.microsoft.com/office/powerpoint/2012/main" xmlns:ahyp="http://schemas.microsoft.com/office/drawing/2018/hyperlinkcolor">
+<p:notesMaster xmlns:a="http://schemas.openxmlformats.org/drawingml/2006/main" xmlns:r="http://schemas.openxmlformats.org/officeDocument/2006/relationships" xmlns:p="http://schemas.openxmlformats.org/presentationml/2006/main">
   <p:cSld>
+    <p:bg>
+      <p:bgRef idx="1001">
+        <a:schemeClr val="bg1"/>
+      </p:bgRef>
+    </p:bg>
     <p:spTree>
       <p:nvGrpSpPr>
-        <p:cNvPr id="2" name="Shape 2"/>
+        <p:cNvPr id="1" name="Shape 2"/>
         <p:cNvGrpSpPr/>
         <p:nvPr/>
       </p:nvGrpSpPr>
@@ -296,9 +301,11 @@
       <p:sp>
         <p:nvSpPr>
           <p:cNvPr id="3" name="Google Shape;3;n"/>
-          <p:cNvSpPr/>
+          <p:cNvSpPr>
+            <a:spLocks noGrp="1" noRot="1" noChangeAspect="1"/>
+          </p:cNvSpPr>
           <p:nvPr>
-            <p:ph idx="2" type="sldImg"/>
+            <p:ph type="sldImg" idx="2"/>
           </p:nvPr>
         </p:nvSpPr>
         <p:spPr>
@@ -307,9 +314,13 @@
             <a:ext cx="6096075" cy="3429000"/>
           </a:xfrm>
           <a:custGeom>
-            <a:rect b="b" l="l" r="r" t="t"/>
+            <a:avLst/>
+            <a:gdLst/>
+            <a:ahLst/>
+            <a:cxnLst/>
+            <a:rect l="l" t="t" r="r" b="b"/>
             <a:pathLst>
-              <a:path extrusionOk="0" h="120000" w="120000">
+              <a:path w="120000" h="120000" extrusionOk="0">
                 <a:moveTo>
                   <a:pt x="0" y="0"/>
                 </a:moveTo>
@@ -327,23 +338,25 @@
             </a:pathLst>
           </a:custGeom>
           <a:noFill/>
-          <a:ln cap="flat" cmpd="sng" w="9525">
+          <a:ln w="9525" cap="flat" cmpd="sng">
             <a:solidFill>
               <a:srgbClr val="000000"/>
             </a:solidFill>
             <a:prstDash val="solid"/>
             <a:round/>
-            <a:headEnd len="sm" w="sm" type="none"/>
-            <a:tailEnd len="sm" w="sm" type="none"/>
+            <a:headEnd type="none" w="sm" len="sm"/>
+            <a:tailEnd type="none" w="sm" len="sm"/>
           </a:ln>
         </p:spPr>
       </p:sp>
       <p:sp>
         <p:nvSpPr>
           <p:cNvPr id="4" name="Google Shape;4;n"/>
-          <p:cNvSpPr txBox="1"/>
+          <p:cNvSpPr txBox="1">
+            <a:spLocks noGrp="1"/>
+          </p:cNvSpPr>
           <p:nvPr>
-            <p:ph idx="1" type="body"/>
+            <p:ph type="body" idx="1"/>
           </p:nvPr>
         </p:nvSpPr>
         <p:spPr>
@@ -360,11 +373,11 @@
           </a:ln>
         </p:spPr>
         <p:txBody>
-          <a:bodyPr anchorCtr="0" anchor="t" bIns="91425" lIns="91425" spcFirstLastPara="1" rIns="91425" wrap="square" tIns="91425">
+          <a:bodyPr spcFirstLastPara="1" wrap="square" lIns="91425" tIns="91425" rIns="91425" bIns="91425" anchor="t" anchorCtr="0">
             <a:noAutofit/>
           </a:bodyPr>
           <a:lstStyle>
-            <a:lvl1pPr indent="-298450" lvl="0" marL="457200">
+            <a:lvl1pPr marL="457200" lvl="0" indent="-298450">
               <a:spcBef>
                 <a:spcPts val="0"/>
               </a:spcBef>
@@ -375,7 +388,7 @@
               <a:buChar char="●"/>
               <a:defRPr sz="1100"/>
             </a:lvl1pPr>
-            <a:lvl2pPr indent="-298450" lvl="1" marL="914400">
+            <a:lvl2pPr marL="914400" lvl="1" indent="-298450">
               <a:spcBef>
                 <a:spcPts val="0"/>
               </a:spcBef>
@@ -386,7 +399,7 @@
               <a:buChar char="○"/>
               <a:defRPr sz="1100"/>
             </a:lvl2pPr>
-            <a:lvl3pPr indent="-298450" lvl="2" marL="1371600">
+            <a:lvl3pPr marL="1371600" lvl="2" indent="-298450">
               <a:spcBef>
                 <a:spcPts val="0"/>
               </a:spcBef>
@@ -397,7 +410,7 @@
               <a:buChar char="■"/>
               <a:defRPr sz="1100"/>
             </a:lvl3pPr>
-            <a:lvl4pPr indent="-298450" lvl="3" marL="1828800">
+            <a:lvl4pPr marL="1828800" lvl="3" indent="-298450">
               <a:spcBef>
                 <a:spcPts val="0"/>
               </a:spcBef>
@@ -408,7 +421,7 @@
               <a:buChar char="●"/>
               <a:defRPr sz="1100"/>
             </a:lvl4pPr>
-            <a:lvl5pPr indent="-298450" lvl="4" marL="2286000">
+            <a:lvl5pPr marL="2286000" lvl="4" indent="-298450">
               <a:spcBef>
                 <a:spcPts val="0"/>
               </a:spcBef>
@@ -419,7 +432,7 @@
               <a:buChar char="○"/>
               <a:defRPr sz="1100"/>
             </a:lvl5pPr>
-            <a:lvl6pPr indent="-298450" lvl="5" marL="2743200">
+            <a:lvl6pPr marL="2743200" lvl="5" indent="-298450">
               <a:spcBef>
                 <a:spcPts val="0"/>
               </a:spcBef>
@@ -430,7 +443,7 @@
               <a:buChar char="■"/>
               <a:defRPr sz="1100"/>
             </a:lvl6pPr>
-            <a:lvl7pPr indent="-298450" lvl="6" marL="3200400">
+            <a:lvl7pPr marL="3200400" lvl="6" indent="-298450">
               <a:spcBef>
                 <a:spcPts val="0"/>
               </a:spcBef>
@@ -441,7 +454,7 @@
               <a:buChar char="●"/>
               <a:defRPr sz="1100"/>
             </a:lvl7pPr>
-            <a:lvl8pPr indent="-298450" lvl="7" marL="3657600">
+            <a:lvl8pPr marL="3657600" lvl="7" indent="-298450">
               <a:spcBef>
                 <a:spcPts val="0"/>
               </a:spcBef>
@@ -452,7 +465,7 @@
               <a:buChar char="○"/>
               <a:defRPr sz="1100"/>
             </a:lvl8pPr>
-            <a:lvl9pPr indent="-298450" lvl="8" marL="4114800">
+            <a:lvl9pPr marL="4114800" lvl="8" indent="-298450">
               <a:spcBef>
                 <a:spcPts val="0"/>
               </a:spcBef>
@@ -464,14 +477,16 @@
               <a:defRPr sz="1100"/>
             </a:lvl9pPr>
           </a:lstStyle>
-          <a:p/>
+          <a:p>
+            <a:endParaRPr/>
+          </a:p>
         </p:txBody>
       </p:sp>
     </p:spTree>
   </p:cSld>
-  <p:clrMap accent1="accent1" accent2="accent2" accent3="accent3" accent4="accent4" accent5="accent5" accent6="accent6" bg1="lt1" bg2="dk2" tx1="dk1" tx2="lt2" folHlink="folHlink" hlink="hlink"/>
+  <p:clrMap bg1="lt1" tx1="dk1" bg2="dk2" tx2="lt2" accent1="accent1" accent2="accent2" accent3="accent3" accent4="accent4" accent5="accent5" accent6="accent6" hlink="hlink" folHlink="folHlink"/>
   <p:notesStyle>
-    <a:defPPr lvl="0" marR="0" rtl="0" algn="l">
+    <a:defPPr marR="0" lvl="0" algn="l" rtl="0">
       <a:lnSpc>
         <a:spcPct val="100000"/>
       </a:lnSpc>
@@ -482,7 +497,7 @@
         <a:spcPts val="0"/>
       </a:spcAft>
     </a:defPPr>
-    <a:lvl1pPr lvl="0" marR="0" rtl="0" algn="l">
+    <a:lvl1pPr marR="0" lvl="0" algn="l" rtl="0">
       <a:lnSpc>
         <a:spcPct val="100000"/>
       </a:lnSpc>
@@ -496,7 +511,7 @@
         <a:srgbClr val="000000"/>
       </a:buClr>
       <a:buFont typeface="Arial"/>
-      <a:defRPr b="0" i="0" sz="1400" u="none" cap="none" strike="noStrike">
+      <a:defRPr sz="1400" b="0" i="0" u="none" strike="noStrike" cap="none">
         <a:solidFill>
           <a:srgbClr val="000000"/>
         </a:solidFill>
@@ -506,7 +521,7 @@
         <a:sym typeface="Arial"/>
       </a:defRPr>
     </a:lvl1pPr>
-    <a:lvl2pPr lvl="1" marR="0" rtl="0" algn="l">
+    <a:lvl2pPr marR="0" lvl="1" algn="l" rtl="0">
       <a:lnSpc>
         <a:spcPct val="100000"/>
       </a:lnSpc>
@@ -520,7 +535,7 @@
         <a:srgbClr val="000000"/>
       </a:buClr>
       <a:buFont typeface="Arial"/>
-      <a:defRPr b="0" i="0" sz="1400" u="none" cap="none" strike="noStrike">
+      <a:defRPr sz="1400" b="0" i="0" u="none" strike="noStrike" cap="none">
         <a:solidFill>
           <a:srgbClr val="000000"/>
         </a:solidFill>
@@ -530,7 +545,7 @@
         <a:sym typeface="Arial"/>
       </a:defRPr>
     </a:lvl2pPr>
-    <a:lvl3pPr lvl="2" marR="0" rtl="0" algn="l">
+    <a:lvl3pPr marR="0" lvl="2" algn="l" rtl="0">
       <a:lnSpc>
         <a:spcPct val="100000"/>
       </a:lnSpc>
@@ -544,7 +559,7 @@
         <a:srgbClr val="000000"/>
       </a:buClr>
       <a:buFont typeface="Arial"/>
-      <a:defRPr b="0" i="0" sz="1400" u="none" cap="none" strike="noStrike">
+      <a:defRPr sz="1400" b="0" i="0" u="none" strike="noStrike" cap="none">
         <a:solidFill>
           <a:srgbClr val="000000"/>
         </a:solidFill>
@@ -554,7 +569,7 @@
         <a:sym typeface="Arial"/>
       </a:defRPr>
     </a:lvl3pPr>
-    <a:lvl4pPr lvl="3" marR="0" rtl="0" algn="l">
+    <a:lvl4pPr marR="0" lvl="3" algn="l" rtl="0">
       <a:lnSpc>
         <a:spcPct val="100000"/>
       </a:lnSpc>
@@ -568,7 +583,7 @@
         <a:srgbClr val="000000"/>
       </a:buClr>
       <a:buFont typeface="Arial"/>
-      <a:defRPr b="0" i="0" sz="1400" u="none" cap="none" strike="noStrike">
+      <a:defRPr sz="1400" b="0" i="0" u="none" strike="noStrike" cap="none">
         <a:solidFill>
           <a:srgbClr val="000000"/>
         </a:solidFill>
@@ -578,7 +593,7 @@
         <a:sym typeface="Arial"/>
       </a:defRPr>
     </a:lvl4pPr>
-    <a:lvl5pPr lvl="4" marR="0" rtl="0" algn="l">
+    <a:lvl5pPr marR="0" lvl="4" algn="l" rtl="0">
       <a:lnSpc>
         <a:spcPct val="100000"/>
       </a:lnSpc>
@@ -592,7 +607,7 @@
         <a:srgbClr val="000000"/>
       </a:buClr>
       <a:buFont typeface="Arial"/>
-      <a:defRPr b="0" i="0" sz="1400" u="none" cap="none" strike="noStrike">
+      <a:defRPr sz="1400" b="0" i="0" u="none" strike="noStrike" cap="none">
         <a:solidFill>
           <a:srgbClr val="000000"/>
         </a:solidFill>
@@ -602,7 +617,7 @@
         <a:sym typeface="Arial"/>
       </a:defRPr>
     </a:lvl5pPr>
-    <a:lvl6pPr lvl="5" marR="0" rtl="0" algn="l">
+    <a:lvl6pPr marR="0" lvl="5" algn="l" rtl="0">
       <a:lnSpc>
         <a:spcPct val="100000"/>
       </a:lnSpc>
@@ -616,7 +631,7 @@
         <a:srgbClr val="000000"/>
       </a:buClr>
       <a:buFont typeface="Arial"/>
-      <a:defRPr b="0" i="0" sz="1400" u="none" cap="none" strike="noStrike">
+      <a:defRPr sz="1400" b="0" i="0" u="none" strike="noStrike" cap="none">
         <a:solidFill>
           <a:srgbClr val="000000"/>
         </a:solidFill>
@@ -626,7 +641,7 @@
         <a:sym typeface="Arial"/>
       </a:defRPr>
     </a:lvl6pPr>
-    <a:lvl7pPr lvl="6" marR="0" rtl="0" algn="l">
+    <a:lvl7pPr marR="0" lvl="6" algn="l" rtl="0">
       <a:lnSpc>
         <a:spcPct val="100000"/>
       </a:lnSpc>
@@ -640,7 +655,7 @@
         <a:srgbClr val="000000"/>
       </a:buClr>
       <a:buFont typeface="Arial"/>
-      <a:defRPr b="0" i="0" sz="1400" u="none" cap="none" strike="noStrike">
+      <a:defRPr sz="1400" b="0" i="0" u="none" strike="noStrike" cap="none">
         <a:solidFill>
           <a:srgbClr val="000000"/>
         </a:solidFill>
@@ -650,7 +665,7 @@
         <a:sym typeface="Arial"/>
       </a:defRPr>
     </a:lvl7pPr>
-    <a:lvl8pPr lvl="7" marR="0" rtl="0" algn="l">
+    <a:lvl8pPr marR="0" lvl="7" algn="l" rtl="0">
       <a:lnSpc>
         <a:spcPct val="100000"/>
       </a:lnSpc>
@@ -664,7 +679,7 @@
         <a:srgbClr val="000000"/>
       </a:buClr>
       <a:buFont typeface="Arial"/>
-      <a:defRPr b="0" i="0" sz="1400" u="none" cap="none" strike="noStrike">
+      <a:defRPr sz="1400" b="0" i="0" u="none" strike="noStrike" cap="none">
         <a:solidFill>
           <a:srgbClr val="000000"/>
         </a:solidFill>
@@ -674,7 +689,7 @@
         <a:sym typeface="Arial"/>
       </a:defRPr>
     </a:lvl8pPr>
-    <a:lvl9pPr lvl="8" marR="0" rtl="0" algn="l">
+    <a:lvl9pPr marR="0" lvl="8" algn="l" rtl="0">
       <a:lnSpc>
         <a:spcPct val="100000"/>
       </a:lnSpc>
@@ -688,7 +703,7 @@
         <a:srgbClr val="000000"/>
       </a:buClr>
       <a:buFont typeface="Arial"/>
-      <a:defRPr b="0" i="0" sz="1400" u="none" cap="none" strike="noStrike">
+      <a:defRPr sz="1400" b="0" i="0" u="none" strike="noStrike" cap="none">
         <a:solidFill>
           <a:srgbClr val="000000"/>
         </a:solidFill>
@@ -703,11 +718,11 @@
 </file>
 
 <file path=ppt/notesSlides/notesSlide1.xml><?xml version="1.0" encoding="utf-8"?>
-<p:notes xmlns:a="http://schemas.openxmlformats.org/drawingml/2006/main" xmlns:r="http://schemas.openxmlformats.org/officeDocument/2006/relationships" xmlns:mc="http://schemas.openxmlformats.org/markup-compatibility/2006" xmlns:mv="urn:schemas-microsoft-com:mac:vml" xmlns:p="http://schemas.openxmlformats.org/presentationml/2006/main" xmlns:c="http://schemas.openxmlformats.org/drawingml/2006/chart" xmlns:dgm="http://schemas.openxmlformats.org/drawingml/2006/diagram" xmlns:o="urn:schemas-microsoft-com:office:office" xmlns:v="urn:schemas-microsoft-com:vml" xmlns:pvml="urn:schemas-microsoft-com:office:powerpoint" xmlns:com="http://schemas.openxmlformats.org/drawingml/2006/compatibility" xmlns:p14="http://schemas.microsoft.com/office/powerpoint/2010/main" xmlns:p15="http://schemas.microsoft.com/office/powerpoint/2012/main" xmlns:ahyp="http://schemas.microsoft.com/office/drawing/2018/hyperlinkcolor" showMasterPhAnim="0" showMasterSp="0">
+<p:notes xmlns:a="http://schemas.openxmlformats.org/drawingml/2006/main" xmlns:r="http://schemas.openxmlformats.org/officeDocument/2006/relationships" xmlns:p="http://schemas.openxmlformats.org/presentationml/2006/main" showMasterSp="0" showMasterPhAnim="0">
   <p:cSld>
     <p:spTree>
       <p:nvGrpSpPr>
-        <p:cNvPr id="50" name="Shape 50"/>
+        <p:cNvPr id="1" name="Shape 50"/>
         <p:cNvGrpSpPr/>
         <p:nvPr/>
       </p:nvGrpSpPr>
@@ -722,20 +737,26 @@
       <p:sp>
         <p:nvSpPr>
           <p:cNvPr id="51" name="Google Shape;51;p:notes"/>
-          <p:cNvSpPr/>
+          <p:cNvSpPr>
+            <a:spLocks noGrp="1" noRot="1" noChangeAspect="1"/>
+          </p:cNvSpPr>
           <p:nvPr>
-            <p:ph idx="2" type="sldImg"/>
+            <p:ph type="sldImg" idx="2"/>
           </p:nvPr>
         </p:nvSpPr>
         <p:spPr>
           <a:xfrm>
-            <a:off x="381300" y="685800"/>
-            <a:ext cx="6096075" cy="3429000"/>
+            <a:off x="381000" y="685800"/>
+            <a:ext cx="6096000" cy="3429000"/>
           </a:xfrm>
           <a:custGeom>
-            <a:rect b="b" l="l" r="r" t="t"/>
+            <a:avLst/>
+            <a:gdLst/>
+            <a:ahLst/>
+            <a:cxnLst/>
+            <a:rect l="l" t="t" r="r" b="b"/>
             <a:pathLst>
-              <a:path extrusionOk="0" h="120000" w="120000">
+              <a:path w="120000" h="120000" extrusionOk="0">
                 <a:moveTo>
                   <a:pt x="0" y="0"/>
                 </a:moveTo>
@@ -757,9 +778,11 @@
       <p:sp>
         <p:nvSpPr>
           <p:cNvPr id="52" name="Google Shape;52;p:notes"/>
-          <p:cNvSpPr txBox="1"/>
+          <p:cNvSpPr txBox="1">
+            <a:spLocks noGrp="1"/>
+          </p:cNvSpPr>
           <p:nvPr>
-            <p:ph idx="1" type="body"/>
+            <p:ph type="body" idx="1"/>
           </p:nvPr>
         </p:nvSpPr>
         <p:spPr>
@@ -772,23 +795,20 @@
           </a:prstGeom>
         </p:spPr>
         <p:txBody>
-          <a:bodyPr anchorCtr="0" anchor="t" bIns="91425" lIns="91425" spcFirstLastPara="1" rIns="91425" wrap="square" tIns="91425">
+          <a:bodyPr spcFirstLastPara="1" wrap="square" lIns="91425" tIns="91425" rIns="91425" bIns="91425" anchor="t" anchorCtr="0">
             <a:noAutofit/>
           </a:bodyPr>
           <a:lstStyle/>
           <a:p>
-            <a:pPr indent="0" lvl="0" marL="0" rtl="0" algn="l">
-              <a:spcBef>
-                <a:spcPts val="0"/>
-              </a:spcBef>
-              <a:spcAft>
-                <a:spcPts val="0"/>
-              </a:spcAft>
-              <a:buNone/>
-            </a:pPr>
-            <a:r>
-              <a:t/>
-            </a:r>
+            <a:pPr marL="0" lvl="0" indent="0" algn="l" rtl="0">
+              <a:spcBef>
+                <a:spcPts val="0"/>
+              </a:spcBef>
+              <a:spcAft>
+                <a:spcPts val="0"/>
+              </a:spcAft>
+              <a:buNone/>
+            </a:pPr>
             <a:endParaRPr/>
           </a:p>
         </p:txBody>
@@ -802,11 +822,11 @@
 </file>
 
 <file path=ppt/notesSlides/notesSlide10.xml><?xml version="1.0" encoding="utf-8"?>
-<p:notes xmlns:a="http://schemas.openxmlformats.org/drawingml/2006/main" xmlns:r="http://schemas.openxmlformats.org/officeDocument/2006/relationships" xmlns:mc="http://schemas.openxmlformats.org/markup-compatibility/2006" xmlns:mv="urn:schemas-microsoft-com:mac:vml" xmlns:p="http://schemas.openxmlformats.org/presentationml/2006/main" xmlns:c="http://schemas.openxmlformats.org/drawingml/2006/chart" xmlns:dgm="http://schemas.openxmlformats.org/drawingml/2006/diagram" xmlns:o="urn:schemas-microsoft-com:office:office" xmlns:v="urn:schemas-microsoft-com:vml" xmlns:pvml="urn:schemas-microsoft-com:office:powerpoint" xmlns:com="http://schemas.openxmlformats.org/drawingml/2006/compatibility" xmlns:p14="http://schemas.microsoft.com/office/powerpoint/2010/main" xmlns:p15="http://schemas.microsoft.com/office/powerpoint/2012/main" xmlns:ahyp="http://schemas.microsoft.com/office/drawing/2018/hyperlinkcolor" showMasterPhAnim="0" showMasterSp="0">
+<p:notes xmlns:a="http://schemas.openxmlformats.org/drawingml/2006/main" xmlns:r="http://schemas.openxmlformats.org/officeDocument/2006/relationships" xmlns:p="http://schemas.openxmlformats.org/presentationml/2006/main" showMasterSp="0" showMasterPhAnim="0">
   <p:cSld>
     <p:spTree>
       <p:nvGrpSpPr>
-        <p:cNvPr id="116" name="Shape 116"/>
+        <p:cNvPr id="1" name="Shape 116"/>
         <p:cNvGrpSpPr/>
         <p:nvPr/>
       </p:nvGrpSpPr>
@@ -821,9 +841,11 @@
       <p:sp>
         <p:nvSpPr>
           <p:cNvPr id="117" name="Google Shape;117;g3e5a2f08be3_0_130:notes"/>
-          <p:cNvSpPr/>
+          <p:cNvSpPr>
+            <a:spLocks noGrp="1" noRot="1" noChangeAspect="1"/>
+          </p:cNvSpPr>
           <p:nvPr>
-            <p:ph idx="2" type="sldImg"/>
+            <p:ph type="sldImg" idx="2"/>
           </p:nvPr>
         </p:nvSpPr>
         <p:spPr>
@@ -832,9 +854,13 @@
             <a:ext cx="6096000" cy="3429000"/>
           </a:xfrm>
           <a:custGeom>
-            <a:rect b="b" l="l" r="r" t="t"/>
+            <a:avLst/>
+            <a:gdLst/>
+            <a:ahLst/>
+            <a:cxnLst/>
+            <a:rect l="l" t="t" r="r" b="b"/>
             <a:pathLst>
-              <a:path extrusionOk="0" h="120000" w="120000">
+              <a:path w="120000" h="120000" extrusionOk="0">
                 <a:moveTo>
                   <a:pt x="0" y="0"/>
                 </a:moveTo>
@@ -856,9 +882,11 @@
       <p:sp>
         <p:nvSpPr>
           <p:cNvPr id="118" name="Google Shape;118;g3e5a2f08be3_0_130:notes"/>
-          <p:cNvSpPr txBox="1"/>
+          <p:cNvSpPr txBox="1">
+            <a:spLocks noGrp="1"/>
+          </p:cNvSpPr>
           <p:nvPr>
-            <p:ph idx="1" type="body"/>
+            <p:ph type="body" idx="1"/>
           </p:nvPr>
         </p:nvSpPr>
         <p:spPr>
@@ -871,23 +899,20 @@
           </a:prstGeom>
         </p:spPr>
         <p:txBody>
-          <a:bodyPr anchorCtr="0" anchor="t" bIns="91425" lIns="91425" spcFirstLastPara="1" rIns="91425" wrap="square" tIns="91425">
+          <a:bodyPr spcFirstLastPara="1" wrap="square" lIns="91425" tIns="91425" rIns="91425" bIns="91425" anchor="t" anchorCtr="0">
             <a:noAutofit/>
           </a:bodyPr>
           <a:lstStyle/>
           <a:p>
-            <a:pPr indent="0" lvl="0" marL="0" rtl="0" algn="l">
-              <a:spcBef>
-                <a:spcPts val="0"/>
-              </a:spcBef>
-              <a:spcAft>
-                <a:spcPts val="0"/>
-              </a:spcAft>
-              <a:buNone/>
-            </a:pPr>
-            <a:r>
-              <a:t/>
-            </a:r>
+            <a:pPr marL="0" lvl="0" indent="0" algn="l" rtl="0">
+              <a:spcBef>
+                <a:spcPts val="0"/>
+              </a:spcBef>
+              <a:spcAft>
+                <a:spcPts val="0"/>
+              </a:spcAft>
+              <a:buNone/>
+            </a:pPr>
             <a:endParaRPr/>
           </a:p>
         </p:txBody>
@@ -901,11 +926,11 @@
 </file>
 
 <file path=ppt/notesSlides/notesSlide11.xml><?xml version="1.0" encoding="utf-8"?>
-<p:notes xmlns:a="http://schemas.openxmlformats.org/drawingml/2006/main" xmlns:r="http://schemas.openxmlformats.org/officeDocument/2006/relationships" xmlns:mc="http://schemas.openxmlformats.org/markup-compatibility/2006" xmlns:mv="urn:schemas-microsoft-com:mac:vml" xmlns:p="http://schemas.openxmlformats.org/presentationml/2006/main" xmlns:c="http://schemas.openxmlformats.org/drawingml/2006/chart" xmlns:dgm="http://schemas.openxmlformats.org/drawingml/2006/diagram" xmlns:o="urn:schemas-microsoft-com:office:office" xmlns:v="urn:schemas-microsoft-com:vml" xmlns:pvml="urn:schemas-microsoft-com:office:powerpoint" xmlns:com="http://schemas.openxmlformats.org/drawingml/2006/compatibility" xmlns:p14="http://schemas.microsoft.com/office/powerpoint/2010/main" xmlns:p15="http://schemas.microsoft.com/office/powerpoint/2012/main" xmlns:ahyp="http://schemas.microsoft.com/office/drawing/2018/hyperlinkcolor" showMasterPhAnim="0" showMasterSp="0">
+<p:notes xmlns:a="http://schemas.openxmlformats.org/drawingml/2006/main" xmlns:r="http://schemas.openxmlformats.org/officeDocument/2006/relationships" xmlns:p="http://schemas.openxmlformats.org/presentationml/2006/main" showMasterSp="0" showMasterPhAnim="0">
   <p:cSld>
     <p:spTree>
       <p:nvGrpSpPr>
-        <p:cNvPr id="122" name="Shape 122"/>
+        <p:cNvPr id="1" name="Shape 122"/>
         <p:cNvGrpSpPr/>
         <p:nvPr/>
       </p:nvGrpSpPr>
@@ -920,9 +945,11 @@
       <p:sp>
         <p:nvSpPr>
           <p:cNvPr id="123" name="Google Shape;123;g3e5a2f08be3_0_136:notes"/>
-          <p:cNvSpPr/>
+          <p:cNvSpPr>
+            <a:spLocks noGrp="1" noRot="1" noChangeAspect="1"/>
+          </p:cNvSpPr>
           <p:nvPr>
-            <p:ph idx="2" type="sldImg"/>
+            <p:ph type="sldImg" idx="2"/>
           </p:nvPr>
         </p:nvSpPr>
         <p:spPr>
@@ -931,9 +958,13 @@
             <a:ext cx="6096000" cy="3429000"/>
           </a:xfrm>
           <a:custGeom>
-            <a:rect b="b" l="l" r="r" t="t"/>
+            <a:avLst/>
+            <a:gdLst/>
+            <a:ahLst/>
+            <a:cxnLst/>
+            <a:rect l="l" t="t" r="r" b="b"/>
             <a:pathLst>
-              <a:path extrusionOk="0" h="120000" w="120000">
+              <a:path w="120000" h="120000" extrusionOk="0">
                 <a:moveTo>
                   <a:pt x="0" y="0"/>
                 </a:moveTo>
@@ -955,9 +986,11 @@
       <p:sp>
         <p:nvSpPr>
           <p:cNvPr id="124" name="Google Shape;124;g3e5a2f08be3_0_136:notes"/>
-          <p:cNvSpPr txBox="1"/>
+          <p:cNvSpPr txBox="1">
+            <a:spLocks noGrp="1"/>
+          </p:cNvSpPr>
           <p:nvPr>
-            <p:ph idx="1" type="body"/>
+            <p:ph type="body" idx="1"/>
           </p:nvPr>
         </p:nvSpPr>
         <p:spPr>
@@ -970,23 +1003,20 @@
           </a:prstGeom>
         </p:spPr>
         <p:txBody>
-          <a:bodyPr anchorCtr="0" anchor="t" bIns="91425" lIns="91425" spcFirstLastPara="1" rIns="91425" wrap="square" tIns="91425">
+          <a:bodyPr spcFirstLastPara="1" wrap="square" lIns="91425" tIns="91425" rIns="91425" bIns="91425" anchor="t" anchorCtr="0">
             <a:noAutofit/>
           </a:bodyPr>
           <a:lstStyle/>
           <a:p>
-            <a:pPr indent="0" lvl="0" marL="0" rtl="0" algn="l">
-              <a:spcBef>
-                <a:spcPts val="0"/>
-              </a:spcBef>
-              <a:spcAft>
-                <a:spcPts val="0"/>
-              </a:spcAft>
-              <a:buNone/>
-            </a:pPr>
-            <a:r>
-              <a:t/>
-            </a:r>
+            <a:pPr marL="0" lvl="0" indent="0" algn="l" rtl="0">
+              <a:spcBef>
+                <a:spcPts val="0"/>
+              </a:spcBef>
+              <a:spcAft>
+                <a:spcPts val="0"/>
+              </a:spcAft>
+              <a:buNone/>
+            </a:pPr>
             <a:endParaRPr/>
           </a:p>
         </p:txBody>
@@ -1000,11 +1030,11 @@
 </file>
 
 <file path=ppt/notesSlides/notesSlide12.xml><?xml version="1.0" encoding="utf-8"?>
-<p:notes xmlns:a="http://schemas.openxmlformats.org/drawingml/2006/main" xmlns:r="http://schemas.openxmlformats.org/officeDocument/2006/relationships" xmlns:mc="http://schemas.openxmlformats.org/markup-compatibility/2006" xmlns:mv="urn:schemas-microsoft-com:mac:vml" xmlns:p="http://schemas.openxmlformats.org/presentationml/2006/main" xmlns:c="http://schemas.openxmlformats.org/drawingml/2006/chart" xmlns:dgm="http://schemas.openxmlformats.org/drawingml/2006/diagram" xmlns:o="urn:schemas-microsoft-com:office:office" xmlns:v="urn:schemas-microsoft-com:vml" xmlns:pvml="urn:schemas-microsoft-com:office:powerpoint" xmlns:com="http://schemas.openxmlformats.org/drawingml/2006/compatibility" xmlns:p14="http://schemas.microsoft.com/office/powerpoint/2010/main" xmlns:p15="http://schemas.microsoft.com/office/powerpoint/2012/main" xmlns:ahyp="http://schemas.microsoft.com/office/drawing/2018/hyperlinkcolor" showMasterPhAnim="0" showMasterSp="0">
+<p:notes xmlns:a="http://schemas.openxmlformats.org/drawingml/2006/main" xmlns:r="http://schemas.openxmlformats.org/officeDocument/2006/relationships" xmlns:p="http://schemas.openxmlformats.org/presentationml/2006/main" showMasterSp="0" showMasterPhAnim="0">
   <p:cSld>
     <p:spTree>
       <p:nvGrpSpPr>
-        <p:cNvPr id="128" name="Shape 128"/>
+        <p:cNvPr id="1" name="Shape 128"/>
         <p:cNvGrpSpPr/>
         <p:nvPr/>
       </p:nvGrpSpPr>
@@ -1019,9 +1049,11 @@
       <p:sp>
         <p:nvSpPr>
           <p:cNvPr id="129" name="Google Shape;129;g3e5a2f08be3_0_142:notes"/>
-          <p:cNvSpPr/>
+          <p:cNvSpPr>
+            <a:spLocks noGrp="1" noRot="1" noChangeAspect="1"/>
+          </p:cNvSpPr>
           <p:nvPr>
-            <p:ph idx="2" type="sldImg"/>
+            <p:ph type="sldImg" idx="2"/>
           </p:nvPr>
         </p:nvSpPr>
         <p:spPr>
@@ -1030,9 +1062,13 @@
             <a:ext cx="6096000" cy="3429000"/>
           </a:xfrm>
           <a:custGeom>
-            <a:rect b="b" l="l" r="r" t="t"/>
+            <a:avLst/>
+            <a:gdLst/>
+            <a:ahLst/>
+            <a:cxnLst/>
+            <a:rect l="l" t="t" r="r" b="b"/>
             <a:pathLst>
-              <a:path extrusionOk="0" h="120000" w="120000">
+              <a:path w="120000" h="120000" extrusionOk="0">
                 <a:moveTo>
                   <a:pt x="0" y="0"/>
                 </a:moveTo>
@@ -1054,9 +1090,11 @@
       <p:sp>
         <p:nvSpPr>
           <p:cNvPr id="130" name="Google Shape;130;g3e5a2f08be3_0_142:notes"/>
-          <p:cNvSpPr txBox="1"/>
+          <p:cNvSpPr txBox="1">
+            <a:spLocks noGrp="1"/>
+          </p:cNvSpPr>
           <p:nvPr>
-            <p:ph idx="1" type="body"/>
+            <p:ph type="body" idx="1"/>
           </p:nvPr>
         </p:nvSpPr>
         <p:spPr>
@@ -1069,23 +1107,20 @@
           </a:prstGeom>
         </p:spPr>
         <p:txBody>
-          <a:bodyPr anchorCtr="0" anchor="t" bIns="91425" lIns="91425" spcFirstLastPara="1" rIns="91425" wrap="square" tIns="91425">
+          <a:bodyPr spcFirstLastPara="1" wrap="square" lIns="91425" tIns="91425" rIns="91425" bIns="91425" anchor="t" anchorCtr="0">
             <a:noAutofit/>
           </a:bodyPr>
           <a:lstStyle/>
           <a:p>
-            <a:pPr indent="0" lvl="0" marL="0" rtl="0" algn="l">
-              <a:spcBef>
-                <a:spcPts val="0"/>
-              </a:spcBef>
-              <a:spcAft>
-                <a:spcPts val="0"/>
-              </a:spcAft>
-              <a:buNone/>
-            </a:pPr>
-            <a:r>
-              <a:t/>
-            </a:r>
+            <a:pPr marL="0" lvl="0" indent="0" algn="l" rtl="0">
+              <a:spcBef>
+                <a:spcPts val="0"/>
+              </a:spcBef>
+              <a:spcAft>
+                <a:spcPts val="0"/>
+              </a:spcAft>
+              <a:buNone/>
+            </a:pPr>
             <a:endParaRPr/>
           </a:p>
         </p:txBody>
@@ -1099,11 +1134,11 @@
 </file>
 
 <file path=ppt/notesSlides/notesSlide13.xml><?xml version="1.0" encoding="utf-8"?>
-<p:notes xmlns:a="http://schemas.openxmlformats.org/drawingml/2006/main" xmlns:r="http://schemas.openxmlformats.org/officeDocument/2006/relationships" xmlns:mc="http://schemas.openxmlformats.org/markup-compatibility/2006" xmlns:mv="urn:schemas-microsoft-com:mac:vml" xmlns:p="http://schemas.openxmlformats.org/presentationml/2006/main" xmlns:c="http://schemas.openxmlformats.org/drawingml/2006/chart" xmlns:dgm="http://schemas.openxmlformats.org/drawingml/2006/diagram" xmlns:o="urn:schemas-microsoft-com:office:office" xmlns:v="urn:schemas-microsoft-com:vml" xmlns:pvml="urn:schemas-microsoft-com:office:powerpoint" xmlns:com="http://schemas.openxmlformats.org/drawingml/2006/compatibility" xmlns:p14="http://schemas.microsoft.com/office/powerpoint/2010/main" xmlns:p15="http://schemas.microsoft.com/office/powerpoint/2012/main" xmlns:ahyp="http://schemas.microsoft.com/office/drawing/2018/hyperlinkcolor" showMasterPhAnim="0" showMasterSp="0">
+<p:notes xmlns:a="http://schemas.openxmlformats.org/drawingml/2006/main" xmlns:r="http://schemas.openxmlformats.org/officeDocument/2006/relationships" xmlns:p="http://schemas.openxmlformats.org/presentationml/2006/main" showMasterSp="0" showMasterPhAnim="0">
   <p:cSld>
     <p:spTree>
       <p:nvGrpSpPr>
-        <p:cNvPr id="134" name="Shape 134"/>
+        <p:cNvPr id="1" name="Shape 134"/>
         <p:cNvGrpSpPr/>
         <p:nvPr/>
       </p:nvGrpSpPr>
@@ -1118,9 +1153,11 @@
       <p:sp>
         <p:nvSpPr>
           <p:cNvPr id="135" name="Google Shape;135;g3e5a2f08be3_0_147:notes"/>
-          <p:cNvSpPr/>
+          <p:cNvSpPr>
+            <a:spLocks noGrp="1" noRot="1" noChangeAspect="1"/>
+          </p:cNvSpPr>
           <p:nvPr>
-            <p:ph idx="2" type="sldImg"/>
+            <p:ph type="sldImg" idx="2"/>
           </p:nvPr>
         </p:nvSpPr>
         <p:spPr>
@@ -1129,9 +1166,13 @@
             <a:ext cx="6096000" cy="3429000"/>
           </a:xfrm>
           <a:custGeom>
-            <a:rect b="b" l="l" r="r" t="t"/>
+            <a:avLst/>
+            <a:gdLst/>
+            <a:ahLst/>
+            <a:cxnLst/>
+            <a:rect l="l" t="t" r="r" b="b"/>
             <a:pathLst>
-              <a:path extrusionOk="0" h="120000" w="120000">
+              <a:path w="120000" h="120000" extrusionOk="0">
                 <a:moveTo>
                   <a:pt x="0" y="0"/>
                 </a:moveTo>
@@ -1153,9 +1194,11 @@
       <p:sp>
         <p:nvSpPr>
           <p:cNvPr id="136" name="Google Shape;136;g3e5a2f08be3_0_147:notes"/>
-          <p:cNvSpPr txBox="1"/>
+          <p:cNvSpPr txBox="1">
+            <a:spLocks noGrp="1"/>
+          </p:cNvSpPr>
           <p:nvPr>
-            <p:ph idx="1" type="body"/>
+            <p:ph type="body" idx="1"/>
           </p:nvPr>
         </p:nvSpPr>
         <p:spPr>
@@ -1168,23 +1211,20 @@
           </a:prstGeom>
         </p:spPr>
         <p:txBody>
-          <a:bodyPr anchorCtr="0" anchor="t" bIns="91425" lIns="91425" spcFirstLastPara="1" rIns="91425" wrap="square" tIns="91425">
+          <a:bodyPr spcFirstLastPara="1" wrap="square" lIns="91425" tIns="91425" rIns="91425" bIns="91425" anchor="t" anchorCtr="0">
             <a:noAutofit/>
           </a:bodyPr>
           <a:lstStyle/>
           <a:p>
-            <a:pPr indent="0" lvl="0" marL="0" rtl="0" algn="l">
-              <a:spcBef>
-                <a:spcPts val="0"/>
-              </a:spcBef>
-              <a:spcAft>
-                <a:spcPts val="0"/>
-              </a:spcAft>
-              <a:buNone/>
-            </a:pPr>
-            <a:r>
-              <a:t/>
-            </a:r>
+            <a:pPr marL="0" lvl="0" indent="0" algn="l" rtl="0">
+              <a:spcBef>
+                <a:spcPts val="0"/>
+              </a:spcBef>
+              <a:spcAft>
+                <a:spcPts val="0"/>
+              </a:spcAft>
+              <a:buNone/>
+            </a:pPr>
             <a:endParaRPr/>
           </a:p>
         </p:txBody>
@@ -1198,11 +1238,11 @@
 </file>
 
 <file path=ppt/notesSlides/notesSlide14.xml><?xml version="1.0" encoding="utf-8"?>
-<p:notes xmlns:a="http://schemas.openxmlformats.org/drawingml/2006/main" xmlns:r="http://schemas.openxmlformats.org/officeDocument/2006/relationships" xmlns:mc="http://schemas.openxmlformats.org/markup-compatibility/2006" xmlns:mv="urn:schemas-microsoft-com:mac:vml" xmlns:p="http://schemas.openxmlformats.org/presentationml/2006/main" xmlns:c="http://schemas.openxmlformats.org/drawingml/2006/chart" xmlns:dgm="http://schemas.openxmlformats.org/drawingml/2006/diagram" xmlns:o="urn:schemas-microsoft-com:office:office" xmlns:v="urn:schemas-microsoft-com:vml" xmlns:pvml="urn:schemas-microsoft-com:office:powerpoint" xmlns:com="http://schemas.openxmlformats.org/drawingml/2006/compatibility" xmlns:p14="http://schemas.microsoft.com/office/powerpoint/2010/main" xmlns:p15="http://schemas.microsoft.com/office/powerpoint/2012/main" xmlns:ahyp="http://schemas.microsoft.com/office/drawing/2018/hyperlinkcolor" showMasterPhAnim="0" showMasterSp="0">
+<p:notes xmlns:a="http://schemas.openxmlformats.org/drawingml/2006/main" xmlns:r="http://schemas.openxmlformats.org/officeDocument/2006/relationships" xmlns:p="http://schemas.openxmlformats.org/presentationml/2006/main" showMasterSp="0" showMasterPhAnim="0">
   <p:cSld>
     <p:spTree>
       <p:nvGrpSpPr>
-        <p:cNvPr id="140" name="Shape 140"/>
+        <p:cNvPr id="1" name="Shape 140"/>
         <p:cNvGrpSpPr/>
         <p:nvPr/>
       </p:nvGrpSpPr>
@@ -1217,9 +1257,11 @@
       <p:sp>
         <p:nvSpPr>
           <p:cNvPr id="141" name="Google Shape;141;g3e5a2f08be3_0_151:notes"/>
-          <p:cNvSpPr/>
+          <p:cNvSpPr>
+            <a:spLocks noGrp="1" noRot="1" noChangeAspect="1"/>
+          </p:cNvSpPr>
           <p:nvPr>
-            <p:ph idx="2" type="sldImg"/>
+            <p:ph type="sldImg" idx="2"/>
           </p:nvPr>
         </p:nvSpPr>
         <p:spPr>
@@ -1228,9 +1270,13 @@
             <a:ext cx="6096000" cy="3429000"/>
           </a:xfrm>
           <a:custGeom>
-            <a:rect b="b" l="l" r="r" t="t"/>
+            <a:avLst/>
+            <a:gdLst/>
+            <a:ahLst/>
+            <a:cxnLst/>
+            <a:rect l="l" t="t" r="r" b="b"/>
             <a:pathLst>
-              <a:path extrusionOk="0" h="120000" w="120000">
+              <a:path w="120000" h="120000" extrusionOk="0">
                 <a:moveTo>
                   <a:pt x="0" y="0"/>
                 </a:moveTo>
@@ -1252,9 +1298,11 @@
       <p:sp>
         <p:nvSpPr>
           <p:cNvPr id="142" name="Google Shape;142;g3e5a2f08be3_0_151:notes"/>
-          <p:cNvSpPr txBox="1"/>
+          <p:cNvSpPr txBox="1">
+            <a:spLocks noGrp="1"/>
+          </p:cNvSpPr>
           <p:nvPr>
-            <p:ph idx="1" type="body"/>
+            <p:ph type="body" idx="1"/>
           </p:nvPr>
         </p:nvSpPr>
         <p:spPr>
@@ -1267,23 +1315,20 @@
           </a:prstGeom>
         </p:spPr>
         <p:txBody>
-          <a:bodyPr anchorCtr="0" anchor="t" bIns="91425" lIns="91425" spcFirstLastPara="1" rIns="91425" wrap="square" tIns="91425">
+          <a:bodyPr spcFirstLastPara="1" wrap="square" lIns="91425" tIns="91425" rIns="91425" bIns="91425" anchor="t" anchorCtr="0">
             <a:noAutofit/>
           </a:bodyPr>
           <a:lstStyle/>
           <a:p>
-            <a:pPr indent="0" lvl="0" marL="0" rtl="0" algn="l">
-              <a:spcBef>
-                <a:spcPts val="0"/>
-              </a:spcBef>
-              <a:spcAft>
-                <a:spcPts val="0"/>
-              </a:spcAft>
-              <a:buNone/>
-            </a:pPr>
-            <a:r>
-              <a:t/>
-            </a:r>
+            <a:pPr marL="0" lvl="0" indent="0" algn="l" rtl="0">
+              <a:spcBef>
+                <a:spcPts val="0"/>
+              </a:spcBef>
+              <a:spcAft>
+                <a:spcPts val="0"/>
+              </a:spcAft>
+              <a:buNone/>
+            </a:pPr>
             <a:endParaRPr/>
           </a:p>
         </p:txBody>
@@ -1297,11 +1342,11 @@
 </file>
 
 <file path=ppt/notesSlides/notesSlide15.xml><?xml version="1.0" encoding="utf-8"?>
-<p:notes xmlns:a="http://schemas.openxmlformats.org/drawingml/2006/main" xmlns:r="http://schemas.openxmlformats.org/officeDocument/2006/relationships" xmlns:mc="http://schemas.openxmlformats.org/markup-compatibility/2006" xmlns:mv="urn:schemas-microsoft-com:mac:vml" xmlns:p="http://schemas.openxmlformats.org/presentationml/2006/main" xmlns:c="http://schemas.openxmlformats.org/drawingml/2006/chart" xmlns:dgm="http://schemas.openxmlformats.org/drawingml/2006/diagram" xmlns:o="urn:schemas-microsoft-com:office:office" xmlns:v="urn:schemas-microsoft-com:vml" xmlns:pvml="urn:schemas-microsoft-com:office:powerpoint" xmlns:com="http://schemas.openxmlformats.org/drawingml/2006/compatibility" xmlns:p14="http://schemas.microsoft.com/office/powerpoint/2010/main" xmlns:p15="http://schemas.microsoft.com/office/powerpoint/2012/main" xmlns:ahyp="http://schemas.microsoft.com/office/drawing/2018/hyperlinkcolor" showMasterPhAnim="0" showMasterSp="0">
+<p:notes xmlns:a="http://schemas.openxmlformats.org/drawingml/2006/main" xmlns:r="http://schemas.openxmlformats.org/officeDocument/2006/relationships" xmlns:p="http://schemas.openxmlformats.org/presentationml/2006/main" showMasterSp="0" showMasterPhAnim="0">
   <p:cSld>
     <p:spTree>
       <p:nvGrpSpPr>
-        <p:cNvPr id="146" name="Shape 146"/>
+        <p:cNvPr id="1" name="Shape 146"/>
         <p:cNvGrpSpPr/>
         <p:nvPr/>
       </p:nvGrpSpPr>
@@ -1316,9 +1361,11 @@
       <p:sp>
         <p:nvSpPr>
           <p:cNvPr id="147" name="Google Shape;147;g3e5a2f08be3_0_158:notes"/>
-          <p:cNvSpPr/>
+          <p:cNvSpPr>
+            <a:spLocks noGrp="1" noRot="1" noChangeAspect="1"/>
+          </p:cNvSpPr>
           <p:nvPr>
-            <p:ph idx="2" type="sldImg"/>
+            <p:ph type="sldImg" idx="2"/>
           </p:nvPr>
         </p:nvSpPr>
         <p:spPr>
@@ -1327,9 +1374,13 @@
             <a:ext cx="6096000" cy="3429000"/>
           </a:xfrm>
           <a:custGeom>
-            <a:rect b="b" l="l" r="r" t="t"/>
+            <a:avLst/>
+            <a:gdLst/>
+            <a:ahLst/>
+            <a:cxnLst/>
+            <a:rect l="l" t="t" r="r" b="b"/>
             <a:pathLst>
-              <a:path extrusionOk="0" h="120000" w="120000">
+              <a:path w="120000" h="120000" extrusionOk="0">
                 <a:moveTo>
                   <a:pt x="0" y="0"/>
                 </a:moveTo>
@@ -1351,9 +1402,11 @@
       <p:sp>
         <p:nvSpPr>
           <p:cNvPr id="148" name="Google Shape;148;g3e5a2f08be3_0_158:notes"/>
-          <p:cNvSpPr txBox="1"/>
+          <p:cNvSpPr txBox="1">
+            <a:spLocks noGrp="1"/>
+          </p:cNvSpPr>
           <p:nvPr>
-            <p:ph idx="1" type="body"/>
+            <p:ph type="body" idx="1"/>
           </p:nvPr>
         </p:nvSpPr>
         <p:spPr>
@@ -1366,23 +1419,20 @@
           </a:prstGeom>
         </p:spPr>
         <p:txBody>
-          <a:bodyPr anchorCtr="0" anchor="t" bIns="91425" lIns="91425" spcFirstLastPara="1" rIns="91425" wrap="square" tIns="91425">
+          <a:bodyPr spcFirstLastPara="1" wrap="square" lIns="91425" tIns="91425" rIns="91425" bIns="91425" anchor="t" anchorCtr="0">
             <a:noAutofit/>
           </a:bodyPr>
           <a:lstStyle/>
           <a:p>
-            <a:pPr indent="0" lvl="0" marL="0" rtl="0" algn="l">
-              <a:spcBef>
-                <a:spcPts val="0"/>
-              </a:spcBef>
-              <a:spcAft>
-                <a:spcPts val="0"/>
-              </a:spcAft>
-              <a:buNone/>
-            </a:pPr>
-            <a:r>
-              <a:t/>
-            </a:r>
+            <a:pPr marL="0" lvl="0" indent="0" algn="l" rtl="0">
+              <a:spcBef>
+                <a:spcPts val="0"/>
+              </a:spcBef>
+              <a:spcAft>
+                <a:spcPts val="0"/>
+              </a:spcAft>
+              <a:buNone/>
+            </a:pPr>
             <a:endParaRPr/>
           </a:p>
         </p:txBody>
@@ -1396,11 +1446,11 @@
 </file>
 
 <file path=ppt/notesSlides/notesSlide16.xml><?xml version="1.0" encoding="utf-8"?>
-<p:notes xmlns:a="http://schemas.openxmlformats.org/drawingml/2006/main" xmlns:r="http://schemas.openxmlformats.org/officeDocument/2006/relationships" xmlns:mc="http://schemas.openxmlformats.org/markup-compatibility/2006" xmlns:mv="urn:schemas-microsoft-com:mac:vml" xmlns:p="http://schemas.openxmlformats.org/presentationml/2006/main" xmlns:c="http://schemas.openxmlformats.org/drawingml/2006/chart" xmlns:dgm="http://schemas.openxmlformats.org/drawingml/2006/diagram" xmlns:o="urn:schemas-microsoft-com:office:office" xmlns:v="urn:schemas-microsoft-com:vml" xmlns:pvml="urn:schemas-microsoft-com:office:powerpoint" xmlns:com="http://schemas.openxmlformats.org/drawingml/2006/compatibility" xmlns:p14="http://schemas.microsoft.com/office/powerpoint/2010/main" xmlns:p15="http://schemas.microsoft.com/office/powerpoint/2012/main" xmlns:ahyp="http://schemas.microsoft.com/office/drawing/2018/hyperlinkcolor" showMasterPhAnim="0" showMasterSp="0">
+<p:notes xmlns:a="http://schemas.openxmlformats.org/drawingml/2006/main" xmlns:r="http://schemas.openxmlformats.org/officeDocument/2006/relationships" xmlns:p="http://schemas.openxmlformats.org/presentationml/2006/main" showMasterSp="0" showMasterPhAnim="0">
   <p:cSld>
     <p:spTree>
       <p:nvGrpSpPr>
-        <p:cNvPr id="152" name="Shape 152"/>
+        <p:cNvPr id="1" name="Shape 152"/>
         <p:cNvGrpSpPr/>
         <p:nvPr/>
       </p:nvGrpSpPr>
@@ -1415,9 +1465,11 @@
       <p:sp>
         <p:nvSpPr>
           <p:cNvPr id="153" name="Google Shape;153;g3e5a2f08be3_0_163:notes"/>
-          <p:cNvSpPr/>
+          <p:cNvSpPr>
+            <a:spLocks noGrp="1" noRot="1" noChangeAspect="1"/>
+          </p:cNvSpPr>
           <p:nvPr>
-            <p:ph idx="2" type="sldImg"/>
+            <p:ph type="sldImg" idx="2"/>
           </p:nvPr>
         </p:nvSpPr>
         <p:spPr>
@@ -1426,9 +1478,13 @@
             <a:ext cx="6096000" cy="3429000"/>
           </a:xfrm>
           <a:custGeom>
-            <a:rect b="b" l="l" r="r" t="t"/>
+            <a:avLst/>
+            <a:gdLst/>
+            <a:ahLst/>
+            <a:cxnLst/>
+            <a:rect l="l" t="t" r="r" b="b"/>
             <a:pathLst>
-              <a:path extrusionOk="0" h="120000" w="120000">
+              <a:path w="120000" h="120000" extrusionOk="0">
                 <a:moveTo>
                   <a:pt x="0" y="0"/>
                 </a:moveTo>
@@ -1450,9 +1506,11 @@
       <p:sp>
         <p:nvSpPr>
           <p:cNvPr id="154" name="Google Shape;154;g3e5a2f08be3_0_163:notes"/>
-          <p:cNvSpPr txBox="1"/>
+          <p:cNvSpPr txBox="1">
+            <a:spLocks noGrp="1"/>
+          </p:cNvSpPr>
           <p:nvPr>
-            <p:ph idx="1" type="body"/>
+            <p:ph type="body" idx="1"/>
           </p:nvPr>
         </p:nvSpPr>
         <p:spPr>
@@ -1465,23 +1523,20 @@
           </a:prstGeom>
         </p:spPr>
         <p:txBody>
-          <a:bodyPr anchorCtr="0" anchor="t" bIns="91425" lIns="91425" spcFirstLastPara="1" rIns="91425" wrap="square" tIns="91425">
+          <a:bodyPr spcFirstLastPara="1" wrap="square" lIns="91425" tIns="91425" rIns="91425" bIns="91425" anchor="t" anchorCtr="0">
             <a:noAutofit/>
           </a:bodyPr>
           <a:lstStyle/>
           <a:p>
-            <a:pPr indent="0" lvl="0" marL="0" rtl="0" algn="l">
-              <a:spcBef>
-                <a:spcPts val="0"/>
-              </a:spcBef>
-              <a:spcAft>
-                <a:spcPts val="0"/>
-              </a:spcAft>
-              <a:buNone/>
-            </a:pPr>
-            <a:r>
-              <a:t/>
-            </a:r>
+            <a:pPr marL="0" lvl="0" indent="0" algn="l" rtl="0">
+              <a:spcBef>
+                <a:spcPts val="0"/>
+              </a:spcBef>
+              <a:spcAft>
+                <a:spcPts val="0"/>
+              </a:spcAft>
+              <a:buNone/>
+            </a:pPr>
             <a:endParaRPr/>
           </a:p>
         </p:txBody>
@@ -1495,11 +1550,11 @@
 </file>
 
 <file path=ppt/notesSlides/notesSlide17.xml><?xml version="1.0" encoding="utf-8"?>
-<p:notes xmlns:a="http://schemas.openxmlformats.org/drawingml/2006/main" xmlns:r="http://schemas.openxmlformats.org/officeDocument/2006/relationships" xmlns:mc="http://schemas.openxmlformats.org/markup-compatibility/2006" xmlns:mv="urn:schemas-microsoft-com:mac:vml" xmlns:p="http://schemas.openxmlformats.org/presentationml/2006/main" xmlns:c="http://schemas.openxmlformats.org/drawingml/2006/chart" xmlns:dgm="http://schemas.openxmlformats.org/drawingml/2006/diagram" xmlns:o="urn:schemas-microsoft-com:office:office" xmlns:v="urn:schemas-microsoft-com:vml" xmlns:pvml="urn:schemas-microsoft-com:office:powerpoint" xmlns:com="http://schemas.openxmlformats.org/drawingml/2006/compatibility" xmlns:p14="http://schemas.microsoft.com/office/powerpoint/2010/main" xmlns:p15="http://schemas.microsoft.com/office/powerpoint/2012/main" xmlns:ahyp="http://schemas.microsoft.com/office/drawing/2018/hyperlinkcolor" showMasterPhAnim="0" showMasterSp="0">
+<p:notes xmlns:a="http://schemas.openxmlformats.org/drawingml/2006/main" xmlns:r="http://schemas.openxmlformats.org/officeDocument/2006/relationships" xmlns:p="http://schemas.openxmlformats.org/presentationml/2006/main" showMasterSp="0" showMasterPhAnim="0">
   <p:cSld>
     <p:spTree>
       <p:nvGrpSpPr>
-        <p:cNvPr id="158" name="Shape 158"/>
+        <p:cNvPr id="1" name="Shape 158"/>
         <p:cNvGrpSpPr/>
         <p:nvPr/>
       </p:nvGrpSpPr>
@@ -1514,9 +1569,11 @@
       <p:sp>
         <p:nvSpPr>
           <p:cNvPr id="159" name="Google Shape;159;g3e5a2f08be3_0_167:notes"/>
-          <p:cNvSpPr/>
+          <p:cNvSpPr>
+            <a:spLocks noGrp="1" noRot="1" noChangeAspect="1"/>
+          </p:cNvSpPr>
           <p:nvPr>
-            <p:ph idx="2" type="sldImg"/>
+            <p:ph type="sldImg" idx="2"/>
           </p:nvPr>
         </p:nvSpPr>
         <p:spPr>
@@ -1525,9 +1582,13 @@
             <a:ext cx="6096000" cy="3429000"/>
           </a:xfrm>
           <a:custGeom>
-            <a:rect b="b" l="l" r="r" t="t"/>
+            <a:avLst/>
+            <a:gdLst/>
+            <a:ahLst/>
+            <a:cxnLst/>
+            <a:rect l="l" t="t" r="r" b="b"/>
             <a:pathLst>
-              <a:path extrusionOk="0" h="120000" w="120000">
+              <a:path w="120000" h="120000" extrusionOk="0">
                 <a:moveTo>
                   <a:pt x="0" y="0"/>
                 </a:moveTo>
@@ -1549,9 +1610,11 @@
       <p:sp>
         <p:nvSpPr>
           <p:cNvPr id="160" name="Google Shape;160;g3e5a2f08be3_0_167:notes"/>
-          <p:cNvSpPr txBox="1"/>
+          <p:cNvSpPr txBox="1">
+            <a:spLocks noGrp="1"/>
+          </p:cNvSpPr>
           <p:nvPr>
-            <p:ph idx="1" type="body"/>
+            <p:ph type="body" idx="1"/>
           </p:nvPr>
         </p:nvSpPr>
         <p:spPr>
@@ -1564,23 +1627,20 @@
           </a:prstGeom>
         </p:spPr>
         <p:txBody>
-          <a:bodyPr anchorCtr="0" anchor="t" bIns="91425" lIns="91425" spcFirstLastPara="1" rIns="91425" wrap="square" tIns="91425">
+          <a:bodyPr spcFirstLastPara="1" wrap="square" lIns="91425" tIns="91425" rIns="91425" bIns="91425" anchor="t" anchorCtr="0">
             <a:noAutofit/>
           </a:bodyPr>
           <a:lstStyle/>
           <a:p>
-            <a:pPr indent="0" lvl="0" marL="0" rtl="0" algn="l">
-              <a:spcBef>
-                <a:spcPts val="0"/>
-              </a:spcBef>
-              <a:spcAft>
-                <a:spcPts val="0"/>
-              </a:spcAft>
-              <a:buNone/>
-            </a:pPr>
-            <a:r>
-              <a:t/>
-            </a:r>
+            <a:pPr marL="0" lvl="0" indent="0" algn="l" rtl="0">
+              <a:spcBef>
+                <a:spcPts val="0"/>
+              </a:spcBef>
+              <a:spcAft>
+                <a:spcPts val="0"/>
+              </a:spcAft>
+              <a:buNone/>
+            </a:pPr>
             <a:endParaRPr/>
           </a:p>
         </p:txBody>
@@ -1594,11 +1654,11 @@
 </file>
 
 <file path=ppt/notesSlides/notesSlide2.xml><?xml version="1.0" encoding="utf-8"?>
-<p:notes xmlns:a="http://schemas.openxmlformats.org/drawingml/2006/main" xmlns:r="http://schemas.openxmlformats.org/officeDocument/2006/relationships" xmlns:mc="http://schemas.openxmlformats.org/markup-compatibility/2006" xmlns:mv="urn:schemas-microsoft-com:mac:vml" xmlns:p="http://schemas.openxmlformats.org/presentationml/2006/main" xmlns:c="http://schemas.openxmlformats.org/drawingml/2006/chart" xmlns:dgm="http://schemas.openxmlformats.org/drawingml/2006/diagram" xmlns:o="urn:schemas-microsoft-com:office:office" xmlns:v="urn:schemas-microsoft-com:vml" xmlns:pvml="urn:schemas-microsoft-com:office:powerpoint" xmlns:com="http://schemas.openxmlformats.org/drawingml/2006/compatibility" xmlns:p14="http://schemas.microsoft.com/office/powerpoint/2010/main" xmlns:p15="http://schemas.microsoft.com/office/powerpoint/2012/main" xmlns:ahyp="http://schemas.microsoft.com/office/drawing/2018/hyperlinkcolor" showMasterPhAnim="0" showMasterSp="0">
+<p:notes xmlns:a="http://schemas.openxmlformats.org/drawingml/2006/main" xmlns:r="http://schemas.openxmlformats.org/officeDocument/2006/relationships" xmlns:p="http://schemas.openxmlformats.org/presentationml/2006/main" showMasterSp="0" showMasterPhAnim="0">
   <p:cSld>
     <p:spTree>
       <p:nvGrpSpPr>
-        <p:cNvPr id="59" name="Shape 59"/>
+        <p:cNvPr id="1" name="Shape 59"/>
         <p:cNvGrpSpPr/>
         <p:nvPr/>
       </p:nvGrpSpPr>
@@ -1613,9 +1673,11 @@
       <p:sp>
         <p:nvSpPr>
           <p:cNvPr id="60" name="Google Shape;60;g3e5a2f08be3_0_6:notes"/>
-          <p:cNvSpPr/>
+          <p:cNvSpPr>
+            <a:spLocks noGrp="1" noRot="1" noChangeAspect="1"/>
+          </p:cNvSpPr>
           <p:nvPr>
-            <p:ph idx="2" type="sldImg"/>
+            <p:ph type="sldImg" idx="2"/>
           </p:nvPr>
         </p:nvSpPr>
         <p:spPr>
@@ -1624,9 +1686,13 @@
             <a:ext cx="6096000" cy="3429000"/>
           </a:xfrm>
           <a:custGeom>
-            <a:rect b="b" l="l" r="r" t="t"/>
+            <a:avLst/>
+            <a:gdLst/>
+            <a:ahLst/>
+            <a:cxnLst/>
+            <a:rect l="l" t="t" r="r" b="b"/>
             <a:pathLst>
-              <a:path extrusionOk="0" h="120000" w="120000">
+              <a:path w="120000" h="120000" extrusionOk="0">
                 <a:moveTo>
                   <a:pt x="0" y="0"/>
                 </a:moveTo>
@@ -1648,9 +1714,11 @@
       <p:sp>
         <p:nvSpPr>
           <p:cNvPr id="61" name="Google Shape;61;g3e5a2f08be3_0_6:notes"/>
-          <p:cNvSpPr txBox="1"/>
+          <p:cNvSpPr txBox="1">
+            <a:spLocks noGrp="1"/>
+          </p:cNvSpPr>
           <p:nvPr>
-            <p:ph idx="1" type="body"/>
+            <p:ph type="body" idx="1"/>
           </p:nvPr>
         </p:nvSpPr>
         <p:spPr>
@@ -1663,23 +1731,20 @@
           </a:prstGeom>
         </p:spPr>
         <p:txBody>
-          <a:bodyPr anchorCtr="0" anchor="t" bIns="91425" lIns="91425" spcFirstLastPara="1" rIns="91425" wrap="square" tIns="91425">
+          <a:bodyPr spcFirstLastPara="1" wrap="square" lIns="91425" tIns="91425" rIns="91425" bIns="91425" anchor="t" anchorCtr="0">
             <a:noAutofit/>
           </a:bodyPr>
           <a:lstStyle/>
           <a:p>
-            <a:pPr indent="0" lvl="0" marL="0" rtl="0" algn="l">
-              <a:spcBef>
-                <a:spcPts val="0"/>
-              </a:spcBef>
-              <a:spcAft>
-                <a:spcPts val="0"/>
-              </a:spcAft>
-              <a:buNone/>
-            </a:pPr>
-            <a:r>
-              <a:t/>
-            </a:r>
+            <a:pPr marL="0" lvl="0" indent="0" algn="l" rtl="0">
+              <a:spcBef>
+                <a:spcPts val="0"/>
+              </a:spcBef>
+              <a:spcAft>
+                <a:spcPts val="0"/>
+              </a:spcAft>
+              <a:buNone/>
+            </a:pPr>
             <a:endParaRPr/>
           </a:p>
         </p:txBody>
@@ -1693,11 +1758,11 @@
 </file>
 
 <file path=ppt/notesSlides/notesSlide3.xml><?xml version="1.0" encoding="utf-8"?>
-<p:notes xmlns:a="http://schemas.openxmlformats.org/drawingml/2006/main" xmlns:r="http://schemas.openxmlformats.org/officeDocument/2006/relationships" xmlns:mc="http://schemas.openxmlformats.org/markup-compatibility/2006" xmlns:mv="urn:schemas-microsoft-com:mac:vml" xmlns:p="http://schemas.openxmlformats.org/presentationml/2006/main" xmlns:c="http://schemas.openxmlformats.org/drawingml/2006/chart" xmlns:dgm="http://schemas.openxmlformats.org/drawingml/2006/diagram" xmlns:o="urn:schemas-microsoft-com:office:office" xmlns:v="urn:schemas-microsoft-com:vml" xmlns:pvml="urn:schemas-microsoft-com:office:powerpoint" xmlns:com="http://schemas.openxmlformats.org/drawingml/2006/compatibility" xmlns:p14="http://schemas.microsoft.com/office/powerpoint/2010/main" xmlns:p15="http://schemas.microsoft.com/office/powerpoint/2012/main" xmlns:ahyp="http://schemas.microsoft.com/office/drawing/2018/hyperlinkcolor" showMasterPhAnim="0" showMasterSp="0">
+<p:notes xmlns:a="http://schemas.openxmlformats.org/drawingml/2006/main" xmlns:r="http://schemas.openxmlformats.org/officeDocument/2006/relationships" xmlns:p="http://schemas.openxmlformats.org/presentationml/2006/main" showMasterSp="0" showMasterPhAnim="0">
   <p:cSld>
     <p:spTree>
       <p:nvGrpSpPr>
-        <p:cNvPr id="65" name="Shape 65"/>
+        <p:cNvPr id="1" name="Shape 65"/>
         <p:cNvGrpSpPr/>
         <p:nvPr/>
       </p:nvGrpSpPr>
@@ -1712,9 +1777,11 @@
       <p:sp>
         <p:nvSpPr>
           <p:cNvPr id="66" name="Google Shape;66;g3e5a2f08be3_0_0:notes"/>
-          <p:cNvSpPr/>
+          <p:cNvSpPr>
+            <a:spLocks noGrp="1" noRot="1" noChangeAspect="1"/>
+          </p:cNvSpPr>
           <p:nvPr>
-            <p:ph idx="2" type="sldImg"/>
+            <p:ph type="sldImg" idx="2"/>
           </p:nvPr>
         </p:nvSpPr>
         <p:spPr>
@@ -1723,9 +1790,13 @@
             <a:ext cx="6096000" cy="3429000"/>
           </a:xfrm>
           <a:custGeom>
-            <a:rect b="b" l="l" r="r" t="t"/>
+            <a:avLst/>
+            <a:gdLst/>
+            <a:ahLst/>
+            <a:cxnLst/>
+            <a:rect l="l" t="t" r="r" b="b"/>
             <a:pathLst>
-              <a:path extrusionOk="0" h="120000" w="120000">
+              <a:path w="120000" h="120000" extrusionOk="0">
                 <a:moveTo>
                   <a:pt x="0" y="0"/>
                 </a:moveTo>
@@ -1747,9 +1818,11 @@
       <p:sp>
         <p:nvSpPr>
           <p:cNvPr id="67" name="Google Shape;67;g3e5a2f08be3_0_0:notes"/>
-          <p:cNvSpPr txBox="1"/>
+          <p:cNvSpPr txBox="1">
+            <a:spLocks noGrp="1"/>
+          </p:cNvSpPr>
           <p:nvPr>
-            <p:ph idx="1" type="body"/>
+            <p:ph type="body" idx="1"/>
           </p:nvPr>
         </p:nvSpPr>
         <p:spPr>
@@ -1762,23 +1835,20 @@
           </a:prstGeom>
         </p:spPr>
         <p:txBody>
-          <a:bodyPr anchorCtr="0" anchor="t" bIns="91425" lIns="91425" spcFirstLastPara="1" rIns="91425" wrap="square" tIns="91425">
+          <a:bodyPr spcFirstLastPara="1" wrap="square" lIns="91425" tIns="91425" rIns="91425" bIns="91425" anchor="t" anchorCtr="0">
             <a:noAutofit/>
           </a:bodyPr>
           <a:lstStyle/>
           <a:p>
-            <a:pPr indent="0" lvl="0" marL="0" rtl="0" algn="l">
-              <a:spcBef>
-                <a:spcPts val="0"/>
-              </a:spcBef>
-              <a:spcAft>
-                <a:spcPts val="0"/>
-              </a:spcAft>
-              <a:buNone/>
-            </a:pPr>
-            <a:r>
-              <a:t/>
-            </a:r>
+            <a:pPr marL="0" lvl="0" indent="0" algn="l" rtl="0">
+              <a:spcBef>
+                <a:spcPts val="0"/>
+              </a:spcBef>
+              <a:spcAft>
+                <a:spcPts val="0"/>
+              </a:spcAft>
+              <a:buNone/>
+            </a:pPr>
             <a:endParaRPr/>
           </a:p>
         </p:txBody>
@@ -1792,11 +1862,11 @@
 </file>
 
 <file path=ppt/notesSlides/notesSlide4.xml><?xml version="1.0" encoding="utf-8"?>
-<p:notes xmlns:a="http://schemas.openxmlformats.org/drawingml/2006/main" xmlns:r="http://schemas.openxmlformats.org/officeDocument/2006/relationships" xmlns:mc="http://schemas.openxmlformats.org/markup-compatibility/2006" xmlns:mv="urn:schemas-microsoft-com:mac:vml" xmlns:p="http://schemas.openxmlformats.org/presentationml/2006/main" xmlns:c="http://schemas.openxmlformats.org/drawingml/2006/chart" xmlns:dgm="http://schemas.openxmlformats.org/drawingml/2006/diagram" xmlns:o="urn:schemas-microsoft-com:office:office" xmlns:v="urn:schemas-microsoft-com:vml" xmlns:pvml="urn:schemas-microsoft-com:office:powerpoint" xmlns:com="http://schemas.openxmlformats.org/drawingml/2006/compatibility" xmlns:p14="http://schemas.microsoft.com/office/powerpoint/2010/main" xmlns:p15="http://schemas.microsoft.com/office/powerpoint/2012/main" xmlns:ahyp="http://schemas.microsoft.com/office/drawing/2018/hyperlinkcolor" showMasterPhAnim="0" showMasterSp="0">
+<p:notes xmlns:a="http://schemas.openxmlformats.org/drawingml/2006/main" xmlns:r="http://schemas.openxmlformats.org/officeDocument/2006/relationships" xmlns:p="http://schemas.openxmlformats.org/presentationml/2006/main" showMasterSp="0" showMasterPhAnim="0">
   <p:cSld>
     <p:spTree>
       <p:nvGrpSpPr>
-        <p:cNvPr id="73" name="Shape 73"/>
+        <p:cNvPr id="1" name="Shape 73"/>
         <p:cNvGrpSpPr/>
         <p:nvPr/>
       </p:nvGrpSpPr>
@@ -1811,9 +1881,11 @@
       <p:sp>
         <p:nvSpPr>
           <p:cNvPr id="74" name="Google Shape;74;g3e5a2f08be3_0_14:notes"/>
-          <p:cNvSpPr/>
+          <p:cNvSpPr>
+            <a:spLocks noGrp="1" noRot="1" noChangeAspect="1"/>
+          </p:cNvSpPr>
           <p:nvPr>
-            <p:ph idx="2" type="sldImg"/>
+            <p:ph type="sldImg" idx="2"/>
           </p:nvPr>
         </p:nvSpPr>
         <p:spPr>
@@ -1822,9 +1894,13 @@
             <a:ext cx="6096000" cy="3429000"/>
           </a:xfrm>
           <a:custGeom>
-            <a:rect b="b" l="l" r="r" t="t"/>
+            <a:avLst/>
+            <a:gdLst/>
+            <a:ahLst/>
+            <a:cxnLst/>
+            <a:rect l="l" t="t" r="r" b="b"/>
             <a:pathLst>
-              <a:path extrusionOk="0" h="120000" w="120000">
+              <a:path w="120000" h="120000" extrusionOk="0">
                 <a:moveTo>
                   <a:pt x="0" y="0"/>
                 </a:moveTo>
@@ -1846,9 +1922,11 @@
       <p:sp>
         <p:nvSpPr>
           <p:cNvPr id="75" name="Google Shape;75;g3e5a2f08be3_0_14:notes"/>
-          <p:cNvSpPr txBox="1"/>
+          <p:cNvSpPr txBox="1">
+            <a:spLocks noGrp="1"/>
+          </p:cNvSpPr>
           <p:nvPr>
-            <p:ph idx="1" type="body"/>
+            <p:ph type="body" idx="1"/>
           </p:nvPr>
         </p:nvSpPr>
         <p:spPr>
@@ -1861,23 +1939,20 @@
           </a:prstGeom>
         </p:spPr>
         <p:txBody>
-          <a:bodyPr anchorCtr="0" anchor="t" bIns="91425" lIns="91425" spcFirstLastPara="1" rIns="91425" wrap="square" tIns="91425">
+          <a:bodyPr spcFirstLastPara="1" wrap="square" lIns="91425" tIns="91425" rIns="91425" bIns="91425" anchor="t" anchorCtr="0">
             <a:noAutofit/>
           </a:bodyPr>
           <a:lstStyle/>
           <a:p>
-            <a:pPr indent="0" lvl="0" marL="0" rtl="0" algn="l">
-              <a:spcBef>
-                <a:spcPts val="0"/>
-              </a:spcBef>
-              <a:spcAft>
-                <a:spcPts val="0"/>
-              </a:spcAft>
-              <a:buNone/>
-            </a:pPr>
-            <a:r>
-              <a:t/>
-            </a:r>
+            <a:pPr marL="0" lvl="0" indent="0" algn="l" rtl="0">
+              <a:spcBef>
+                <a:spcPts val="0"/>
+              </a:spcBef>
+              <a:spcAft>
+                <a:spcPts val="0"/>
+              </a:spcAft>
+              <a:buNone/>
+            </a:pPr>
             <a:endParaRPr/>
           </a:p>
         </p:txBody>
@@ -1891,11 +1966,11 @@
 </file>
 
 <file path=ppt/notesSlides/notesSlide5.xml><?xml version="1.0" encoding="utf-8"?>
-<p:notes xmlns:a="http://schemas.openxmlformats.org/drawingml/2006/main" xmlns:r="http://schemas.openxmlformats.org/officeDocument/2006/relationships" xmlns:mc="http://schemas.openxmlformats.org/markup-compatibility/2006" xmlns:mv="urn:schemas-microsoft-com:mac:vml" xmlns:p="http://schemas.openxmlformats.org/presentationml/2006/main" xmlns:c="http://schemas.openxmlformats.org/drawingml/2006/chart" xmlns:dgm="http://schemas.openxmlformats.org/drawingml/2006/diagram" xmlns:o="urn:schemas-microsoft-com:office:office" xmlns:v="urn:schemas-microsoft-com:vml" xmlns:pvml="urn:schemas-microsoft-com:office:powerpoint" xmlns:com="http://schemas.openxmlformats.org/drawingml/2006/compatibility" xmlns:p14="http://schemas.microsoft.com/office/powerpoint/2010/main" xmlns:p15="http://schemas.microsoft.com/office/powerpoint/2012/main" xmlns:ahyp="http://schemas.microsoft.com/office/drawing/2018/hyperlinkcolor" showMasterPhAnim="0" showMasterSp="0">
+<p:notes xmlns:a="http://schemas.openxmlformats.org/drawingml/2006/main" xmlns:r="http://schemas.openxmlformats.org/officeDocument/2006/relationships" xmlns:p="http://schemas.openxmlformats.org/presentationml/2006/main" showMasterSp="0" showMasterPhAnim="0">
   <p:cSld>
     <p:spTree>
       <p:nvGrpSpPr>
-        <p:cNvPr id="80" name="Shape 80"/>
+        <p:cNvPr id="1" name="Shape 80"/>
         <p:cNvGrpSpPr/>
         <p:nvPr/>
       </p:nvGrpSpPr>
@@ -1910,9 +1985,11 @@
       <p:sp>
         <p:nvSpPr>
           <p:cNvPr id="81" name="Google Shape;81;g3e5a2f08be3_0_106:notes"/>
-          <p:cNvSpPr/>
+          <p:cNvSpPr>
+            <a:spLocks noGrp="1" noRot="1" noChangeAspect="1"/>
+          </p:cNvSpPr>
           <p:nvPr>
-            <p:ph idx="2" type="sldImg"/>
+            <p:ph type="sldImg" idx="2"/>
           </p:nvPr>
         </p:nvSpPr>
         <p:spPr>
@@ -1921,9 +1998,13 @@
             <a:ext cx="6096000" cy="3429000"/>
           </a:xfrm>
           <a:custGeom>
-            <a:rect b="b" l="l" r="r" t="t"/>
+            <a:avLst/>
+            <a:gdLst/>
+            <a:ahLst/>
+            <a:cxnLst/>
+            <a:rect l="l" t="t" r="r" b="b"/>
             <a:pathLst>
-              <a:path extrusionOk="0" h="120000" w="120000">
+              <a:path w="120000" h="120000" extrusionOk="0">
                 <a:moveTo>
                   <a:pt x="0" y="0"/>
                 </a:moveTo>
@@ -1945,9 +2026,11 @@
       <p:sp>
         <p:nvSpPr>
           <p:cNvPr id="82" name="Google Shape;82;g3e5a2f08be3_0_106:notes"/>
-          <p:cNvSpPr txBox="1"/>
+          <p:cNvSpPr txBox="1">
+            <a:spLocks noGrp="1"/>
+          </p:cNvSpPr>
           <p:nvPr>
-            <p:ph idx="1" type="body"/>
+            <p:ph type="body" idx="1"/>
           </p:nvPr>
         </p:nvSpPr>
         <p:spPr>
@@ -1960,23 +2043,20 @@
           </a:prstGeom>
         </p:spPr>
         <p:txBody>
-          <a:bodyPr anchorCtr="0" anchor="t" bIns="91425" lIns="91425" spcFirstLastPara="1" rIns="91425" wrap="square" tIns="91425">
+          <a:bodyPr spcFirstLastPara="1" wrap="square" lIns="91425" tIns="91425" rIns="91425" bIns="91425" anchor="t" anchorCtr="0">
             <a:noAutofit/>
           </a:bodyPr>
           <a:lstStyle/>
           <a:p>
-            <a:pPr indent="0" lvl="0" marL="0" rtl="0" algn="l">
-              <a:spcBef>
-                <a:spcPts val="0"/>
-              </a:spcBef>
-              <a:spcAft>
-                <a:spcPts val="0"/>
-              </a:spcAft>
-              <a:buNone/>
-            </a:pPr>
-            <a:r>
-              <a:t/>
-            </a:r>
+            <a:pPr marL="0" lvl="0" indent="0" algn="l" rtl="0">
+              <a:spcBef>
+                <a:spcPts val="0"/>
+              </a:spcBef>
+              <a:spcAft>
+                <a:spcPts val="0"/>
+              </a:spcAft>
+              <a:buNone/>
+            </a:pPr>
             <a:endParaRPr/>
           </a:p>
         </p:txBody>
@@ -1990,11 +2070,11 @@
 </file>
 
 <file path=ppt/notesSlides/notesSlide6.xml><?xml version="1.0" encoding="utf-8"?>
-<p:notes xmlns:a="http://schemas.openxmlformats.org/drawingml/2006/main" xmlns:r="http://schemas.openxmlformats.org/officeDocument/2006/relationships" xmlns:mc="http://schemas.openxmlformats.org/markup-compatibility/2006" xmlns:mv="urn:schemas-microsoft-com:mac:vml" xmlns:p="http://schemas.openxmlformats.org/presentationml/2006/main" xmlns:c="http://schemas.openxmlformats.org/drawingml/2006/chart" xmlns:dgm="http://schemas.openxmlformats.org/drawingml/2006/diagram" xmlns:o="urn:schemas-microsoft-com:office:office" xmlns:v="urn:schemas-microsoft-com:vml" xmlns:pvml="urn:schemas-microsoft-com:office:powerpoint" xmlns:com="http://schemas.openxmlformats.org/drawingml/2006/compatibility" xmlns:p14="http://schemas.microsoft.com/office/powerpoint/2010/main" xmlns:p15="http://schemas.microsoft.com/office/powerpoint/2012/main" xmlns:ahyp="http://schemas.microsoft.com/office/drawing/2018/hyperlinkcolor" showMasterPhAnim="0" showMasterSp="0">
+<p:notes xmlns:a="http://schemas.openxmlformats.org/drawingml/2006/main" xmlns:r="http://schemas.openxmlformats.org/officeDocument/2006/relationships" xmlns:p="http://schemas.openxmlformats.org/presentationml/2006/main" showMasterSp="0" showMasterPhAnim="0">
   <p:cSld>
     <p:spTree>
       <p:nvGrpSpPr>
-        <p:cNvPr id="86" name="Shape 86"/>
+        <p:cNvPr id="1" name="Shape 86"/>
         <p:cNvGrpSpPr/>
         <p:nvPr/>
       </p:nvGrpSpPr>
@@ -2009,9 +2089,11 @@
       <p:sp>
         <p:nvSpPr>
           <p:cNvPr id="87" name="Google Shape;87;g3e5a2f08be3_0_53:notes"/>
-          <p:cNvSpPr/>
+          <p:cNvSpPr>
+            <a:spLocks noGrp="1" noRot="1" noChangeAspect="1"/>
+          </p:cNvSpPr>
           <p:nvPr>
-            <p:ph idx="2" type="sldImg"/>
+            <p:ph type="sldImg" idx="2"/>
           </p:nvPr>
         </p:nvSpPr>
         <p:spPr>
@@ -2020,9 +2102,13 @@
             <a:ext cx="6096000" cy="3429000"/>
           </a:xfrm>
           <a:custGeom>
-            <a:rect b="b" l="l" r="r" t="t"/>
+            <a:avLst/>
+            <a:gdLst/>
+            <a:ahLst/>
+            <a:cxnLst/>
+            <a:rect l="l" t="t" r="r" b="b"/>
             <a:pathLst>
-              <a:path extrusionOk="0" h="120000" w="120000">
+              <a:path w="120000" h="120000" extrusionOk="0">
                 <a:moveTo>
                   <a:pt x="0" y="0"/>
                 </a:moveTo>
@@ -2044,9 +2130,11 @@
       <p:sp>
         <p:nvSpPr>
           <p:cNvPr id="88" name="Google Shape;88;g3e5a2f08be3_0_53:notes"/>
-          <p:cNvSpPr txBox="1"/>
+          <p:cNvSpPr txBox="1">
+            <a:spLocks noGrp="1"/>
+          </p:cNvSpPr>
           <p:nvPr>
-            <p:ph idx="1" type="body"/>
+            <p:ph type="body" idx="1"/>
           </p:nvPr>
         </p:nvSpPr>
         <p:spPr>
@@ -2059,23 +2147,20 @@
           </a:prstGeom>
         </p:spPr>
         <p:txBody>
-          <a:bodyPr anchorCtr="0" anchor="t" bIns="91425" lIns="91425" spcFirstLastPara="1" rIns="91425" wrap="square" tIns="91425">
+          <a:bodyPr spcFirstLastPara="1" wrap="square" lIns="91425" tIns="91425" rIns="91425" bIns="91425" anchor="t" anchorCtr="0">
             <a:noAutofit/>
           </a:bodyPr>
           <a:lstStyle/>
           <a:p>
-            <a:pPr indent="0" lvl="0" marL="0" rtl="0" algn="l">
-              <a:spcBef>
-                <a:spcPts val="0"/>
-              </a:spcBef>
-              <a:spcAft>
-                <a:spcPts val="0"/>
-              </a:spcAft>
-              <a:buNone/>
-            </a:pPr>
-            <a:r>
-              <a:t/>
-            </a:r>
+            <a:pPr marL="0" lvl="0" indent="0" algn="l" rtl="0">
+              <a:spcBef>
+                <a:spcPts val="0"/>
+              </a:spcBef>
+              <a:spcAft>
+                <a:spcPts val="0"/>
+              </a:spcAft>
+              <a:buNone/>
+            </a:pPr>
             <a:endParaRPr/>
           </a:p>
         </p:txBody>
@@ -2089,11 +2174,11 @@
 </file>
 
 <file path=ppt/notesSlides/notesSlide7.xml><?xml version="1.0" encoding="utf-8"?>
-<p:notes xmlns:a="http://schemas.openxmlformats.org/drawingml/2006/main" xmlns:r="http://schemas.openxmlformats.org/officeDocument/2006/relationships" xmlns:mc="http://schemas.openxmlformats.org/markup-compatibility/2006" xmlns:mv="urn:schemas-microsoft-com:mac:vml" xmlns:p="http://schemas.openxmlformats.org/presentationml/2006/main" xmlns:c="http://schemas.openxmlformats.org/drawingml/2006/chart" xmlns:dgm="http://schemas.openxmlformats.org/drawingml/2006/diagram" xmlns:o="urn:schemas-microsoft-com:office:office" xmlns:v="urn:schemas-microsoft-com:vml" xmlns:pvml="urn:schemas-microsoft-com:office:powerpoint" xmlns:com="http://schemas.openxmlformats.org/drawingml/2006/compatibility" xmlns:p14="http://schemas.microsoft.com/office/powerpoint/2010/main" xmlns:p15="http://schemas.microsoft.com/office/powerpoint/2012/main" xmlns:ahyp="http://schemas.microsoft.com/office/drawing/2018/hyperlinkcolor" showMasterPhAnim="0" showMasterSp="0">
+<p:notes xmlns:a="http://schemas.openxmlformats.org/drawingml/2006/main" xmlns:r="http://schemas.openxmlformats.org/officeDocument/2006/relationships" xmlns:p="http://schemas.openxmlformats.org/presentationml/2006/main" showMasterSp="0" showMasterPhAnim="0">
   <p:cSld>
     <p:spTree>
       <p:nvGrpSpPr>
-        <p:cNvPr id="94" name="Shape 94"/>
+        <p:cNvPr id="1" name="Shape 94"/>
         <p:cNvGrpSpPr/>
         <p:nvPr/>
       </p:nvGrpSpPr>
@@ -2108,9 +2193,11 @@
       <p:sp>
         <p:nvSpPr>
           <p:cNvPr id="95" name="Google Shape;95;g3e5a2f08be3_0_67:notes"/>
-          <p:cNvSpPr/>
+          <p:cNvSpPr>
+            <a:spLocks noGrp="1" noRot="1" noChangeAspect="1"/>
+          </p:cNvSpPr>
           <p:nvPr>
-            <p:ph idx="2" type="sldImg"/>
+            <p:ph type="sldImg" idx="2"/>
           </p:nvPr>
         </p:nvSpPr>
         <p:spPr>
@@ -2119,9 +2206,13 @@
             <a:ext cx="6096000" cy="3429000"/>
           </a:xfrm>
           <a:custGeom>
-            <a:rect b="b" l="l" r="r" t="t"/>
+            <a:avLst/>
+            <a:gdLst/>
+            <a:ahLst/>
+            <a:cxnLst/>
+            <a:rect l="l" t="t" r="r" b="b"/>
             <a:pathLst>
-              <a:path extrusionOk="0" h="120000" w="120000">
+              <a:path w="120000" h="120000" extrusionOk="0">
                 <a:moveTo>
                   <a:pt x="0" y="0"/>
                 </a:moveTo>
@@ -2143,9 +2234,11 @@
       <p:sp>
         <p:nvSpPr>
           <p:cNvPr id="96" name="Google Shape;96;g3e5a2f08be3_0_67:notes"/>
-          <p:cNvSpPr txBox="1"/>
+          <p:cNvSpPr txBox="1">
+            <a:spLocks noGrp="1"/>
+          </p:cNvSpPr>
           <p:nvPr>
-            <p:ph idx="1" type="body"/>
+            <p:ph type="body" idx="1"/>
           </p:nvPr>
         </p:nvSpPr>
         <p:spPr>
@@ -2158,23 +2251,20 @@
           </a:prstGeom>
         </p:spPr>
         <p:txBody>
-          <a:bodyPr anchorCtr="0" anchor="t" bIns="91425" lIns="91425" spcFirstLastPara="1" rIns="91425" wrap="square" tIns="91425">
+          <a:bodyPr spcFirstLastPara="1" wrap="square" lIns="91425" tIns="91425" rIns="91425" bIns="91425" anchor="t" anchorCtr="0">
             <a:noAutofit/>
           </a:bodyPr>
           <a:lstStyle/>
           <a:p>
-            <a:pPr indent="0" lvl="0" marL="0" rtl="0" algn="l">
-              <a:spcBef>
-                <a:spcPts val="0"/>
-              </a:spcBef>
-              <a:spcAft>
-                <a:spcPts val="0"/>
-              </a:spcAft>
-              <a:buNone/>
-            </a:pPr>
-            <a:r>
-              <a:t/>
-            </a:r>
+            <a:pPr marL="0" lvl="0" indent="0" algn="l" rtl="0">
+              <a:spcBef>
+                <a:spcPts val="0"/>
+              </a:spcBef>
+              <a:spcAft>
+                <a:spcPts val="0"/>
+              </a:spcAft>
+              <a:buNone/>
+            </a:pPr>
             <a:endParaRPr/>
           </a:p>
         </p:txBody>
@@ -2188,11 +2278,11 @@
 </file>
 
 <file path=ppt/notesSlides/notesSlide8.xml><?xml version="1.0" encoding="utf-8"?>
-<p:notes xmlns:a="http://schemas.openxmlformats.org/drawingml/2006/main" xmlns:r="http://schemas.openxmlformats.org/officeDocument/2006/relationships" xmlns:mc="http://schemas.openxmlformats.org/markup-compatibility/2006" xmlns:mv="urn:schemas-microsoft-com:mac:vml" xmlns:p="http://schemas.openxmlformats.org/presentationml/2006/main" xmlns:c="http://schemas.openxmlformats.org/drawingml/2006/chart" xmlns:dgm="http://schemas.openxmlformats.org/drawingml/2006/diagram" xmlns:o="urn:schemas-microsoft-com:office:office" xmlns:v="urn:schemas-microsoft-com:vml" xmlns:pvml="urn:schemas-microsoft-com:office:powerpoint" xmlns:com="http://schemas.openxmlformats.org/drawingml/2006/compatibility" xmlns:p14="http://schemas.microsoft.com/office/powerpoint/2010/main" xmlns:p15="http://schemas.microsoft.com/office/powerpoint/2012/main" xmlns:ahyp="http://schemas.microsoft.com/office/drawing/2018/hyperlinkcolor" showMasterPhAnim="0" showMasterSp="0">
+<p:notes xmlns:a="http://schemas.openxmlformats.org/drawingml/2006/main" xmlns:r="http://schemas.openxmlformats.org/officeDocument/2006/relationships" xmlns:p="http://schemas.openxmlformats.org/presentationml/2006/main" showMasterSp="0" showMasterPhAnim="0">
   <p:cSld>
     <p:spTree>
       <p:nvGrpSpPr>
-        <p:cNvPr id="101" name="Shape 101"/>
+        <p:cNvPr id="1" name="Shape 101"/>
         <p:cNvGrpSpPr/>
         <p:nvPr/>
       </p:nvGrpSpPr>
@@ -2207,9 +2297,11 @@
       <p:sp>
         <p:nvSpPr>
           <p:cNvPr id="102" name="Google Shape;102;g3e5a2f08be3_0_115:notes"/>
-          <p:cNvSpPr/>
+          <p:cNvSpPr>
+            <a:spLocks noGrp="1" noRot="1" noChangeAspect="1"/>
+          </p:cNvSpPr>
           <p:nvPr>
-            <p:ph idx="2" type="sldImg"/>
+            <p:ph type="sldImg" idx="2"/>
           </p:nvPr>
         </p:nvSpPr>
         <p:spPr>
@@ -2218,9 +2310,13 @@
             <a:ext cx="6096000" cy="3429000"/>
           </a:xfrm>
           <a:custGeom>
-            <a:rect b="b" l="l" r="r" t="t"/>
+            <a:avLst/>
+            <a:gdLst/>
+            <a:ahLst/>
+            <a:cxnLst/>
+            <a:rect l="l" t="t" r="r" b="b"/>
             <a:pathLst>
-              <a:path extrusionOk="0" h="120000" w="120000">
+              <a:path w="120000" h="120000" extrusionOk="0">
                 <a:moveTo>
                   <a:pt x="0" y="0"/>
                 </a:moveTo>
@@ -2242,9 +2338,11 @@
       <p:sp>
         <p:nvSpPr>
           <p:cNvPr id="103" name="Google Shape;103;g3e5a2f08be3_0_115:notes"/>
-          <p:cNvSpPr txBox="1"/>
+          <p:cNvSpPr txBox="1">
+            <a:spLocks noGrp="1"/>
+          </p:cNvSpPr>
           <p:nvPr>
-            <p:ph idx="1" type="body"/>
+            <p:ph type="body" idx="1"/>
           </p:nvPr>
         </p:nvSpPr>
         <p:spPr>
@@ -2257,23 +2355,20 @@
           </a:prstGeom>
         </p:spPr>
         <p:txBody>
-          <a:bodyPr anchorCtr="0" anchor="t" bIns="91425" lIns="91425" spcFirstLastPara="1" rIns="91425" wrap="square" tIns="91425">
+          <a:bodyPr spcFirstLastPara="1" wrap="square" lIns="91425" tIns="91425" rIns="91425" bIns="91425" anchor="t" anchorCtr="0">
             <a:noAutofit/>
           </a:bodyPr>
           <a:lstStyle/>
           <a:p>
-            <a:pPr indent="0" lvl="0" marL="0" rtl="0" algn="l">
-              <a:spcBef>
-                <a:spcPts val="0"/>
-              </a:spcBef>
-              <a:spcAft>
-                <a:spcPts val="0"/>
-              </a:spcAft>
-              <a:buNone/>
-            </a:pPr>
-            <a:r>
-              <a:t/>
-            </a:r>
+            <a:pPr marL="0" lvl="0" indent="0" algn="l" rtl="0">
+              <a:spcBef>
+                <a:spcPts val="0"/>
+              </a:spcBef>
+              <a:spcAft>
+                <a:spcPts val="0"/>
+              </a:spcAft>
+              <a:buNone/>
+            </a:pPr>
             <a:endParaRPr/>
           </a:p>
         </p:txBody>
@@ -2287,11 +2382,11 @@
 </file>
 
 <file path=ppt/notesSlides/notesSlide9.xml><?xml version="1.0" encoding="utf-8"?>
-<p:notes xmlns:a="http://schemas.openxmlformats.org/drawingml/2006/main" xmlns:r="http://schemas.openxmlformats.org/officeDocument/2006/relationships" xmlns:mc="http://schemas.openxmlformats.org/markup-compatibility/2006" xmlns:mv="urn:schemas-microsoft-com:mac:vml" xmlns:p="http://schemas.openxmlformats.org/presentationml/2006/main" xmlns:c="http://schemas.openxmlformats.org/drawingml/2006/chart" xmlns:dgm="http://schemas.openxmlformats.org/drawingml/2006/diagram" xmlns:o="urn:schemas-microsoft-com:office:office" xmlns:v="urn:schemas-microsoft-com:vml" xmlns:pvml="urn:schemas-microsoft-com:office:powerpoint" xmlns:com="http://schemas.openxmlformats.org/drawingml/2006/compatibility" xmlns:p14="http://schemas.microsoft.com/office/powerpoint/2010/main" xmlns:p15="http://schemas.microsoft.com/office/powerpoint/2012/main" xmlns:ahyp="http://schemas.microsoft.com/office/drawing/2018/hyperlinkcolor" showMasterPhAnim="0" showMasterSp="0">
+<p:notes xmlns:a="http://schemas.openxmlformats.org/drawingml/2006/main" xmlns:r="http://schemas.openxmlformats.org/officeDocument/2006/relationships" xmlns:p="http://schemas.openxmlformats.org/presentationml/2006/main" showMasterSp="0" showMasterPhAnim="0">
   <p:cSld>
     <p:spTree>
       <p:nvGrpSpPr>
-        <p:cNvPr id="110" name="Shape 110"/>
+        <p:cNvPr id="1" name="Shape 110"/>
         <p:cNvGrpSpPr/>
         <p:nvPr/>
       </p:nvGrpSpPr>
@@ -2306,9 +2401,11 @@
       <p:sp>
         <p:nvSpPr>
           <p:cNvPr id="111" name="Google Shape;111;g3e5a2f08be3_0_74:notes"/>
-          <p:cNvSpPr/>
+          <p:cNvSpPr>
+            <a:spLocks noGrp="1" noRot="1" noChangeAspect="1"/>
+          </p:cNvSpPr>
           <p:nvPr>
-            <p:ph idx="2" type="sldImg"/>
+            <p:ph type="sldImg" idx="2"/>
           </p:nvPr>
         </p:nvSpPr>
         <p:spPr>
@@ -2317,9 +2414,13 @@
             <a:ext cx="6096000" cy="3429000"/>
           </a:xfrm>
           <a:custGeom>
-            <a:rect b="b" l="l" r="r" t="t"/>
+            <a:avLst/>
+            <a:gdLst/>
+            <a:ahLst/>
+            <a:cxnLst/>
+            <a:rect l="l" t="t" r="r" b="b"/>
             <a:pathLst>
-              <a:path extrusionOk="0" h="120000" w="120000">
+              <a:path w="120000" h="120000" extrusionOk="0">
                 <a:moveTo>
                   <a:pt x="0" y="0"/>
                 </a:moveTo>
@@ -2341,9 +2442,11 @@
       <p:sp>
         <p:nvSpPr>
           <p:cNvPr id="112" name="Google Shape;112;g3e5a2f08be3_0_74:notes"/>
-          <p:cNvSpPr txBox="1"/>
+          <p:cNvSpPr txBox="1">
+            <a:spLocks noGrp="1"/>
+          </p:cNvSpPr>
           <p:nvPr>
-            <p:ph idx="1" type="body"/>
+            <p:ph type="body" idx="1"/>
           </p:nvPr>
         </p:nvSpPr>
         <p:spPr>
@@ -2356,23 +2459,20 @@
           </a:prstGeom>
         </p:spPr>
         <p:txBody>
-          <a:bodyPr anchorCtr="0" anchor="t" bIns="91425" lIns="91425" spcFirstLastPara="1" rIns="91425" wrap="square" tIns="91425">
+          <a:bodyPr spcFirstLastPara="1" wrap="square" lIns="91425" tIns="91425" rIns="91425" bIns="91425" anchor="t" anchorCtr="0">
             <a:noAutofit/>
           </a:bodyPr>
           <a:lstStyle/>
           <a:p>
-            <a:pPr indent="0" lvl="0" marL="0" rtl="0" algn="l">
-              <a:spcBef>
-                <a:spcPts val="0"/>
-              </a:spcBef>
-              <a:spcAft>
-                <a:spcPts val="0"/>
-              </a:spcAft>
-              <a:buNone/>
-            </a:pPr>
-            <a:r>
-              <a:t/>
-            </a:r>
+            <a:pPr marL="0" lvl="0" indent="0" algn="l" rtl="0">
+              <a:spcBef>
+                <a:spcPts val="0"/>
+              </a:spcBef>
+              <a:spcAft>
+                <a:spcPts val="0"/>
+              </a:spcAft>
+              <a:buNone/>
+            </a:pPr>
             <a:endParaRPr/>
           </a:p>
         </p:txBody>
@@ -2386,11 +2486,11 @@
 </file>
 
 <file path=ppt/slideLayouts/slideLayout1.xml><?xml version="1.0" encoding="utf-8"?>
-<p:sldLayout xmlns:a="http://schemas.openxmlformats.org/drawingml/2006/main" xmlns:r="http://schemas.openxmlformats.org/officeDocument/2006/relationships" xmlns:mc="http://schemas.openxmlformats.org/markup-compatibility/2006" xmlns:mv="urn:schemas-microsoft-com:mac:vml" xmlns:p="http://schemas.openxmlformats.org/presentationml/2006/main" xmlns:c="http://schemas.openxmlformats.org/drawingml/2006/chart" xmlns:dgm="http://schemas.openxmlformats.org/drawingml/2006/diagram" xmlns:o="urn:schemas-microsoft-com:office:office" xmlns:v="urn:schemas-microsoft-com:vml" xmlns:pvml="urn:schemas-microsoft-com:office:powerpoint" xmlns:com="http://schemas.openxmlformats.org/drawingml/2006/compatibility" xmlns:p14="http://schemas.microsoft.com/office/powerpoint/2010/main" xmlns:p15="http://schemas.microsoft.com/office/powerpoint/2012/main" xmlns:ahyp="http://schemas.microsoft.com/office/drawing/2018/hyperlinkcolor" matchingName="Title slide" type="title">
+<p:sldLayout xmlns:a="http://schemas.openxmlformats.org/drawingml/2006/main" xmlns:r="http://schemas.openxmlformats.org/officeDocument/2006/relationships" xmlns:p="http://schemas.openxmlformats.org/presentationml/2006/main" matchingName="Title slide" type="title">
   <p:cSld name="TITLE">
     <p:spTree>
       <p:nvGrpSpPr>
-        <p:cNvPr id="9" name="Shape 9"/>
+        <p:cNvPr id="1" name="Shape 9"/>
         <p:cNvGrpSpPr/>
         <p:nvPr/>
       </p:nvGrpSpPr>
@@ -2405,7 +2505,9 @@
       <p:sp>
         <p:nvSpPr>
           <p:cNvPr id="10" name="Google Shape;10;p2"/>
-          <p:cNvSpPr txBox="1"/>
+          <p:cNvSpPr txBox="1">
+            <a:spLocks noGrp="1"/>
+          </p:cNvSpPr>
           <p:nvPr>
             <p:ph type="ctrTitle"/>
           </p:nvPr>
@@ -2420,7 +2522,7 @@
           </a:prstGeom>
         </p:spPr>
         <p:txBody>
-          <a:bodyPr anchorCtr="0" anchor="b" bIns="91425" lIns="91425" spcFirstLastPara="1" rIns="91425" wrap="square" tIns="91425">
+          <a:bodyPr spcFirstLastPara="1" wrap="square" lIns="91425" tIns="91425" rIns="91425" bIns="91425" anchor="b" anchorCtr="0">
             <a:normAutofit/>
           </a:bodyPr>
           <a:lstStyle>
@@ -2524,15 +2626,19 @@
               <a:defRPr sz="5200"/>
             </a:lvl9pPr>
           </a:lstStyle>
-          <a:p/>
+          <a:p>
+            <a:endParaRPr/>
+          </a:p>
         </p:txBody>
       </p:sp>
       <p:sp>
         <p:nvSpPr>
           <p:cNvPr id="11" name="Google Shape;11;p2"/>
-          <p:cNvSpPr txBox="1"/>
+          <p:cNvSpPr txBox="1">
+            <a:spLocks noGrp="1"/>
+          </p:cNvSpPr>
           <p:nvPr>
-            <p:ph idx="1" type="subTitle"/>
+            <p:ph type="subTitle" idx="1"/>
           </p:nvPr>
         </p:nvSpPr>
         <p:spPr>
@@ -2545,7 +2651,7 @@
           </a:prstGeom>
         </p:spPr>
         <p:txBody>
-          <a:bodyPr anchorCtr="0" anchor="t" bIns="91425" lIns="91425" spcFirstLastPara="1" rIns="91425" wrap="square" tIns="91425">
+          <a:bodyPr spcFirstLastPara="1" wrap="square" lIns="91425" tIns="91425" rIns="91425" bIns="91425" anchor="t" anchorCtr="0">
             <a:normAutofit/>
           </a:bodyPr>
           <a:lstStyle>
@@ -2676,15 +2782,19 @@
               <a:defRPr sz="2800"/>
             </a:lvl9pPr>
           </a:lstStyle>
-          <a:p/>
+          <a:p>
+            <a:endParaRPr/>
+          </a:p>
         </p:txBody>
       </p:sp>
       <p:sp>
         <p:nvSpPr>
           <p:cNvPr id="12" name="Google Shape;12;p2"/>
-          <p:cNvSpPr txBox="1"/>
+          <p:cNvSpPr txBox="1">
+            <a:spLocks noGrp="1"/>
+          </p:cNvSpPr>
           <p:nvPr>
-            <p:ph idx="12" type="sldNum"/>
+            <p:ph type="sldNum" idx="12"/>
           </p:nvPr>
         </p:nvSpPr>
         <p:spPr>
@@ -2697,7 +2807,7 @@
           </a:prstGeom>
         </p:spPr>
         <p:txBody>
-          <a:bodyPr anchorCtr="0" anchor="ctr" bIns="91425" lIns="91425" spcFirstLastPara="1" rIns="91425" wrap="square" tIns="91425">
+          <a:bodyPr spcFirstLastPara="1" wrap="square" lIns="91425" tIns="91425" rIns="91425" bIns="91425" anchor="ctr" anchorCtr="0">
             <a:normAutofit/>
           </a:bodyPr>
           <a:lstStyle>
@@ -2739,7 +2849,7 @@
             </a:lvl9pPr>
           </a:lstStyle>
           <a:p>
-            <a:pPr indent="0" lvl="0" marL="0" rtl="0" algn="r">
+            <a:pPr marL="0" lvl="0" indent="0" algn="r" rtl="0">
               <a:spcBef>
                 <a:spcPts val="0"/>
               </a:spcBef>
@@ -2765,11 +2875,11 @@
 </file>
 
 <file path=ppt/slideLayouts/slideLayout10.xml><?xml version="1.0" encoding="utf-8"?>
-<p:sldLayout xmlns:a="http://schemas.openxmlformats.org/drawingml/2006/main" xmlns:r="http://schemas.openxmlformats.org/officeDocument/2006/relationships" xmlns:mc="http://schemas.openxmlformats.org/markup-compatibility/2006" xmlns:mv="urn:schemas-microsoft-com:mac:vml" xmlns:p="http://schemas.openxmlformats.org/presentationml/2006/main" xmlns:c="http://schemas.openxmlformats.org/drawingml/2006/chart" xmlns:dgm="http://schemas.openxmlformats.org/drawingml/2006/diagram" xmlns:o="urn:schemas-microsoft-com:office:office" xmlns:v="urn:schemas-microsoft-com:vml" xmlns:pvml="urn:schemas-microsoft-com:office:powerpoint" xmlns:com="http://schemas.openxmlformats.org/drawingml/2006/compatibility" xmlns:p14="http://schemas.microsoft.com/office/powerpoint/2010/main" xmlns:p15="http://schemas.microsoft.com/office/powerpoint/2012/main" xmlns:ahyp="http://schemas.microsoft.com/office/drawing/2018/hyperlinkcolor" matchingName="Big number">
+<p:sldLayout xmlns:a="http://schemas.openxmlformats.org/drawingml/2006/main" xmlns:r="http://schemas.openxmlformats.org/officeDocument/2006/relationships" xmlns:p="http://schemas.openxmlformats.org/presentationml/2006/main" matchingName="Big number">
   <p:cSld name="BIG_NUMBER">
     <p:spTree>
       <p:nvGrpSpPr>
-        <p:cNvPr id="44" name="Shape 44"/>
+        <p:cNvPr id="1" name="Shape 44"/>
         <p:cNvGrpSpPr/>
         <p:nvPr/>
       </p:nvGrpSpPr>
@@ -2784,9 +2894,11 @@
       <p:sp>
         <p:nvSpPr>
           <p:cNvPr id="45" name="Google Shape;45;p11"/>
-          <p:cNvSpPr txBox="1"/>
+          <p:cNvSpPr txBox="1">
+            <a:spLocks noGrp="1"/>
+          </p:cNvSpPr>
           <p:nvPr>
-            <p:ph hasCustomPrompt="1" type="title"/>
+            <p:ph type="title" hasCustomPrompt="1"/>
           </p:nvPr>
         </p:nvSpPr>
         <p:spPr>
@@ -2799,7 +2911,7 @@
           </a:prstGeom>
         </p:spPr>
         <p:txBody>
-          <a:bodyPr anchorCtr="0" anchor="b" bIns="91425" lIns="91425" spcFirstLastPara="1" rIns="91425" wrap="square" tIns="91425">
+          <a:bodyPr spcFirstLastPara="1" wrap="square" lIns="91425" tIns="91425" rIns="91425" bIns="91425" anchor="b" anchorCtr="0">
             <a:normAutofit/>
           </a:bodyPr>
           <a:lstStyle>
@@ -2913,9 +3025,11 @@
       <p:sp>
         <p:nvSpPr>
           <p:cNvPr id="46" name="Google Shape;46;p11"/>
-          <p:cNvSpPr txBox="1"/>
+          <p:cNvSpPr txBox="1">
+            <a:spLocks noGrp="1"/>
+          </p:cNvSpPr>
           <p:nvPr>
-            <p:ph idx="1" type="body"/>
+            <p:ph type="body" idx="1"/>
           </p:nvPr>
         </p:nvSpPr>
         <p:spPr>
@@ -2928,11 +3042,11 @@
           </a:prstGeom>
         </p:spPr>
         <p:txBody>
-          <a:bodyPr anchorCtr="0" anchor="t" bIns="91425" lIns="91425" spcFirstLastPara="1" rIns="91425" wrap="square" tIns="91425">
+          <a:bodyPr spcFirstLastPara="1" wrap="square" lIns="91425" tIns="91425" rIns="91425" bIns="91425" anchor="t" anchorCtr="0">
             <a:normAutofit/>
           </a:bodyPr>
           <a:lstStyle>
-            <a:lvl1pPr indent="-342900" lvl="0" marL="457200" algn="ctr">
+            <a:lvl1pPr marL="457200" lvl="0" indent="-342900" algn="ctr">
               <a:spcBef>
                 <a:spcPts val="0"/>
               </a:spcBef>
@@ -2943,7 +3057,7 @@
               <a:buChar char="●"/>
               <a:defRPr/>
             </a:lvl1pPr>
-            <a:lvl2pPr indent="-317500" lvl="1" marL="914400" algn="ctr">
+            <a:lvl2pPr marL="914400" lvl="1" indent="-317500" algn="ctr">
               <a:spcBef>
                 <a:spcPts val="0"/>
               </a:spcBef>
@@ -2954,7 +3068,7 @@
               <a:buChar char="○"/>
               <a:defRPr/>
             </a:lvl2pPr>
-            <a:lvl3pPr indent="-317500" lvl="2" marL="1371600" algn="ctr">
+            <a:lvl3pPr marL="1371600" lvl="2" indent="-317500" algn="ctr">
               <a:spcBef>
                 <a:spcPts val="0"/>
               </a:spcBef>
@@ -2965,7 +3079,7 @@
               <a:buChar char="■"/>
               <a:defRPr/>
             </a:lvl3pPr>
-            <a:lvl4pPr indent="-317500" lvl="3" marL="1828800" algn="ctr">
+            <a:lvl4pPr marL="1828800" lvl="3" indent="-317500" algn="ctr">
               <a:spcBef>
                 <a:spcPts val="0"/>
               </a:spcBef>
@@ -2976,7 +3090,7 @@
               <a:buChar char="●"/>
               <a:defRPr/>
             </a:lvl4pPr>
-            <a:lvl5pPr indent="-317500" lvl="4" marL="2286000" algn="ctr">
+            <a:lvl5pPr marL="2286000" lvl="4" indent="-317500" algn="ctr">
               <a:spcBef>
                 <a:spcPts val="0"/>
               </a:spcBef>
@@ -2987,7 +3101,7 @@
               <a:buChar char="○"/>
               <a:defRPr/>
             </a:lvl5pPr>
-            <a:lvl6pPr indent="-317500" lvl="5" marL="2743200" algn="ctr">
+            <a:lvl6pPr marL="2743200" lvl="5" indent="-317500" algn="ctr">
               <a:spcBef>
                 <a:spcPts val="0"/>
               </a:spcBef>
@@ -2998,7 +3112,7 @@
               <a:buChar char="■"/>
               <a:defRPr/>
             </a:lvl6pPr>
-            <a:lvl7pPr indent="-317500" lvl="6" marL="3200400" algn="ctr">
+            <a:lvl7pPr marL="3200400" lvl="6" indent="-317500" algn="ctr">
               <a:spcBef>
                 <a:spcPts val="0"/>
               </a:spcBef>
@@ -3009,7 +3123,7 @@
               <a:buChar char="●"/>
               <a:defRPr/>
             </a:lvl7pPr>
-            <a:lvl8pPr indent="-317500" lvl="7" marL="3657600" algn="ctr">
+            <a:lvl8pPr marL="3657600" lvl="7" indent="-317500" algn="ctr">
               <a:spcBef>
                 <a:spcPts val="0"/>
               </a:spcBef>
@@ -3020,7 +3134,7 @@
               <a:buChar char="○"/>
               <a:defRPr/>
             </a:lvl8pPr>
-            <a:lvl9pPr indent="-317500" lvl="8" marL="4114800" algn="ctr">
+            <a:lvl9pPr marL="4114800" lvl="8" indent="-317500" algn="ctr">
               <a:spcBef>
                 <a:spcPts val="0"/>
               </a:spcBef>
@@ -3032,15 +3146,19 @@
               <a:defRPr/>
             </a:lvl9pPr>
           </a:lstStyle>
-          <a:p/>
+          <a:p>
+            <a:endParaRPr/>
+          </a:p>
         </p:txBody>
       </p:sp>
       <p:sp>
         <p:nvSpPr>
           <p:cNvPr id="47" name="Google Shape;47;p11"/>
-          <p:cNvSpPr txBox="1"/>
+          <p:cNvSpPr txBox="1">
+            <a:spLocks noGrp="1"/>
+          </p:cNvSpPr>
           <p:nvPr>
-            <p:ph idx="12" type="sldNum"/>
+            <p:ph type="sldNum" idx="12"/>
           </p:nvPr>
         </p:nvSpPr>
         <p:spPr>
@@ -3053,7 +3171,7 @@
           </a:prstGeom>
         </p:spPr>
         <p:txBody>
-          <a:bodyPr anchorCtr="0" anchor="ctr" bIns="91425" lIns="91425" spcFirstLastPara="1" rIns="91425" wrap="square" tIns="91425">
+          <a:bodyPr spcFirstLastPara="1" wrap="square" lIns="91425" tIns="91425" rIns="91425" bIns="91425" anchor="ctr" anchorCtr="0">
             <a:normAutofit/>
           </a:bodyPr>
           <a:lstStyle>
@@ -3095,7 +3213,7 @@
             </a:lvl9pPr>
           </a:lstStyle>
           <a:p>
-            <a:pPr indent="0" lvl="0" marL="0" rtl="0" algn="r">
+            <a:pPr marL="0" lvl="0" indent="0" algn="r" rtl="0">
               <a:spcBef>
                 <a:spcPts val="0"/>
               </a:spcBef>
@@ -3121,11 +3239,11 @@
 </file>
 
 <file path=ppt/slideLayouts/slideLayout11.xml><?xml version="1.0" encoding="utf-8"?>
-<p:sldLayout xmlns:a="http://schemas.openxmlformats.org/drawingml/2006/main" xmlns:r="http://schemas.openxmlformats.org/officeDocument/2006/relationships" xmlns:mc="http://schemas.openxmlformats.org/markup-compatibility/2006" xmlns:mv="urn:schemas-microsoft-com:mac:vml" xmlns:p="http://schemas.openxmlformats.org/presentationml/2006/main" xmlns:c="http://schemas.openxmlformats.org/drawingml/2006/chart" xmlns:dgm="http://schemas.openxmlformats.org/drawingml/2006/diagram" xmlns:o="urn:schemas-microsoft-com:office:office" xmlns:v="urn:schemas-microsoft-com:vml" xmlns:pvml="urn:schemas-microsoft-com:office:powerpoint" xmlns:com="http://schemas.openxmlformats.org/drawingml/2006/compatibility" xmlns:p14="http://schemas.microsoft.com/office/powerpoint/2010/main" xmlns:p15="http://schemas.microsoft.com/office/powerpoint/2012/main" xmlns:ahyp="http://schemas.microsoft.com/office/drawing/2018/hyperlinkcolor" matchingName="Blank" type="blank">
+<p:sldLayout xmlns:a="http://schemas.openxmlformats.org/drawingml/2006/main" xmlns:r="http://schemas.openxmlformats.org/officeDocument/2006/relationships" xmlns:p="http://schemas.openxmlformats.org/presentationml/2006/main" matchingName="Blank" type="blank">
   <p:cSld name="BLANK">
     <p:spTree>
       <p:nvGrpSpPr>
-        <p:cNvPr id="48" name="Shape 48"/>
+        <p:cNvPr id="1" name="Shape 48"/>
         <p:cNvGrpSpPr/>
         <p:nvPr/>
       </p:nvGrpSpPr>
@@ -3140,9 +3258,11 @@
       <p:sp>
         <p:nvSpPr>
           <p:cNvPr id="49" name="Google Shape;49;p12"/>
-          <p:cNvSpPr txBox="1"/>
+          <p:cNvSpPr txBox="1">
+            <a:spLocks noGrp="1"/>
+          </p:cNvSpPr>
           <p:nvPr>
-            <p:ph idx="12" type="sldNum"/>
+            <p:ph type="sldNum" idx="12"/>
           </p:nvPr>
         </p:nvSpPr>
         <p:spPr>
@@ -3155,7 +3275,7 @@
           </a:prstGeom>
         </p:spPr>
         <p:txBody>
-          <a:bodyPr anchorCtr="0" anchor="ctr" bIns="91425" lIns="91425" spcFirstLastPara="1" rIns="91425" wrap="square" tIns="91425">
+          <a:bodyPr spcFirstLastPara="1" wrap="square" lIns="91425" tIns="91425" rIns="91425" bIns="91425" anchor="ctr" anchorCtr="0">
             <a:normAutofit/>
           </a:bodyPr>
           <a:lstStyle>
@@ -3197,7 +3317,7 @@
             </a:lvl9pPr>
           </a:lstStyle>
           <a:p>
-            <a:pPr indent="0" lvl="0" marL="0" rtl="0" algn="r">
+            <a:pPr marL="0" lvl="0" indent="0" algn="r" rtl="0">
               <a:spcBef>
                 <a:spcPts val="0"/>
               </a:spcBef>
@@ -3223,11 +3343,11 @@
 </file>
 
 <file path=ppt/slideLayouts/slideLayout2.xml><?xml version="1.0" encoding="utf-8"?>
-<p:sldLayout xmlns:a="http://schemas.openxmlformats.org/drawingml/2006/main" xmlns:r="http://schemas.openxmlformats.org/officeDocument/2006/relationships" xmlns:mc="http://schemas.openxmlformats.org/markup-compatibility/2006" xmlns:mv="urn:schemas-microsoft-com:mac:vml" xmlns:p="http://schemas.openxmlformats.org/presentationml/2006/main" xmlns:c="http://schemas.openxmlformats.org/drawingml/2006/chart" xmlns:dgm="http://schemas.openxmlformats.org/drawingml/2006/diagram" xmlns:o="urn:schemas-microsoft-com:office:office" xmlns:v="urn:schemas-microsoft-com:vml" xmlns:pvml="urn:schemas-microsoft-com:office:powerpoint" xmlns:com="http://schemas.openxmlformats.org/drawingml/2006/compatibility" xmlns:p14="http://schemas.microsoft.com/office/powerpoint/2010/main" xmlns:p15="http://schemas.microsoft.com/office/powerpoint/2012/main" xmlns:ahyp="http://schemas.microsoft.com/office/drawing/2018/hyperlinkcolor" matchingName="Section header" type="secHead">
+<p:sldLayout xmlns:a="http://schemas.openxmlformats.org/drawingml/2006/main" xmlns:r="http://schemas.openxmlformats.org/officeDocument/2006/relationships" xmlns:p="http://schemas.openxmlformats.org/presentationml/2006/main" matchingName="Section header" type="secHead">
   <p:cSld name="SECTION_HEADER">
     <p:spTree>
       <p:nvGrpSpPr>
-        <p:cNvPr id="13" name="Shape 13"/>
+        <p:cNvPr id="1" name="Shape 13"/>
         <p:cNvGrpSpPr/>
         <p:nvPr/>
       </p:nvGrpSpPr>
@@ -3242,7 +3362,9 @@
       <p:sp>
         <p:nvSpPr>
           <p:cNvPr id="14" name="Google Shape;14;p3"/>
-          <p:cNvSpPr txBox="1"/>
+          <p:cNvSpPr txBox="1">
+            <a:spLocks noGrp="1"/>
+          </p:cNvSpPr>
           <p:nvPr>
             <p:ph type="title"/>
           </p:nvPr>
@@ -3257,7 +3379,7 @@
           </a:prstGeom>
         </p:spPr>
         <p:txBody>
-          <a:bodyPr anchorCtr="0" anchor="ctr" bIns="91425" lIns="91425" spcFirstLastPara="1" rIns="91425" wrap="square" tIns="91425">
+          <a:bodyPr spcFirstLastPara="1" wrap="square" lIns="91425" tIns="91425" rIns="91425" bIns="91425" anchor="ctr" anchorCtr="0">
             <a:normAutofit/>
           </a:bodyPr>
           <a:lstStyle>
@@ -3361,15 +3483,19 @@
               <a:defRPr sz="3600"/>
             </a:lvl9pPr>
           </a:lstStyle>
-          <a:p/>
+          <a:p>
+            <a:endParaRPr/>
+          </a:p>
         </p:txBody>
       </p:sp>
       <p:sp>
         <p:nvSpPr>
           <p:cNvPr id="15" name="Google Shape;15;p3"/>
-          <p:cNvSpPr txBox="1"/>
+          <p:cNvSpPr txBox="1">
+            <a:spLocks noGrp="1"/>
+          </p:cNvSpPr>
           <p:nvPr>
-            <p:ph idx="12" type="sldNum"/>
+            <p:ph type="sldNum" idx="12"/>
           </p:nvPr>
         </p:nvSpPr>
         <p:spPr>
@@ -3382,7 +3508,7 @@
           </a:prstGeom>
         </p:spPr>
         <p:txBody>
-          <a:bodyPr anchorCtr="0" anchor="ctr" bIns="91425" lIns="91425" spcFirstLastPara="1" rIns="91425" wrap="square" tIns="91425">
+          <a:bodyPr spcFirstLastPara="1" wrap="square" lIns="91425" tIns="91425" rIns="91425" bIns="91425" anchor="ctr" anchorCtr="0">
             <a:normAutofit/>
           </a:bodyPr>
           <a:lstStyle>
@@ -3424,7 +3550,7 @@
             </a:lvl9pPr>
           </a:lstStyle>
           <a:p>
-            <a:pPr indent="0" lvl="0" marL="0" rtl="0" algn="r">
+            <a:pPr marL="0" lvl="0" indent="0" algn="r" rtl="0">
               <a:spcBef>
                 <a:spcPts val="0"/>
               </a:spcBef>
@@ -3450,11 +3576,11 @@
 </file>
 
 <file path=ppt/slideLayouts/slideLayout3.xml><?xml version="1.0" encoding="utf-8"?>
-<p:sldLayout xmlns:a="http://schemas.openxmlformats.org/drawingml/2006/main" xmlns:r="http://schemas.openxmlformats.org/officeDocument/2006/relationships" xmlns:mc="http://schemas.openxmlformats.org/markup-compatibility/2006" xmlns:mv="urn:schemas-microsoft-com:mac:vml" xmlns:p="http://schemas.openxmlformats.org/presentationml/2006/main" xmlns:c="http://schemas.openxmlformats.org/drawingml/2006/chart" xmlns:dgm="http://schemas.openxmlformats.org/drawingml/2006/diagram" xmlns:o="urn:schemas-microsoft-com:office:office" xmlns:v="urn:schemas-microsoft-com:vml" xmlns:pvml="urn:schemas-microsoft-com:office:powerpoint" xmlns:com="http://schemas.openxmlformats.org/drawingml/2006/compatibility" xmlns:p14="http://schemas.microsoft.com/office/powerpoint/2010/main" xmlns:p15="http://schemas.microsoft.com/office/powerpoint/2012/main" xmlns:ahyp="http://schemas.microsoft.com/office/drawing/2018/hyperlinkcolor" matchingName="Title and body" type="tx">
+<p:sldLayout xmlns:a="http://schemas.openxmlformats.org/drawingml/2006/main" xmlns:r="http://schemas.openxmlformats.org/officeDocument/2006/relationships" xmlns:p="http://schemas.openxmlformats.org/presentationml/2006/main" matchingName="Title and body" type="tx">
   <p:cSld name="TITLE_AND_BODY">
     <p:spTree>
       <p:nvGrpSpPr>
-        <p:cNvPr id="16" name="Shape 16"/>
+        <p:cNvPr id="1" name="Shape 16"/>
         <p:cNvGrpSpPr/>
         <p:nvPr/>
       </p:nvGrpSpPr>
@@ -3469,7 +3595,9 @@
       <p:sp>
         <p:nvSpPr>
           <p:cNvPr id="17" name="Google Shape;17;p4"/>
-          <p:cNvSpPr txBox="1"/>
+          <p:cNvSpPr txBox="1">
+            <a:spLocks noGrp="1"/>
+          </p:cNvSpPr>
           <p:nvPr>
             <p:ph type="title"/>
           </p:nvPr>
@@ -3484,7 +3612,7 @@
           </a:prstGeom>
         </p:spPr>
         <p:txBody>
-          <a:bodyPr anchorCtr="0" anchor="t" bIns="91425" lIns="91425" spcFirstLastPara="1" rIns="91425" wrap="square" tIns="91425">
+          <a:bodyPr spcFirstLastPara="1" wrap="square" lIns="91425" tIns="91425" rIns="91425" bIns="91425" anchor="t" anchorCtr="0">
             <a:normAutofit/>
           </a:bodyPr>
           <a:lstStyle>
@@ -3588,15 +3716,19 @@
               <a:defRPr/>
             </a:lvl9pPr>
           </a:lstStyle>
-          <a:p/>
+          <a:p>
+            <a:endParaRPr/>
+          </a:p>
         </p:txBody>
       </p:sp>
       <p:sp>
         <p:nvSpPr>
           <p:cNvPr id="18" name="Google Shape;18;p4"/>
-          <p:cNvSpPr txBox="1"/>
+          <p:cNvSpPr txBox="1">
+            <a:spLocks noGrp="1"/>
+          </p:cNvSpPr>
           <p:nvPr>
-            <p:ph idx="1" type="body"/>
+            <p:ph type="body" idx="1"/>
           </p:nvPr>
         </p:nvSpPr>
         <p:spPr>
@@ -3609,11 +3741,11 @@
           </a:prstGeom>
         </p:spPr>
         <p:txBody>
-          <a:bodyPr anchorCtr="0" anchor="t" bIns="91425" lIns="91425" spcFirstLastPara="1" rIns="91425" wrap="square" tIns="91425">
+          <a:bodyPr spcFirstLastPara="1" wrap="square" lIns="91425" tIns="91425" rIns="91425" bIns="91425" anchor="t" anchorCtr="0">
             <a:normAutofit/>
           </a:bodyPr>
           <a:lstStyle>
-            <a:lvl1pPr indent="-342900" lvl="0" marL="457200">
+            <a:lvl1pPr marL="457200" lvl="0" indent="-342900">
               <a:spcBef>
                 <a:spcPts val="0"/>
               </a:spcBef>
@@ -3624,7 +3756,7 @@
               <a:buChar char="●"/>
               <a:defRPr/>
             </a:lvl1pPr>
-            <a:lvl2pPr indent="-317500" lvl="1" marL="914400">
+            <a:lvl2pPr marL="914400" lvl="1" indent="-317500">
               <a:spcBef>
                 <a:spcPts val="0"/>
               </a:spcBef>
@@ -3635,7 +3767,7 @@
               <a:buChar char="○"/>
               <a:defRPr/>
             </a:lvl2pPr>
-            <a:lvl3pPr indent="-317500" lvl="2" marL="1371600">
+            <a:lvl3pPr marL="1371600" lvl="2" indent="-317500">
               <a:spcBef>
                 <a:spcPts val="0"/>
               </a:spcBef>
@@ -3646,7 +3778,7 @@
               <a:buChar char="■"/>
               <a:defRPr/>
             </a:lvl3pPr>
-            <a:lvl4pPr indent="-317500" lvl="3" marL="1828800">
+            <a:lvl4pPr marL="1828800" lvl="3" indent="-317500">
               <a:spcBef>
                 <a:spcPts val="0"/>
               </a:spcBef>
@@ -3657,7 +3789,7 @@
               <a:buChar char="●"/>
               <a:defRPr/>
             </a:lvl4pPr>
-            <a:lvl5pPr indent="-317500" lvl="4" marL="2286000">
+            <a:lvl5pPr marL="2286000" lvl="4" indent="-317500">
               <a:spcBef>
                 <a:spcPts val="0"/>
               </a:spcBef>
@@ -3668,7 +3800,7 @@
               <a:buChar char="○"/>
               <a:defRPr/>
             </a:lvl5pPr>
-            <a:lvl6pPr indent="-317500" lvl="5" marL="2743200">
+            <a:lvl6pPr marL="2743200" lvl="5" indent="-317500">
               <a:spcBef>
                 <a:spcPts val="0"/>
               </a:spcBef>
@@ -3679,7 +3811,7 @@
               <a:buChar char="■"/>
               <a:defRPr/>
             </a:lvl6pPr>
-            <a:lvl7pPr indent="-317500" lvl="6" marL="3200400">
+            <a:lvl7pPr marL="3200400" lvl="6" indent="-317500">
               <a:spcBef>
                 <a:spcPts val="0"/>
               </a:spcBef>
@@ -3690,7 +3822,7 @@
               <a:buChar char="●"/>
               <a:defRPr/>
             </a:lvl7pPr>
-            <a:lvl8pPr indent="-317500" lvl="7" marL="3657600">
+            <a:lvl8pPr marL="3657600" lvl="7" indent="-317500">
               <a:spcBef>
                 <a:spcPts val="0"/>
               </a:spcBef>
@@ -3701,7 +3833,7 @@
               <a:buChar char="○"/>
               <a:defRPr/>
             </a:lvl8pPr>
-            <a:lvl9pPr indent="-317500" lvl="8" marL="4114800">
+            <a:lvl9pPr marL="4114800" lvl="8" indent="-317500">
               <a:spcBef>
                 <a:spcPts val="0"/>
               </a:spcBef>
@@ -3713,15 +3845,19 @@
               <a:defRPr/>
             </a:lvl9pPr>
           </a:lstStyle>
-          <a:p/>
+          <a:p>
+            <a:endParaRPr/>
+          </a:p>
         </p:txBody>
       </p:sp>
       <p:sp>
         <p:nvSpPr>
           <p:cNvPr id="19" name="Google Shape;19;p4"/>
-          <p:cNvSpPr txBox="1"/>
+          <p:cNvSpPr txBox="1">
+            <a:spLocks noGrp="1"/>
+          </p:cNvSpPr>
           <p:nvPr>
-            <p:ph idx="12" type="sldNum"/>
+            <p:ph type="sldNum" idx="12"/>
           </p:nvPr>
         </p:nvSpPr>
         <p:spPr>
@@ -3734,7 +3870,7 @@
           </a:prstGeom>
         </p:spPr>
         <p:txBody>
-          <a:bodyPr anchorCtr="0" anchor="ctr" bIns="91425" lIns="91425" spcFirstLastPara="1" rIns="91425" wrap="square" tIns="91425">
+          <a:bodyPr spcFirstLastPara="1" wrap="square" lIns="91425" tIns="91425" rIns="91425" bIns="91425" anchor="ctr" anchorCtr="0">
             <a:normAutofit/>
           </a:bodyPr>
           <a:lstStyle>
@@ -3776,7 +3912,7 @@
             </a:lvl9pPr>
           </a:lstStyle>
           <a:p>
-            <a:pPr indent="0" lvl="0" marL="0" rtl="0" algn="r">
+            <a:pPr marL="0" lvl="0" indent="0" algn="r" rtl="0">
               <a:spcBef>
                 <a:spcPts val="0"/>
               </a:spcBef>
@@ -3802,11 +3938,11 @@
 </file>
 
 <file path=ppt/slideLayouts/slideLayout4.xml><?xml version="1.0" encoding="utf-8"?>
-<p:sldLayout xmlns:a="http://schemas.openxmlformats.org/drawingml/2006/main" xmlns:r="http://schemas.openxmlformats.org/officeDocument/2006/relationships" xmlns:mc="http://schemas.openxmlformats.org/markup-compatibility/2006" xmlns:mv="urn:schemas-microsoft-com:mac:vml" xmlns:p="http://schemas.openxmlformats.org/presentationml/2006/main" xmlns:c="http://schemas.openxmlformats.org/drawingml/2006/chart" xmlns:dgm="http://schemas.openxmlformats.org/drawingml/2006/diagram" xmlns:o="urn:schemas-microsoft-com:office:office" xmlns:v="urn:schemas-microsoft-com:vml" xmlns:pvml="urn:schemas-microsoft-com:office:powerpoint" xmlns:com="http://schemas.openxmlformats.org/drawingml/2006/compatibility" xmlns:p14="http://schemas.microsoft.com/office/powerpoint/2010/main" xmlns:p15="http://schemas.microsoft.com/office/powerpoint/2012/main" xmlns:ahyp="http://schemas.microsoft.com/office/drawing/2018/hyperlinkcolor" matchingName="Title and two columns" type="twoColTx">
+<p:sldLayout xmlns:a="http://schemas.openxmlformats.org/drawingml/2006/main" xmlns:r="http://schemas.openxmlformats.org/officeDocument/2006/relationships" xmlns:p="http://schemas.openxmlformats.org/presentationml/2006/main" matchingName="Title and two columns" type="twoColTx">
   <p:cSld name="TITLE_AND_TWO_COLUMNS">
     <p:spTree>
       <p:nvGrpSpPr>
-        <p:cNvPr id="20" name="Shape 20"/>
+        <p:cNvPr id="1" name="Shape 20"/>
         <p:cNvGrpSpPr/>
         <p:nvPr/>
       </p:nvGrpSpPr>
@@ -3821,7 +3957,9 @@
       <p:sp>
         <p:nvSpPr>
           <p:cNvPr id="21" name="Google Shape;21;p5"/>
-          <p:cNvSpPr txBox="1"/>
+          <p:cNvSpPr txBox="1">
+            <a:spLocks noGrp="1"/>
+          </p:cNvSpPr>
           <p:nvPr>
             <p:ph type="title"/>
           </p:nvPr>
@@ -3836,7 +3974,7 @@
           </a:prstGeom>
         </p:spPr>
         <p:txBody>
-          <a:bodyPr anchorCtr="0" anchor="t" bIns="91425" lIns="91425" spcFirstLastPara="1" rIns="91425" wrap="square" tIns="91425">
+          <a:bodyPr spcFirstLastPara="1" wrap="square" lIns="91425" tIns="91425" rIns="91425" bIns="91425" anchor="t" anchorCtr="0">
             <a:normAutofit/>
           </a:bodyPr>
           <a:lstStyle>
@@ -3940,15 +4078,19 @@
               <a:defRPr/>
             </a:lvl9pPr>
           </a:lstStyle>
-          <a:p/>
+          <a:p>
+            <a:endParaRPr/>
+          </a:p>
         </p:txBody>
       </p:sp>
       <p:sp>
         <p:nvSpPr>
           <p:cNvPr id="22" name="Google Shape;22;p5"/>
-          <p:cNvSpPr txBox="1"/>
+          <p:cNvSpPr txBox="1">
+            <a:spLocks noGrp="1"/>
+          </p:cNvSpPr>
           <p:nvPr>
-            <p:ph idx="1" type="body"/>
+            <p:ph type="body" idx="1"/>
           </p:nvPr>
         </p:nvSpPr>
         <p:spPr>
@@ -3961,11 +4103,11 @@
           </a:prstGeom>
         </p:spPr>
         <p:txBody>
-          <a:bodyPr anchorCtr="0" anchor="t" bIns="91425" lIns="91425" spcFirstLastPara="1" rIns="91425" wrap="square" tIns="91425">
+          <a:bodyPr spcFirstLastPara="1" wrap="square" lIns="91425" tIns="91425" rIns="91425" bIns="91425" anchor="t" anchorCtr="0">
             <a:normAutofit/>
           </a:bodyPr>
           <a:lstStyle>
-            <a:lvl1pPr indent="-317500" lvl="0" marL="457200">
+            <a:lvl1pPr marL="457200" lvl="0" indent="-317500">
               <a:spcBef>
                 <a:spcPts val="0"/>
               </a:spcBef>
@@ -3976,7 +4118,7 @@
               <a:buChar char="●"/>
               <a:defRPr sz="1400"/>
             </a:lvl1pPr>
-            <a:lvl2pPr indent="-304800" lvl="1" marL="914400">
+            <a:lvl2pPr marL="914400" lvl="1" indent="-304800">
               <a:spcBef>
                 <a:spcPts val="0"/>
               </a:spcBef>
@@ -3987,7 +4129,7 @@
               <a:buChar char="○"/>
               <a:defRPr sz="1200"/>
             </a:lvl2pPr>
-            <a:lvl3pPr indent="-304800" lvl="2" marL="1371600">
+            <a:lvl3pPr marL="1371600" lvl="2" indent="-304800">
               <a:spcBef>
                 <a:spcPts val="0"/>
               </a:spcBef>
@@ -3998,7 +4140,7 @@
               <a:buChar char="■"/>
               <a:defRPr sz="1200"/>
             </a:lvl3pPr>
-            <a:lvl4pPr indent="-304800" lvl="3" marL="1828800">
+            <a:lvl4pPr marL="1828800" lvl="3" indent="-304800">
               <a:spcBef>
                 <a:spcPts val="0"/>
               </a:spcBef>
@@ -4009,7 +4151,7 @@
               <a:buChar char="●"/>
               <a:defRPr sz="1200"/>
             </a:lvl4pPr>
-            <a:lvl5pPr indent="-304800" lvl="4" marL="2286000">
+            <a:lvl5pPr marL="2286000" lvl="4" indent="-304800">
               <a:spcBef>
                 <a:spcPts val="0"/>
               </a:spcBef>
@@ -4020,7 +4162,7 @@
               <a:buChar char="○"/>
               <a:defRPr sz="1200"/>
             </a:lvl5pPr>
-            <a:lvl6pPr indent="-304800" lvl="5" marL="2743200">
+            <a:lvl6pPr marL="2743200" lvl="5" indent="-304800">
               <a:spcBef>
                 <a:spcPts val="0"/>
               </a:spcBef>
@@ -4031,7 +4173,7 @@
               <a:buChar char="■"/>
               <a:defRPr sz="1200"/>
             </a:lvl6pPr>
-            <a:lvl7pPr indent="-304800" lvl="6" marL="3200400">
+            <a:lvl7pPr marL="3200400" lvl="6" indent="-304800">
               <a:spcBef>
                 <a:spcPts val="0"/>
               </a:spcBef>
@@ -4042,7 +4184,7 @@
               <a:buChar char="●"/>
               <a:defRPr sz="1200"/>
             </a:lvl7pPr>
-            <a:lvl8pPr indent="-304800" lvl="7" marL="3657600">
+            <a:lvl8pPr marL="3657600" lvl="7" indent="-304800">
               <a:spcBef>
                 <a:spcPts val="0"/>
               </a:spcBef>
@@ -4053,7 +4195,7 @@
               <a:buChar char="○"/>
               <a:defRPr sz="1200"/>
             </a:lvl8pPr>
-            <a:lvl9pPr indent="-304800" lvl="8" marL="4114800">
+            <a:lvl9pPr marL="4114800" lvl="8" indent="-304800">
               <a:spcBef>
                 <a:spcPts val="0"/>
               </a:spcBef>
@@ -4065,15 +4207,19 @@
               <a:defRPr sz="1200"/>
             </a:lvl9pPr>
           </a:lstStyle>
-          <a:p/>
+          <a:p>
+            <a:endParaRPr/>
+          </a:p>
         </p:txBody>
       </p:sp>
       <p:sp>
         <p:nvSpPr>
           <p:cNvPr id="23" name="Google Shape;23;p5"/>
-          <p:cNvSpPr txBox="1"/>
+          <p:cNvSpPr txBox="1">
+            <a:spLocks noGrp="1"/>
+          </p:cNvSpPr>
           <p:nvPr>
-            <p:ph idx="2" type="body"/>
+            <p:ph type="body" idx="2"/>
           </p:nvPr>
         </p:nvSpPr>
         <p:spPr>
@@ -4086,11 +4232,11 @@
           </a:prstGeom>
         </p:spPr>
         <p:txBody>
-          <a:bodyPr anchorCtr="0" anchor="t" bIns="91425" lIns="91425" spcFirstLastPara="1" rIns="91425" wrap="square" tIns="91425">
+          <a:bodyPr spcFirstLastPara="1" wrap="square" lIns="91425" tIns="91425" rIns="91425" bIns="91425" anchor="t" anchorCtr="0">
             <a:normAutofit/>
           </a:bodyPr>
           <a:lstStyle>
-            <a:lvl1pPr indent="-317500" lvl="0" marL="457200">
+            <a:lvl1pPr marL="457200" lvl="0" indent="-317500">
               <a:spcBef>
                 <a:spcPts val="0"/>
               </a:spcBef>
@@ -4101,7 +4247,7 @@
               <a:buChar char="●"/>
               <a:defRPr sz="1400"/>
             </a:lvl1pPr>
-            <a:lvl2pPr indent="-304800" lvl="1" marL="914400">
+            <a:lvl2pPr marL="914400" lvl="1" indent="-304800">
               <a:spcBef>
                 <a:spcPts val="0"/>
               </a:spcBef>
@@ -4112,7 +4258,7 @@
               <a:buChar char="○"/>
               <a:defRPr sz="1200"/>
             </a:lvl2pPr>
-            <a:lvl3pPr indent="-304800" lvl="2" marL="1371600">
+            <a:lvl3pPr marL="1371600" lvl="2" indent="-304800">
               <a:spcBef>
                 <a:spcPts val="0"/>
               </a:spcBef>
@@ -4123,7 +4269,7 @@
               <a:buChar char="■"/>
               <a:defRPr sz="1200"/>
             </a:lvl3pPr>
-            <a:lvl4pPr indent="-304800" lvl="3" marL="1828800">
+            <a:lvl4pPr marL="1828800" lvl="3" indent="-304800">
               <a:spcBef>
                 <a:spcPts val="0"/>
               </a:spcBef>
@@ -4134,7 +4280,7 @@
               <a:buChar char="●"/>
               <a:defRPr sz="1200"/>
             </a:lvl4pPr>
-            <a:lvl5pPr indent="-304800" lvl="4" marL="2286000">
+            <a:lvl5pPr marL="2286000" lvl="4" indent="-304800">
               <a:spcBef>
                 <a:spcPts val="0"/>
               </a:spcBef>
@@ -4145,7 +4291,7 @@
               <a:buChar char="○"/>
               <a:defRPr sz="1200"/>
             </a:lvl5pPr>
-            <a:lvl6pPr indent="-304800" lvl="5" marL="2743200">
+            <a:lvl6pPr marL="2743200" lvl="5" indent="-304800">
               <a:spcBef>
                 <a:spcPts val="0"/>
               </a:spcBef>
@@ -4156,7 +4302,7 @@
               <a:buChar char="■"/>
               <a:defRPr sz="1200"/>
             </a:lvl6pPr>
-            <a:lvl7pPr indent="-304800" lvl="6" marL="3200400">
+            <a:lvl7pPr marL="3200400" lvl="6" indent="-304800">
               <a:spcBef>
                 <a:spcPts val="0"/>
               </a:spcBef>
@@ -4167,7 +4313,7 @@
               <a:buChar char="●"/>
               <a:defRPr sz="1200"/>
             </a:lvl7pPr>
-            <a:lvl8pPr indent="-304800" lvl="7" marL="3657600">
+            <a:lvl8pPr marL="3657600" lvl="7" indent="-304800">
               <a:spcBef>
                 <a:spcPts val="0"/>
               </a:spcBef>
@@ -4178,7 +4324,7 @@
               <a:buChar char="○"/>
               <a:defRPr sz="1200"/>
             </a:lvl8pPr>
-            <a:lvl9pPr indent="-304800" lvl="8" marL="4114800">
+            <a:lvl9pPr marL="4114800" lvl="8" indent="-304800">
               <a:spcBef>
                 <a:spcPts val="0"/>
               </a:spcBef>
@@ -4190,15 +4336,19 @@
               <a:defRPr sz="1200"/>
             </a:lvl9pPr>
           </a:lstStyle>
-          <a:p/>
+          <a:p>
+            <a:endParaRPr/>
+          </a:p>
         </p:txBody>
       </p:sp>
       <p:sp>
         <p:nvSpPr>
           <p:cNvPr id="24" name="Google Shape;24;p5"/>
-          <p:cNvSpPr txBox="1"/>
+          <p:cNvSpPr txBox="1">
+            <a:spLocks noGrp="1"/>
+          </p:cNvSpPr>
           <p:nvPr>
-            <p:ph idx="12" type="sldNum"/>
+            <p:ph type="sldNum" idx="12"/>
           </p:nvPr>
         </p:nvSpPr>
         <p:spPr>
@@ -4211,7 +4361,7 @@
           </a:prstGeom>
         </p:spPr>
         <p:txBody>
-          <a:bodyPr anchorCtr="0" anchor="ctr" bIns="91425" lIns="91425" spcFirstLastPara="1" rIns="91425" wrap="square" tIns="91425">
+          <a:bodyPr spcFirstLastPara="1" wrap="square" lIns="91425" tIns="91425" rIns="91425" bIns="91425" anchor="ctr" anchorCtr="0">
             <a:normAutofit/>
           </a:bodyPr>
           <a:lstStyle>
@@ -4253,7 +4403,7 @@
             </a:lvl9pPr>
           </a:lstStyle>
           <a:p>
-            <a:pPr indent="0" lvl="0" marL="0" rtl="0" algn="r">
+            <a:pPr marL="0" lvl="0" indent="0" algn="r" rtl="0">
               <a:spcBef>
                 <a:spcPts val="0"/>
               </a:spcBef>
@@ -4279,11 +4429,11 @@
 </file>
 
 <file path=ppt/slideLayouts/slideLayout5.xml><?xml version="1.0" encoding="utf-8"?>
-<p:sldLayout xmlns:a="http://schemas.openxmlformats.org/drawingml/2006/main" xmlns:r="http://schemas.openxmlformats.org/officeDocument/2006/relationships" xmlns:mc="http://schemas.openxmlformats.org/markup-compatibility/2006" xmlns:mv="urn:schemas-microsoft-com:mac:vml" xmlns:p="http://schemas.openxmlformats.org/presentationml/2006/main" xmlns:c="http://schemas.openxmlformats.org/drawingml/2006/chart" xmlns:dgm="http://schemas.openxmlformats.org/drawingml/2006/diagram" xmlns:o="urn:schemas-microsoft-com:office:office" xmlns:v="urn:schemas-microsoft-com:vml" xmlns:pvml="urn:schemas-microsoft-com:office:powerpoint" xmlns:com="http://schemas.openxmlformats.org/drawingml/2006/compatibility" xmlns:p14="http://schemas.microsoft.com/office/powerpoint/2010/main" xmlns:p15="http://schemas.microsoft.com/office/powerpoint/2012/main" xmlns:ahyp="http://schemas.microsoft.com/office/drawing/2018/hyperlinkcolor" matchingName="Title only" type="titleOnly">
+<p:sldLayout xmlns:a="http://schemas.openxmlformats.org/drawingml/2006/main" xmlns:r="http://schemas.openxmlformats.org/officeDocument/2006/relationships" xmlns:p="http://schemas.openxmlformats.org/presentationml/2006/main" matchingName="Title only" type="titleOnly">
   <p:cSld name="TITLE_ONLY">
     <p:spTree>
       <p:nvGrpSpPr>
-        <p:cNvPr id="25" name="Shape 25"/>
+        <p:cNvPr id="1" name="Shape 25"/>
         <p:cNvGrpSpPr/>
         <p:nvPr/>
       </p:nvGrpSpPr>
@@ -4298,7 +4448,9 @@
       <p:sp>
         <p:nvSpPr>
           <p:cNvPr id="26" name="Google Shape;26;p6"/>
-          <p:cNvSpPr txBox="1"/>
+          <p:cNvSpPr txBox="1">
+            <a:spLocks noGrp="1"/>
+          </p:cNvSpPr>
           <p:nvPr>
             <p:ph type="title"/>
           </p:nvPr>
@@ -4313,7 +4465,7 @@
           </a:prstGeom>
         </p:spPr>
         <p:txBody>
-          <a:bodyPr anchorCtr="0" anchor="t" bIns="91425" lIns="91425" spcFirstLastPara="1" rIns="91425" wrap="square" tIns="91425">
+          <a:bodyPr spcFirstLastPara="1" wrap="square" lIns="91425" tIns="91425" rIns="91425" bIns="91425" anchor="t" anchorCtr="0">
             <a:normAutofit/>
           </a:bodyPr>
           <a:lstStyle>
@@ -4417,15 +4569,19 @@
               <a:defRPr/>
             </a:lvl9pPr>
           </a:lstStyle>
-          <a:p/>
+          <a:p>
+            <a:endParaRPr/>
+          </a:p>
         </p:txBody>
       </p:sp>
       <p:sp>
         <p:nvSpPr>
           <p:cNvPr id="27" name="Google Shape;27;p6"/>
-          <p:cNvSpPr txBox="1"/>
+          <p:cNvSpPr txBox="1">
+            <a:spLocks noGrp="1"/>
+          </p:cNvSpPr>
           <p:nvPr>
-            <p:ph idx="12" type="sldNum"/>
+            <p:ph type="sldNum" idx="12"/>
           </p:nvPr>
         </p:nvSpPr>
         <p:spPr>
@@ -4438,7 +4594,7 @@
           </a:prstGeom>
         </p:spPr>
         <p:txBody>
-          <a:bodyPr anchorCtr="0" anchor="ctr" bIns="91425" lIns="91425" spcFirstLastPara="1" rIns="91425" wrap="square" tIns="91425">
+          <a:bodyPr spcFirstLastPara="1" wrap="square" lIns="91425" tIns="91425" rIns="91425" bIns="91425" anchor="ctr" anchorCtr="0">
             <a:normAutofit/>
           </a:bodyPr>
           <a:lstStyle>
@@ -4480,7 +4636,7 @@
             </a:lvl9pPr>
           </a:lstStyle>
           <a:p>
-            <a:pPr indent="0" lvl="0" marL="0" rtl="0" algn="r">
+            <a:pPr marL="0" lvl="0" indent="0" algn="r" rtl="0">
               <a:spcBef>
                 <a:spcPts val="0"/>
               </a:spcBef>
@@ -4506,11 +4662,11 @@
 </file>
 
 <file path=ppt/slideLayouts/slideLayout6.xml><?xml version="1.0" encoding="utf-8"?>
-<p:sldLayout xmlns:a="http://schemas.openxmlformats.org/drawingml/2006/main" xmlns:r="http://schemas.openxmlformats.org/officeDocument/2006/relationships" xmlns:mc="http://schemas.openxmlformats.org/markup-compatibility/2006" xmlns:mv="urn:schemas-microsoft-com:mac:vml" xmlns:p="http://schemas.openxmlformats.org/presentationml/2006/main" xmlns:c="http://schemas.openxmlformats.org/drawingml/2006/chart" xmlns:dgm="http://schemas.openxmlformats.org/drawingml/2006/diagram" xmlns:o="urn:schemas-microsoft-com:office:office" xmlns:v="urn:schemas-microsoft-com:vml" xmlns:pvml="urn:schemas-microsoft-com:office:powerpoint" xmlns:com="http://schemas.openxmlformats.org/drawingml/2006/compatibility" xmlns:p14="http://schemas.microsoft.com/office/powerpoint/2010/main" xmlns:p15="http://schemas.microsoft.com/office/powerpoint/2012/main" xmlns:ahyp="http://schemas.microsoft.com/office/drawing/2018/hyperlinkcolor" matchingName="One column text">
+<p:sldLayout xmlns:a="http://schemas.openxmlformats.org/drawingml/2006/main" xmlns:r="http://schemas.openxmlformats.org/officeDocument/2006/relationships" xmlns:p="http://schemas.openxmlformats.org/presentationml/2006/main" matchingName="One column text">
   <p:cSld name="ONE_COLUMN_TEXT">
     <p:spTree>
       <p:nvGrpSpPr>
-        <p:cNvPr id="28" name="Shape 28"/>
+        <p:cNvPr id="1" name="Shape 28"/>
         <p:cNvGrpSpPr/>
         <p:nvPr/>
       </p:nvGrpSpPr>
@@ -4525,7 +4681,9 @@
       <p:sp>
         <p:nvSpPr>
           <p:cNvPr id="29" name="Google Shape;29;p7"/>
-          <p:cNvSpPr txBox="1"/>
+          <p:cNvSpPr txBox="1">
+            <a:spLocks noGrp="1"/>
+          </p:cNvSpPr>
           <p:nvPr>
             <p:ph type="title"/>
           </p:nvPr>
@@ -4540,7 +4698,7 @@
           </a:prstGeom>
         </p:spPr>
         <p:txBody>
-          <a:bodyPr anchorCtr="0" anchor="b" bIns="91425" lIns="91425" spcFirstLastPara="1" rIns="91425" wrap="square" tIns="91425">
+          <a:bodyPr spcFirstLastPara="1" wrap="square" lIns="91425" tIns="91425" rIns="91425" bIns="91425" anchor="b" anchorCtr="0">
             <a:normAutofit/>
           </a:bodyPr>
           <a:lstStyle>
@@ -4644,15 +4802,19 @@
               <a:defRPr sz="2400"/>
             </a:lvl9pPr>
           </a:lstStyle>
-          <a:p/>
+          <a:p>
+            <a:endParaRPr/>
+          </a:p>
         </p:txBody>
       </p:sp>
       <p:sp>
         <p:nvSpPr>
           <p:cNvPr id="30" name="Google Shape;30;p7"/>
-          <p:cNvSpPr txBox="1"/>
+          <p:cNvSpPr txBox="1">
+            <a:spLocks noGrp="1"/>
+          </p:cNvSpPr>
           <p:nvPr>
-            <p:ph idx="1" type="body"/>
+            <p:ph type="body" idx="1"/>
           </p:nvPr>
         </p:nvSpPr>
         <p:spPr>
@@ -4665,11 +4827,11 @@
           </a:prstGeom>
         </p:spPr>
         <p:txBody>
-          <a:bodyPr anchorCtr="0" anchor="t" bIns="91425" lIns="91425" spcFirstLastPara="1" rIns="91425" wrap="square" tIns="91425">
+          <a:bodyPr spcFirstLastPara="1" wrap="square" lIns="91425" tIns="91425" rIns="91425" bIns="91425" anchor="t" anchorCtr="0">
             <a:normAutofit/>
           </a:bodyPr>
           <a:lstStyle>
-            <a:lvl1pPr indent="-304800" lvl="0" marL="457200">
+            <a:lvl1pPr marL="457200" lvl="0" indent="-304800">
               <a:spcBef>
                 <a:spcPts val="0"/>
               </a:spcBef>
@@ -4680,7 +4842,7 @@
               <a:buChar char="●"/>
               <a:defRPr sz="1200"/>
             </a:lvl1pPr>
-            <a:lvl2pPr indent="-304800" lvl="1" marL="914400">
+            <a:lvl2pPr marL="914400" lvl="1" indent="-304800">
               <a:spcBef>
                 <a:spcPts val="0"/>
               </a:spcBef>
@@ -4691,7 +4853,7 @@
               <a:buChar char="○"/>
               <a:defRPr sz="1200"/>
             </a:lvl2pPr>
-            <a:lvl3pPr indent="-304800" lvl="2" marL="1371600">
+            <a:lvl3pPr marL="1371600" lvl="2" indent="-304800">
               <a:spcBef>
                 <a:spcPts val="0"/>
               </a:spcBef>
@@ -4702,7 +4864,7 @@
               <a:buChar char="■"/>
               <a:defRPr sz="1200"/>
             </a:lvl3pPr>
-            <a:lvl4pPr indent="-304800" lvl="3" marL="1828800">
+            <a:lvl4pPr marL="1828800" lvl="3" indent="-304800">
               <a:spcBef>
                 <a:spcPts val="0"/>
               </a:spcBef>
@@ -4713,7 +4875,7 @@
               <a:buChar char="●"/>
               <a:defRPr sz="1200"/>
             </a:lvl4pPr>
-            <a:lvl5pPr indent="-304800" lvl="4" marL="2286000">
+            <a:lvl5pPr marL="2286000" lvl="4" indent="-304800">
               <a:spcBef>
                 <a:spcPts val="0"/>
               </a:spcBef>
@@ -4724,7 +4886,7 @@
               <a:buChar char="○"/>
               <a:defRPr sz="1200"/>
             </a:lvl5pPr>
-            <a:lvl6pPr indent="-304800" lvl="5" marL="2743200">
+            <a:lvl6pPr marL="2743200" lvl="5" indent="-304800">
               <a:spcBef>
                 <a:spcPts val="0"/>
               </a:spcBef>
@@ -4735,7 +4897,7 @@
               <a:buChar char="■"/>
               <a:defRPr sz="1200"/>
             </a:lvl6pPr>
-            <a:lvl7pPr indent="-304800" lvl="6" marL="3200400">
+            <a:lvl7pPr marL="3200400" lvl="6" indent="-304800">
               <a:spcBef>
                 <a:spcPts val="0"/>
               </a:spcBef>
@@ -4746,7 +4908,7 @@
               <a:buChar char="●"/>
               <a:defRPr sz="1200"/>
             </a:lvl7pPr>
-            <a:lvl8pPr indent="-304800" lvl="7" marL="3657600">
+            <a:lvl8pPr marL="3657600" lvl="7" indent="-304800">
               <a:spcBef>
                 <a:spcPts val="0"/>
               </a:spcBef>
@@ -4757,7 +4919,7 @@
               <a:buChar char="○"/>
               <a:defRPr sz="1200"/>
             </a:lvl8pPr>
-            <a:lvl9pPr indent="-304800" lvl="8" marL="4114800">
+            <a:lvl9pPr marL="4114800" lvl="8" indent="-304800">
               <a:spcBef>
                 <a:spcPts val="0"/>
               </a:spcBef>
@@ -4769,15 +4931,19 @@
               <a:defRPr sz="1200"/>
             </a:lvl9pPr>
           </a:lstStyle>
-          <a:p/>
+          <a:p>
+            <a:endParaRPr/>
+          </a:p>
         </p:txBody>
       </p:sp>
       <p:sp>
         <p:nvSpPr>
           <p:cNvPr id="31" name="Google Shape;31;p7"/>
-          <p:cNvSpPr txBox="1"/>
+          <p:cNvSpPr txBox="1">
+            <a:spLocks noGrp="1"/>
+          </p:cNvSpPr>
           <p:nvPr>
-            <p:ph idx="12" type="sldNum"/>
+            <p:ph type="sldNum" idx="12"/>
           </p:nvPr>
         </p:nvSpPr>
         <p:spPr>
@@ -4790,7 +4956,7 @@
           </a:prstGeom>
         </p:spPr>
         <p:txBody>
-          <a:bodyPr anchorCtr="0" anchor="ctr" bIns="91425" lIns="91425" spcFirstLastPara="1" rIns="91425" wrap="square" tIns="91425">
+          <a:bodyPr spcFirstLastPara="1" wrap="square" lIns="91425" tIns="91425" rIns="91425" bIns="91425" anchor="ctr" anchorCtr="0">
             <a:normAutofit/>
           </a:bodyPr>
           <a:lstStyle>
@@ -4832,7 +4998,7 @@
             </a:lvl9pPr>
           </a:lstStyle>
           <a:p>
-            <a:pPr indent="0" lvl="0" marL="0" rtl="0" algn="r">
+            <a:pPr marL="0" lvl="0" indent="0" algn="r" rtl="0">
               <a:spcBef>
                 <a:spcPts val="0"/>
               </a:spcBef>
@@ -4858,11 +5024,11 @@
 </file>
 
 <file path=ppt/slideLayouts/slideLayout7.xml><?xml version="1.0" encoding="utf-8"?>
-<p:sldLayout xmlns:a="http://schemas.openxmlformats.org/drawingml/2006/main" xmlns:r="http://schemas.openxmlformats.org/officeDocument/2006/relationships" xmlns:mc="http://schemas.openxmlformats.org/markup-compatibility/2006" xmlns:mv="urn:schemas-microsoft-com:mac:vml" xmlns:p="http://schemas.openxmlformats.org/presentationml/2006/main" xmlns:c="http://schemas.openxmlformats.org/drawingml/2006/chart" xmlns:dgm="http://schemas.openxmlformats.org/drawingml/2006/diagram" xmlns:o="urn:schemas-microsoft-com:office:office" xmlns:v="urn:schemas-microsoft-com:vml" xmlns:pvml="urn:schemas-microsoft-com:office:powerpoint" xmlns:com="http://schemas.openxmlformats.org/drawingml/2006/compatibility" xmlns:p14="http://schemas.microsoft.com/office/powerpoint/2010/main" xmlns:p15="http://schemas.microsoft.com/office/powerpoint/2012/main" xmlns:ahyp="http://schemas.microsoft.com/office/drawing/2018/hyperlinkcolor" matchingName="Main point">
+<p:sldLayout xmlns:a="http://schemas.openxmlformats.org/drawingml/2006/main" xmlns:r="http://schemas.openxmlformats.org/officeDocument/2006/relationships" xmlns:p="http://schemas.openxmlformats.org/presentationml/2006/main" matchingName="Main point">
   <p:cSld name="MAIN_POINT">
     <p:spTree>
       <p:nvGrpSpPr>
-        <p:cNvPr id="32" name="Shape 32"/>
+        <p:cNvPr id="1" name="Shape 32"/>
         <p:cNvGrpSpPr/>
         <p:nvPr/>
       </p:nvGrpSpPr>
@@ -4877,7 +5043,9 @@
       <p:sp>
         <p:nvSpPr>
           <p:cNvPr id="33" name="Google Shape;33;p8"/>
-          <p:cNvSpPr txBox="1"/>
+          <p:cNvSpPr txBox="1">
+            <a:spLocks noGrp="1"/>
+          </p:cNvSpPr>
           <p:nvPr>
             <p:ph type="title"/>
           </p:nvPr>
@@ -4892,7 +5060,7 @@
           </a:prstGeom>
         </p:spPr>
         <p:txBody>
-          <a:bodyPr anchorCtr="0" anchor="ctr" bIns="91425" lIns="91425" spcFirstLastPara="1" rIns="91425" wrap="square" tIns="91425">
+          <a:bodyPr spcFirstLastPara="1" wrap="square" lIns="91425" tIns="91425" rIns="91425" bIns="91425" anchor="ctr" anchorCtr="0">
             <a:normAutofit/>
           </a:bodyPr>
           <a:lstStyle>
@@ -4996,15 +5164,19 @@
               <a:defRPr sz="4800"/>
             </a:lvl9pPr>
           </a:lstStyle>
-          <a:p/>
+          <a:p>
+            <a:endParaRPr/>
+          </a:p>
         </p:txBody>
       </p:sp>
       <p:sp>
         <p:nvSpPr>
           <p:cNvPr id="34" name="Google Shape;34;p8"/>
-          <p:cNvSpPr txBox="1"/>
+          <p:cNvSpPr txBox="1">
+            <a:spLocks noGrp="1"/>
+          </p:cNvSpPr>
           <p:nvPr>
-            <p:ph idx="12" type="sldNum"/>
+            <p:ph type="sldNum" idx="12"/>
           </p:nvPr>
         </p:nvSpPr>
         <p:spPr>
@@ -5017,7 +5189,7 @@
           </a:prstGeom>
         </p:spPr>
         <p:txBody>
-          <a:bodyPr anchorCtr="0" anchor="ctr" bIns="91425" lIns="91425" spcFirstLastPara="1" rIns="91425" wrap="square" tIns="91425">
+          <a:bodyPr spcFirstLastPara="1" wrap="square" lIns="91425" tIns="91425" rIns="91425" bIns="91425" anchor="ctr" anchorCtr="0">
             <a:normAutofit/>
           </a:bodyPr>
           <a:lstStyle>
@@ -5059,7 +5231,7 @@
             </a:lvl9pPr>
           </a:lstStyle>
           <a:p>
-            <a:pPr indent="0" lvl="0" marL="0" rtl="0" algn="r">
+            <a:pPr marL="0" lvl="0" indent="0" algn="r" rtl="0">
               <a:spcBef>
                 <a:spcPts val="0"/>
               </a:spcBef>
@@ -5085,11 +5257,11 @@
 </file>
 
 <file path=ppt/slideLayouts/slideLayout8.xml><?xml version="1.0" encoding="utf-8"?>
-<p:sldLayout xmlns:a="http://schemas.openxmlformats.org/drawingml/2006/main" xmlns:r="http://schemas.openxmlformats.org/officeDocument/2006/relationships" xmlns:mc="http://schemas.openxmlformats.org/markup-compatibility/2006" xmlns:mv="urn:schemas-microsoft-com:mac:vml" xmlns:p="http://schemas.openxmlformats.org/presentationml/2006/main" xmlns:c="http://schemas.openxmlformats.org/drawingml/2006/chart" xmlns:dgm="http://schemas.openxmlformats.org/drawingml/2006/diagram" xmlns:o="urn:schemas-microsoft-com:office:office" xmlns:v="urn:schemas-microsoft-com:vml" xmlns:pvml="urn:schemas-microsoft-com:office:powerpoint" xmlns:com="http://schemas.openxmlformats.org/drawingml/2006/compatibility" xmlns:p14="http://schemas.microsoft.com/office/powerpoint/2010/main" xmlns:p15="http://schemas.microsoft.com/office/powerpoint/2012/main" xmlns:ahyp="http://schemas.microsoft.com/office/drawing/2018/hyperlinkcolor" matchingName="Section title and description">
+<p:sldLayout xmlns:a="http://schemas.openxmlformats.org/drawingml/2006/main" xmlns:r="http://schemas.openxmlformats.org/officeDocument/2006/relationships" xmlns:p="http://schemas.openxmlformats.org/presentationml/2006/main" matchingName="Section title and description">
   <p:cSld name="SECTION_TITLE_AND_DESCRIPTION">
     <p:spTree>
       <p:nvGrpSpPr>
-        <p:cNvPr id="35" name="Shape 35"/>
+        <p:cNvPr id="1" name="Shape 35"/>
         <p:cNvGrpSpPr/>
         <p:nvPr/>
       </p:nvGrpSpPr>
@@ -5123,23 +5295,20 @@
           </a:ln>
         </p:spPr>
         <p:txBody>
-          <a:bodyPr anchorCtr="0" anchor="ctr" bIns="91425" lIns="91425" spcFirstLastPara="1" rIns="91425" wrap="square" tIns="91425">
+          <a:bodyPr spcFirstLastPara="1" wrap="square" lIns="91425" tIns="91425" rIns="91425" bIns="91425" anchor="ctr" anchorCtr="0">
             <a:noAutofit/>
           </a:bodyPr>
           <a:lstStyle/>
           <a:p>
-            <a:pPr indent="0" lvl="0" marL="0" rtl="0" algn="l">
-              <a:spcBef>
-                <a:spcPts val="0"/>
-              </a:spcBef>
-              <a:spcAft>
-                <a:spcPts val="0"/>
-              </a:spcAft>
-              <a:buNone/>
-            </a:pPr>
-            <a:r>
-              <a:t/>
-            </a:r>
+            <a:pPr marL="0" lvl="0" indent="0" algn="l" rtl="0">
+              <a:spcBef>
+                <a:spcPts val="0"/>
+              </a:spcBef>
+              <a:spcAft>
+                <a:spcPts val="0"/>
+              </a:spcAft>
+              <a:buNone/>
+            </a:pPr>
             <a:endParaRPr/>
           </a:p>
         </p:txBody>
@@ -5147,7 +5316,9 @@
       <p:sp>
         <p:nvSpPr>
           <p:cNvPr id="37" name="Google Shape;37;p9"/>
-          <p:cNvSpPr txBox="1"/>
+          <p:cNvSpPr txBox="1">
+            <a:spLocks noGrp="1"/>
+          </p:cNvSpPr>
           <p:nvPr>
             <p:ph type="title"/>
           </p:nvPr>
@@ -5162,7 +5333,7 @@
           </a:prstGeom>
         </p:spPr>
         <p:txBody>
-          <a:bodyPr anchorCtr="0" anchor="b" bIns="91425" lIns="91425" spcFirstLastPara="1" rIns="91425" wrap="square" tIns="91425">
+          <a:bodyPr spcFirstLastPara="1" wrap="square" lIns="91425" tIns="91425" rIns="91425" bIns="91425" anchor="b" anchorCtr="0">
             <a:normAutofit/>
           </a:bodyPr>
           <a:lstStyle>
@@ -5266,15 +5437,19 @@
               <a:defRPr sz="4200"/>
             </a:lvl9pPr>
           </a:lstStyle>
-          <a:p/>
+          <a:p>
+            <a:endParaRPr/>
+          </a:p>
         </p:txBody>
       </p:sp>
       <p:sp>
         <p:nvSpPr>
           <p:cNvPr id="38" name="Google Shape;38;p9"/>
-          <p:cNvSpPr txBox="1"/>
+          <p:cNvSpPr txBox="1">
+            <a:spLocks noGrp="1"/>
+          </p:cNvSpPr>
           <p:nvPr>
-            <p:ph idx="1" type="subTitle"/>
+            <p:ph type="subTitle" idx="1"/>
           </p:nvPr>
         </p:nvSpPr>
         <p:spPr>
@@ -5287,7 +5462,7 @@
           </a:prstGeom>
         </p:spPr>
         <p:txBody>
-          <a:bodyPr anchorCtr="0" anchor="t" bIns="91425" lIns="91425" spcFirstLastPara="1" rIns="91425" wrap="square" tIns="91425">
+          <a:bodyPr spcFirstLastPara="1" wrap="square" lIns="91425" tIns="91425" rIns="91425" bIns="91425" anchor="t" anchorCtr="0">
             <a:normAutofit/>
           </a:bodyPr>
           <a:lstStyle>
@@ -5418,15 +5593,19 @@
               <a:defRPr sz="2100"/>
             </a:lvl9pPr>
           </a:lstStyle>
-          <a:p/>
+          <a:p>
+            <a:endParaRPr/>
+          </a:p>
         </p:txBody>
       </p:sp>
       <p:sp>
         <p:nvSpPr>
           <p:cNvPr id="39" name="Google Shape;39;p9"/>
-          <p:cNvSpPr txBox="1"/>
+          <p:cNvSpPr txBox="1">
+            <a:spLocks noGrp="1"/>
+          </p:cNvSpPr>
           <p:nvPr>
-            <p:ph idx="2" type="body"/>
+            <p:ph type="body" idx="2"/>
           </p:nvPr>
         </p:nvSpPr>
         <p:spPr>
@@ -5439,11 +5618,11 @@
           </a:prstGeom>
         </p:spPr>
         <p:txBody>
-          <a:bodyPr anchorCtr="0" anchor="ctr" bIns="91425" lIns="91425" spcFirstLastPara="1" rIns="91425" wrap="square" tIns="91425">
+          <a:bodyPr spcFirstLastPara="1" wrap="square" lIns="91425" tIns="91425" rIns="91425" bIns="91425" anchor="ctr" anchorCtr="0">
             <a:normAutofit/>
           </a:bodyPr>
           <a:lstStyle>
-            <a:lvl1pPr indent="-342900" lvl="0" marL="457200">
+            <a:lvl1pPr marL="457200" lvl="0" indent="-342900">
               <a:spcBef>
                 <a:spcPts val="0"/>
               </a:spcBef>
@@ -5454,7 +5633,7 @@
               <a:buChar char="●"/>
               <a:defRPr/>
             </a:lvl1pPr>
-            <a:lvl2pPr indent="-317500" lvl="1" marL="914400">
+            <a:lvl2pPr marL="914400" lvl="1" indent="-317500">
               <a:spcBef>
                 <a:spcPts val="0"/>
               </a:spcBef>
@@ -5465,7 +5644,7 @@
               <a:buChar char="○"/>
               <a:defRPr/>
             </a:lvl2pPr>
-            <a:lvl3pPr indent="-317500" lvl="2" marL="1371600">
+            <a:lvl3pPr marL="1371600" lvl="2" indent="-317500">
               <a:spcBef>
                 <a:spcPts val="0"/>
               </a:spcBef>
@@ -5476,7 +5655,7 @@
               <a:buChar char="■"/>
               <a:defRPr/>
             </a:lvl3pPr>
-            <a:lvl4pPr indent="-317500" lvl="3" marL="1828800">
+            <a:lvl4pPr marL="1828800" lvl="3" indent="-317500">
               <a:spcBef>
                 <a:spcPts val="0"/>
               </a:spcBef>
@@ -5487,7 +5666,7 @@
               <a:buChar char="●"/>
               <a:defRPr/>
             </a:lvl4pPr>
-            <a:lvl5pPr indent="-317500" lvl="4" marL="2286000">
+            <a:lvl5pPr marL="2286000" lvl="4" indent="-317500">
               <a:spcBef>
                 <a:spcPts val="0"/>
               </a:spcBef>
@@ -5498,7 +5677,7 @@
               <a:buChar char="○"/>
               <a:defRPr/>
             </a:lvl5pPr>
-            <a:lvl6pPr indent="-317500" lvl="5" marL="2743200">
+            <a:lvl6pPr marL="2743200" lvl="5" indent="-317500">
               <a:spcBef>
                 <a:spcPts val="0"/>
               </a:spcBef>
@@ -5509,7 +5688,7 @@
               <a:buChar char="■"/>
               <a:defRPr/>
             </a:lvl6pPr>
-            <a:lvl7pPr indent="-317500" lvl="6" marL="3200400">
+            <a:lvl7pPr marL="3200400" lvl="6" indent="-317500">
               <a:spcBef>
                 <a:spcPts val="0"/>
               </a:spcBef>
@@ -5520,7 +5699,7 @@
               <a:buChar char="●"/>
               <a:defRPr/>
             </a:lvl7pPr>
-            <a:lvl8pPr indent="-317500" lvl="7" marL="3657600">
+            <a:lvl8pPr marL="3657600" lvl="7" indent="-317500">
               <a:spcBef>
                 <a:spcPts val="0"/>
               </a:spcBef>
@@ -5531,7 +5710,7 @@
               <a:buChar char="○"/>
               <a:defRPr/>
             </a:lvl8pPr>
-            <a:lvl9pPr indent="-317500" lvl="8" marL="4114800">
+            <a:lvl9pPr marL="4114800" lvl="8" indent="-317500">
               <a:spcBef>
                 <a:spcPts val="0"/>
               </a:spcBef>
@@ -5543,15 +5722,19 @@
               <a:defRPr/>
             </a:lvl9pPr>
           </a:lstStyle>
-          <a:p/>
+          <a:p>
+            <a:endParaRPr/>
+          </a:p>
         </p:txBody>
       </p:sp>
       <p:sp>
         <p:nvSpPr>
           <p:cNvPr id="40" name="Google Shape;40;p9"/>
-          <p:cNvSpPr txBox="1"/>
+          <p:cNvSpPr txBox="1">
+            <a:spLocks noGrp="1"/>
+          </p:cNvSpPr>
           <p:nvPr>
-            <p:ph idx="12" type="sldNum"/>
+            <p:ph type="sldNum" idx="12"/>
           </p:nvPr>
         </p:nvSpPr>
         <p:spPr>
@@ -5564,7 +5747,7 @@
           </a:prstGeom>
         </p:spPr>
         <p:txBody>
-          <a:bodyPr anchorCtr="0" anchor="ctr" bIns="91425" lIns="91425" spcFirstLastPara="1" rIns="91425" wrap="square" tIns="91425">
+          <a:bodyPr spcFirstLastPara="1" wrap="square" lIns="91425" tIns="91425" rIns="91425" bIns="91425" anchor="ctr" anchorCtr="0">
             <a:normAutofit/>
           </a:bodyPr>
           <a:lstStyle>
@@ -5606,7 +5789,7 @@
             </a:lvl9pPr>
           </a:lstStyle>
           <a:p>
-            <a:pPr indent="0" lvl="0" marL="0" rtl="0" algn="r">
+            <a:pPr marL="0" lvl="0" indent="0" algn="r" rtl="0">
               <a:spcBef>
                 <a:spcPts val="0"/>
               </a:spcBef>
@@ -5632,11 +5815,11 @@
 </file>
 
 <file path=ppt/slideLayouts/slideLayout9.xml><?xml version="1.0" encoding="utf-8"?>
-<p:sldLayout xmlns:a="http://schemas.openxmlformats.org/drawingml/2006/main" xmlns:r="http://schemas.openxmlformats.org/officeDocument/2006/relationships" xmlns:mc="http://schemas.openxmlformats.org/markup-compatibility/2006" xmlns:mv="urn:schemas-microsoft-com:mac:vml" xmlns:p="http://schemas.openxmlformats.org/presentationml/2006/main" xmlns:c="http://schemas.openxmlformats.org/drawingml/2006/chart" xmlns:dgm="http://schemas.openxmlformats.org/drawingml/2006/diagram" xmlns:o="urn:schemas-microsoft-com:office:office" xmlns:v="urn:schemas-microsoft-com:vml" xmlns:pvml="urn:schemas-microsoft-com:office:powerpoint" xmlns:com="http://schemas.openxmlformats.org/drawingml/2006/compatibility" xmlns:p14="http://schemas.microsoft.com/office/powerpoint/2010/main" xmlns:p15="http://schemas.microsoft.com/office/powerpoint/2012/main" xmlns:ahyp="http://schemas.microsoft.com/office/drawing/2018/hyperlinkcolor" matchingName="Caption">
+<p:sldLayout xmlns:a="http://schemas.openxmlformats.org/drawingml/2006/main" xmlns:r="http://schemas.openxmlformats.org/officeDocument/2006/relationships" xmlns:p="http://schemas.openxmlformats.org/presentationml/2006/main" matchingName="Caption">
   <p:cSld name="CAPTION_ONLY">
     <p:spTree>
       <p:nvGrpSpPr>
-        <p:cNvPr id="41" name="Shape 41"/>
+        <p:cNvPr id="1" name="Shape 41"/>
         <p:cNvGrpSpPr/>
         <p:nvPr/>
       </p:nvGrpSpPr>
@@ -5651,9 +5834,11 @@
       <p:sp>
         <p:nvSpPr>
           <p:cNvPr id="42" name="Google Shape;42;p10"/>
-          <p:cNvSpPr txBox="1"/>
+          <p:cNvSpPr txBox="1">
+            <a:spLocks noGrp="1"/>
+          </p:cNvSpPr>
           <p:nvPr>
-            <p:ph idx="1" type="body"/>
+            <p:ph type="body" idx="1"/>
           </p:nvPr>
         </p:nvSpPr>
         <p:spPr>
@@ -5666,11 +5851,11 @@
           </a:prstGeom>
         </p:spPr>
         <p:txBody>
-          <a:bodyPr anchorCtr="0" anchor="ctr" bIns="91425" lIns="91425" spcFirstLastPara="1" rIns="91425" wrap="square" tIns="91425">
+          <a:bodyPr spcFirstLastPara="1" wrap="square" lIns="91425" tIns="91425" rIns="91425" bIns="91425" anchor="ctr" anchorCtr="0">
             <a:normAutofit/>
           </a:bodyPr>
           <a:lstStyle>
-            <a:lvl1pPr indent="-228600" lvl="0" marL="457200">
+            <a:lvl1pPr marL="457200" lvl="0" indent="-228600">
               <a:lnSpc>
                 <a:spcPct val="100000"/>
               </a:lnSpc>
@@ -5685,15 +5870,19 @@
               <a:defRPr/>
             </a:lvl1pPr>
           </a:lstStyle>
-          <a:p/>
+          <a:p>
+            <a:endParaRPr/>
+          </a:p>
         </p:txBody>
       </p:sp>
       <p:sp>
         <p:nvSpPr>
           <p:cNvPr id="43" name="Google Shape;43;p10"/>
-          <p:cNvSpPr txBox="1"/>
+          <p:cNvSpPr txBox="1">
+            <a:spLocks noGrp="1"/>
+          </p:cNvSpPr>
           <p:nvPr>
-            <p:ph idx="12" type="sldNum"/>
+            <p:ph type="sldNum" idx="12"/>
           </p:nvPr>
         </p:nvSpPr>
         <p:spPr>
@@ -5706,7 +5895,7 @@
           </a:prstGeom>
         </p:spPr>
         <p:txBody>
-          <a:bodyPr anchorCtr="0" anchor="ctr" bIns="91425" lIns="91425" spcFirstLastPara="1" rIns="91425" wrap="square" tIns="91425">
+          <a:bodyPr spcFirstLastPara="1" wrap="square" lIns="91425" tIns="91425" rIns="91425" bIns="91425" anchor="ctr" anchorCtr="0">
             <a:normAutofit/>
           </a:bodyPr>
           <a:lstStyle>
@@ -5748,7 +5937,7 @@
             </a:lvl9pPr>
           </a:lstStyle>
           <a:p>
-            <a:pPr indent="0" lvl="0" marL="0" rtl="0" algn="r">
+            <a:pPr marL="0" lvl="0" indent="0" algn="r" rtl="0">
               <a:spcBef>
                 <a:spcPts val="0"/>
               </a:spcBef>
@@ -5774,18 +5963,19 @@
 </file>
 
 <file path=ppt/slideMasters/slideMaster1.xml><?xml version="1.0" encoding="utf-8"?>
-<p:sldMaster xmlns:a="http://schemas.openxmlformats.org/drawingml/2006/main" xmlns:r="http://schemas.openxmlformats.org/officeDocument/2006/relationships" xmlns:mc="http://schemas.openxmlformats.org/markup-compatibility/2006" xmlns:mv="urn:schemas-microsoft-com:mac:vml" xmlns:p="http://schemas.openxmlformats.org/presentationml/2006/main" xmlns:c="http://schemas.openxmlformats.org/drawingml/2006/chart" xmlns:dgm="http://schemas.openxmlformats.org/drawingml/2006/diagram" xmlns:o="urn:schemas-microsoft-com:office:office" xmlns:v="urn:schemas-microsoft-com:vml" xmlns:pvml="urn:schemas-microsoft-com:office:powerpoint" xmlns:com="http://schemas.openxmlformats.org/drawingml/2006/compatibility" xmlns:p14="http://schemas.microsoft.com/office/powerpoint/2010/main" xmlns:p15="http://schemas.microsoft.com/office/powerpoint/2012/main" xmlns:ahyp="http://schemas.microsoft.com/office/drawing/2018/hyperlinkcolor">
+<p:sldMaster xmlns:a="http://schemas.openxmlformats.org/drawingml/2006/main" xmlns:r="http://schemas.openxmlformats.org/officeDocument/2006/relationships" xmlns:p="http://schemas.openxmlformats.org/presentationml/2006/main">
   <p:cSld name="simple-light-2">
     <p:bg>
       <p:bgPr>
         <a:solidFill>
           <a:schemeClr val="lt1"/>
         </a:solidFill>
+        <a:effectLst/>
       </p:bgPr>
     </p:bg>
     <p:spTree>
       <p:nvGrpSpPr>
-        <p:cNvPr id="5" name="Shape 5"/>
+        <p:cNvPr id="1" name="Shape 5"/>
         <p:cNvGrpSpPr/>
         <p:nvPr/>
       </p:nvGrpSpPr>
@@ -5800,7 +5990,9 @@
       <p:sp>
         <p:nvSpPr>
           <p:cNvPr id="6" name="Google Shape;6;p1"/>
-          <p:cNvSpPr txBox="1"/>
+          <p:cNvSpPr txBox="1">
+            <a:spLocks noGrp="1"/>
+          </p:cNvSpPr>
           <p:nvPr>
             <p:ph type="title"/>
           </p:nvPr>
@@ -5819,7 +6011,7 @@
           </a:ln>
         </p:spPr>
         <p:txBody>
-          <a:bodyPr anchorCtr="0" anchor="t" bIns="91425" lIns="91425" spcFirstLastPara="1" rIns="91425" wrap="square" tIns="91425">
+          <a:bodyPr spcFirstLastPara="1" wrap="square" lIns="91425" tIns="91425" rIns="91425" bIns="91425" anchor="t" anchorCtr="0">
             <a:normAutofit/>
           </a:bodyPr>
           <a:lstStyle>
@@ -5986,15 +6178,19 @@
               </a:defRPr>
             </a:lvl9pPr>
           </a:lstStyle>
-          <a:p/>
+          <a:p>
+            <a:endParaRPr/>
+          </a:p>
         </p:txBody>
       </p:sp>
       <p:sp>
         <p:nvSpPr>
           <p:cNvPr id="7" name="Google Shape;7;p1"/>
-          <p:cNvSpPr txBox="1"/>
+          <p:cNvSpPr txBox="1">
+            <a:spLocks noGrp="1"/>
+          </p:cNvSpPr>
           <p:nvPr>
-            <p:ph idx="1" type="body"/>
+            <p:ph type="body" idx="1"/>
           </p:nvPr>
         </p:nvSpPr>
         <p:spPr>
@@ -6011,11 +6207,11 @@
           </a:ln>
         </p:spPr>
         <p:txBody>
-          <a:bodyPr anchorCtr="0" anchor="t" bIns="91425" lIns="91425" spcFirstLastPara="1" rIns="91425" wrap="square" tIns="91425">
+          <a:bodyPr spcFirstLastPara="1" wrap="square" lIns="91425" tIns="91425" rIns="91425" bIns="91425" anchor="t" anchorCtr="0">
             <a:normAutofit/>
           </a:bodyPr>
           <a:lstStyle>
-            <a:lvl1pPr indent="-342900" lvl="0" marL="457200">
+            <a:lvl1pPr marL="457200" lvl="0" indent="-342900">
               <a:lnSpc>
                 <a:spcPct val="115000"/>
               </a:lnSpc>
@@ -6036,7 +6232,7 @@
                 </a:solidFill>
               </a:defRPr>
             </a:lvl1pPr>
-            <a:lvl2pPr indent="-317500" lvl="1" marL="914400">
+            <a:lvl2pPr marL="914400" lvl="1" indent="-317500">
               <a:lnSpc>
                 <a:spcPct val="115000"/>
               </a:lnSpc>
@@ -6057,7 +6253,7 @@
                 </a:solidFill>
               </a:defRPr>
             </a:lvl2pPr>
-            <a:lvl3pPr indent="-317500" lvl="2" marL="1371600">
+            <a:lvl3pPr marL="1371600" lvl="2" indent="-317500">
               <a:lnSpc>
                 <a:spcPct val="115000"/>
               </a:lnSpc>
@@ -6078,7 +6274,7 @@
                 </a:solidFill>
               </a:defRPr>
             </a:lvl3pPr>
-            <a:lvl4pPr indent="-317500" lvl="3" marL="1828800">
+            <a:lvl4pPr marL="1828800" lvl="3" indent="-317500">
               <a:lnSpc>
                 <a:spcPct val="115000"/>
               </a:lnSpc>
@@ -6099,7 +6295,7 @@
                 </a:solidFill>
               </a:defRPr>
             </a:lvl4pPr>
-            <a:lvl5pPr indent="-317500" lvl="4" marL="2286000">
+            <a:lvl5pPr marL="2286000" lvl="4" indent="-317500">
               <a:lnSpc>
                 <a:spcPct val="115000"/>
               </a:lnSpc>
@@ -6120,7 +6316,7 @@
                 </a:solidFill>
               </a:defRPr>
             </a:lvl5pPr>
-            <a:lvl6pPr indent="-317500" lvl="5" marL="2743200">
+            <a:lvl6pPr marL="2743200" lvl="5" indent="-317500">
               <a:lnSpc>
                 <a:spcPct val="115000"/>
               </a:lnSpc>
@@ -6141,7 +6337,7 @@
                 </a:solidFill>
               </a:defRPr>
             </a:lvl6pPr>
-            <a:lvl7pPr indent="-317500" lvl="6" marL="3200400">
+            <a:lvl7pPr marL="3200400" lvl="6" indent="-317500">
               <a:lnSpc>
                 <a:spcPct val="115000"/>
               </a:lnSpc>
@@ -6162,7 +6358,7 @@
                 </a:solidFill>
               </a:defRPr>
             </a:lvl7pPr>
-            <a:lvl8pPr indent="-317500" lvl="7" marL="3657600">
+            <a:lvl8pPr marL="3657600" lvl="7" indent="-317500">
               <a:lnSpc>
                 <a:spcPct val="115000"/>
               </a:lnSpc>
@@ -6183,7 +6379,7 @@
                 </a:solidFill>
               </a:defRPr>
             </a:lvl8pPr>
-            <a:lvl9pPr indent="-317500" lvl="8" marL="4114800">
+            <a:lvl9pPr marL="4114800" lvl="8" indent="-317500">
               <a:lnSpc>
                 <a:spcPct val="115000"/>
               </a:lnSpc>
@@ -6205,15 +6401,19 @@
               </a:defRPr>
             </a:lvl9pPr>
           </a:lstStyle>
-          <a:p/>
+          <a:p>
+            <a:endParaRPr/>
+          </a:p>
         </p:txBody>
       </p:sp>
       <p:sp>
         <p:nvSpPr>
           <p:cNvPr id="8" name="Google Shape;8;p1"/>
-          <p:cNvSpPr txBox="1"/>
+          <p:cNvSpPr txBox="1">
+            <a:spLocks noGrp="1"/>
+          </p:cNvSpPr>
           <p:nvPr>
-            <p:ph idx="12" type="sldNum"/>
+            <p:ph type="sldNum" idx="12"/>
           </p:nvPr>
         </p:nvSpPr>
         <p:spPr>
@@ -6230,7 +6430,7 @@
           </a:ln>
         </p:spPr>
         <p:txBody>
-          <a:bodyPr anchorCtr="0" anchor="ctr" bIns="91425" lIns="91425" spcFirstLastPara="1" rIns="91425" wrap="square" tIns="91425">
+          <a:bodyPr spcFirstLastPara="1" wrap="square" lIns="91425" tIns="91425" rIns="91425" bIns="91425" anchor="ctr" anchorCtr="0">
             <a:normAutofit/>
           </a:bodyPr>
           <a:lstStyle>
@@ -6308,7 +6508,7 @@
             </a:lvl9pPr>
           </a:lstStyle>
           <a:p>
-            <a:pPr indent="0" lvl="0" marL="0" rtl="0" algn="r">
+            <a:pPr marL="0" lvl="0" indent="0" algn="r" rtl="0">
               <a:spcBef>
                 <a:spcPts val="0"/>
               </a:spcBef>
@@ -6327,7 +6527,7 @@
       </p:sp>
     </p:spTree>
   </p:cSld>
-  <p:clrMap accent1="accent1" accent2="accent2" accent3="accent3" accent4="accent4" accent5="accent5" accent6="accent6" bg1="lt1" bg2="dk2" tx1="dk1" tx2="lt2" folHlink="folHlink" hlink="hlink"/>
+  <p:clrMap bg1="lt1" tx1="dk1" bg2="dk2" tx2="lt2" accent1="accent1" accent2="accent2" accent3="accent3" accent4="accent4" accent5="accent5" accent6="accent6" hlink="hlink" folHlink="folHlink"/>
   <p:sldLayoutIdLst>
     <p:sldLayoutId id="2147483648" r:id="rId1"/>
     <p:sldLayoutId id="2147483649" r:id="rId2"/>
@@ -6341,10 +6541,10 @@
     <p:sldLayoutId id="2147483657" r:id="rId10"/>
     <p:sldLayoutId id="2147483658" r:id="rId11"/>
   </p:sldLayoutIdLst>
-  <p:hf dt="0" ftr="0" hdr="0" sldNum="0"/>
+  <p:hf sldNum="0" hdr="0" ftr="0" dt="0"/>
   <p:txStyles>
     <p:titleStyle>
-      <a:defPPr lvl="0" marR="0" rtl="0" algn="l">
+      <a:defPPr marR="0" lvl="0" algn="l" rtl="0">
         <a:lnSpc>
           <a:spcPct val="100000"/>
         </a:lnSpc>
@@ -6355,7 +6555,7 @@
           <a:spcPts val="0"/>
         </a:spcAft>
       </a:defPPr>
-      <a:lvl1pPr lvl="0" marR="0" rtl="0" algn="l">
+      <a:lvl1pPr marR="0" lvl="0" algn="l" rtl="0">
         <a:lnSpc>
           <a:spcPct val="100000"/>
         </a:lnSpc>
@@ -6369,7 +6569,7 @@
           <a:srgbClr val="000000"/>
         </a:buClr>
         <a:buFont typeface="Arial"/>
-        <a:defRPr b="0" i="0" sz="1400" u="none" cap="none" strike="noStrike">
+        <a:defRPr sz="1400" b="0" i="0" u="none" strike="noStrike" cap="none">
           <a:solidFill>
             <a:srgbClr val="000000"/>
           </a:solidFill>
@@ -6379,7 +6579,7 @@
           <a:sym typeface="Arial"/>
         </a:defRPr>
       </a:lvl1pPr>
-      <a:lvl2pPr lvl="1" marR="0" rtl="0" algn="l">
+      <a:lvl2pPr marR="0" lvl="1" algn="l" rtl="0">
         <a:lnSpc>
           <a:spcPct val="100000"/>
         </a:lnSpc>
@@ -6393,7 +6593,7 @@
           <a:srgbClr val="000000"/>
         </a:buClr>
         <a:buFont typeface="Arial"/>
-        <a:defRPr b="0" i="0" sz="1400" u="none" cap="none" strike="noStrike">
+        <a:defRPr sz="1400" b="0" i="0" u="none" strike="noStrike" cap="none">
           <a:solidFill>
             <a:srgbClr val="000000"/>
           </a:solidFill>
@@ -6403,7 +6603,7 @@
           <a:sym typeface="Arial"/>
         </a:defRPr>
       </a:lvl2pPr>
-      <a:lvl3pPr lvl="2" marR="0" rtl="0" algn="l">
+      <a:lvl3pPr marR="0" lvl="2" algn="l" rtl="0">
         <a:lnSpc>
           <a:spcPct val="100000"/>
         </a:lnSpc>
@@ -6417,7 +6617,7 @@
           <a:srgbClr val="000000"/>
         </a:buClr>
         <a:buFont typeface="Arial"/>
-        <a:defRPr b="0" i="0" sz="1400" u="none" cap="none" strike="noStrike">
+        <a:defRPr sz="1400" b="0" i="0" u="none" strike="noStrike" cap="none">
           <a:solidFill>
             <a:srgbClr val="000000"/>
           </a:solidFill>
@@ -6427,7 +6627,7 @@
           <a:sym typeface="Arial"/>
         </a:defRPr>
       </a:lvl3pPr>
-      <a:lvl4pPr lvl="3" marR="0" rtl="0" algn="l">
+      <a:lvl4pPr marR="0" lvl="3" algn="l" rtl="0">
         <a:lnSpc>
           <a:spcPct val="100000"/>
         </a:lnSpc>
@@ -6441,7 +6641,7 @@
           <a:srgbClr val="000000"/>
         </a:buClr>
         <a:buFont typeface="Arial"/>
-        <a:defRPr b="0" i="0" sz="1400" u="none" cap="none" strike="noStrike">
+        <a:defRPr sz="1400" b="0" i="0" u="none" strike="noStrike" cap="none">
           <a:solidFill>
             <a:srgbClr val="000000"/>
           </a:solidFill>
@@ -6451,7 +6651,7 @@
           <a:sym typeface="Arial"/>
         </a:defRPr>
       </a:lvl4pPr>
-      <a:lvl5pPr lvl="4" marR="0" rtl="0" algn="l">
+      <a:lvl5pPr marR="0" lvl="4" algn="l" rtl="0">
         <a:lnSpc>
           <a:spcPct val="100000"/>
         </a:lnSpc>
@@ -6465,7 +6665,7 @@
           <a:srgbClr val="000000"/>
         </a:buClr>
         <a:buFont typeface="Arial"/>
-        <a:defRPr b="0" i="0" sz="1400" u="none" cap="none" strike="noStrike">
+        <a:defRPr sz="1400" b="0" i="0" u="none" strike="noStrike" cap="none">
           <a:solidFill>
             <a:srgbClr val="000000"/>
           </a:solidFill>
@@ -6475,7 +6675,7 @@
           <a:sym typeface="Arial"/>
         </a:defRPr>
       </a:lvl5pPr>
-      <a:lvl6pPr lvl="5" marR="0" rtl="0" algn="l">
+      <a:lvl6pPr marR="0" lvl="5" algn="l" rtl="0">
         <a:lnSpc>
           <a:spcPct val="100000"/>
         </a:lnSpc>
@@ -6489,7 +6689,7 @@
           <a:srgbClr val="000000"/>
         </a:buClr>
         <a:buFont typeface="Arial"/>
-        <a:defRPr b="0" i="0" sz="1400" u="none" cap="none" strike="noStrike">
+        <a:defRPr sz="1400" b="0" i="0" u="none" strike="noStrike" cap="none">
           <a:solidFill>
             <a:srgbClr val="000000"/>
           </a:solidFill>
@@ -6499,7 +6699,7 @@
           <a:sym typeface="Arial"/>
         </a:defRPr>
       </a:lvl6pPr>
-      <a:lvl7pPr lvl="6" marR="0" rtl="0" algn="l">
+      <a:lvl7pPr marR="0" lvl="6" algn="l" rtl="0">
         <a:lnSpc>
           <a:spcPct val="100000"/>
         </a:lnSpc>
@@ -6513,7 +6713,7 @@
           <a:srgbClr val="000000"/>
         </a:buClr>
         <a:buFont typeface="Arial"/>
-        <a:defRPr b="0" i="0" sz="1400" u="none" cap="none" strike="noStrike">
+        <a:defRPr sz="1400" b="0" i="0" u="none" strike="noStrike" cap="none">
           <a:solidFill>
             <a:srgbClr val="000000"/>
           </a:solidFill>
@@ -6523,7 +6723,7 @@
           <a:sym typeface="Arial"/>
         </a:defRPr>
       </a:lvl7pPr>
-      <a:lvl8pPr lvl="7" marR="0" rtl="0" algn="l">
+      <a:lvl8pPr marR="0" lvl="7" algn="l" rtl="0">
         <a:lnSpc>
           <a:spcPct val="100000"/>
         </a:lnSpc>
@@ -6537,7 +6737,7 @@
           <a:srgbClr val="000000"/>
         </a:buClr>
         <a:buFont typeface="Arial"/>
-        <a:defRPr b="0" i="0" sz="1400" u="none" cap="none" strike="noStrike">
+        <a:defRPr sz="1400" b="0" i="0" u="none" strike="noStrike" cap="none">
           <a:solidFill>
             <a:srgbClr val="000000"/>
           </a:solidFill>
@@ -6547,7 +6747,7 @@
           <a:sym typeface="Arial"/>
         </a:defRPr>
       </a:lvl8pPr>
-      <a:lvl9pPr lvl="8" marR="0" rtl="0" algn="l">
+      <a:lvl9pPr marR="0" lvl="8" algn="l" rtl="0">
         <a:lnSpc>
           <a:spcPct val="100000"/>
         </a:lnSpc>
@@ -6561,7 +6761,7 @@
           <a:srgbClr val="000000"/>
         </a:buClr>
         <a:buFont typeface="Arial"/>
-        <a:defRPr b="0" i="0" sz="1400" u="none" cap="none" strike="noStrike">
+        <a:defRPr sz="1400" b="0" i="0" u="none" strike="noStrike" cap="none">
           <a:solidFill>
             <a:srgbClr val="000000"/>
           </a:solidFill>
@@ -6573,7 +6773,7 @@
       </a:lvl9pPr>
     </p:titleStyle>
     <p:bodyStyle>
-      <a:defPPr lvl="0" marR="0" rtl="0" algn="l">
+      <a:defPPr marR="0" lvl="0" algn="l" rtl="0">
         <a:lnSpc>
           <a:spcPct val="100000"/>
         </a:lnSpc>
@@ -6584,7 +6784,7 @@
           <a:spcPts val="0"/>
         </a:spcAft>
       </a:defPPr>
-      <a:lvl1pPr lvl="0" marR="0" rtl="0" algn="l">
+      <a:lvl1pPr marR="0" lvl="0" algn="l" rtl="0">
         <a:lnSpc>
           <a:spcPct val="100000"/>
         </a:lnSpc>
@@ -6598,7 +6798,7 @@
           <a:srgbClr val="000000"/>
         </a:buClr>
         <a:buFont typeface="Arial"/>
-        <a:defRPr b="0" i="0" sz="1400" u="none" cap="none" strike="noStrike">
+        <a:defRPr sz="1400" b="0" i="0" u="none" strike="noStrike" cap="none">
           <a:solidFill>
             <a:srgbClr val="000000"/>
           </a:solidFill>
@@ -6608,7 +6808,7 @@
           <a:sym typeface="Arial"/>
         </a:defRPr>
       </a:lvl1pPr>
-      <a:lvl2pPr lvl="1" marR="0" rtl="0" algn="l">
+      <a:lvl2pPr marR="0" lvl="1" algn="l" rtl="0">
         <a:lnSpc>
           <a:spcPct val="100000"/>
         </a:lnSpc>
@@ -6622,7 +6822,7 @@
           <a:srgbClr val="000000"/>
         </a:buClr>
         <a:buFont typeface="Arial"/>
-        <a:defRPr b="0" i="0" sz="1400" u="none" cap="none" strike="noStrike">
+        <a:defRPr sz="1400" b="0" i="0" u="none" strike="noStrike" cap="none">
           <a:solidFill>
             <a:srgbClr val="000000"/>
           </a:solidFill>
@@ -6632,7 +6832,7 @@
           <a:sym typeface="Arial"/>
         </a:defRPr>
       </a:lvl2pPr>
-      <a:lvl3pPr lvl="2" marR="0" rtl="0" algn="l">
+      <a:lvl3pPr marR="0" lvl="2" algn="l" rtl="0">
         <a:lnSpc>
           <a:spcPct val="100000"/>
         </a:lnSpc>
@@ -6646,7 +6846,7 @@
           <a:srgbClr val="000000"/>
         </a:buClr>
         <a:buFont typeface="Arial"/>
-        <a:defRPr b="0" i="0" sz="1400" u="none" cap="none" strike="noStrike">
+        <a:defRPr sz="1400" b="0" i="0" u="none" strike="noStrike" cap="none">
           <a:solidFill>
             <a:srgbClr val="000000"/>
           </a:solidFill>
@@ -6656,7 +6856,7 @@
           <a:sym typeface="Arial"/>
         </a:defRPr>
       </a:lvl3pPr>
-      <a:lvl4pPr lvl="3" marR="0" rtl="0" algn="l">
+      <a:lvl4pPr marR="0" lvl="3" algn="l" rtl="0">
         <a:lnSpc>
           <a:spcPct val="100000"/>
         </a:lnSpc>
@@ -6670,7 +6870,7 @@
           <a:srgbClr val="000000"/>
         </a:buClr>
         <a:buFont typeface="Arial"/>
-        <a:defRPr b="0" i="0" sz="1400" u="none" cap="none" strike="noStrike">
+        <a:defRPr sz="1400" b="0" i="0" u="none" strike="noStrike" cap="none">
           <a:solidFill>
             <a:srgbClr val="000000"/>
           </a:solidFill>
@@ -6680,7 +6880,7 @@
           <a:sym typeface="Arial"/>
         </a:defRPr>
       </a:lvl4pPr>
-      <a:lvl5pPr lvl="4" marR="0" rtl="0" algn="l">
+      <a:lvl5pPr marR="0" lvl="4" algn="l" rtl="0">
         <a:lnSpc>
           <a:spcPct val="100000"/>
         </a:lnSpc>
@@ -6694,7 +6894,7 @@
           <a:srgbClr val="000000"/>
         </a:buClr>
         <a:buFont typeface="Arial"/>
-        <a:defRPr b="0" i="0" sz="1400" u="none" cap="none" strike="noStrike">
+        <a:defRPr sz="1400" b="0" i="0" u="none" strike="noStrike" cap="none">
           <a:solidFill>
             <a:srgbClr val="000000"/>
           </a:solidFill>
@@ -6704,7 +6904,7 @@
           <a:sym typeface="Arial"/>
         </a:defRPr>
       </a:lvl5pPr>
-      <a:lvl6pPr lvl="5" marR="0" rtl="0" algn="l">
+      <a:lvl6pPr marR="0" lvl="5" algn="l" rtl="0">
         <a:lnSpc>
           <a:spcPct val="100000"/>
         </a:lnSpc>
@@ -6718,7 +6918,7 @@
           <a:srgbClr val="000000"/>
         </a:buClr>
         <a:buFont typeface="Arial"/>
-        <a:defRPr b="0" i="0" sz="1400" u="none" cap="none" strike="noStrike">
+        <a:defRPr sz="1400" b="0" i="0" u="none" strike="noStrike" cap="none">
           <a:solidFill>
             <a:srgbClr val="000000"/>
           </a:solidFill>
@@ -6728,7 +6928,7 @@
           <a:sym typeface="Arial"/>
         </a:defRPr>
       </a:lvl6pPr>
-      <a:lvl7pPr lvl="6" marR="0" rtl="0" algn="l">
+      <a:lvl7pPr marR="0" lvl="6" algn="l" rtl="0">
         <a:lnSpc>
           <a:spcPct val="100000"/>
         </a:lnSpc>
@@ -6742,7 +6942,7 @@
           <a:srgbClr val="000000"/>
         </a:buClr>
         <a:buFont typeface="Arial"/>
-        <a:defRPr b="0" i="0" sz="1400" u="none" cap="none" strike="noStrike">
+        <a:defRPr sz="1400" b="0" i="0" u="none" strike="noStrike" cap="none">
           <a:solidFill>
             <a:srgbClr val="000000"/>
           </a:solidFill>
@@ -6752,7 +6952,7 @@
           <a:sym typeface="Arial"/>
         </a:defRPr>
       </a:lvl7pPr>
-      <a:lvl8pPr lvl="7" marR="0" rtl="0" algn="l">
+      <a:lvl8pPr marR="0" lvl="7" algn="l" rtl="0">
         <a:lnSpc>
           <a:spcPct val="100000"/>
         </a:lnSpc>
@@ -6766,7 +6966,7 @@
           <a:srgbClr val="000000"/>
         </a:buClr>
         <a:buFont typeface="Arial"/>
-        <a:defRPr b="0" i="0" sz="1400" u="none" cap="none" strike="noStrike">
+        <a:defRPr sz="1400" b="0" i="0" u="none" strike="noStrike" cap="none">
           <a:solidFill>
             <a:srgbClr val="000000"/>
           </a:solidFill>
@@ -6776,7 +6976,7 @@
           <a:sym typeface="Arial"/>
         </a:defRPr>
       </a:lvl8pPr>
-      <a:lvl9pPr lvl="8" marR="0" rtl="0" algn="l">
+      <a:lvl9pPr marR="0" lvl="8" algn="l" rtl="0">
         <a:lnSpc>
           <a:spcPct val="100000"/>
         </a:lnSpc>
@@ -6790,7 +6990,7 @@
           <a:srgbClr val="000000"/>
         </a:buClr>
         <a:buFont typeface="Arial"/>
-        <a:defRPr b="0" i="0" sz="1400" u="none" cap="none" strike="noStrike">
+        <a:defRPr sz="1400" b="0" i="0" u="none" strike="noStrike" cap="none">
           <a:solidFill>
             <a:srgbClr val="000000"/>
           </a:solidFill>
@@ -6802,7 +7002,7 @@
       </a:lvl9pPr>
     </p:bodyStyle>
     <p:otherStyle>
-      <a:defPPr lvl="0" marR="0" rtl="0" algn="l">
+      <a:defPPr marR="0" lvl="0" algn="l" rtl="0">
         <a:lnSpc>
           <a:spcPct val="100000"/>
         </a:lnSpc>
@@ -6813,7 +7013,7 @@
           <a:spcPts val="0"/>
         </a:spcAft>
       </a:defPPr>
-      <a:lvl1pPr lvl="0" marR="0" rtl="0" algn="l">
+      <a:lvl1pPr marR="0" lvl="0" algn="l" rtl="0">
         <a:lnSpc>
           <a:spcPct val="100000"/>
         </a:lnSpc>
@@ -6827,7 +7027,7 @@
           <a:srgbClr val="000000"/>
         </a:buClr>
         <a:buFont typeface="Arial"/>
-        <a:defRPr b="0" i="0" sz="1400" u="none" cap="none" strike="noStrike">
+        <a:defRPr sz="1400" b="0" i="0" u="none" strike="noStrike" cap="none">
           <a:solidFill>
             <a:srgbClr val="000000"/>
           </a:solidFill>
@@ -6837,7 +7037,7 @@
           <a:sym typeface="Arial"/>
         </a:defRPr>
       </a:lvl1pPr>
-      <a:lvl2pPr lvl="1" marR="0" rtl="0" algn="l">
+      <a:lvl2pPr marR="0" lvl="1" algn="l" rtl="0">
         <a:lnSpc>
           <a:spcPct val="100000"/>
         </a:lnSpc>
@@ -6851,7 +7051,7 @@
           <a:srgbClr val="000000"/>
         </a:buClr>
         <a:buFont typeface="Arial"/>
-        <a:defRPr b="0" i="0" sz="1400" u="none" cap="none" strike="noStrike">
+        <a:defRPr sz="1400" b="0" i="0" u="none" strike="noStrike" cap="none">
           <a:solidFill>
             <a:srgbClr val="000000"/>
           </a:solidFill>
@@ -6861,7 +7061,7 @@
           <a:sym typeface="Arial"/>
         </a:defRPr>
       </a:lvl2pPr>
-      <a:lvl3pPr lvl="2" marR="0" rtl="0" algn="l">
+      <a:lvl3pPr marR="0" lvl="2" algn="l" rtl="0">
         <a:lnSpc>
           <a:spcPct val="100000"/>
         </a:lnSpc>
@@ -6875,7 +7075,7 @@
           <a:srgbClr val="000000"/>
         </a:buClr>
         <a:buFont typeface="Arial"/>
-        <a:defRPr b="0" i="0" sz="1400" u="none" cap="none" strike="noStrike">
+        <a:defRPr sz="1400" b="0" i="0" u="none" strike="noStrike" cap="none">
           <a:solidFill>
             <a:srgbClr val="000000"/>
           </a:solidFill>
@@ -6885,7 +7085,7 @@
           <a:sym typeface="Arial"/>
         </a:defRPr>
       </a:lvl3pPr>
-      <a:lvl4pPr lvl="3" marR="0" rtl="0" algn="l">
+      <a:lvl4pPr marR="0" lvl="3" algn="l" rtl="0">
         <a:lnSpc>
           <a:spcPct val="100000"/>
         </a:lnSpc>
@@ -6899,7 +7099,7 @@
           <a:srgbClr val="000000"/>
         </a:buClr>
         <a:buFont typeface="Arial"/>
-        <a:defRPr b="0" i="0" sz="1400" u="none" cap="none" strike="noStrike">
+        <a:defRPr sz="1400" b="0" i="0" u="none" strike="noStrike" cap="none">
           <a:solidFill>
             <a:srgbClr val="000000"/>
           </a:solidFill>
@@ -6909,7 +7109,7 @@
           <a:sym typeface="Arial"/>
         </a:defRPr>
       </a:lvl4pPr>
-      <a:lvl5pPr lvl="4" marR="0" rtl="0" algn="l">
+      <a:lvl5pPr marR="0" lvl="4" algn="l" rtl="0">
         <a:lnSpc>
           <a:spcPct val="100000"/>
         </a:lnSpc>
@@ -6923,7 +7123,7 @@
           <a:srgbClr val="000000"/>
         </a:buClr>
         <a:buFont typeface="Arial"/>
-        <a:defRPr b="0" i="0" sz="1400" u="none" cap="none" strike="noStrike">
+        <a:defRPr sz="1400" b="0" i="0" u="none" strike="noStrike" cap="none">
           <a:solidFill>
             <a:srgbClr val="000000"/>
           </a:solidFill>
@@ -6933,7 +7133,7 @@
           <a:sym typeface="Arial"/>
         </a:defRPr>
       </a:lvl5pPr>
-      <a:lvl6pPr lvl="5" marR="0" rtl="0" algn="l">
+      <a:lvl6pPr marR="0" lvl="5" algn="l" rtl="0">
         <a:lnSpc>
           <a:spcPct val="100000"/>
         </a:lnSpc>
@@ -6947,7 +7147,7 @@
           <a:srgbClr val="000000"/>
         </a:buClr>
         <a:buFont typeface="Arial"/>
-        <a:defRPr b="0" i="0" sz="1400" u="none" cap="none" strike="noStrike">
+        <a:defRPr sz="1400" b="0" i="0" u="none" strike="noStrike" cap="none">
           <a:solidFill>
             <a:srgbClr val="000000"/>
           </a:solidFill>
@@ -6957,7 +7157,7 @@
           <a:sym typeface="Arial"/>
         </a:defRPr>
       </a:lvl6pPr>
-      <a:lvl7pPr lvl="6" marR="0" rtl="0" algn="l">
+      <a:lvl7pPr marR="0" lvl="6" algn="l" rtl="0">
         <a:lnSpc>
           <a:spcPct val="100000"/>
         </a:lnSpc>
@@ -6971,7 +7171,7 @@
           <a:srgbClr val="000000"/>
         </a:buClr>
         <a:buFont typeface="Arial"/>
-        <a:defRPr b="0" i="0" sz="1400" u="none" cap="none" strike="noStrike">
+        <a:defRPr sz="1400" b="0" i="0" u="none" strike="noStrike" cap="none">
           <a:solidFill>
             <a:srgbClr val="000000"/>
           </a:solidFill>
@@ -6981,7 +7181,7 @@
           <a:sym typeface="Arial"/>
         </a:defRPr>
       </a:lvl7pPr>
-      <a:lvl8pPr lvl="7" marR="0" rtl="0" algn="l">
+      <a:lvl8pPr marR="0" lvl="7" algn="l" rtl="0">
         <a:lnSpc>
           <a:spcPct val="100000"/>
         </a:lnSpc>
@@ -6995,7 +7195,7 @@
           <a:srgbClr val="000000"/>
         </a:buClr>
         <a:buFont typeface="Arial"/>
-        <a:defRPr b="0" i="0" sz="1400" u="none" cap="none" strike="noStrike">
+        <a:defRPr sz="1400" b="0" i="0" u="none" strike="noStrike" cap="none">
           <a:solidFill>
             <a:srgbClr val="000000"/>
           </a:solidFill>
@@ -7005,7 +7205,7 @@
           <a:sym typeface="Arial"/>
         </a:defRPr>
       </a:lvl8pPr>
-      <a:lvl9pPr lvl="8" marR="0" rtl="0" algn="l">
+      <a:lvl9pPr marR="0" lvl="8" algn="l" rtl="0">
         <a:lnSpc>
           <a:spcPct val="100000"/>
         </a:lnSpc>
@@ -7019,7 +7219,7 @@
           <a:srgbClr val="000000"/>
         </a:buClr>
         <a:buFont typeface="Arial"/>
-        <a:defRPr b="0" i="0" sz="1400" u="none" cap="none" strike="noStrike">
+        <a:defRPr sz="1400" b="0" i="0" u="none" strike="noStrike" cap="none">
           <a:solidFill>
             <a:srgbClr val="000000"/>
           </a:solidFill>
@@ -7035,11 +7235,11 @@
 </file>
 
 <file path=ppt/slides/slide1.xml><?xml version="1.0" encoding="utf-8"?>
-<p:sld xmlns:a="http://schemas.openxmlformats.org/drawingml/2006/main" xmlns:r="http://schemas.openxmlformats.org/officeDocument/2006/relationships" xmlns:mc="http://schemas.openxmlformats.org/markup-compatibility/2006" xmlns:mv="urn:schemas-microsoft-com:mac:vml" xmlns:p="http://schemas.openxmlformats.org/presentationml/2006/main" xmlns:c="http://schemas.openxmlformats.org/drawingml/2006/chart" xmlns:dgm="http://schemas.openxmlformats.org/drawingml/2006/diagram" xmlns:o="urn:schemas-microsoft-com:office:office" xmlns:v="urn:schemas-microsoft-com:vml" xmlns:pvml="urn:schemas-microsoft-com:office:powerpoint" xmlns:com="http://schemas.openxmlformats.org/drawingml/2006/compatibility" xmlns:p14="http://schemas.microsoft.com/office/powerpoint/2010/main" xmlns:p15="http://schemas.microsoft.com/office/powerpoint/2012/main" xmlns:ahyp="http://schemas.microsoft.com/office/drawing/2018/hyperlinkcolor">
+<p:sld xmlns:a="http://schemas.openxmlformats.org/drawingml/2006/main" xmlns:r="http://schemas.openxmlformats.org/officeDocument/2006/relationships" xmlns:p="http://schemas.openxmlformats.org/presentationml/2006/main">
   <p:cSld>
     <p:spTree>
       <p:nvGrpSpPr>
-        <p:cNvPr id="53" name="Shape 53"/>
+        <p:cNvPr id="1" name="Shape 53"/>
         <p:cNvGrpSpPr/>
         <p:nvPr/>
       </p:nvGrpSpPr>
@@ -7054,27 +7254,29 @@
       <p:sp>
         <p:nvSpPr>
           <p:cNvPr id="54" name="Google Shape;54;p13"/>
-          <p:cNvSpPr txBox="1"/>
+          <p:cNvSpPr txBox="1">
+            <a:spLocks noGrp="1"/>
+          </p:cNvSpPr>
           <p:nvPr>
             <p:ph type="ctrTitle"/>
           </p:nvPr>
         </p:nvSpPr>
         <p:spPr>
           <a:xfrm>
-            <a:off x="311708" y="744575"/>
-            <a:ext cx="8520600" cy="2052600"/>
+            <a:off x="0" y="744575"/>
+            <a:ext cx="9144000" cy="2052600"/>
           </a:xfrm>
           <a:prstGeom prst="rect">
             <a:avLst/>
           </a:prstGeom>
         </p:spPr>
         <p:txBody>
-          <a:bodyPr anchorCtr="0" anchor="b" bIns="91425" lIns="91425" spcFirstLastPara="1" rIns="91425" wrap="square" tIns="91425">
+          <a:bodyPr spcFirstLastPara="1" wrap="square" lIns="91425" tIns="91425" rIns="91425" bIns="91425" anchor="b" anchorCtr="0">
             <a:normAutofit/>
           </a:bodyPr>
           <a:lstStyle/>
           <a:p>
-            <a:pPr indent="0" lvl="0" marL="0" rtl="0" algn="ctr">
+            <a:pPr marL="0" lvl="0" indent="0" algn="ctr" rtl="0">
               <a:spcBef>
                 <a:spcPts val="0"/>
               </a:spcBef>
@@ -7084,13 +7286,13 @@
               <a:buNone/>
             </a:pPr>
             <a:r>
-              <a:rPr b="1" lang="pt-PT" sz="5300"/>
+              <a:rPr lang="pt-PT" sz="5300" b="1" dirty="0"/>
               <a:t>Dance4Life</a:t>
             </a:r>
-            <a:endParaRPr b="1" sz="5300"/>
-          </a:p>
-          <a:p>
-            <a:pPr indent="0" lvl="0" marL="0" rtl="0" algn="ctr">
+            <a:endParaRPr sz="5300" b="1" dirty="0"/>
+          </a:p>
+          <a:p>
+            <a:pPr marL="0" lvl="0" indent="0" algn="ctr" rtl="0">
               <a:spcBef>
                 <a:spcPts val="0"/>
               </a:spcBef>
@@ -7100,13 +7302,17 @@
               <a:buNone/>
             </a:pPr>
             <a:r>
-              <a:rPr lang="pt-PT" sz="4200"/>
-              <a:t>Envelhecimento activo</a:t>
+              <a:rPr lang="pt-PT" sz="4200" dirty="0"/>
+              <a:t>Envelhecimento </a:t>
             </a:r>
-            <a:endParaRPr sz="4200"/>
-          </a:p>
-          <a:p>
-            <a:pPr indent="-396875" lvl="0" marL="457200" rtl="0" algn="ctr">
+            <a:r>
+              <a:rPr lang="pt-PT" sz="4200" dirty="0" err="1"/>
+              <a:t>activo</a:t>
+            </a:r>
+            <a:endParaRPr sz="4200" dirty="0"/>
+          </a:p>
+          <a:p>
+            <a:pPr marL="457200" lvl="0" indent="-396875" algn="ctr" rtl="0">
               <a:spcBef>
                 <a:spcPts val="0"/>
               </a:spcBef>
@@ -7117,37 +7323,47 @@
               <a:buChar char="-"/>
             </a:pPr>
             <a:r>
-              <a:rPr lang="pt-PT" sz="2650"/>
-              <a:t>Agentes e Sistemas MultiAgentes -</a:t>
+              <a:rPr lang="pt-PT" sz="2650" dirty="0"/>
+              <a:t>Agentes e Sistemas </a:t>
             </a:r>
-            <a:endParaRPr sz="2650"/>
+            <a:r>
+              <a:rPr lang="pt-PT" sz="2650" dirty="0" err="1"/>
+              <a:t>MultiAgentes</a:t>
+            </a:r>
+            <a:r>
+              <a:rPr lang="pt-PT" sz="2650" dirty="0"/>
+              <a:t> -</a:t>
+            </a:r>
+            <a:endParaRPr sz="2650" dirty="0"/>
           </a:p>
         </p:txBody>
       </p:sp>
       <p:sp>
         <p:nvSpPr>
           <p:cNvPr id="55" name="Google Shape;55;p13"/>
-          <p:cNvSpPr txBox="1"/>
+          <p:cNvSpPr txBox="1">
+            <a:spLocks noGrp="1"/>
+          </p:cNvSpPr>
           <p:nvPr>
-            <p:ph idx="1" type="subTitle"/>
+            <p:ph type="subTitle" idx="1"/>
           </p:nvPr>
         </p:nvSpPr>
         <p:spPr>
           <a:xfrm>
-            <a:off x="3679700" y="3285850"/>
-            <a:ext cx="5304900" cy="1104300"/>
+            <a:off x="0" y="3285850"/>
+            <a:ext cx="9144000" cy="1104300"/>
           </a:xfrm>
           <a:prstGeom prst="rect">
             <a:avLst/>
           </a:prstGeom>
         </p:spPr>
         <p:txBody>
-          <a:bodyPr anchorCtr="0" anchor="t" bIns="91425" lIns="91425" spcFirstLastPara="1" rIns="91425" wrap="square" tIns="91425">
+          <a:bodyPr spcFirstLastPara="1" wrap="square" lIns="91425" tIns="91425" rIns="91425" bIns="91425" anchor="t" anchorCtr="0">
             <a:normAutofit/>
           </a:bodyPr>
           <a:lstStyle/>
           <a:p>
-            <a:pPr indent="0" lvl="0" marL="0" rtl="0" algn="l">
+            <a:pPr marL="0" lvl="0" indent="0" rtl="0">
               <a:spcBef>
                 <a:spcPts val="0"/>
               </a:spcBef>
@@ -7157,45 +7373,53 @@
               <a:buNone/>
             </a:pPr>
             <a:r>
-              <a:rPr lang="pt-PT" sz="1400"/>
-              <a:t>Carlos Bergueira   		PG11605</a:t>
+              <a:rPr lang="pt-PT" sz="1400" dirty="0"/>
+              <a:t>Carlos </a:t>
             </a:r>
-            <a:endParaRPr sz="1400"/>
-          </a:p>
-          <a:p>
-            <a:pPr indent="0" lvl="0" marL="0" rtl="0" algn="l">
-              <a:spcBef>
-                <a:spcPts val="0"/>
-              </a:spcBef>
-              <a:spcAft>
-                <a:spcPts val="0"/>
-              </a:spcAft>
-              <a:buNone/>
-            </a:pPr>
             <a:r>
-              <a:rPr lang="pt-PT" sz="1400"/>
-              <a:t>Diego Silva				PG59999</a:t>
+              <a:rPr lang="pt-PT" sz="1400" dirty="0" err="1"/>
+              <a:t>Bergueira</a:t>
             </a:r>
-            <a:endParaRPr sz="1400"/>
-          </a:p>
-          <a:p>
-            <a:pPr indent="0" lvl="0" marL="0" rtl="0" algn="l">
-              <a:spcBef>
-                <a:spcPts val="0"/>
-              </a:spcBef>
-              <a:spcAft>
-                <a:spcPts val="0"/>
-              </a:spcAft>
-              <a:buNone/>
-            </a:pPr>
             <a:r>
-              <a:rPr lang="pt-PT" sz="1400"/>
-              <a:t>Filipa Pereira			PG42201</a:t>
+              <a:rPr lang="pt-PT" sz="1400" dirty="0"/>
+              <a:t>   		PG11605</a:t>
             </a:r>
-            <a:endParaRPr sz="1400"/>
-          </a:p>
-          <a:p>
-            <a:pPr indent="0" lvl="0" marL="0" rtl="0" algn="l">
+            <a:endParaRPr sz="1400" dirty="0"/>
+          </a:p>
+          <a:p>
+            <a:pPr marL="0" lvl="0" indent="0" rtl="0">
+              <a:spcBef>
+                <a:spcPts val="0"/>
+              </a:spcBef>
+              <a:spcAft>
+                <a:spcPts val="0"/>
+              </a:spcAft>
+              <a:buNone/>
+            </a:pPr>
+            <a:r>
+              <a:rPr lang="pt-PT" sz="1400" dirty="0"/>
+              <a:t>Diego Silva			PG59999</a:t>
+            </a:r>
+            <a:endParaRPr sz="1400" dirty="0"/>
+          </a:p>
+          <a:p>
+            <a:pPr marL="0" lvl="0" indent="0" rtl="0">
+              <a:spcBef>
+                <a:spcPts val="0"/>
+              </a:spcBef>
+              <a:spcAft>
+                <a:spcPts val="0"/>
+              </a:spcAft>
+              <a:buNone/>
+            </a:pPr>
+            <a:r>
+              <a:rPr lang="pt-PT" sz="1400" dirty="0"/>
+              <a:t>Filipa Pereira		PG42201</a:t>
+            </a:r>
+            <a:endParaRPr sz="1400" dirty="0"/>
+          </a:p>
+          <a:p>
+            <a:pPr marL="0" lvl="0" indent="0" rtl="0">
               <a:spcBef>
                 <a:spcPts val="0"/>
               </a:spcBef>
@@ -7210,37 +7434,39 @@
               <a:buNone/>
             </a:pPr>
             <a:r>
-              <a:rPr lang="pt-PT" sz="1400"/>
-              <a:t>Rui Rodrigues			PG 7942</a:t>
+              <a:rPr lang="pt-PT" sz="1400" dirty="0"/>
+              <a:t>Rui Rodrigues		PG 7942</a:t>
             </a:r>
-            <a:endParaRPr sz="1400"/>
+            <a:endParaRPr sz="1400" dirty="0"/>
           </a:p>
         </p:txBody>
       </p:sp>
       <p:sp>
         <p:nvSpPr>
           <p:cNvPr id="56" name="Google Shape;56;p13"/>
-          <p:cNvSpPr txBox="1"/>
+          <p:cNvSpPr txBox="1">
+            <a:spLocks noGrp="1"/>
+          </p:cNvSpPr>
           <p:nvPr>
-            <p:ph idx="1" type="subTitle"/>
+            <p:ph type="subTitle" idx="1"/>
           </p:nvPr>
         </p:nvSpPr>
         <p:spPr>
           <a:xfrm>
-            <a:off x="3679700" y="4390375"/>
-            <a:ext cx="5304900" cy="363300"/>
+            <a:off x="0" y="4390375"/>
+            <a:ext cx="9144000" cy="363300"/>
           </a:xfrm>
           <a:prstGeom prst="rect">
             <a:avLst/>
           </a:prstGeom>
         </p:spPr>
         <p:txBody>
-          <a:bodyPr anchorCtr="0" anchor="t" bIns="91425" lIns="91425" spcFirstLastPara="1" rIns="91425" wrap="square" tIns="91425">
-            <a:normAutofit lnSpcReduction="20000"/>
+          <a:bodyPr spcFirstLastPara="1" wrap="square" lIns="91425" tIns="91425" rIns="91425" bIns="91425" anchor="t" anchorCtr="0">
+            <a:normAutofit fontScale="92500" lnSpcReduction="10000"/>
           </a:bodyPr>
           <a:lstStyle/>
           <a:p>
-            <a:pPr indent="0" lvl="0" marL="0" rtl="0" algn="ctr">
+            <a:pPr marL="0" lvl="0" indent="0" algn="ctr" rtl="0">
               <a:spcBef>
                 <a:spcPts val="0"/>
               </a:spcBef>
@@ -7250,37 +7476,39 @@
               <a:buNone/>
             </a:pPr>
             <a:r>
-              <a:rPr lang="pt-PT" sz="1400"/>
-              <a:t>Universidade do Minho | Maio 2026</a:t>
+              <a:rPr lang="pt-PT" sz="1400" dirty="0"/>
+              <a:t>Universidade do Minho | Junho 2026</a:t>
             </a:r>
-            <a:endParaRPr sz="1400"/>
+            <a:endParaRPr sz="1400" dirty="0"/>
           </a:p>
         </p:txBody>
       </p:sp>
       <p:sp>
         <p:nvSpPr>
           <p:cNvPr id="57" name="Google Shape;57;p13"/>
-          <p:cNvSpPr txBox="1"/>
+          <p:cNvSpPr txBox="1">
+            <a:spLocks noGrp="1"/>
+          </p:cNvSpPr>
           <p:nvPr>
-            <p:ph idx="1" type="subTitle"/>
+            <p:ph type="subTitle" idx="1"/>
           </p:nvPr>
         </p:nvSpPr>
         <p:spPr>
           <a:xfrm>
-            <a:off x="3679700" y="2922550"/>
-            <a:ext cx="5304900" cy="363300"/>
+            <a:off x="-1" y="2922550"/>
+            <a:ext cx="9143999" cy="363300"/>
           </a:xfrm>
           <a:prstGeom prst="rect">
             <a:avLst/>
           </a:prstGeom>
         </p:spPr>
         <p:txBody>
-          <a:bodyPr anchorCtr="0" anchor="t" bIns="91425" lIns="91425" spcFirstLastPara="1" rIns="91425" wrap="square" tIns="91425">
-            <a:normAutofit lnSpcReduction="20000"/>
+          <a:bodyPr spcFirstLastPara="1" wrap="square" lIns="91425" tIns="91425" rIns="91425" bIns="91425" anchor="t" anchorCtr="0">
+            <a:normAutofit fontScale="92500" lnSpcReduction="10000"/>
           </a:bodyPr>
           <a:lstStyle/>
           <a:p>
-            <a:pPr indent="0" lvl="0" marL="0" rtl="0" algn="l">
+            <a:pPr marL="0" lvl="0" indent="0" rtl="0">
               <a:spcBef>
                 <a:spcPts val="0"/>
               </a:spcBef>
@@ -7290,10 +7518,10 @@
               <a:buNone/>
             </a:pPr>
             <a:r>
-              <a:rPr lang="pt-PT" sz="1400"/>
+              <a:rPr lang="pt-PT" sz="1400" dirty="0"/>
               <a:t>Mestrado em Inteligência Artificial</a:t>
             </a:r>
-            <a:endParaRPr sz="1400"/>
+            <a:endParaRPr sz="1400" dirty="0"/>
           </a:p>
         </p:txBody>
       </p:sp>
@@ -7313,8 +7541,8 @@
         </p:blipFill>
         <p:spPr>
           <a:xfrm>
-            <a:off x="656227" y="2797175"/>
-            <a:ext cx="2316275" cy="2312200"/>
+            <a:off x="166219" y="141181"/>
+            <a:ext cx="1283409" cy="1359188"/>
           </a:xfrm>
           <a:prstGeom prst="rect">
             <a:avLst/>
@@ -7334,11 +7562,11 @@
 </file>
 
 <file path=ppt/slides/slide10.xml><?xml version="1.0" encoding="utf-8"?>
-<p:sld xmlns:a="http://schemas.openxmlformats.org/drawingml/2006/main" xmlns:r="http://schemas.openxmlformats.org/officeDocument/2006/relationships" xmlns:mc="http://schemas.openxmlformats.org/markup-compatibility/2006" xmlns:mv="urn:schemas-microsoft-com:mac:vml" xmlns:p="http://schemas.openxmlformats.org/presentationml/2006/main" xmlns:c="http://schemas.openxmlformats.org/drawingml/2006/chart" xmlns:dgm="http://schemas.openxmlformats.org/drawingml/2006/diagram" xmlns:o="urn:schemas-microsoft-com:office:office" xmlns:v="urn:schemas-microsoft-com:vml" xmlns:pvml="urn:schemas-microsoft-com:office:powerpoint" xmlns:com="http://schemas.openxmlformats.org/drawingml/2006/compatibility" xmlns:p14="http://schemas.microsoft.com/office/powerpoint/2010/main" xmlns:p15="http://schemas.microsoft.com/office/powerpoint/2012/main" xmlns:ahyp="http://schemas.microsoft.com/office/drawing/2018/hyperlinkcolor">
+<p:sld xmlns:a="http://schemas.openxmlformats.org/drawingml/2006/main" xmlns:r="http://schemas.openxmlformats.org/officeDocument/2006/relationships" xmlns:p="http://schemas.openxmlformats.org/presentationml/2006/main">
   <p:cSld>
     <p:spTree>
       <p:nvGrpSpPr>
-        <p:cNvPr id="119" name="Shape 119"/>
+        <p:cNvPr id="1" name="Shape 119"/>
         <p:cNvGrpSpPr/>
         <p:nvPr/>
       </p:nvGrpSpPr>
@@ -7353,7 +7581,9 @@
       <p:sp>
         <p:nvSpPr>
           <p:cNvPr id="120" name="Google Shape;120;p22"/>
-          <p:cNvSpPr txBox="1"/>
+          <p:cNvSpPr txBox="1">
+            <a:spLocks noGrp="1"/>
+          </p:cNvSpPr>
           <p:nvPr>
             <p:ph type="title"/>
           </p:nvPr>
@@ -7368,12 +7598,12 @@
           </a:prstGeom>
         </p:spPr>
         <p:txBody>
-          <a:bodyPr anchorCtr="0" anchor="t" bIns="91425" lIns="91425" spcFirstLastPara="1" rIns="91425" wrap="square" tIns="91425">
+          <a:bodyPr spcFirstLastPara="1" wrap="square" lIns="91425" tIns="91425" rIns="91425" bIns="91425" anchor="t" anchorCtr="0">
             <a:normAutofit fontScale="90000"/>
           </a:bodyPr>
           <a:lstStyle/>
           <a:p>
-            <a:pPr indent="0" lvl="0" marL="0" rtl="0" algn="l">
+            <a:pPr marL="0" lvl="0" indent="0" algn="l" rtl="0">
               <a:spcBef>
                 <a:spcPts val="0"/>
               </a:spcBef>
@@ -7427,11 +7657,11 @@
 </file>
 
 <file path=ppt/slides/slide11.xml><?xml version="1.0" encoding="utf-8"?>
-<p:sld xmlns:a="http://schemas.openxmlformats.org/drawingml/2006/main" xmlns:r="http://schemas.openxmlformats.org/officeDocument/2006/relationships" xmlns:mc="http://schemas.openxmlformats.org/markup-compatibility/2006" xmlns:mv="urn:schemas-microsoft-com:mac:vml" xmlns:p="http://schemas.openxmlformats.org/presentationml/2006/main" xmlns:c="http://schemas.openxmlformats.org/drawingml/2006/chart" xmlns:dgm="http://schemas.openxmlformats.org/drawingml/2006/diagram" xmlns:o="urn:schemas-microsoft-com:office:office" xmlns:v="urn:schemas-microsoft-com:vml" xmlns:pvml="urn:schemas-microsoft-com:office:powerpoint" xmlns:com="http://schemas.openxmlformats.org/drawingml/2006/compatibility" xmlns:p14="http://schemas.microsoft.com/office/powerpoint/2010/main" xmlns:p15="http://schemas.microsoft.com/office/powerpoint/2012/main" xmlns:ahyp="http://schemas.microsoft.com/office/drawing/2018/hyperlinkcolor">
+<p:sld xmlns:a="http://schemas.openxmlformats.org/drawingml/2006/main" xmlns:r="http://schemas.openxmlformats.org/officeDocument/2006/relationships" xmlns:p="http://schemas.openxmlformats.org/presentationml/2006/main">
   <p:cSld>
     <p:spTree>
       <p:nvGrpSpPr>
-        <p:cNvPr id="125" name="Shape 125"/>
+        <p:cNvPr id="1" name="Shape 125"/>
         <p:cNvGrpSpPr/>
         <p:nvPr/>
       </p:nvGrpSpPr>
@@ -7446,7 +7676,9 @@
       <p:sp>
         <p:nvSpPr>
           <p:cNvPr id="126" name="Google Shape;126;p23"/>
-          <p:cNvSpPr txBox="1"/>
+          <p:cNvSpPr txBox="1">
+            <a:spLocks noGrp="1"/>
+          </p:cNvSpPr>
           <p:nvPr>
             <p:ph type="title"/>
           </p:nvPr>
@@ -7461,12 +7693,12 @@
           </a:prstGeom>
         </p:spPr>
         <p:txBody>
-          <a:bodyPr anchorCtr="0" anchor="t" bIns="91425" lIns="91425" spcFirstLastPara="1" rIns="91425" wrap="square" tIns="91425">
+          <a:bodyPr spcFirstLastPara="1" wrap="square" lIns="91425" tIns="91425" rIns="91425" bIns="91425" anchor="t" anchorCtr="0">
             <a:normAutofit fontScale="90000"/>
           </a:bodyPr>
           <a:lstStyle/>
           <a:p>
-            <a:pPr indent="0" lvl="0" marL="0" rtl="0" algn="l">
+            <a:pPr marL="0" lvl="0" indent="0" algn="l" rtl="0">
               <a:spcBef>
                 <a:spcPts val="0"/>
               </a:spcBef>
@@ -7520,11 +7752,11 @@
 </file>
 
 <file path=ppt/slides/slide12.xml><?xml version="1.0" encoding="utf-8"?>
-<p:sld xmlns:a="http://schemas.openxmlformats.org/drawingml/2006/main" xmlns:r="http://schemas.openxmlformats.org/officeDocument/2006/relationships" xmlns:mc="http://schemas.openxmlformats.org/markup-compatibility/2006" xmlns:mv="urn:schemas-microsoft-com:mac:vml" xmlns:p="http://schemas.openxmlformats.org/presentationml/2006/main" xmlns:c="http://schemas.openxmlformats.org/drawingml/2006/chart" xmlns:dgm="http://schemas.openxmlformats.org/drawingml/2006/diagram" xmlns:o="urn:schemas-microsoft-com:office:office" xmlns:v="urn:schemas-microsoft-com:vml" xmlns:pvml="urn:schemas-microsoft-com:office:powerpoint" xmlns:com="http://schemas.openxmlformats.org/drawingml/2006/compatibility" xmlns:p14="http://schemas.microsoft.com/office/powerpoint/2010/main" xmlns:p15="http://schemas.microsoft.com/office/powerpoint/2012/main" xmlns:ahyp="http://schemas.microsoft.com/office/drawing/2018/hyperlinkcolor">
+<p:sld xmlns:a="http://schemas.openxmlformats.org/drawingml/2006/main" xmlns:r="http://schemas.openxmlformats.org/officeDocument/2006/relationships" xmlns:p="http://schemas.openxmlformats.org/presentationml/2006/main">
   <p:cSld>
     <p:spTree>
       <p:nvGrpSpPr>
-        <p:cNvPr id="131" name="Shape 131"/>
+        <p:cNvPr id="1" name="Shape 131"/>
         <p:cNvGrpSpPr/>
         <p:nvPr/>
       </p:nvGrpSpPr>
@@ -7539,7 +7771,9 @@
       <p:sp>
         <p:nvSpPr>
           <p:cNvPr id="132" name="Google Shape;132;p24"/>
-          <p:cNvSpPr txBox="1"/>
+          <p:cNvSpPr txBox="1">
+            <a:spLocks noGrp="1"/>
+          </p:cNvSpPr>
           <p:nvPr>
             <p:ph type="title"/>
           </p:nvPr>
@@ -7554,12 +7788,12 @@
           </a:prstGeom>
         </p:spPr>
         <p:txBody>
-          <a:bodyPr anchorCtr="0" anchor="t" bIns="91425" lIns="91425" spcFirstLastPara="1" rIns="91425" wrap="square" tIns="91425">
+          <a:bodyPr spcFirstLastPara="1" wrap="square" lIns="91425" tIns="91425" rIns="91425" bIns="91425" anchor="t" anchorCtr="0">
             <a:normAutofit fontScale="90000"/>
           </a:bodyPr>
           <a:lstStyle/>
           <a:p>
-            <a:pPr indent="0" lvl="0" marL="0" rtl="0" algn="l">
+            <a:pPr marL="0" lvl="0" indent="0" algn="l" rtl="0">
               <a:spcBef>
                 <a:spcPts val="0"/>
               </a:spcBef>
@@ -7613,11 +7847,11 @@
 </file>
 
 <file path=ppt/slides/slide13.xml><?xml version="1.0" encoding="utf-8"?>
-<p:sld xmlns:a="http://schemas.openxmlformats.org/drawingml/2006/main" xmlns:r="http://schemas.openxmlformats.org/officeDocument/2006/relationships" xmlns:mc="http://schemas.openxmlformats.org/markup-compatibility/2006" xmlns:mv="urn:schemas-microsoft-com:mac:vml" xmlns:p="http://schemas.openxmlformats.org/presentationml/2006/main" xmlns:c="http://schemas.openxmlformats.org/drawingml/2006/chart" xmlns:dgm="http://schemas.openxmlformats.org/drawingml/2006/diagram" xmlns:o="urn:schemas-microsoft-com:office:office" xmlns:v="urn:schemas-microsoft-com:vml" xmlns:pvml="urn:schemas-microsoft-com:office:powerpoint" xmlns:com="http://schemas.openxmlformats.org/drawingml/2006/compatibility" xmlns:p14="http://schemas.microsoft.com/office/powerpoint/2010/main" xmlns:p15="http://schemas.microsoft.com/office/powerpoint/2012/main" xmlns:ahyp="http://schemas.microsoft.com/office/drawing/2018/hyperlinkcolor">
+<p:sld xmlns:a="http://schemas.openxmlformats.org/drawingml/2006/main" xmlns:r="http://schemas.openxmlformats.org/officeDocument/2006/relationships" xmlns:p="http://schemas.openxmlformats.org/presentationml/2006/main">
   <p:cSld>
     <p:spTree>
       <p:nvGrpSpPr>
-        <p:cNvPr id="137" name="Shape 137"/>
+        <p:cNvPr id="1" name="Shape 137"/>
         <p:cNvGrpSpPr/>
         <p:nvPr/>
       </p:nvGrpSpPr>
@@ -7632,7 +7866,9 @@
       <p:sp>
         <p:nvSpPr>
           <p:cNvPr id="138" name="Google Shape;138;p25"/>
-          <p:cNvSpPr txBox="1"/>
+          <p:cNvSpPr txBox="1">
+            <a:spLocks noGrp="1"/>
+          </p:cNvSpPr>
           <p:nvPr>
             <p:ph type="title"/>
           </p:nvPr>
@@ -7647,12 +7883,12 @@
           </a:prstGeom>
         </p:spPr>
         <p:txBody>
-          <a:bodyPr anchorCtr="0" anchor="t" bIns="91425" lIns="91425" spcFirstLastPara="1" rIns="91425" wrap="square" tIns="91425">
+          <a:bodyPr spcFirstLastPara="1" wrap="square" lIns="91425" tIns="91425" rIns="91425" bIns="91425" anchor="t" anchorCtr="0">
             <a:normAutofit fontScale="90000"/>
           </a:bodyPr>
           <a:lstStyle/>
           <a:p>
-            <a:pPr indent="0" lvl="0" marL="0" rtl="0" algn="l">
+            <a:pPr marL="0" lvl="0" indent="0" algn="l" rtl="0">
               <a:spcBef>
                 <a:spcPts val="0"/>
               </a:spcBef>
@@ -7706,11 +7942,11 @@
 </file>
 
 <file path=ppt/slides/slide14.xml><?xml version="1.0" encoding="utf-8"?>
-<p:sld xmlns:a="http://schemas.openxmlformats.org/drawingml/2006/main" xmlns:r="http://schemas.openxmlformats.org/officeDocument/2006/relationships" xmlns:mc="http://schemas.openxmlformats.org/markup-compatibility/2006" xmlns:mv="urn:schemas-microsoft-com:mac:vml" xmlns:p="http://schemas.openxmlformats.org/presentationml/2006/main" xmlns:c="http://schemas.openxmlformats.org/drawingml/2006/chart" xmlns:dgm="http://schemas.openxmlformats.org/drawingml/2006/diagram" xmlns:o="urn:schemas-microsoft-com:office:office" xmlns:v="urn:schemas-microsoft-com:vml" xmlns:pvml="urn:schemas-microsoft-com:office:powerpoint" xmlns:com="http://schemas.openxmlformats.org/drawingml/2006/compatibility" xmlns:p14="http://schemas.microsoft.com/office/powerpoint/2010/main" xmlns:p15="http://schemas.microsoft.com/office/powerpoint/2012/main" xmlns:ahyp="http://schemas.microsoft.com/office/drawing/2018/hyperlinkcolor">
+<p:sld xmlns:a="http://schemas.openxmlformats.org/drawingml/2006/main" xmlns:r="http://schemas.openxmlformats.org/officeDocument/2006/relationships" xmlns:p="http://schemas.openxmlformats.org/presentationml/2006/main">
   <p:cSld>
     <p:spTree>
       <p:nvGrpSpPr>
-        <p:cNvPr id="143" name="Shape 143"/>
+        <p:cNvPr id="1" name="Shape 143"/>
         <p:cNvGrpSpPr/>
         <p:nvPr/>
       </p:nvGrpSpPr>
@@ -7725,7 +7961,9 @@
       <p:sp>
         <p:nvSpPr>
           <p:cNvPr id="144" name="Google Shape;144;p26"/>
-          <p:cNvSpPr txBox="1"/>
+          <p:cNvSpPr txBox="1">
+            <a:spLocks noGrp="1"/>
+          </p:cNvSpPr>
           <p:nvPr>
             <p:ph type="title"/>
           </p:nvPr>
@@ -7740,12 +7978,12 @@
           </a:prstGeom>
         </p:spPr>
         <p:txBody>
-          <a:bodyPr anchorCtr="0" anchor="t" bIns="91425" lIns="91425" spcFirstLastPara="1" rIns="91425" wrap="square" tIns="91425">
+          <a:bodyPr spcFirstLastPara="1" wrap="square" lIns="91425" tIns="91425" rIns="91425" bIns="91425" anchor="t" anchorCtr="0">
             <a:normAutofit fontScale="90000"/>
           </a:bodyPr>
           <a:lstStyle/>
           <a:p>
-            <a:pPr indent="0" lvl="0" marL="0" rtl="0" algn="l">
+            <a:pPr marL="0" lvl="0" indent="0" algn="l" rtl="0">
               <a:spcBef>
                 <a:spcPts val="0"/>
               </a:spcBef>
@@ -7799,11 +8037,11 @@
 </file>
 
 <file path=ppt/slides/slide15.xml><?xml version="1.0" encoding="utf-8"?>
-<p:sld xmlns:a="http://schemas.openxmlformats.org/drawingml/2006/main" xmlns:r="http://schemas.openxmlformats.org/officeDocument/2006/relationships" xmlns:mc="http://schemas.openxmlformats.org/markup-compatibility/2006" xmlns:mv="urn:schemas-microsoft-com:mac:vml" xmlns:p="http://schemas.openxmlformats.org/presentationml/2006/main" xmlns:c="http://schemas.openxmlformats.org/drawingml/2006/chart" xmlns:dgm="http://schemas.openxmlformats.org/drawingml/2006/diagram" xmlns:o="urn:schemas-microsoft-com:office:office" xmlns:v="urn:schemas-microsoft-com:vml" xmlns:pvml="urn:schemas-microsoft-com:office:powerpoint" xmlns:com="http://schemas.openxmlformats.org/drawingml/2006/compatibility" xmlns:p14="http://schemas.microsoft.com/office/powerpoint/2010/main" xmlns:p15="http://schemas.microsoft.com/office/powerpoint/2012/main" xmlns:ahyp="http://schemas.microsoft.com/office/drawing/2018/hyperlinkcolor">
+<p:sld xmlns:a="http://schemas.openxmlformats.org/drawingml/2006/main" xmlns:r="http://schemas.openxmlformats.org/officeDocument/2006/relationships" xmlns:p="http://schemas.openxmlformats.org/presentationml/2006/main">
   <p:cSld>
     <p:spTree>
       <p:nvGrpSpPr>
-        <p:cNvPr id="149" name="Shape 149"/>
+        <p:cNvPr id="1" name="Shape 149"/>
         <p:cNvGrpSpPr/>
         <p:nvPr/>
       </p:nvGrpSpPr>
@@ -7818,7 +8056,9 @@
       <p:sp>
         <p:nvSpPr>
           <p:cNvPr id="150" name="Google Shape;150;p27"/>
-          <p:cNvSpPr txBox="1"/>
+          <p:cNvSpPr txBox="1">
+            <a:spLocks noGrp="1"/>
+          </p:cNvSpPr>
           <p:nvPr>
             <p:ph type="title"/>
           </p:nvPr>
@@ -7833,12 +8073,12 @@
           </a:prstGeom>
         </p:spPr>
         <p:txBody>
-          <a:bodyPr anchorCtr="0" anchor="t" bIns="91425" lIns="91425" spcFirstLastPara="1" rIns="91425" wrap="square" tIns="91425">
+          <a:bodyPr spcFirstLastPara="1" wrap="square" lIns="91425" tIns="91425" rIns="91425" bIns="91425" anchor="t" anchorCtr="0">
             <a:normAutofit fontScale="90000"/>
           </a:bodyPr>
           <a:lstStyle/>
           <a:p>
-            <a:pPr indent="0" lvl="0" marL="0" rtl="0" algn="l">
+            <a:pPr marL="0" lvl="0" indent="0" algn="l" rtl="0">
               <a:spcBef>
                 <a:spcPts val="0"/>
               </a:spcBef>
@@ -7892,11 +8132,11 @@
 </file>
 
 <file path=ppt/slides/slide16.xml><?xml version="1.0" encoding="utf-8"?>
-<p:sld xmlns:a="http://schemas.openxmlformats.org/drawingml/2006/main" xmlns:r="http://schemas.openxmlformats.org/officeDocument/2006/relationships" xmlns:mc="http://schemas.openxmlformats.org/markup-compatibility/2006" xmlns:mv="urn:schemas-microsoft-com:mac:vml" xmlns:p="http://schemas.openxmlformats.org/presentationml/2006/main" xmlns:c="http://schemas.openxmlformats.org/drawingml/2006/chart" xmlns:dgm="http://schemas.openxmlformats.org/drawingml/2006/diagram" xmlns:o="urn:schemas-microsoft-com:office:office" xmlns:v="urn:schemas-microsoft-com:vml" xmlns:pvml="urn:schemas-microsoft-com:office:powerpoint" xmlns:com="http://schemas.openxmlformats.org/drawingml/2006/compatibility" xmlns:p14="http://schemas.microsoft.com/office/powerpoint/2010/main" xmlns:p15="http://schemas.microsoft.com/office/powerpoint/2012/main" xmlns:ahyp="http://schemas.microsoft.com/office/drawing/2018/hyperlinkcolor">
+<p:sld xmlns:a="http://schemas.openxmlformats.org/drawingml/2006/main" xmlns:r="http://schemas.openxmlformats.org/officeDocument/2006/relationships" xmlns:p="http://schemas.openxmlformats.org/presentationml/2006/main">
   <p:cSld>
     <p:spTree>
       <p:nvGrpSpPr>
-        <p:cNvPr id="155" name="Shape 155"/>
+        <p:cNvPr id="1" name="Shape 155"/>
         <p:cNvGrpSpPr/>
         <p:nvPr/>
       </p:nvGrpSpPr>
@@ -7911,7 +8151,9 @@
       <p:sp>
         <p:nvSpPr>
           <p:cNvPr id="156" name="Google Shape;156;p28"/>
-          <p:cNvSpPr txBox="1"/>
+          <p:cNvSpPr txBox="1">
+            <a:spLocks noGrp="1"/>
+          </p:cNvSpPr>
           <p:nvPr>
             <p:ph type="title"/>
           </p:nvPr>
@@ -7926,12 +8168,12 @@
           </a:prstGeom>
         </p:spPr>
         <p:txBody>
-          <a:bodyPr anchorCtr="0" anchor="t" bIns="91425" lIns="91425" spcFirstLastPara="1" rIns="91425" wrap="square" tIns="91425">
+          <a:bodyPr spcFirstLastPara="1" wrap="square" lIns="91425" tIns="91425" rIns="91425" bIns="91425" anchor="t" anchorCtr="0">
             <a:normAutofit fontScale="90000"/>
           </a:bodyPr>
           <a:lstStyle/>
           <a:p>
-            <a:pPr indent="0" lvl="0" marL="0" rtl="0" algn="l">
+            <a:pPr marL="0" lvl="0" indent="0" algn="l" rtl="0">
               <a:spcBef>
                 <a:spcPts val="0"/>
               </a:spcBef>
@@ -7985,11 +8227,11 @@
 </file>
 
 <file path=ppt/slides/slide17.xml><?xml version="1.0" encoding="utf-8"?>
-<p:sld xmlns:a="http://schemas.openxmlformats.org/drawingml/2006/main" xmlns:r="http://schemas.openxmlformats.org/officeDocument/2006/relationships" xmlns:mc="http://schemas.openxmlformats.org/markup-compatibility/2006" xmlns:mv="urn:schemas-microsoft-com:mac:vml" xmlns:p="http://schemas.openxmlformats.org/presentationml/2006/main" xmlns:c="http://schemas.openxmlformats.org/drawingml/2006/chart" xmlns:dgm="http://schemas.openxmlformats.org/drawingml/2006/diagram" xmlns:o="urn:schemas-microsoft-com:office:office" xmlns:v="urn:schemas-microsoft-com:vml" xmlns:pvml="urn:schemas-microsoft-com:office:powerpoint" xmlns:com="http://schemas.openxmlformats.org/drawingml/2006/compatibility" xmlns:p14="http://schemas.microsoft.com/office/powerpoint/2010/main" xmlns:p15="http://schemas.microsoft.com/office/powerpoint/2012/main" xmlns:ahyp="http://schemas.microsoft.com/office/drawing/2018/hyperlinkcolor">
+<p:sld xmlns:a="http://schemas.openxmlformats.org/drawingml/2006/main" xmlns:r="http://schemas.openxmlformats.org/officeDocument/2006/relationships" xmlns:p="http://schemas.openxmlformats.org/presentationml/2006/main">
   <p:cSld>
     <p:spTree>
       <p:nvGrpSpPr>
-        <p:cNvPr id="161" name="Shape 161"/>
+        <p:cNvPr id="1" name="Shape 161"/>
         <p:cNvGrpSpPr/>
         <p:nvPr/>
       </p:nvGrpSpPr>
@@ -8004,7 +8246,9 @@
       <p:sp>
         <p:nvSpPr>
           <p:cNvPr id="162" name="Google Shape;162;p29"/>
-          <p:cNvSpPr txBox="1"/>
+          <p:cNvSpPr txBox="1">
+            <a:spLocks noGrp="1"/>
+          </p:cNvSpPr>
           <p:nvPr>
             <p:ph type="title"/>
           </p:nvPr>
@@ -8019,12 +8263,12 @@
           </a:prstGeom>
         </p:spPr>
         <p:txBody>
-          <a:bodyPr anchorCtr="0" anchor="t" bIns="91425" lIns="91425" spcFirstLastPara="1" rIns="91425" wrap="square" tIns="91425">
+          <a:bodyPr spcFirstLastPara="1" wrap="square" lIns="91425" tIns="91425" rIns="91425" bIns="91425" anchor="t" anchorCtr="0">
             <a:normAutofit fontScale="90000"/>
           </a:bodyPr>
           <a:lstStyle/>
           <a:p>
-            <a:pPr indent="0" lvl="0" marL="0" rtl="0" algn="l">
+            <a:pPr marL="0" lvl="0" indent="0" algn="l" rtl="0">
               <a:spcBef>
                 <a:spcPts val="0"/>
               </a:spcBef>
@@ -8078,11 +8322,11 @@
 </file>
 
 <file path=ppt/slides/slide2.xml><?xml version="1.0" encoding="utf-8"?>
-<p:sld xmlns:a="http://schemas.openxmlformats.org/drawingml/2006/main" xmlns:r="http://schemas.openxmlformats.org/officeDocument/2006/relationships" xmlns:mc="http://schemas.openxmlformats.org/markup-compatibility/2006" xmlns:mv="urn:schemas-microsoft-com:mac:vml" xmlns:p="http://schemas.openxmlformats.org/presentationml/2006/main" xmlns:c="http://schemas.openxmlformats.org/drawingml/2006/chart" xmlns:dgm="http://schemas.openxmlformats.org/drawingml/2006/diagram" xmlns:o="urn:schemas-microsoft-com:office:office" xmlns:v="urn:schemas-microsoft-com:vml" xmlns:pvml="urn:schemas-microsoft-com:office:powerpoint" xmlns:com="http://schemas.openxmlformats.org/drawingml/2006/compatibility" xmlns:p14="http://schemas.microsoft.com/office/powerpoint/2010/main" xmlns:p15="http://schemas.microsoft.com/office/powerpoint/2012/main" xmlns:ahyp="http://schemas.microsoft.com/office/drawing/2018/hyperlinkcolor">
+<p:sld xmlns:a="http://schemas.openxmlformats.org/drawingml/2006/main" xmlns:r="http://schemas.openxmlformats.org/officeDocument/2006/relationships" xmlns:p="http://schemas.openxmlformats.org/presentationml/2006/main">
   <p:cSld>
     <p:spTree>
       <p:nvGrpSpPr>
-        <p:cNvPr id="62" name="Shape 62"/>
+        <p:cNvPr id="1" name="Shape 62"/>
         <p:cNvGrpSpPr/>
         <p:nvPr/>
       </p:nvGrpSpPr>
@@ -8097,7 +8341,9 @@
       <p:sp>
         <p:nvSpPr>
           <p:cNvPr id="63" name="Google Shape;63;p14"/>
-          <p:cNvSpPr txBox="1"/>
+          <p:cNvSpPr txBox="1">
+            <a:spLocks noGrp="1"/>
+          </p:cNvSpPr>
           <p:nvPr>
             <p:ph type="title"/>
           </p:nvPr>
@@ -8112,12 +8358,12 @@
           </a:prstGeom>
         </p:spPr>
         <p:txBody>
-          <a:bodyPr anchorCtr="0" anchor="t" bIns="91425" lIns="91425" spcFirstLastPara="1" rIns="91425" wrap="square" tIns="91425">
+          <a:bodyPr spcFirstLastPara="1" wrap="square" lIns="91425" tIns="91425" rIns="91425" bIns="91425" anchor="t" anchorCtr="0">
             <a:normAutofit fontScale="90000"/>
           </a:bodyPr>
           <a:lstStyle/>
           <a:p>
-            <a:pPr indent="0" lvl="0" marL="0" rtl="0" algn="l">
+            <a:pPr marL="0" lvl="0" indent="0" algn="l" rtl="0">
               <a:spcBef>
                 <a:spcPts val="0"/>
               </a:spcBef>
@@ -8137,9 +8383,11 @@
       <p:sp>
         <p:nvSpPr>
           <p:cNvPr id="64" name="Google Shape;64;p14"/>
-          <p:cNvSpPr txBox="1"/>
+          <p:cNvSpPr txBox="1">
+            <a:spLocks noGrp="1"/>
+          </p:cNvSpPr>
           <p:nvPr>
-            <p:ph idx="1" type="body"/>
+            <p:ph type="body" idx="1"/>
           </p:nvPr>
         </p:nvSpPr>
         <p:spPr>
@@ -8152,12 +8400,12 @@
           </a:prstGeom>
         </p:spPr>
         <p:txBody>
-          <a:bodyPr anchorCtr="0" anchor="t" bIns="91425" lIns="91425" spcFirstLastPara="1" rIns="91425" wrap="square" tIns="91425">
+          <a:bodyPr spcFirstLastPara="1" wrap="square" lIns="91425" tIns="91425" rIns="91425" bIns="91425" anchor="t" anchorCtr="0">
             <a:normAutofit/>
           </a:bodyPr>
           <a:lstStyle/>
           <a:p>
-            <a:pPr indent="0" lvl="0" marL="0" rtl="0" algn="l">
+            <a:pPr marL="0" lvl="0" indent="0" algn="l" rtl="0">
               <a:spcBef>
                 <a:spcPts val="0"/>
               </a:spcBef>
@@ -8173,7 +8421,7 @@
             <a:endParaRPr/>
           </a:p>
           <a:p>
-            <a:pPr indent="0" lvl="0" marL="0" rtl="0" algn="l">
+            <a:pPr marL="0" lvl="0" indent="0" algn="l" rtl="0">
               <a:spcBef>
                 <a:spcPts val="1200"/>
               </a:spcBef>
@@ -8189,7 +8437,7 @@
             <a:endParaRPr/>
           </a:p>
           <a:p>
-            <a:pPr indent="0" lvl="0" marL="0" rtl="0" algn="l">
+            <a:pPr marL="0" lvl="0" indent="0" algn="l" rtl="0">
               <a:spcBef>
                 <a:spcPts val="1200"/>
               </a:spcBef>
@@ -8205,7 +8453,7 @@
             <a:endParaRPr/>
           </a:p>
           <a:p>
-            <a:pPr indent="0" lvl="0" marL="0" rtl="0" algn="l">
+            <a:pPr marL="0" lvl="0" indent="0" algn="l" rtl="0">
               <a:spcBef>
                 <a:spcPts val="1200"/>
               </a:spcBef>
@@ -8221,7 +8469,7 @@
             <a:endParaRPr/>
           </a:p>
           <a:p>
-            <a:pPr indent="0" lvl="0" marL="0" rtl="0" algn="l">
+            <a:pPr marL="0" lvl="0" indent="0" algn="l" rtl="0">
               <a:spcBef>
                 <a:spcPts val="1200"/>
               </a:spcBef>
@@ -8247,11 +8495,11 @@
 </file>
 
 <file path=ppt/slides/slide3.xml><?xml version="1.0" encoding="utf-8"?>
-<p:sld xmlns:a="http://schemas.openxmlformats.org/drawingml/2006/main" xmlns:r="http://schemas.openxmlformats.org/officeDocument/2006/relationships" xmlns:mc="http://schemas.openxmlformats.org/markup-compatibility/2006" xmlns:mv="urn:schemas-microsoft-com:mac:vml" xmlns:p="http://schemas.openxmlformats.org/presentationml/2006/main" xmlns:c="http://schemas.openxmlformats.org/drawingml/2006/chart" xmlns:dgm="http://schemas.openxmlformats.org/drawingml/2006/diagram" xmlns:o="urn:schemas-microsoft-com:office:office" xmlns:v="urn:schemas-microsoft-com:vml" xmlns:pvml="urn:schemas-microsoft-com:office:powerpoint" xmlns:com="http://schemas.openxmlformats.org/drawingml/2006/compatibility" xmlns:p14="http://schemas.microsoft.com/office/powerpoint/2010/main" xmlns:p15="http://schemas.microsoft.com/office/powerpoint/2012/main" xmlns:ahyp="http://schemas.microsoft.com/office/drawing/2018/hyperlinkcolor">
+<p:sld xmlns:a="http://schemas.openxmlformats.org/drawingml/2006/main" xmlns:r="http://schemas.openxmlformats.org/officeDocument/2006/relationships" xmlns:p="http://schemas.openxmlformats.org/presentationml/2006/main">
   <p:cSld>
     <p:spTree>
       <p:nvGrpSpPr>
-        <p:cNvPr id="68" name="Shape 68"/>
+        <p:cNvPr id="1" name="Shape 68"/>
         <p:cNvGrpSpPr/>
         <p:nvPr/>
       </p:nvGrpSpPr>
@@ -8266,7 +8514,9 @@
       <p:sp>
         <p:nvSpPr>
           <p:cNvPr id="69" name="Google Shape;69;p15"/>
-          <p:cNvSpPr txBox="1"/>
+          <p:cNvSpPr txBox="1">
+            <a:spLocks noGrp="1"/>
+          </p:cNvSpPr>
           <p:nvPr>
             <p:ph type="title"/>
           </p:nvPr>
@@ -8281,12 +8531,12 @@
           </a:prstGeom>
         </p:spPr>
         <p:txBody>
-          <a:bodyPr anchorCtr="0" anchor="t" bIns="91425" lIns="91425" spcFirstLastPara="1" rIns="91425" wrap="square" tIns="91425">
+          <a:bodyPr spcFirstLastPara="1" wrap="square" lIns="91425" tIns="91425" rIns="91425" bIns="91425" anchor="t" anchorCtr="0">
             <a:normAutofit fontScale="90000"/>
           </a:bodyPr>
           <a:lstStyle/>
           <a:p>
-            <a:pPr indent="0" lvl="0" marL="0" rtl="0" algn="l">
+            <a:pPr marL="0" lvl="0" indent="0" algn="l" rtl="0">
               <a:spcBef>
                 <a:spcPts val="0"/>
               </a:spcBef>
@@ -8297,15 +8547,7 @@
             </a:pPr>
             <a:r>
               <a:rPr lang="pt-PT"/>
-              <a:t>Tecnologia, </a:t>
-            </a:r>
-            <a:r>
-              <a:rPr lang="pt-PT"/>
-              <a:t>Metodologia </a:t>
-            </a:r>
-            <a:r>
-              <a:rPr lang="pt-PT"/>
-              <a:t>e Standards</a:t>
+              <a:t>Tecnologia, Metodologia e Standards</a:t>
             </a:r>
             <a:endParaRPr/>
           </a:p>
@@ -8314,9 +8556,11 @@
       <p:sp>
         <p:nvSpPr>
           <p:cNvPr id="70" name="Google Shape;70;p15"/>
-          <p:cNvSpPr txBox="1"/>
+          <p:cNvSpPr txBox="1">
+            <a:spLocks noGrp="1"/>
+          </p:cNvSpPr>
           <p:nvPr>
-            <p:ph idx="1" type="body"/>
+            <p:ph type="body" idx="1"/>
           </p:nvPr>
         </p:nvSpPr>
         <p:spPr>
@@ -8329,12 +8573,12 @@
           </a:prstGeom>
         </p:spPr>
         <p:txBody>
-          <a:bodyPr anchorCtr="0" anchor="t" bIns="91425" lIns="91425" spcFirstLastPara="1" rIns="91425" wrap="square" tIns="91425">
+          <a:bodyPr spcFirstLastPara="1" wrap="square" lIns="91425" tIns="91425" rIns="91425" bIns="91425" anchor="t" anchorCtr="0">
             <a:normAutofit lnSpcReduction="20000"/>
           </a:bodyPr>
           <a:lstStyle/>
           <a:p>
-            <a:pPr indent="0" lvl="0" marL="0" rtl="0" algn="l">
+            <a:pPr marL="0" lvl="0" indent="0" algn="l" rtl="0">
               <a:spcBef>
                 <a:spcPts val="0"/>
               </a:spcBef>
@@ -8350,7 +8594,7 @@
             <a:endParaRPr/>
           </a:p>
           <a:p>
-            <a:pPr indent="0" lvl="0" marL="0" rtl="0" algn="l">
+            <a:pPr marL="0" lvl="0" indent="0" algn="l" rtl="0">
               <a:spcBef>
                 <a:spcPts val="1200"/>
               </a:spcBef>
@@ -8366,7 +8610,7 @@
             <a:endParaRPr/>
           </a:p>
           <a:p>
-            <a:pPr indent="0" lvl="0" marL="0" rtl="0" algn="l">
+            <a:pPr marL="0" lvl="0" indent="0" algn="l" rtl="0">
               <a:spcBef>
                 <a:spcPts val="1200"/>
               </a:spcBef>
@@ -8382,7 +8626,7 @@
             <a:endParaRPr/>
           </a:p>
           <a:p>
-            <a:pPr indent="0" lvl="0" marL="0" rtl="0" algn="l">
+            <a:pPr marL="0" lvl="0" indent="0" algn="l" rtl="0">
               <a:spcBef>
                 <a:spcPts val="1200"/>
               </a:spcBef>
@@ -8398,7 +8642,7 @@
             <a:endParaRPr/>
           </a:p>
           <a:p>
-            <a:pPr indent="0" lvl="0" marL="0" rtl="0" algn="l">
+            <a:pPr marL="0" lvl="0" indent="0" algn="l" rtl="0">
               <a:spcBef>
                 <a:spcPts val="1200"/>
               </a:spcBef>
@@ -8414,7 +8658,7 @@
             <a:endParaRPr/>
           </a:p>
           <a:p>
-            <a:pPr indent="0" lvl="0" marL="0" rtl="0" algn="l">
+            <a:pPr marL="0" lvl="0" indent="0" algn="l" rtl="0">
               <a:spcBef>
                 <a:spcPts val="1200"/>
               </a:spcBef>
@@ -8430,7 +8674,7 @@
             <a:endParaRPr/>
           </a:p>
           <a:p>
-            <a:pPr indent="0" lvl="0" marL="0" rtl="0" algn="l">
+            <a:pPr marL="0" lvl="0" indent="0" algn="l" rtl="0">
               <a:spcBef>
                 <a:spcPts val="1200"/>
               </a:spcBef>
@@ -8446,7 +8690,7 @@
             <a:endParaRPr/>
           </a:p>
           <a:p>
-            <a:pPr indent="0" lvl="0" marL="0" rtl="0" algn="l">
+            <a:pPr marL="0" lvl="0" indent="0" algn="l" rtl="0">
               <a:spcBef>
                 <a:spcPts val="1200"/>
               </a:spcBef>
@@ -8466,9 +8710,11 @@
       <p:sp>
         <p:nvSpPr>
           <p:cNvPr id="71" name="Google Shape;71;p15"/>
-          <p:cNvSpPr txBox="1"/>
+          <p:cNvSpPr txBox="1">
+            <a:spLocks noGrp="1"/>
+          </p:cNvSpPr>
           <p:nvPr>
-            <p:ph idx="1" type="body"/>
+            <p:ph type="body" idx="1"/>
           </p:nvPr>
         </p:nvSpPr>
         <p:spPr>
@@ -8481,12 +8727,12 @@
           </a:prstGeom>
         </p:spPr>
         <p:txBody>
-          <a:bodyPr anchorCtr="0" anchor="t" bIns="91425" lIns="91425" spcFirstLastPara="1" rIns="91425" wrap="square" tIns="91425">
+          <a:bodyPr spcFirstLastPara="1" wrap="square" lIns="91425" tIns="91425" rIns="91425" bIns="91425" anchor="t" anchorCtr="0">
             <a:normAutofit/>
           </a:bodyPr>
           <a:lstStyle/>
           <a:p>
-            <a:pPr indent="0" lvl="0" marL="0" rtl="0" algn="l">
+            <a:pPr marL="0" lvl="0" indent="0" algn="l" rtl="0">
               <a:spcBef>
                 <a:spcPts val="0"/>
               </a:spcBef>
@@ -8502,7 +8748,7 @@
             <a:endParaRPr/>
           </a:p>
           <a:p>
-            <a:pPr indent="0" lvl="0" marL="0" rtl="0" algn="l">
+            <a:pPr marL="0" lvl="0" indent="0" algn="l" rtl="0">
               <a:spcBef>
                 <a:spcPts val="1200"/>
               </a:spcBef>
@@ -8518,7 +8764,7 @@
             <a:endParaRPr/>
           </a:p>
           <a:p>
-            <a:pPr indent="0" lvl="0" marL="0" rtl="0" algn="l">
+            <a:pPr marL="0" lvl="0" indent="0" algn="l" rtl="0">
               <a:spcBef>
                 <a:spcPts val="1200"/>
               </a:spcBef>
@@ -8527,13 +8773,10 @@
               </a:spcAft>
               <a:buNone/>
             </a:pPr>
-            <a:r>
-              <a:t/>
-            </a:r>
             <a:endParaRPr/>
           </a:p>
           <a:p>
-            <a:pPr indent="0" lvl="0" marL="0" rtl="0" algn="l">
+            <a:pPr marL="0" lvl="0" indent="0" algn="l" rtl="0">
               <a:spcBef>
                 <a:spcPts val="1200"/>
               </a:spcBef>
@@ -8542,13 +8785,10 @@
               </a:spcAft>
               <a:buNone/>
             </a:pPr>
-            <a:r>
-              <a:t/>
-            </a:r>
             <a:endParaRPr/>
           </a:p>
           <a:p>
-            <a:pPr indent="0" lvl="0" marL="0" rtl="0" algn="l">
+            <a:pPr marL="0" lvl="0" indent="0" algn="l" rtl="0">
               <a:spcBef>
                 <a:spcPts val="1200"/>
               </a:spcBef>
@@ -8564,7 +8804,7 @@
             <a:endParaRPr/>
           </a:p>
           <a:p>
-            <a:pPr indent="0" lvl="0" marL="0" rtl="0" algn="l">
+            <a:pPr marL="0" lvl="0" indent="0" algn="l" rtl="0">
               <a:spcBef>
                 <a:spcPts val="1200"/>
               </a:spcBef>
@@ -8580,7 +8820,7 @@
             <a:endParaRPr/>
           </a:p>
           <a:p>
-            <a:pPr indent="0" lvl="0" marL="0" rtl="0" algn="l">
+            <a:pPr marL="0" lvl="0" indent="0" algn="l" rtl="0">
               <a:spcBef>
                 <a:spcPts val="1200"/>
               </a:spcBef>
@@ -8600,9 +8840,11 @@
       <p:sp>
         <p:nvSpPr>
           <p:cNvPr id="72" name="Google Shape;72;p15"/>
-          <p:cNvSpPr txBox="1"/>
+          <p:cNvSpPr txBox="1">
+            <a:spLocks noGrp="1"/>
+          </p:cNvSpPr>
           <p:nvPr>
-            <p:ph idx="1" type="body"/>
+            <p:ph type="body" idx="1"/>
           </p:nvPr>
         </p:nvSpPr>
         <p:spPr>
@@ -8615,12 +8857,12 @@
           </a:prstGeom>
         </p:spPr>
         <p:txBody>
-          <a:bodyPr anchorCtr="0" anchor="t" bIns="91425" lIns="91425" spcFirstLastPara="1" rIns="91425" wrap="square" tIns="91425">
+          <a:bodyPr spcFirstLastPara="1" wrap="square" lIns="91425" tIns="91425" rIns="91425" bIns="91425" anchor="t" anchorCtr="0">
             <a:normAutofit lnSpcReduction="20000"/>
           </a:bodyPr>
           <a:lstStyle/>
           <a:p>
-            <a:pPr indent="0" lvl="0" marL="0" rtl="0" algn="l">
+            <a:pPr marL="0" lvl="0" indent="0" algn="l" rtl="0">
               <a:spcBef>
                 <a:spcPts val="0"/>
               </a:spcBef>
@@ -8641,7 +8883,7 @@
             <a:endParaRPr/>
           </a:p>
           <a:p>
-            <a:pPr indent="0" lvl="0" marL="0" rtl="0" algn="l">
+            <a:pPr marL="0" lvl="0" indent="0" algn="l" rtl="0">
               <a:spcBef>
                 <a:spcPts val="1200"/>
               </a:spcBef>
@@ -8662,7 +8904,7 @@
             <a:endParaRPr/>
           </a:p>
           <a:p>
-            <a:pPr indent="0" lvl="0" marL="0" rtl="0" algn="l">
+            <a:pPr marL="0" lvl="0" indent="0" algn="l" rtl="0">
               <a:spcBef>
                 <a:spcPts val="1200"/>
               </a:spcBef>
@@ -8678,7 +8920,7 @@
             <a:endParaRPr/>
           </a:p>
           <a:p>
-            <a:pPr indent="0" lvl="0" marL="0" rtl="0" algn="l">
+            <a:pPr marL="0" lvl="0" indent="0" algn="l" rtl="0">
               <a:spcBef>
                 <a:spcPts val="1200"/>
               </a:spcBef>
@@ -8694,7 +8936,7 @@
             <a:endParaRPr/>
           </a:p>
           <a:p>
-            <a:pPr indent="0" lvl="0" marL="0" rtl="0" algn="l">
+            <a:pPr marL="0" lvl="0" indent="0" algn="l" rtl="0">
               <a:spcBef>
                 <a:spcPts val="1200"/>
               </a:spcBef>
@@ -8710,7 +8952,7 @@
             <a:endParaRPr/>
           </a:p>
           <a:p>
-            <a:pPr indent="0" lvl="0" marL="0" rtl="0" algn="l">
+            <a:pPr marL="0" lvl="0" indent="0" algn="l" rtl="0">
               <a:spcBef>
                 <a:spcPts val="1200"/>
               </a:spcBef>
@@ -8731,7 +8973,7 @@
             <a:endParaRPr/>
           </a:p>
           <a:p>
-            <a:pPr indent="0" lvl="0" marL="0" rtl="0" algn="l">
+            <a:pPr marL="0" lvl="0" indent="0" algn="l" rtl="0">
               <a:spcBef>
                 <a:spcPts val="1200"/>
               </a:spcBef>
@@ -8757,7 +8999,7 @@
             <a:endParaRPr/>
           </a:p>
           <a:p>
-            <a:pPr indent="0" lvl="0" marL="0" rtl="0" algn="l">
+            <a:pPr marL="0" lvl="0" indent="0" algn="l" rtl="0">
               <a:spcBef>
                 <a:spcPts val="1200"/>
               </a:spcBef>
@@ -8788,11 +9030,11 @@
 </file>
 
 <file path=ppt/slides/slide4.xml><?xml version="1.0" encoding="utf-8"?>
-<p:sld xmlns:a="http://schemas.openxmlformats.org/drawingml/2006/main" xmlns:r="http://schemas.openxmlformats.org/officeDocument/2006/relationships" xmlns:mc="http://schemas.openxmlformats.org/markup-compatibility/2006" xmlns:mv="urn:schemas-microsoft-com:mac:vml" xmlns:p="http://schemas.openxmlformats.org/presentationml/2006/main" xmlns:c="http://schemas.openxmlformats.org/drawingml/2006/chart" xmlns:dgm="http://schemas.openxmlformats.org/drawingml/2006/diagram" xmlns:o="urn:schemas-microsoft-com:office:office" xmlns:v="urn:schemas-microsoft-com:vml" xmlns:pvml="urn:schemas-microsoft-com:office:powerpoint" xmlns:com="http://schemas.openxmlformats.org/drawingml/2006/compatibility" xmlns:p14="http://schemas.microsoft.com/office/powerpoint/2010/main" xmlns:p15="http://schemas.microsoft.com/office/powerpoint/2012/main" xmlns:ahyp="http://schemas.microsoft.com/office/drawing/2018/hyperlinkcolor">
+<p:sld xmlns:a="http://schemas.openxmlformats.org/drawingml/2006/main" xmlns:r="http://schemas.openxmlformats.org/officeDocument/2006/relationships" xmlns:p="http://schemas.openxmlformats.org/presentationml/2006/main">
   <p:cSld>
     <p:spTree>
       <p:nvGrpSpPr>
-        <p:cNvPr id="76" name="Shape 76"/>
+        <p:cNvPr id="1" name="Shape 76"/>
         <p:cNvGrpSpPr/>
         <p:nvPr/>
       </p:nvGrpSpPr>
@@ -8807,7 +9049,9 @@
       <p:sp>
         <p:nvSpPr>
           <p:cNvPr id="77" name="Google Shape;77;p16"/>
-          <p:cNvSpPr txBox="1"/>
+          <p:cNvSpPr txBox="1">
+            <a:spLocks noGrp="1"/>
+          </p:cNvSpPr>
           <p:nvPr>
             <p:ph type="title"/>
           </p:nvPr>
@@ -8822,12 +9066,12 @@
           </a:prstGeom>
         </p:spPr>
         <p:txBody>
-          <a:bodyPr anchorCtr="0" anchor="t" bIns="91425" lIns="91425" spcFirstLastPara="1" rIns="91425" wrap="square" tIns="91425">
+          <a:bodyPr spcFirstLastPara="1" wrap="square" lIns="91425" tIns="91425" rIns="91425" bIns="91425" anchor="t" anchorCtr="0">
             <a:normAutofit fontScale="90000"/>
           </a:bodyPr>
           <a:lstStyle/>
           <a:p>
-            <a:pPr indent="0" lvl="0" marL="0" rtl="0" algn="l">
+            <a:pPr marL="0" lvl="0" indent="0" algn="l" rtl="0">
               <a:spcBef>
                 <a:spcPts val="0"/>
               </a:spcBef>
@@ -8847,9 +9091,11 @@
       <p:sp>
         <p:nvSpPr>
           <p:cNvPr id="78" name="Google Shape;78;p16"/>
-          <p:cNvSpPr txBox="1"/>
+          <p:cNvSpPr txBox="1">
+            <a:spLocks noGrp="1"/>
+          </p:cNvSpPr>
           <p:nvPr>
-            <p:ph idx="1" type="body"/>
+            <p:ph type="body" idx="1"/>
           </p:nvPr>
         </p:nvSpPr>
         <p:spPr>
@@ -8862,12 +9108,12 @@
           </a:prstGeom>
         </p:spPr>
         <p:txBody>
-          <a:bodyPr anchorCtr="0" anchor="t" bIns="91425" lIns="91425" spcFirstLastPara="1" rIns="91425" wrap="square" tIns="91425">
+          <a:bodyPr spcFirstLastPara="1" wrap="square" lIns="91425" tIns="91425" rIns="91425" bIns="91425" anchor="t" anchorCtr="0">
             <a:normAutofit fontScale="77500"/>
           </a:bodyPr>
           <a:lstStyle/>
           <a:p>
-            <a:pPr indent="0" lvl="0" marL="0" rtl="0" algn="l">
+            <a:pPr marL="0" lvl="0" indent="0" algn="l" rtl="0">
               <a:spcBef>
                 <a:spcPts val="0"/>
               </a:spcBef>
@@ -8877,13 +9123,13 @@
               <a:buNone/>
             </a:pPr>
             <a:r>
-              <a:rPr b="1" lang="pt-PT" sz="2316"/>
+              <a:rPr lang="pt-PT" sz="2316" b="1"/>
               <a:t>Características</a:t>
             </a:r>
-            <a:endParaRPr b="1" sz="2316"/>
-          </a:p>
-          <a:p>
-            <a:pPr indent="0" lvl="0" marL="0" rtl="0" algn="l">
+            <a:endParaRPr sz="2316" b="1"/>
+          </a:p>
+          <a:p>
+            <a:pPr marL="0" lvl="0" indent="0" algn="l" rtl="0">
               <a:spcBef>
                 <a:spcPts val="1200"/>
               </a:spcBef>
@@ -8898,7 +9144,7 @@
               <a:buNone/>
             </a:pPr>
             <a:r>
-              <a:rPr b="1" lang="pt-PT" sz="1929"/>
+              <a:rPr lang="pt-PT" sz="1929" b="1"/>
               <a:t>Autonomia</a:t>
             </a:r>
             <a:r>
@@ -8908,7 +9154,7 @@
             <a:endParaRPr sz="1929"/>
           </a:p>
           <a:p>
-            <a:pPr indent="0" lvl="0" marL="0" rtl="0" algn="l">
+            <a:pPr marL="0" lvl="0" indent="0" algn="l" rtl="0">
               <a:spcBef>
                 <a:spcPts val="1200"/>
               </a:spcBef>
@@ -8923,7 +9169,7 @@
               <a:buNone/>
             </a:pPr>
             <a:r>
-              <a:rPr b="1" lang="pt-PT" sz="1929"/>
+              <a:rPr lang="pt-PT" sz="1929" b="1"/>
               <a:t>Reatividade</a:t>
             </a:r>
             <a:r>
@@ -8933,7 +9179,7 @@
             <a:endParaRPr sz="1929"/>
           </a:p>
           <a:p>
-            <a:pPr indent="0" lvl="0" marL="0" rtl="0" algn="l">
+            <a:pPr marL="0" lvl="0" indent="0" algn="l" rtl="0">
               <a:spcBef>
                 <a:spcPts val="1200"/>
               </a:spcBef>
@@ -8948,7 +9194,7 @@
               <a:buNone/>
             </a:pPr>
             <a:r>
-              <a:rPr b="1" lang="pt-PT" sz="1929"/>
+              <a:rPr lang="pt-PT" sz="1929" b="1"/>
               <a:t>Proatividade</a:t>
             </a:r>
             <a:r>
@@ -8958,7 +9204,7 @@
             <a:endParaRPr sz="1929"/>
           </a:p>
           <a:p>
-            <a:pPr indent="0" lvl="0" marL="0" rtl="0" algn="l">
+            <a:pPr marL="0" lvl="0" indent="0" algn="l" rtl="0">
               <a:spcBef>
                 <a:spcPts val="1200"/>
               </a:spcBef>
@@ -8973,7 +9219,7 @@
               <a:buNone/>
             </a:pPr>
             <a:r>
-              <a:rPr b="1" lang="pt-PT" sz="1929"/>
+              <a:rPr lang="pt-PT" sz="1929" b="1"/>
               <a:t>Capacidade social</a:t>
             </a:r>
             <a:r>
@@ -8983,7 +9229,7 @@
             <a:endParaRPr sz="1929"/>
           </a:p>
           <a:p>
-            <a:pPr indent="0" lvl="0" marL="0" rtl="0" algn="l">
+            <a:pPr marL="0" lvl="0" indent="0" algn="l" rtl="0">
               <a:spcBef>
                 <a:spcPts val="1200"/>
               </a:spcBef>
@@ -8998,25 +9244,17 @@
               <a:buNone/>
             </a:pPr>
             <a:r>
-              <a:rPr b="1" lang="pt-PT" sz="1929"/>
+              <a:rPr lang="pt-PT" sz="1929" b="1"/>
               <a:t>Racionalidade</a:t>
             </a:r>
             <a:r>
               <a:rPr lang="pt-PT" sz="1929"/>
-              <a:t>: escolhe ações que maximizam a probab</a:t>
-            </a:r>
-            <a:r>
-              <a:rPr lang="pt-PT" sz="1929"/>
-              <a:t>ilidade</a:t>
-            </a:r>
-            <a:r>
-              <a:rPr lang="pt-PT" sz="1929"/>
-              <a:t> de atingir os seus objetivos</a:t>
+              <a:t>: escolhe ações que maximizam a probabilidade de atingir os seus objetivos</a:t>
             </a:r>
             <a:endParaRPr sz="1929"/>
           </a:p>
           <a:p>
-            <a:pPr indent="0" lvl="0" marL="0" rtl="0" algn="l">
+            <a:pPr marL="0" lvl="0" indent="0" algn="l" rtl="0">
               <a:spcBef>
                 <a:spcPts val="1200"/>
               </a:spcBef>
@@ -9031,7 +9269,7 @@
               <a:buNone/>
             </a:pPr>
             <a:r>
-              <a:rPr b="1" lang="pt-PT" sz="1929"/>
+              <a:rPr lang="pt-PT" sz="1929" b="1"/>
               <a:t>Persistência</a:t>
             </a:r>
             <a:r>
@@ -9041,7 +9279,7 @@
             <a:endParaRPr sz="1929"/>
           </a:p>
           <a:p>
-            <a:pPr indent="0" lvl="0" marL="0" rtl="0" algn="l">
+            <a:pPr marL="0" lvl="0" indent="0" algn="l" rtl="0">
               <a:spcBef>
                 <a:spcPts val="1200"/>
               </a:spcBef>
@@ -9051,7 +9289,7 @@
               <a:buNone/>
             </a:pPr>
             <a:r>
-              <a:rPr b="1" lang="pt-PT" sz="1929"/>
+              <a:rPr lang="pt-PT" sz="1929" b="1"/>
               <a:t>Adaptabilidade</a:t>
             </a:r>
             <a:r>
@@ -9065,9 +9303,11 @@
       <p:sp>
         <p:nvSpPr>
           <p:cNvPr id="79" name="Google Shape;79;p16"/>
-          <p:cNvSpPr txBox="1"/>
+          <p:cNvSpPr txBox="1">
+            <a:spLocks noGrp="1"/>
+          </p:cNvSpPr>
           <p:nvPr>
-            <p:ph idx="1" type="body"/>
+            <p:ph type="body" idx="1"/>
           </p:nvPr>
         </p:nvSpPr>
         <p:spPr>
@@ -9080,12 +9320,12 @@
           </a:prstGeom>
         </p:spPr>
         <p:txBody>
-          <a:bodyPr anchorCtr="0" anchor="t" bIns="91425" lIns="91425" spcFirstLastPara="1" rIns="91425" wrap="square" tIns="91425">
+          <a:bodyPr spcFirstLastPara="1" wrap="square" lIns="91425" tIns="91425" rIns="91425" bIns="91425" anchor="t" anchorCtr="0">
             <a:normAutofit fontScale="70000"/>
           </a:bodyPr>
           <a:lstStyle/>
           <a:p>
-            <a:pPr indent="0" lvl="0" marL="0" rtl="0" algn="l">
+            <a:pPr marL="0" lvl="0" indent="0" algn="l" rtl="0">
               <a:spcBef>
                 <a:spcPts val="0"/>
               </a:spcBef>
@@ -9100,13 +9340,13 @@
               <a:buNone/>
             </a:pPr>
             <a:r>
-              <a:rPr b="1" lang="pt-PT"/>
+              <a:rPr lang="pt-PT" b="1"/>
               <a:t>Agentes</a:t>
             </a:r>
             <a:endParaRPr b="1"/>
           </a:p>
           <a:p>
-            <a:pPr indent="0" lvl="0" marL="0" rtl="0" algn="l">
+            <a:pPr marL="0" lvl="0" indent="0" algn="l" rtl="0">
               <a:spcBef>
                 <a:spcPts val="1200"/>
               </a:spcBef>
@@ -9127,7 +9367,7 @@
             <a:endParaRPr/>
           </a:p>
           <a:p>
-            <a:pPr indent="0" lvl="0" marL="0" rtl="0" algn="l">
+            <a:pPr marL="0" lvl="0" indent="0" algn="l" rtl="0">
               <a:spcBef>
                 <a:spcPts val="1200"/>
               </a:spcBef>
@@ -9148,7 +9388,7 @@
             <a:endParaRPr/>
           </a:p>
           <a:p>
-            <a:pPr indent="0" lvl="0" marL="0" rtl="0" algn="l">
+            <a:pPr marL="0" lvl="0" indent="0" algn="l" rtl="0">
               <a:spcBef>
                 <a:spcPts val="1200"/>
               </a:spcBef>
@@ -9169,7 +9409,7 @@
             <a:endParaRPr/>
           </a:p>
           <a:p>
-            <a:pPr indent="0" lvl="0" marL="0" rtl="0" algn="l">
+            <a:pPr marL="0" lvl="0" indent="0" algn="l" rtl="0">
               <a:spcBef>
                 <a:spcPts val="1200"/>
               </a:spcBef>
@@ -9190,7 +9430,7 @@
             <a:endParaRPr/>
           </a:p>
           <a:p>
-            <a:pPr indent="0" lvl="0" marL="0" rtl="0" algn="l">
+            <a:pPr marL="0" lvl="0" indent="0" algn="l" rtl="0">
               <a:spcBef>
                 <a:spcPts val="1200"/>
               </a:spcBef>
@@ -9211,7 +9451,7 @@
             <a:endParaRPr/>
           </a:p>
           <a:p>
-            <a:pPr indent="0" lvl="0" marL="0" rtl="0" algn="l">
+            <a:pPr marL="0" lvl="0" indent="0" algn="l" rtl="0">
               <a:spcBef>
                 <a:spcPts val="1200"/>
               </a:spcBef>
@@ -9232,7 +9472,7 @@
             <a:endParaRPr/>
           </a:p>
           <a:p>
-            <a:pPr indent="0" lvl="0" marL="0" rtl="0" algn="l">
+            <a:pPr marL="0" lvl="0" indent="0" algn="l" rtl="0">
               <a:spcBef>
                 <a:spcPts val="1200"/>
               </a:spcBef>
@@ -9253,7 +9493,7 @@
             <a:endParaRPr/>
           </a:p>
           <a:p>
-            <a:pPr indent="0" lvl="0" marL="0" rtl="0" algn="l">
+            <a:pPr marL="0" lvl="0" indent="0" algn="l" rtl="0">
               <a:spcBef>
                 <a:spcPts val="1200"/>
               </a:spcBef>
@@ -9284,11 +9524,11 @@
 </file>
 
 <file path=ppt/slides/slide5.xml><?xml version="1.0" encoding="utf-8"?>
-<p:sld xmlns:a="http://schemas.openxmlformats.org/drawingml/2006/main" xmlns:r="http://schemas.openxmlformats.org/officeDocument/2006/relationships" xmlns:mc="http://schemas.openxmlformats.org/markup-compatibility/2006" xmlns:mv="urn:schemas-microsoft-com:mac:vml" xmlns:p="http://schemas.openxmlformats.org/presentationml/2006/main" xmlns:c="http://schemas.openxmlformats.org/drawingml/2006/chart" xmlns:dgm="http://schemas.openxmlformats.org/drawingml/2006/diagram" xmlns:o="urn:schemas-microsoft-com:office:office" xmlns:v="urn:schemas-microsoft-com:vml" xmlns:pvml="urn:schemas-microsoft-com:office:powerpoint" xmlns:com="http://schemas.openxmlformats.org/drawingml/2006/compatibility" xmlns:p14="http://schemas.microsoft.com/office/powerpoint/2010/main" xmlns:p15="http://schemas.microsoft.com/office/powerpoint/2012/main" xmlns:ahyp="http://schemas.microsoft.com/office/drawing/2018/hyperlinkcolor">
+<p:sld xmlns:a="http://schemas.openxmlformats.org/drawingml/2006/main" xmlns:r="http://schemas.openxmlformats.org/officeDocument/2006/relationships" xmlns:p="http://schemas.openxmlformats.org/presentationml/2006/main">
   <p:cSld>
     <p:spTree>
       <p:nvGrpSpPr>
-        <p:cNvPr id="83" name="Shape 83"/>
+        <p:cNvPr id="1" name="Shape 83"/>
         <p:cNvGrpSpPr/>
         <p:nvPr/>
       </p:nvGrpSpPr>
@@ -9303,7 +9543,9 @@
       <p:sp>
         <p:nvSpPr>
           <p:cNvPr id="84" name="Google Shape;84;p17"/>
-          <p:cNvSpPr txBox="1"/>
+          <p:cNvSpPr txBox="1">
+            <a:spLocks noGrp="1"/>
+          </p:cNvSpPr>
           <p:nvPr>
             <p:ph type="title"/>
           </p:nvPr>
@@ -9318,12 +9560,12 @@
           </a:prstGeom>
         </p:spPr>
         <p:txBody>
-          <a:bodyPr anchorCtr="0" anchor="t" bIns="91425" lIns="91425" spcFirstLastPara="1" rIns="91425" wrap="square" tIns="91425">
+          <a:bodyPr spcFirstLastPara="1" wrap="square" lIns="91425" tIns="91425" rIns="91425" bIns="91425" anchor="t" anchorCtr="0">
             <a:normAutofit fontScale="90000"/>
           </a:bodyPr>
           <a:lstStyle/>
           <a:p>
-            <a:pPr indent="0" lvl="0" marL="0" rtl="0" algn="l">
+            <a:pPr marL="0" lvl="0" indent="0" algn="l" rtl="0">
               <a:spcBef>
                 <a:spcPts val="0"/>
               </a:spcBef>
@@ -9343,9 +9585,11 @@
       <p:sp>
         <p:nvSpPr>
           <p:cNvPr id="85" name="Google Shape;85;p17"/>
-          <p:cNvSpPr txBox="1"/>
+          <p:cNvSpPr txBox="1">
+            <a:spLocks noGrp="1"/>
+          </p:cNvSpPr>
           <p:nvPr>
-            <p:ph idx="1" type="body"/>
+            <p:ph type="body" idx="1"/>
           </p:nvPr>
         </p:nvSpPr>
         <p:spPr>
@@ -9358,12 +9602,12 @@
           </a:prstGeom>
         </p:spPr>
         <p:txBody>
-          <a:bodyPr anchorCtr="0" anchor="t" bIns="91425" lIns="91425" spcFirstLastPara="1" rIns="91425" wrap="square" tIns="91425">
+          <a:bodyPr spcFirstLastPara="1" wrap="square" lIns="91425" tIns="91425" rIns="91425" bIns="91425" anchor="t" anchorCtr="0">
             <a:normAutofit lnSpcReduction="20000"/>
           </a:bodyPr>
           <a:lstStyle/>
           <a:p>
-            <a:pPr indent="0" lvl="0" marL="0" rtl="0" algn="l">
+            <a:pPr marL="0" lvl="0" indent="0" algn="l" rtl="0">
               <a:spcBef>
                 <a:spcPts val="0"/>
               </a:spcBef>
@@ -9373,13 +9617,13 @@
               <a:buNone/>
             </a:pPr>
             <a:r>
-              <a:rPr b="1" lang="pt-PT"/>
+              <a:rPr lang="pt-PT" b="1"/>
               <a:t>Características</a:t>
             </a:r>
             <a:endParaRPr b="1"/>
           </a:p>
           <a:p>
-            <a:pPr indent="0" lvl="0" marL="0" rtl="0" algn="l">
+            <a:pPr marL="0" lvl="0" indent="0" algn="l" rtl="0">
               <a:spcBef>
                 <a:spcPts val="1200"/>
               </a:spcBef>
@@ -9389,7 +9633,7 @@
               <a:buNone/>
             </a:pPr>
             <a:r>
-              <a:rPr b="1" lang="pt-PT" sz="1471">
+              <a:rPr lang="pt-PT" sz="1471" b="1">
                 <a:solidFill>
                   <a:schemeClr val="dk1"/>
                 </a:solidFill>
@@ -9411,7 +9655,7 @@
             </a:endParaRPr>
           </a:p>
           <a:p>
-            <a:pPr indent="0" lvl="0" marL="0" rtl="0" algn="l">
+            <a:pPr marL="0" lvl="0" indent="0" algn="l" rtl="0">
               <a:spcBef>
                 <a:spcPts val="1200"/>
               </a:spcBef>
@@ -9421,7 +9665,7 @@
               <a:buNone/>
             </a:pPr>
             <a:r>
-              <a:rPr b="1" lang="pt-PT" sz="1471">
+              <a:rPr lang="pt-PT" sz="1471" b="1">
                 <a:solidFill>
                   <a:schemeClr val="dk1"/>
                 </a:solidFill>
@@ -9443,7 +9687,7 @@
             </a:endParaRPr>
           </a:p>
           <a:p>
-            <a:pPr indent="0" lvl="0" marL="0" rtl="0" algn="l">
+            <a:pPr marL="0" lvl="0" indent="0" algn="l" rtl="0">
               <a:spcBef>
                 <a:spcPts val="1200"/>
               </a:spcBef>
@@ -9453,7 +9697,7 @@
               <a:buNone/>
             </a:pPr>
             <a:r>
-              <a:rPr b="1" lang="pt-PT" sz="1471">
+              <a:rPr lang="pt-PT" sz="1471" b="1">
                 <a:solidFill>
                   <a:schemeClr val="dk1"/>
                 </a:solidFill>
@@ -9475,7 +9719,7 @@
             </a:endParaRPr>
           </a:p>
           <a:p>
-            <a:pPr indent="0" lvl="0" marL="0" rtl="0" algn="l">
+            <a:pPr marL="0" lvl="0" indent="0" algn="l" rtl="0">
               <a:spcBef>
                 <a:spcPts val="1200"/>
               </a:spcBef>
@@ -9485,7 +9729,7 @@
               <a:buNone/>
             </a:pPr>
             <a:r>
-              <a:rPr b="1" lang="pt-PT" sz="1471">
+              <a:rPr lang="pt-PT" sz="1471" b="1">
                 <a:solidFill>
                   <a:schemeClr val="dk1"/>
                 </a:solidFill>
@@ -9507,7 +9751,7 @@
             </a:endParaRPr>
           </a:p>
           <a:p>
-            <a:pPr indent="0" lvl="0" marL="0" rtl="0" algn="l">
+            <a:pPr marL="0" lvl="0" indent="0" algn="l" rtl="0">
               <a:spcBef>
                 <a:spcPts val="1200"/>
               </a:spcBef>
@@ -9517,7 +9761,7 @@
               <a:buNone/>
             </a:pPr>
             <a:r>
-              <a:rPr b="1" lang="pt-PT" sz="1471">
+              <a:rPr lang="pt-PT" sz="1471" b="1">
                 <a:solidFill>
                   <a:schemeClr val="dk1"/>
                 </a:solidFill>
@@ -9539,7 +9783,7 @@
             </a:endParaRPr>
           </a:p>
           <a:p>
-            <a:pPr indent="0" lvl="0" marL="0" rtl="0" algn="l">
+            <a:pPr marL="0" lvl="0" indent="0" algn="l" rtl="0">
               <a:spcBef>
                 <a:spcPts val="1200"/>
               </a:spcBef>
@@ -9549,7 +9793,7 @@
               <a:buNone/>
             </a:pPr>
             <a:r>
-              <a:rPr b="1" lang="pt-PT" sz="1471">
+              <a:rPr lang="pt-PT" sz="1471" b="1">
                 <a:solidFill>
                   <a:schemeClr val="dk1"/>
                 </a:solidFill>
@@ -9571,7 +9815,7 @@
             </a:endParaRPr>
           </a:p>
           <a:p>
-            <a:pPr indent="0" lvl="0" marL="0" rtl="0" algn="l">
+            <a:pPr marL="0" lvl="0" indent="0" algn="l" rtl="0">
               <a:spcBef>
                 <a:spcPts val="1200"/>
               </a:spcBef>
@@ -9581,7 +9825,7 @@
               <a:buNone/>
             </a:pPr>
             <a:r>
-              <a:rPr b="1" lang="pt-PT" sz="1471">
+              <a:rPr lang="pt-PT" sz="1471" b="1">
                 <a:solidFill>
                   <a:schemeClr val="dk1"/>
                 </a:solidFill>
@@ -9603,7 +9847,7 @@
             </a:endParaRPr>
           </a:p>
           <a:p>
-            <a:pPr indent="0" lvl="0" marL="0" rtl="0" algn="l">
+            <a:pPr marL="0" lvl="0" indent="0" algn="l" rtl="0">
               <a:spcBef>
                 <a:spcPts val="1200"/>
               </a:spcBef>
@@ -9613,7 +9857,7 @@
               <a:buNone/>
             </a:pPr>
             <a:r>
-              <a:rPr b="1" lang="pt-PT" sz="1471">
+              <a:rPr lang="pt-PT" sz="1471" b="1">
                 <a:solidFill>
                   <a:schemeClr val="dk1"/>
                 </a:solidFill>
@@ -9628,7 +9872,7 @@
               </a:rPr>
               <a:t>: o sistema adapta-se facilmente a novas necessidades ou condições.</a:t>
             </a:r>
-            <a:endParaRPr b="1" sz="2171"/>
+            <a:endParaRPr sz="2171" b="1"/>
           </a:p>
         </p:txBody>
       </p:sp>
@@ -9641,11 +9885,11 @@
 </file>
 
 <file path=ppt/slides/slide6.xml><?xml version="1.0" encoding="utf-8"?>
-<p:sld xmlns:a="http://schemas.openxmlformats.org/drawingml/2006/main" xmlns:r="http://schemas.openxmlformats.org/officeDocument/2006/relationships" xmlns:mc="http://schemas.openxmlformats.org/markup-compatibility/2006" xmlns:mv="urn:schemas-microsoft-com:mac:vml" xmlns:p="http://schemas.openxmlformats.org/presentationml/2006/main" xmlns:c="http://schemas.openxmlformats.org/drawingml/2006/chart" xmlns:dgm="http://schemas.openxmlformats.org/drawingml/2006/diagram" xmlns:o="urn:schemas-microsoft-com:office:office" xmlns:v="urn:schemas-microsoft-com:vml" xmlns:pvml="urn:schemas-microsoft-com:office:powerpoint" xmlns:com="http://schemas.openxmlformats.org/drawingml/2006/compatibility" xmlns:p14="http://schemas.microsoft.com/office/powerpoint/2010/main" xmlns:p15="http://schemas.microsoft.com/office/powerpoint/2012/main" xmlns:ahyp="http://schemas.microsoft.com/office/drawing/2018/hyperlinkcolor">
+<p:sld xmlns:a="http://schemas.openxmlformats.org/drawingml/2006/main" xmlns:r="http://schemas.openxmlformats.org/officeDocument/2006/relationships" xmlns:p="http://schemas.openxmlformats.org/presentationml/2006/main">
   <p:cSld>
     <p:spTree>
       <p:nvGrpSpPr>
-        <p:cNvPr id="89" name="Shape 89"/>
+        <p:cNvPr id="1" name="Shape 89"/>
         <p:cNvGrpSpPr/>
         <p:nvPr/>
       </p:nvGrpSpPr>
@@ -9660,7 +9904,9 @@
       <p:sp>
         <p:nvSpPr>
           <p:cNvPr id="90" name="Google Shape;90;p18"/>
-          <p:cNvSpPr txBox="1"/>
+          <p:cNvSpPr txBox="1">
+            <a:spLocks noGrp="1"/>
+          </p:cNvSpPr>
           <p:nvPr>
             <p:ph type="title"/>
           </p:nvPr>
@@ -9675,12 +9921,12 @@
           </a:prstGeom>
         </p:spPr>
         <p:txBody>
-          <a:bodyPr anchorCtr="0" anchor="t" bIns="91425" lIns="91425" spcFirstLastPara="1" rIns="91425" wrap="square" tIns="91425">
+          <a:bodyPr spcFirstLastPara="1" wrap="square" lIns="91425" tIns="91425" rIns="91425" bIns="91425" anchor="t" anchorCtr="0">
             <a:normAutofit fontScale="90000"/>
           </a:bodyPr>
           <a:lstStyle/>
           <a:p>
-            <a:pPr indent="0" lvl="0" marL="0" rtl="0" algn="l">
+            <a:pPr marL="0" lvl="0" indent="0" algn="l" rtl="0">
               <a:spcBef>
                 <a:spcPts val="0"/>
               </a:spcBef>
@@ -9700,9 +9946,11 @@
       <p:sp>
         <p:nvSpPr>
           <p:cNvPr id="91" name="Google Shape;91;p18"/>
-          <p:cNvSpPr txBox="1"/>
+          <p:cNvSpPr txBox="1">
+            <a:spLocks noGrp="1"/>
+          </p:cNvSpPr>
           <p:nvPr>
-            <p:ph idx="1" type="body"/>
+            <p:ph type="body" idx="1"/>
           </p:nvPr>
         </p:nvSpPr>
         <p:spPr>
@@ -9715,12 +9963,12 @@
           </a:prstGeom>
         </p:spPr>
         <p:txBody>
-          <a:bodyPr anchorCtr="0" anchor="t" bIns="91425" lIns="91425" spcFirstLastPara="1" rIns="91425" wrap="square" tIns="91425">
+          <a:bodyPr spcFirstLastPara="1" wrap="square" lIns="91425" tIns="91425" rIns="91425" bIns="91425" anchor="t" anchorCtr="0">
             <a:normAutofit/>
           </a:bodyPr>
           <a:lstStyle/>
           <a:p>
-            <a:pPr indent="0" lvl="0" marL="0" rtl="0" algn="l">
+            <a:pPr marL="0" lvl="0" indent="0" algn="l" rtl="0">
               <a:spcBef>
                 <a:spcPts val="0"/>
               </a:spcBef>
@@ -9729,9 +9977,6 @@
               </a:spcAft>
               <a:buNone/>
             </a:pPr>
-            <a:r>
-              <a:t/>
-            </a:r>
             <a:endParaRPr/>
           </a:p>
         </p:txBody>
@@ -9801,11 +10046,11 @@
 </file>
 
 <file path=ppt/slides/slide7.xml><?xml version="1.0" encoding="utf-8"?>
-<p:sld xmlns:a="http://schemas.openxmlformats.org/drawingml/2006/main" xmlns:r="http://schemas.openxmlformats.org/officeDocument/2006/relationships" xmlns:mc="http://schemas.openxmlformats.org/markup-compatibility/2006" xmlns:mv="urn:schemas-microsoft-com:mac:vml" xmlns:p="http://schemas.openxmlformats.org/presentationml/2006/main" xmlns:c="http://schemas.openxmlformats.org/drawingml/2006/chart" xmlns:dgm="http://schemas.openxmlformats.org/drawingml/2006/diagram" xmlns:o="urn:schemas-microsoft-com:office:office" xmlns:v="urn:schemas-microsoft-com:vml" xmlns:pvml="urn:schemas-microsoft-com:office:powerpoint" xmlns:com="http://schemas.openxmlformats.org/drawingml/2006/compatibility" xmlns:p14="http://schemas.microsoft.com/office/powerpoint/2010/main" xmlns:p15="http://schemas.microsoft.com/office/powerpoint/2012/main" xmlns:ahyp="http://schemas.microsoft.com/office/drawing/2018/hyperlinkcolor">
+<p:sld xmlns:a="http://schemas.openxmlformats.org/drawingml/2006/main" xmlns:r="http://schemas.openxmlformats.org/officeDocument/2006/relationships" xmlns:p="http://schemas.openxmlformats.org/presentationml/2006/main">
   <p:cSld>
     <p:spTree>
       <p:nvGrpSpPr>
-        <p:cNvPr id="97" name="Shape 97"/>
+        <p:cNvPr id="1" name="Shape 97"/>
         <p:cNvGrpSpPr/>
         <p:nvPr/>
       </p:nvGrpSpPr>
@@ -9820,7 +10065,9 @@
       <p:sp>
         <p:nvSpPr>
           <p:cNvPr id="98" name="Google Shape;98;p19"/>
-          <p:cNvSpPr txBox="1"/>
+          <p:cNvSpPr txBox="1">
+            <a:spLocks noGrp="1"/>
+          </p:cNvSpPr>
           <p:nvPr>
             <p:ph type="title"/>
           </p:nvPr>
@@ -9835,12 +10082,12 @@
           </a:prstGeom>
         </p:spPr>
         <p:txBody>
-          <a:bodyPr anchorCtr="0" anchor="t" bIns="91425" lIns="91425" spcFirstLastPara="1" rIns="91425" wrap="square" tIns="91425">
+          <a:bodyPr spcFirstLastPara="1" wrap="square" lIns="91425" tIns="91425" rIns="91425" bIns="91425" anchor="t" anchorCtr="0">
             <a:normAutofit fontScale="90000"/>
           </a:bodyPr>
           <a:lstStyle/>
           <a:p>
-            <a:pPr indent="0" lvl="0" marL="0" rtl="0" algn="l">
+            <a:pPr marL="0" lvl="0" indent="0" algn="l" rtl="0">
               <a:spcBef>
                 <a:spcPts val="0"/>
               </a:spcBef>
@@ -9860,9 +10107,11 @@
       <p:sp>
         <p:nvSpPr>
           <p:cNvPr id="99" name="Google Shape;99;p19"/>
-          <p:cNvSpPr txBox="1"/>
+          <p:cNvSpPr txBox="1">
+            <a:spLocks noGrp="1"/>
+          </p:cNvSpPr>
           <p:nvPr>
-            <p:ph idx="1" type="body"/>
+            <p:ph type="body" idx="1"/>
           </p:nvPr>
         </p:nvSpPr>
         <p:spPr>
@@ -9875,12 +10124,12 @@
           </a:prstGeom>
         </p:spPr>
         <p:txBody>
-          <a:bodyPr anchorCtr="0" anchor="t" bIns="91425" lIns="91425" spcFirstLastPara="1" rIns="91425" wrap="square" tIns="91425">
+          <a:bodyPr spcFirstLastPara="1" wrap="square" lIns="91425" tIns="91425" rIns="91425" bIns="91425" anchor="t" anchorCtr="0">
             <a:normAutofit/>
           </a:bodyPr>
           <a:lstStyle/>
           <a:p>
-            <a:pPr indent="0" lvl="0" marL="0" rtl="0" algn="l">
+            <a:pPr marL="0" lvl="0" indent="0" algn="l" rtl="0">
               <a:spcBef>
                 <a:spcPts val="0"/>
               </a:spcBef>
@@ -9889,9 +10138,6 @@
               </a:spcAft>
               <a:buNone/>
             </a:pPr>
-            <a:r>
-              <a:t/>
-            </a:r>
             <a:endParaRPr/>
           </a:p>
         </p:txBody>
@@ -9933,11 +10179,11 @@
 </file>
 
 <file path=ppt/slides/slide8.xml><?xml version="1.0" encoding="utf-8"?>
-<p:sld xmlns:a="http://schemas.openxmlformats.org/drawingml/2006/main" xmlns:r="http://schemas.openxmlformats.org/officeDocument/2006/relationships" xmlns:mc="http://schemas.openxmlformats.org/markup-compatibility/2006" xmlns:mv="urn:schemas-microsoft-com:mac:vml" xmlns:p="http://schemas.openxmlformats.org/presentationml/2006/main" xmlns:c="http://schemas.openxmlformats.org/drawingml/2006/chart" xmlns:dgm="http://schemas.openxmlformats.org/drawingml/2006/diagram" xmlns:o="urn:schemas-microsoft-com:office:office" xmlns:v="urn:schemas-microsoft-com:vml" xmlns:pvml="urn:schemas-microsoft-com:office:powerpoint" xmlns:com="http://schemas.openxmlformats.org/drawingml/2006/compatibility" xmlns:p14="http://schemas.microsoft.com/office/powerpoint/2010/main" xmlns:p15="http://schemas.microsoft.com/office/powerpoint/2012/main" xmlns:ahyp="http://schemas.microsoft.com/office/drawing/2018/hyperlinkcolor">
+<p:sld xmlns:a="http://schemas.openxmlformats.org/drawingml/2006/main" xmlns:r="http://schemas.openxmlformats.org/officeDocument/2006/relationships" xmlns:p="http://schemas.openxmlformats.org/presentationml/2006/main">
   <p:cSld>
     <p:spTree>
       <p:nvGrpSpPr>
-        <p:cNvPr id="104" name="Shape 104"/>
+        <p:cNvPr id="1" name="Shape 104"/>
         <p:cNvGrpSpPr/>
         <p:nvPr/>
       </p:nvGrpSpPr>
@@ -9952,7 +10198,9 @@
       <p:sp>
         <p:nvSpPr>
           <p:cNvPr id="105" name="Google Shape;105;p20"/>
-          <p:cNvSpPr txBox="1"/>
+          <p:cNvSpPr txBox="1">
+            <a:spLocks noGrp="1"/>
+          </p:cNvSpPr>
           <p:nvPr>
             <p:ph type="title"/>
           </p:nvPr>
@@ -9967,12 +10215,12 @@
           </a:prstGeom>
         </p:spPr>
         <p:txBody>
-          <a:bodyPr anchorCtr="0" anchor="t" bIns="91425" lIns="91425" spcFirstLastPara="1" rIns="91425" wrap="square" tIns="91425">
+          <a:bodyPr spcFirstLastPara="1" wrap="square" lIns="91425" tIns="91425" rIns="91425" bIns="91425" anchor="t" anchorCtr="0">
             <a:normAutofit fontScale="90000"/>
           </a:bodyPr>
           <a:lstStyle/>
           <a:p>
-            <a:pPr indent="0" lvl="0" marL="0" rtl="0" algn="l">
+            <a:pPr marL="0" lvl="0" indent="0" algn="l" rtl="0">
               <a:spcBef>
                 <a:spcPts val="0"/>
               </a:spcBef>
@@ -9992,9 +10240,11 @@
       <p:sp>
         <p:nvSpPr>
           <p:cNvPr id="106" name="Google Shape;106;p20"/>
-          <p:cNvSpPr txBox="1"/>
+          <p:cNvSpPr txBox="1">
+            <a:spLocks noGrp="1"/>
+          </p:cNvSpPr>
           <p:nvPr>
-            <p:ph idx="1" type="body"/>
+            <p:ph type="body" idx="1"/>
           </p:nvPr>
         </p:nvSpPr>
         <p:spPr>
@@ -10007,12 +10257,12 @@
           </a:prstGeom>
         </p:spPr>
         <p:txBody>
-          <a:bodyPr anchorCtr="0" anchor="t" bIns="91425" lIns="91425" spcFirstLastPara="1" rIns="91425" wrap="square" tIns="91425">
+          <a:bodyPr spcFirstLastPara="1" wrap="square" lIns="91425" tIns="91425" rIns="91425" bIns="91425" anchor="t" anchorCtr="0">
             <a:normAutofit fontScale="85000" lnSpcReduction="20000"/>
           </a:bodyPr>
           <a:lstStyle/>
           <a:p>
-            <a:pPr indent="0" lvl="0" marL="0" rtl="0" algn="l">
+            <a:pPr marL="0" lvl="0" indent="0" algn="l" rtl="0">
               <a:spcBef>
                 <a:spcPts val="0"/>
               </a:spcBef>
@@ -10028,7 +10278,7 @@
             <a:endParaRPr/>
           </a:p>
           <a:p>
-            <a:pPr indent="0" lvl="0" marL="0" rtl="0" algn="l">
+            <a:pPr marL="0" lvl="0" indent="0" algn="l" rtl="0">
               <a:spcBef>
                 <a:spcPts val="1200"/>
               </a:spcBef>
@@ -10044,7 +10294,7 @@
             <a:endParaRPr/>
           </a:p>
           <a:p>
-            <a:pPr indent="0" lvl="0" marL="0" rtl="0" algn="l">
+            <a:pPr marL="0" lvl="0" indent="0" algn="l" rtl="0">
               <a:spcBef>
                 <a:spcPts val="1200"/>
               </a:spcBef>
@@ -10060,7 +10310,7 @@
             <a:endParaRPr/>
           </a:p>
           <a:p>
-            <a:pPr indent="0" lvl="0" marL="0" rtl="0" algn="l">
+            <a:pPr marL="0" lvl="0" indent="0" algn="l" rtl="0">
               <a:spcBef>
                 <a:spcPts val="1200"/>
               </a:spcBef>
@@ -10076,7 +10326,7 @@
             <a:endParaRPr/>
           </a:p>
           <a:p>
-            <a:pPr indent="0" lvl="0" marL="0" rtl="0" algn="l">
+            <a:pPr marL="0" lvl="0" indent="0" algn="l" rtl="0">
               <a:spcBef>
                 <a:spcPts val="1200"/>
               </a:spcBef>
@@ -10092,7 +10342,7 @@
             <a:endParaRPr/>
           </a:p>
           <a:p>
-            <a:pPr indent="0" lvl="0" marL="0" rtl="0" algn="l">
+            <a:pPr marL="0" lvl="0" indent="0" algn="l" rtl="0">
               <a:spcBef>
                 <a:spcPts val="1200"/>
               </a:spcBef>
@@ -10108,7 +10358,7 @@
             <a:endParaRPr/>
           </a:p>
           <a:p>
-            <a:pPr indent="0" lvl="0" marL="0" rtl="0" algn="l">
+            <a:pPr marL="0" lvl="0" indent="0" algn="l" rtl="0">
               <a:spcBef>
                 <a:spcPts val="1200"/>
               </a:spcBef>
@@ -10124,7 +10374,7 @@
             <a:endParaRPr/>
           </a:p>
           <a:p>
-            <a:pPr indent="0" lvl="0" marL="0" rtl="0" algn="l">
+            <a:pPr marL="0" lvl="0" indent="0" algn="l" rtl="0">
               <a:spcBef>
                 <a:spcPts val="1200"/>
               </a:spcBef>
@@ -10234,11 +10484,11 @@
 </file>
 
 <file path=ppt/slides/slide9.xml><?xml version="1.0" encoding="utf-8"?>
-<p:sld xmlns:a="http://schemas.openxmlformats.org/drawingml/2006/main" xmlns:r="http://schemas.openxmlformats.org/officeDocument/2006/relationships" xmlns:mc="http://schemas.openxmlformats.org/markup-compatibility/2006" xmlns:mv="urn:schemas-microsoft-com:mac:vml" xmlns:p="http://schemas.openxmlformats.org/presentationml/2006/main" xmlns:c="http://schemas.openxmlformats.org/drawingml/2006/chart" xmlns:dgm="http://schemas.openxmlformats.org/drawingml/2006/diagram" xmlns:o="urn:schemas-microsoft-com:office:office" xmlns:v="urn:schemas-microsoft-com:vml" xmlns:pvml="urn:schemas-microsoft-com:office:powerpoint" xmlns:com="http://schemas.openxmlformats.org/drawingml/2006/compatibility" xmlns:p14="http://schemas.microsoft.com/office/powerpoint/2010/main" xmlns:p15="http://schemas.microsoft.com/office/powerpoint/2012/main" xmlns:ahyp="http://schemas.microsoft.com/office/drawing/2018/hyperlinkcolor">
+<p:sld xmlns:a="http://schemas.openxmlformats.org/drawingml/2006/main" xmlns:r="http://schemas.openxmlformats.org/officeDocument/2006/relationships" xmlns:p="http://schemas.openxmlformats.org/presentationml/2006/main">
   <p:cSld>
     <p:spTree>
       <p:nvGrpSpPr>
-        <p:cNvPr id="113" name="Shape 113"/>
+        <p:cNvPr id="1" name="Shape 113"/>
         <p:cNvGrpSpPr/>
         <p:nvPr/>
       </p:nvGrpSpPr>
@@ -10253,7 +10503,9 @@
       <p:sp>
         <p:nvSpPr>
           <p:cNvPr id="114" name="Google Shape;114;p21"/>
-          <p:cNvSpPr txBox="1"/>
+          <p:cNvSpPr txBox="1">
+            <a:spLocks noGrp="1"/>
+          </p:cNvSpPr>
           <p:nvPr>
             <p:ph type="title"/>
           </p:nvPr>
@@ -10268,12 +10520,12 @@
           </a:prstGeom>
         </p:spPr>
         <p:txBody>
-          <a:bodyPr anchorCtr="0" anchor="t" bIns="91425" lIns="91425" spcFirstLastPara="1" rIns="91425" wrap="square" tIns="91425">
+          <a:bodyPr spcFirstLastPara="1" wrap="square" lIns="91425" tIns="91425" rIns="91425" bIns="91425" anchor="t" anchorCtr="0">
             <a:normAutofit fontScale="90000"/>
           </a:bodyPr>
           <a:lstStyle/>
           <a:p>
-            <a:pPr indent="0" lvl="0" marL="0" rtl="0" algn="l">
+            <a:pPr marL="0" lvl="0" indent="0" algn="l" rtl="0">
               <a:spcBef>
                 <a:spcPts val="0"/>
               </a:spcBef>
@@ -10327,7 +10579,288 @@
 </file>
 
 <file path=ppt/theme/theme1.xml><?xml version="1.0" encoding="utf-8"?>
-<a:theme xmlns:a="http://schemas.openxmlformats.org/drawingml/2006/main" xmlns:r="http://schemas.openxmlformats.org/officeDocument/2006/relationships">
+<a:theme xmlns:a="http://schemas.openxmlformats.org/drawingml/2006/main" name="Simple Light">
+  <a:themeElements>
+    <a:clrScheme name="Simple Light">
+      <a:dk1>
+        <a:srgbClr val="000000"/>
+      </a:dk1>
+      <a:lt1>
+        <a:srgbClr val="FFFFFF"/>
+      </a:lt1>
+      <a:dk2>
+        <a:srgbClr val="595959"/>
+      </a:dk2>
+      <a:lt2>
+        <a:srgbClr val="EEEEEE"/>
+      </a:lt2>
+      <a:accent1>
+        <a:srgbClr val="4285F4"/>
+      </a:accent1>
+      <a:accent2>
+        <a:srgbClr val="212121"/>
+      </a:accent2>
+      <a:accent3>
+        <a:srgbClr val="78909C"/>
+      </a:accent3>
+      <a:accent4>
+        <a:srgbClr val="FFAB40"/>
+      </a:accent4>
+      <a:accent5>
+        <a:srgbClr val="0097A7"/>
+      </a:accent5>
+      <a:accent6>
+        <a:srgbClr val="EEFF41"/>
+      </a:accent6>
+      <a:hlink>
+        <a:srgbClr val="0097A7"/>
+      </a:hlink>
+      <a:folHlink>
+        <a:srgbClr val="0097A7"/>
+      </a:folHlink>
+    </a:clrScheme>
+    <a:fontScheme name="Office">
+      <a:majorFont>
+        <a:latin typeface="Arial"/>
+        <a:ea typeface=""/>
+        <a:cs typeface=""/>
+        <a:font script="Jpan" typeface="ＭＳ Ｐゴシック"/>
+        <a:font script="Hang" typeface="맑은 고딕"/>
+        <a:font script="Hans" typeface="宋体"/>
+        <a:font script="Hant" typeface="新細明體"/>
+        <a:font script="Arab" typeface="Times New Roman"/>
+        <a:font script="Hebr" typeface="Times New Roman"/>
+        <a:font script="Thai" typeface="Angsana New"/>
+        <a:font script="Ethi" typeface="Nyala"/>
+        <a:font script="Beng" typeface="Vrinda"/>
+        <a:font script="Gujr" typeface="Shruti"/>
+        <a:font script="Khmr" typeface="MoolBoran"/>
+        <a:font script="Knda" typeface="Tunga"/>
+        <a:font script="Guru" typeface="Raavi"/>
+        <a:font script="Cans" typeface="Euphemia"/>
+        <a:font script="Cher" typeface="Plantagenet Cherokee"/>
+        <a:font script="Yiii" typeface="Microsoft Yi Baiti"/>
+        <a:font script="Tibt" typeface="Microsoft Himalaya"/>
+        <a:font script="Thaa" typeface="MV Boli"/>
+        <a:font script="Deva" typeface="Mangal"/>
+        <a:font script="Telu" typeface="Gautami"/>
+        <a:font script="Taml" typeface="Latha"/>
+        <a:font script="Syrc" typeface="Estrangelo Edessa"/>
+        <a:font script="Orya" typeface="Kalinga"/>
+        <a:font script="Mlym" typeface="Kartika"/>
+        <a:font script="Laoo" typeface="DokChampa"/>
+        <a:font script="Sinh" typeface="Iskoola Pota"/>
+        <a:font script="Mong" typeface="Mongolian Baiti"/>
+        <a:font script="Viet" typeface="Times New Roman"/>
+        <a:font script="Uigh" typeface="Microsoft Uighur"/>
+        <a:font script="Geor" typeface="Sylfaen"/>
+      </a:majorFont>
+      <a:minorFont>
+        <a:latin typeface="Arial"/>
+        <a:ea typeface=""/>
+        <a:cs typeface=""/>
+        <a:font script="Jpan" typeface="ＭＳ Ｐゴシック"/>
+        <a:font script="Hang" typeface="맑은 고딕"/>
+        <a:font script="Hans" typeface="宋体"/>
+        <a:font script="Hant" typeface="新細明體"/>
+        <a:font script="Arab" typeface="Arial"/>
+        <a:font script="Hebr" typeface="Arial"/>
+        <a:font script="Thai" typeface="Cordia New"/>
+        <a:font script="Ethi" typeface="Nyala"/>
+        <a:font script="Beng" typeface="Vrinda"/>
+        <a:font script="Gujr" typeface="Shruti"/>
+        <a:font script="Khmr" typeface="DaunPenh"/>
+        <a:font script="Knda" typeface="Tunga"/>
+        <a:font script="Guru" typeface="Raavi"/>
+        <a:font script="Cans" typeface="Euphemia"/>
+        <a:font script="Cher" typeface="Plantagenet Cherokee"/>
+        <a:font script="Yiii" typeface="Microsoft Yi Baiti"/>
+        <a:font script="Tibt" typeface="Microsoft Himalaya"/>
+        <a:font script="Thaa" typeface="MV Boli"/>
+        <a:font script="Deva" typeface="Mangal"/>
+        <a:font script="Telu" typeface="Gautami"/>
+        <a:font script="Taml" typeface="Latha"/>
+        <a:font script="Syrc" typeface="Estrangelo Edessa"/>
+        <a:font script="Orya" typeface="Kalinga"/>
+        <a:font script="Mlym" typeface="Kartika"/>
+        <a:font script="Laoo" typeface="DokChampa"/>
+        <a:font script="Sinh" typeface="Iskoola Pota"/>
+        <a:font script="Mong" typeface="Mongolian Baiti"/>
+        <a:font script="Viet" typeface="Arial"/>
+        <a:font script="Uigh" typeface="Microsoft Uighur"/>
+        <a:font script="Geor" typeface="Sylfaen"/>
+      </a:minorFont>
+    </a:fontScheme>
+    <a:fmtScheme name="Office">
+      <a:fillStyleLst>
+        <a:solidFill>
+          <a:schemeClr val="phClr"/>
+        </a:solidFill>
+        <a:gradFill rotWithShape="1">
+          <a:gsLst>
+            <a:gs pos="0">
+              <a:schemeClr val="phClr">
+                <a:tint val="50000"/>
+                <a:satMod val="300000"/>
+              </a:schemeClr>
+            </a:gs>
+            <a:gs pos="35000">
+              <a:schemeClr val="phClr">
+                <a:tint val="37000"/>
+                <a:satMod val="300000"/>
+              </a:schemeClr>
+            </a:gs>
+            <a:gs pos="100000">
+              <a:schemeClr val="phClr">
+                <a:tint val="15000"/>
+                <a:satMod val="350000"/>
+              </a:schemeClr>
+            </a:gs>
+          </a:gsLst>
+          <a:lin ang="16200000" scaled="1"/>
+        </a:gradFill>
+        <a:gradFill rotWithShape="1">
+          <a:gsLst>
+            <a:gs pos="0">
+              <a:schemeClr val="phClr">
+                <a:tint val="100000"/>
+                <a:shade val="100000"/>
+                <a:satMod val="130000"/>
+              </a:schemeClr>
+            </a:gs>
+            <a:gs pos="100000">
+              <a:schemeClr val="phClr">
+                <a:tint val="50000"/>
+                <a:shade val="100000"/>
+                <a:satMod val="350000"/>
+              </a:schemeClr>
+            </a:gs>
+          </a:gsLst>
+          <a:lin ang="16200000" scaled="0"/>
+        </a:gradFill>
+      </a:fillStyleLst>
+      <a:lnStyleLst>
+        <a:ln w="9525" cap="flat" cmpd="sng" algn="ctr">
+          <a:solidFill>
+            <a:schemeClr val="phClr">
+              <a:shade val="95000"/>
+              <a:satMod val="105000"/>
+            </a:schemeClr>
+          </a:solidFill>
+          <a:prstDash val="solid"/>
+        </a:ln>
+        <a:ln w="25400" cap="flat" cmpd="sng" algn="ctr">
+          <a:solidFill>
+            <a:schemeClr val="phClr"/>
+          </a:solidFill>
+          <a:prstDash val="solid"/>
+        </a:ln>
+        <a:ln w="38100" cap="flat" cmpd="sng" algn="ctr">
+          <a:solidFill>
+            <a:schemeClr val="phClr"/>
+          </a:solidFill>
+          <a:prstDash val="solid"/>
+        </a:ln>
+      </a:lnStyleLst>
+      <a:effectStyleLst>
+        <a:effectStyle>
+          <a:effectLst>
+            <a:outerShdw blurRad="40000" dist="20000" dir="5400000" rotWithShape="0">
+              <a:srgbClr val="000000">
+                <a:alpha val="38000"/>
+              </a:srgbClr>
+            </a:outerShdw>
+          </a:effectLst>
+        </a:effectStyle>
+        <a:effectStyle>
+          <a:effectLst>
+            <a:outerShdw blurRad="40000" dist="23000" dir="5400000" rotWithShape="0">
+              <a:srgbClr val="000000">
+                <a:alpha val="35000"/>
+              </a:srgbClr>
+            </a:outerShdw>
+          </a:effectLst>
+        </a:effectStyle>
+        <a:effectStyle>
+          <a:effectLst>
+            <a:outerShdw blurRad="40000" dist="23000" dir="5400000" rotWithShape="0">
+              <a:srgbClr val="000000">
+                <a:alpha val="35000"/>
+              </a:srgbClr>
+            </a:outerShdw>
+          </a:effectLst>
+          <a:scene3d>
+            <a:camera prst="orthographicFront">
+              <a:rot lat="0" lon="0" rev="0"/>
+            </a:camera>
+            <a:lightRig rig="threePt" dir="t">
+              <a:rot lat="0" lon="0" rev="1200000"/>
+            </a:lightRig>
+          </a:scene3d>
+          <a:sp3d>
+            <a:bevelT w="63500" h="25400"/>
+          </a:sp3d>
+        </a:effectStyle>
+      </a:effectStyleLst>
+      <a:bgFillStyleLst>
+        <a:solidFill>
+          <a:schemeClr val="phClr"/>
+        </a:solidFill>
+        <a:gradFill rotWithShape="1">
+          <a:gsLst>
+            <a:gs pos="0">
+              <a:schemeClr val="phClr">
+                <a:tint val="40000"/>
+                <a:satMod val="350000"/>
+              </a:schemeClr>
+            </a:gs>
+            <a:gs pos="40000">
+              <a:schemeClr val="phClr">
+                <a:tint val="45000"/>
+                <a:shade val="99000"/>
+                <a:satMod val="350000"/>
+              </a:schemeClr>
+            </a:gs>
+            <a:gs pos="100000">
+              <a:schemeClr val="phClr">
+                <a:shade val="20000"/>
+                <a:satMod val="255000"/>
+              </a:schemeClr>
+            </a:gs>
+          </a:gsLst>
+          <a:path path="circle">
+            <a:fillToRect l="50000" t="-80000" r="50000" b="180000"/>
+          </a:path>
+        </a:gradFill>
+        <a:gradFill rotWithShape="1">
+          <a:gsLst>
+            <a:gs pos="0">
+              <a:schemeClr val="phClr">
+                <a:tint val="80000"/>
+                <a:satMod val="300000"/>
+              </a:schemeClr>
+            </a:gs>
+            <a:gs pos="100000">
+              <a:schemeClr val="phClr">
+                <a:shade val="30000"/>
+                <a:satMod val="200000"/>
+              </a:schemeClr>
+            </a:gs>
+          </a:gsLst>
+          <a:path path="circle">
+            <a:fillToRect l="50000" t="50000" r="50000" b="50000"/>
+          </a:path>
+        </a:gradFill>
+      </a:bgFillStyleLst>
+    </a:fmtScheme>
+  </a:themeElements>
+  <a:objectDefaults/>
+  <a:extraClrSchemeLst/>
+</a:theme>
+</file>
+
+<file path=ppt/theme/theme2.xml><?xml version="1.0" encoding="utf-8"?>
+<a:theme xmlns:a="http://schemas.openxmlformats.org/drawingml/2006/main">
   <a:themeElements>
     <a:clrScheme name="Default">
       <a:dk1>
@@ -10602,284 +11135,7 @@
       </a:bgFillStyleLst>
     </a:fmtScheme>
   </a:themeElements>
-</a:theme>
-</file>
-
-<file path=ppt/theme/theme2.xml><?xml version="1.0" encoding="utf-8"?>
-<a:theme xmlns:a="http://schemas.openxmlformats.org/drawingml/2006/main" xmlns:r="http://schemas.openxmlformats.org/officeDocument/2006/relationships" name="Simple Light">
-  <a:themeElements>
-    <a:clrScheme name="Simple Light">
-      <a:dk1>
-        <a:srgbClr val="000000"/>
-      </a:dk1>
-      <a:lt1>
-        <a:srgbClr val="FFFFFF"/>
-      </a:lt1>
-      <a:dk2>
-        <a:srgbClr val="595959"/>
-      </a:dk2>
-      <a:lt2>
-        <a:srgbClr val="EEEEEE"/>
-      </a:lt2>
-      <a:accent1>
-        <a:srgbClr val="4285F4"/>
-      </a:accent1>
-      <a:accent2>
-        <a:srgbClr val="212121"/>
-      </a:accent2>
-      <a:accent3>
-        <a:srgbClr val="78909C"/>
-      </a:accent3>
-      <a:accent4>
-        <a:srgbClr val="FFAB40"/>
-      </a:accent4>
-      <a:accent5>
-        <a:srgbClr val="0097A7"/>
-      </a:accent5>
-      <a:accent6>
-        <a:srgbClr val="EEFF41"/>
-      </a:accent6>
-      <a:hlink>
-        <a:srgbClr val="0097A7"/>
-      </a:hlink>
-      <a:folHlink>
-        <a:srgbClr val="0097A7"/>
-      </a:folHlink>
-    </a:clrScheme>
-    <a:fontScheme name="Office">
-      <a:majorFont>
-        <a:latin typeface="Arial"/>
-        <a:ea typeface=""/>
-        <a:cs typeface=""/>
-        <a:font script="Jpan" typeface="ＭＳ Ｐゴシック"/>
-        <a:font script="Hang" typeface="맑은 고딕"/>
-        <a:font script="Hans" typeface="宋体"/>
-        <a:font script="Hant" typeface="新細明體"/>
-        <a:font script="Arab" typeface="Times New Roman"/>
-        <a:font script="Hebr" typeface="Times New Roman"/>
-        <a:font script="Thai" typeface="Angsana New"/>
-        <a:font script="Ethi" typeface="Nyala"/>
-        <a:font script="Beng" typeface="Vrinda"/>
-        <a:font script="Gujr" typeface="Shruti"/>
-        <a:font script="Khmr" typeface="MoolBoran"/>
-        <a:font script="Knda" typeface="Tunga"/>
-        <a:font script="Guru" typeface="Raavi"/>
-        <a:font script="Cans" typeface="Euphemia"/>
-        <a:font script="Cher" typeface="Plantagenet Cherokee"/>
-        <a:font script="Yiii" typeface="Microsoft Yi Baiti"/>
-        <a:font script="Tibt" typeface="Microsoft Himalaya"/>
-        <a:font script="Thaa" typeface="MV Boli"/>
-        <a:font script="Deva" typeface="Mangal"/>
-        <a:font script="Telu" typeface="Gautami"/>
-        <a:font script="Taml" typeface="Latha"/>
-        <a:font script="Syrc" typeface="Estrangelo Edessa"/>
-        <a:font script="Orya" typeface="Kalinga"/>
-        <a:font script="Mlym" typeface="Kartika"/>
-        <a:font script="Laoo" typeface="DokChampa"/>
-        <a:font script="Sinh" typeface="Iskoola Pota"/>
-        <a:font script="Mong" typeface="Mongolian Baiti"/>
-        <a:font script="Viet" typeface="Times New Roman"/>
-        <a:font script="Uigh" typeface="Microsoft Uighur"/>
-        <a:font script="Geor" typeface="Sylfaen"/>
-      </a:majorFont>
-      <a:minorFont>
-        <a:latin typeface="Arial"/>
-        <a:ea typeface=""/>
-        <a:cs typeface=""/>
-        <a:font script="Jpan" typeface="ＭＳ Ｐゴシック"/>
-        <a:font script="Hang" typeface="맑은 고딕"/>
-        <a:font script="Hans" typeface="宋体"/>
-        <a:font script="Hant" typeface="新細明體"/>
-        <a:font script="Arab" typeface="Arial"/>
-        <a:font script="Hebr" typeface="Arial"/>
-        <a:font script="Thai" typeface="Cordia New"/>
-        <a:font script="Ethi" typeface="Nyala"/>
-        <a:font script="Beng" typeface="Vrinda"/>
-        <a:font script="Gujr" typeface="Shruti"/>
-        <a:font script="Khmr" typeface="DaunPenh"/>
-        <a:font script="Knda" typeface="Tunga"/>
-        <a:font script="Guru" typeface="Raavi"/>
-        <a:font script="Cans" typeface="Euphemia"/>
-        <a:font script="Cher" typeface="Plantagenet Cherokee"/>
-        <a:font script="Yiii" typeface="Microsoft Yi Baiti"/>
-        <a:font script="Tibt" typeface="Microsoft Himalaya"/>
-        <a:font script="Thaa" typeface="MV Boli"/>
-        <a:font script="Deva" typeface="Mangal"/>
-        <a:font script="Telu" typeface="Gautami"/>
-        <a:font script="Taml" typeface="Latha"/>
-        <a:font script="Syrc" typeface="Estrangelo Edessa"/>
-        <a:font script="Orya" typeface="Kalinga"/>
-        <a:font script="Mlym" typeface="Kartika"/>
-        <a:font script="Laoo" typeface="DokChampa"/>
-        <a:font script="Sinh" typeface="Iskoola Pota"/>
-        <a:font script="Mong" typeface="Mongolian Baiti"/>
-        <a:font script="Viet" typeface="Arial"/>
-        <a:font script="Uigh" typeface="Microsoft Uighur"/>
-        <a:font script="Geor" typeface="Sylfaen"/>
-      </a:minorFont>
-    </a:fontScheme>
-    <a:fmtScheme name="Office">
-      <a:fillStyleLst>
-        <a:solidFill>
-          <a:schemeClr val="phClr"/>
-        </a:solidFill>
-        <a:gradFill rotWithShape="1">
-          <a:gsLst>
-            <a:gs pos="0">
-              <a:schemeClr val="phClr">
-                <a:tint val="50000"/>
-                <a:satMod val="300000"/>
-              </a:schemeClr>
-            </a:gs>
-            <a:gs pos="35000">
-              <a:schemeClr val="phClr">
-                <a:tint val="37000"/>
-                <a:satMod val="300000"/>
-              </a:schemeClr>
-            </a:gs>
-            <a:gs pos="100000">
-              <a:schemeClr val="phClr">
-                <a:tint val="15000"/>
-                <a:satMod val="350000"/>
-              </a:schemeClr>
-            </a:gs>
-          </a:gsLst>
-          <a:lin ang="16200000" scaled="1"/>
-        </a:gradFill>
-        <a:gradFill rotWithShape="1">
-          <a:gsLst>
-            <a:gs pos="0">
-              <a:schemeClr val="phClr">
-                <a:tint val="100000"/>
-                <a:shade val="100000"/>
-                <a:satMod val="130000"/>
-              </a:schemeClr>
-            </a:gs>
-            <a:gs pos="100000">
-              <a:schemeClr val="phClr">
-                <a:tint val="50000"/>
-                <a:shade val="100000"/>
-                <a:satMod val="350000"/>
-              </a:schemeClr>
-            </a:gs>
-          </a:gsLst>
-          <a:lin ang="16200000" scaled="0"/>
-        </a:gradFill>
-      </a:fillStyleLst>
-      <a:lnStyleLst>
-        <a:ln w="9525" cap="flat" cmpd="sng" algn="ctr">
-          <a:solidFill>
-            <a:schemeClr val="phClr">
-              <a:shade val="95000"/>
-              <a:satMod val="105000"/>
-            </a:schemeClr>
-          </a:solidFill>
-          <a:prstDash val="solid"/>
-        </a:ln>
-        <a:ln w="25400" cap="flat" cmpd="sng" algn="ctr">
-          <a:solidFill>
-            <a:schemeClr val="phClr"/>
-          </a:solidFill>
-          <a:prstDash val="solid"/>
-        </a:ln>
-        <a:ln w="38100" cap="flat" cmpd="sng" algn="ctr">
-          <a:solidFill>
-            <a:schemeClr val="phClr"/>
-          </a:solidFill>
-          <a:prstDash val="solid"/>
-        </a:ln>
-      </a:lnStyleLst>
-      <a:effectStyleLst>
-        <a:effectStyle>
-          <a:effectLst>
-            <a:outerShdw blurRad="40000" dist="20000" dir="5400000" rotWithShape="0">
-              <a:srgbClr val="000000">
-                <a:alpha val="38000"/>
-              </a:srgbClr>
-            </a:outerShdw>
-          </a:effectLst>
-        </a:effectStyle>
-        <a:effectStyle>
-          <a:effectLst>
-            <a:outerShdw blurRad="40000" dist="23000" dir="5400000" rotWithShape="0">
-              <a:srgbClr val="000000">
-                <a:alpha val="35000"/>
-              </a:srgbClr>
-            </a:outerShdw>
-          </a:effectLst>
-        </a:effectStyle>
-        <a:effectStyle>
-          <a:effectLst>
-            <a:outerShdw blurRad="40000" dist="23000" dir="5400000" rotWithShape="0">
-              <a:srgbClr val="000000">
-                <a:alpha val="35000"/>
-              </a:srgbClr>
-            </a:outerShdw>
-          </a:effectLst>
-          <a:scene3d>
-            <a:camera prst="orthographicFront">
-              <a:rot lat="0" lon="0" rev="0"/>
-            </a:camera>
-            <a:lightRig rig="threePt" dir="t">
-              <a:rot lat="0" lon="0" rev="1200000"/>
-            </a:lightRig>
-          </a:scene3d>
-          <a:sp3d>
-            <a:bevelT w="63500" h="25400"/>
-          </a:sp3d>
-        </a:effectStyle>
-      </a:effectStyleLst>
-      <a:bgFillStyleLst>
-        <a:solidFill>
-          <a:schemeClr val="phClr"/>
-        </a:solidFill>
-        <a:gradFill rotWithShape="1">
-          <a:gsLst>
-            <a:gs pos="0">
-              <a:schemeClr val="phClr">
-                <a:tint val="40000"/>
-                <a:satMod val="350000"/>
-              </a:schemeClr>
-            </a:gs>
-            <a:gs pos="40000">
-              <a:schemeClr val="phClr">
-                <a:tint val="45000"/>
-                <a:shade val="99000"/>
-                <a:satMod val="350000"/>
-              </a:schemeClr>
-            </a:gs>
-            <a:gs pos="100000">
-              <a:schemeClr val="phClr">
-                <a:shade val="20000"/>
-                <a:satMod val="255000"/>
-              </a:schemeClr>
-            </a:gs>
-          </a:gsLst>
-          <a:path path="circle">
-            <a:fillToRect l="50000" t="-80000" r="50000" b="180000"/>
-          </a:path>
-        </a:gradFill>
-        <a:gradFill rotWithShape="1">
-          <a:gsLst>
-            <a:gs pos="0">
-              <a:schemeClr val="phClr">
-                <a:tint val="80000"/>
-                <a:satMod val="300000"/>
-              </a:schemeClr>
-            </a:gs>
-            <a:gs pos="100000">
-              <a:schemeClr val="phClr">
-                <a:shade val="30000"/>
-                <a:satMod val="200000"/>
-              </a:schemeClr>
-            </a:gs>
-          </a:gsLst>
-          <a:path path="circle">
-            <a:fillToRect l="50000" t="50000" r="50000" b="50000"/>
-          </a:path>
-        </a:gradFill>
-      </a:bgFillStyleLst>
-    </a:fmtScheme>
-  </a:themeElements>
+  <a:objectDefaults/>
+  <a:extraClrSchemeLst/>
 </a:theme>
 </file>
--- a/Relatórios/ASMA/PPT/PPT_ASMA _v1.pptx
+++ b/Relatórios/ASMA/PPT/PPT_ASMA _v1.pptx
@@ -17,11 +17,11 @@
     <p:sldId id="262" r:id="rId8"/>
     <p:sldId id="263" r:id="rId9"/>
     <p:sldId id="264" r:id="rId10"/>
-    <p:sldId id="265" r:id="rId11"/>
-    <p:sldId id="266" r:id="rId12"/>
+    <p:sldId id="266" r:id="rId11"/>
+    <p:sldId id="265" r:id="rId12"/>
     <p:sldId id="267" r:id="rId13"/>
-    <p:sldId id="268" r:id="rId14"/>
-    <p:sldId id="269" r:id="rId15"/>
+    <p:sldId id="269" r:id="rId14"/>
+    <p:sldId id="268" r:id="rId15"/>
     <p:sldId id="270" r:id="rId16"/>
     <p:sldId id="271" r:id="rId17"/>
     <p:sldId id="272" r:id="rId18"/>
@@ -826,6 +826,110 @@
   <p:cSld>
     <p:spTree>
       <p:nvGrpSpPr>
+        <p:cNvPr id="1" name="Shape 122"/>
+        <p:cNvGrpSpPr/>
+        <p:nvPr/>
+      </p:nvGrpSpPr>
+      <p:grpSpPr>
+        <a:xfrm>
+          <a:off x="0" y="0"/>
+          <a:ext cx="0" cy="0"/>
+          <a:chOff x="0" y="0"/>
+          <a:chExt cx="0" cy="0"/>
+        </a:xfrm>
+      </p:grpSpPr>
+      <p:sp>
+        <p:nvSpPr>
+          <p:cNvPr id="123" name="Google Shape;123;g3e5a2f08be3_0_136:notes"/>
+          <p:cNvSpPr>
+            <a:spLocks noGrp="1" noRot="1" noChangeAspect="1"/>
+          </p:cNvSpPr>
+          <p:nvPr>
+            <p:ph type="sldImg" idx="2"/>
+          </p:nvPr>
+        </p:nvSpPr>
+        <p:spPr>
+          <a:xfrm>
+            <a:off x="381000" y="685800"/>
+            <a:ext cx="6096000" cy="3429000"/>
+          </a:xfrm>
+          <a:custGeom>
+            <a:avLst/>
+            <a:gdLst/>
+            <a:ahLst/>
+            <a:cxnLst/>
+            <a:rect l="l" t="t" r="r" b="b"/>
+            <a:pathLst>
+              <a:path w="120000" h="120000" extrusionOk="0">
+                <a:moveTo>
+                  <a:pt x="0" y="0"/>
+                </a:moveTo>
+                <a:lnTo>
+                  <a:pt x="120000" y="0"/>
+                </a:lnTo>
+                <a:lnTo>
+                  <a:pt x="120000" y="120000"/>
+                </a:lnTo>
+                <a:lnTo>
+                  <a:pt x="0" y="120000"/>
+                </a:lnTo>
+                <a:close/>
+              </a:path>
+            </a:pathLst>
+          </a:custGeom>
+        </p:spPr>
+      </p:sp>
+      <p:sp>
+        <p:nvSpPr>
+          <p:cNvPr id="124" name="Google Shape;124;g3e5a2f08be3_0_136:notes"/>
+          <p:cNvSpPr txBox="1">
+            <a:spLocks noGrp="1"/>
+          </p:cNvSpPr>
+          <p:nvPr>
+            <p:ph type="body" idx="1"/>
+          </p:nvPr>
+        </p:nvSpPr>
+        <p:spPr>
+          <a:xfrm>
+            <a:off x="685800" y="4343400"/>
+            <a:ext cx="5486400" cy="4114800"/>
+          </a:xfrm>
+          <a:prstGeom prst="rect">
+            <a:avLst/>
+          </a:prstGeom>
+        </p:spPr>
+        <p:txBody>
+          <a:bodyPr spcFirstLastPara="1" wrap="square" lIns="91425" tIns="91425" rIns="91425" bIns="91425" anchor="t" anchorCtr="0">
+            <a:noAutofit/>
+          </a:bodyPr>
+          <a:lstStyle/>
+          <a:p>
+            <a:pPr marL="0" lvl="0" indent="0" algn="l" rtl="0">
+              <a:spcBef>
+                <a:spcPts val="0"/>
+              </a:spcBef>
+              <a:spcAft>
+                <a:spcPts val="0"/>
+              </a:spcAft>
+              <a:buNone/>
+            </a:pPr>
+            <a:endParaRPr/>
+          </a:p>
+        </p:txBody>
+      </p:sp>
+    </p:spTree>
+  </p:cSld>
+  <p:clrMapOvr>
+    <a:masterClrMapping/>
+  </p:clrMapOvr>
+</p:notes>
+</file>
+
+<file path=ppt/notesSlides/notesSlide11.xml><?xml version="1.0" encoding="utf-8"?>
+<p:notes xmlns:a="http://schemas.openxmlformats.org/drawingml/2006/main" xmlns:r="http://schemas.openxmlformats.org/officeDocument/2006/relationships" xmlns:p="http://schemas.openxmlformats.org/presentationml/2006/main" showMasterSp="0" showMasterPhAnim="0">
+  <p:cSld>
+    <p:spTree>
+      <p:nvGrpSpPr>
         <p:cNvPr id="1" name="Shape 116"/>
         <p:cNvGrpSpPr/>
         <p:nvPr/>
@@ -882,110 +986,6 @@
       <p:sp>
         <p:nvSpPr>
           <p:cNvPr id="118" name="Google Shape;118;g3e5a2f08be3_0_130:notes"/>
-          <p:cNvSpPr txBox="1">
-            <a:spLocks noGrp="1"/>
-          </p:cNvSpPr>
-          <p:nvPr>
-            <p:ph type="body" idx="1"/>
-          </p:nvPr>
-        </p:nvSpPr>
-        <p:spPr>
-          <a:xfrm>
-            <a:off x="685800" y="4343400"/>
-            <a:ext cx="5486400" cy="4114800"/>
-          </a:xfrm>
-          <a:prstGeom prst="rect">
-            <a:avLst/>
-          </a:prstGeom>
-        </p:spPr>
-        <p:txBody>
-          <a:bodyPr spcFirstLastPara="1" wrap="square" lIns="91425" tIns="91425" rIns="91425" bIns="91425" anchor="t" anchorCtr="0">
-            <a:noAutofit/>
-          </a:bodyPr>
-          <a:lstStyle/>
-          <a:p>
-            <a:pPr marL="0" lvl="0" indent="0" algn="l" rtl="0">
-              <a:spcBef>
-                <a:spcPts val="0"/>
-              </a:spcBef>
-              <a:spcAft>
-                <a:spcPts val="0"/>
-              </a:spcAft>
-              <a:buNone/>
-            </a:pPr>
-            <a:endParaRPr/>
-          </a:p>
-        </p:txBody>
-      </p:sp>
-    </p:spTree>
-  </p:cSld>
-  <p:clrMapOvr>
-    <a:masterClrMapping/>
-  </p:clrMapOvr>
-</p:notes>
-</file>
-
-<file path=ppt/notesSlides/notesSlide11.xml><?xml version="1.0" encoding="utf-8"?>
-<p:notes xmlns:a="http://schemas.openxmlformats.org/drawingml/2006/main" xmlns:r="http://schemas.openxmlformats.org/officeDocument/2006/relationships" xmlns:p="http://schemas.openxmlformats.org/presentationml/2006/main" showMasterSp="0" showMasterPhAnim="0">
-  <p:cSld>
-    <p:spTree>
-      <p:nvGrpSpPr>
-        <p:cNvPr id="1" name="Shape 122"/>
-        <p:cNvGrpSpPr/>
-        <p:nvPr/>
-      </p:nvGrpSpPr>
-      <p:grpSpPr>
-        <a:xfrm>
-          <a:off x="0" y="0"/>
-          <a:ext cx="0" cy="0"/>
-          <a:chOff x="0" y="0"/>
-          <a:chExt cx="0" cy="0"/>
-        </a:xfrm>
-      </p:grpSpPr>
-      <p:sp>
-        <p:nvSpPr>
-          <p:cNvPr id="123" name="Google Shape;123;g3e5a2f08be3_0_136:notes"/>
-          <p:cNvSpPr>
-            <a:spLocks noGrp="1" noRot="1" noChangeAspect="1"/>
-          </p:cNvSpPr>
-          <p:nvPr>
-            <p:ph type="sldImg" idx="2"/>
-          </p:nvPr>
-        </p:nvSpPr>
-        <p:spPr>
-          <a:xfrm>
-            <a:off x="381300" y="685800"/>
-            <a:ext cx="6096000" cy="3429000"/>
-          </a:xfrm>
-          <a:custGeom>
-            <a:avLst/>
-            <a:gdLst/>
-            <a:ahLst/>
-            <a:cxnLst/>
-            <a:rect l="l" t="t" r="r" b="b"/>
-            <a:pathLst>
-              <a:path w="120000" h="120000" extrusionOk="0">
-                <a:moveTo>
-                  <a:pt x="0" y="0"/>
-                </a:moveTo>
-                <a:lnTo>
-                  <a:pt x="120000" y="0"/>
-                </a:lnTo>
-                <a:lnTo>
-                  <a:pt x="120000" y="120000"/>
-                </a:lnTo>
-                <a:lnTo>
-                  <a:pt x="0" y="120000"/>
-                </a:lnTo>
-                <a:close/>
-              </a:path>
-            </a:pathLst>
-          </a:custGeom>
-        </p:spPr>
-      </p:sp>
-      <p:sp>
-        <p:nvSpPr>
-          <p:cNvPr id="124" name="Google Shape;124;g3e5a2f08be3_0_136:notes"/>
           <p:cNvSpPr txBox="1">
             <a:spLocks noGrp="1"/>
           </p:cNvSpPr>
@@ -1121,7 +1121,7 @@
               </a:spcAft>
               <a:buNone/>
             </a:pPr>
-            <a:endParaRPr/>
+            <a:endParaRPr dirty="0"/>
           </a:p>
         </p:txBody>
       </p:sp>
@@ -1134,6 +1134,110 @@
 </file>
 
 <file path=ppt/notesSlides/notesSlide13.xml><?xml version="1.0" encoding="utf-8"?>
+<p:notes xmlns:a="http://schemas.openxmlformats.org/drawingml/2006/main" xmlns:r="http://schemas.openxmlformats.org/officeDocument/2006/relationships" xmlns:p="http://schemas.openxmlformats.org/presentationml/2006/main" showMasterSp="0" showMasterPhAnim="0">
+  <p:cSld>
+    <p:spTree>
+      <p:nvGrpSpPr>
+        <p:cNvPr id="1" name="Shape 140"/>
+        <p:cNvGrpSpPr/>
+        <p:nvPr/>
+      </p:nvGrpSpPr>
+      <p:grpSpPr>
+        <a:xfrm>
+          <a:off x="0" y="0"/>
+          <a:ext cx="0" cy="0"/>
+          <a:chOff x="0" y="0"/>
+          <a:chExt cx="0" cy="0"/>
+        </a:xfrm>
+      </p:grpSpPr>
+      <p:sp>
+        <p:nvSpPr>
+          <p:cNvPr id="141" name="Google Shape;141;g3e5a2f08be3_0_151:notes"/>
+          <p:cNvSpPr>
+            <a:spLocks noGrp="1" noRot="1" noChangeAspect="1"/>
+          </p:cNvSpPr>
+          <p:nvPr>
+            <p:ph type="sldImg" idx="2"/>
+          </p:nvPr>
+        </p:nvSpPr>
+        <p:spPr>
+          <a:xfrm>
+            <a:off x="381000" y="685800"/>
+            <a:ext cx="6096000" cy="3429000"/>
+          </a:xfrm>
+          <a:custGeom>
+            <a:avLst/>
+            <a:gdLst/>
+            <a:ahLst/>
+            <a:cxnLst/>
+            <a:rect l="l" t="t" r="r" b="b"/>
+            <a:pathLst>
+              <a:path w="120000" h="120000" extrusionOk="0">
+                <a:moveTo>
+                  <a:pt x="0" y="0"/>
+                </a:moveTo>
+                <a:lnTo>
+                  <a:pt x="120000" y="0"/>
+                </a:lnTo>
+                <a:lnTo>
+                  <a:pt x="120000" y="120000"/>
+                </a:lnTo>
+                <a:lnTo>
+                  <a:pt x="0" y="120000"/>
+                </a:lnTo>
+                <a:close/>
+              </a:path>
+            </a:pathLst>
+          </a:custGeom>
+        </p:spPr>
+      </p:sp>
+      <p:sp>
+        <p:nvSpPr>
+          <p:cNvPr id="142" name="Google Shape;142;g3e5a2f08be3_0_151:notes"/>
+          <p:cNvSpPr txBox="1">
+            <a:spLocks noGrp="1"/>
+          </p:cNvSpPr>
+          <p:nvPr>
+            <p:ph type="body" idx="1"/>
+          </p:nvPr>
+        </p:nvSpPr>
+        <p:spPr>
+          <a:xfrm>
+            <a:off x="685800" y="4343400"/>
+            <a:ext cx="5486400" cy="4114800"/>
+          </a:xfrm>
+          <a:prstGeom prst="rect">
+            <a:avLst/>
+          </a:prstGeom>
+        </p:spPr>
+        <p:txBody>
+          <a:bodyPr spcFirstLastPara="1" wrap="square" lIns="91425" tIns="91425" rIns="91425" bIns="91425" anchor="t" anchorCtr="0">
+            <a:noAutofit/>
+          </a:bodyPr>
+          <a:lstStyle/>
+          <a:p>
+            <a:pPr marL="0" lvl="0" indent="0" algn="l" rtl="0">
+              <a:spcBef>
+                <a:spcPts val="0"/>
+              </a:spcBef>
+              <a:spcAft>
+                <a:spcPts val="0"/>
+              </a:spcAft>
+              <a:buNone/>
+            </a:pPr>
+            <a:endParaRPr dirty="0"/>
+          </a:p>
+        </p:txBody>
+      </p:sp>
+    </p:spTree>
+  </p:cSld>
+  <p:clrMapOvr>
+    <a:masterClrMapping/>
+  </p:clrMapOvr>
+</p:notes>
+</file>
+
+<file path=ppt/notesSlides/notesSlide14.xml><?xml version="1.0" encoding="utf-8"?>
 <p:notes xmlns:a="http://schemas.openxmlformats.org/drawingml/2006/main" xmlns:r="http://schemas.openxmlformats.org/officeDocument/2006/relationships" xmlns:p="http://schemas.openxmlformats.org/presentationml/2006/main" showMasterSp="0" showMasterPhAnim="0">
   <p:cSld>
     <p:spTree>
@@ -1194,110 +1298,6 @@
       <p:sp>
         <p:nvSpPr>
           <p:cNvPr id="136" name="Google Shape;136;g3e5a2f08be3_0_147:notes"/>
-          <p:cNvSpPr txBox="1">
-            <a:spLocks noGrp="1"/>
-          </p:cNvSpPr>
-          <p:nvPr>
-            <p:ph type="body" idx="1"/>
-          </p:nvPr>
-        </p:nvSpPr>
-        <p:spPr>
-          <a:xfrm>
-            <a:off x="685800" y="4343400"/>
-            <a:ext cx="5486400" cy="4114800"/>
-          </a:xfrm>
-          <a:prstGeom prst="rect">
-            <a:avLst/>
-          </a:prstGeom>
-        </p:spPr>
-        <p:txBody>
-          <a:bodyPr spcFirstLastPara="1" wrap="square" lIns="91425" tIns="91425" rIns="91425" bIns="91425" anchor="t" anchorCtr="0">
-            <a:noAutofit/>
-          </a:bodyPr>
-          <a:lstStyle/>
-          <a:p>
-            <a:pPr marL="0" lvl="0" indent="0" algn="l" rtl="0">
-              <a:spcBef>
-                <a:spcPts val="0"/>
-              </a:spcBef>
-              <a:spcAft>
-                <a:spcPts val="0"/>
-              </a:spcAft>
-              <a:buNone/>
-            </a:pPr>
-            <a:endParaRPr/>
-          </a:p>
-        </p:txBody>
-      </p:sp>
-    </p:spTree>
-  </p:cSld>
-  <p:clrMapOvr>
-    <a:masterClrMapping/>
-  </p:clrMapOvr>
-</p:notes>
-</file>
-
-<file path=ppt/notesSlides/notesSlide14.xml><?xml version="1.0" encoding="utf-8"?>
-<p:notes xmlns:a="http://schemas.openxmlformats.org/drawingml/2006/main" xmlns:r="http://schemas.openxmlformats.org/officeDocument/2006/relationships" xmlns:p="http://schemas.openxmlformats.org/presentationml/2006/main" showMasterSp="0" showMasterPhAnim="0">
-  <p:cSld>
-    <p:spTree>
-      <p:nvGrpSpPr>
-        <p:cNvPr id="1" name="Shape 140"/>
-        <p:cNvGrpSpPr/>
-        <p:nvPr/>
-      </p:nvGrpSpPr>
-      <p:grpSpPr>
-        <a:xfrm>
-          <a:off x="0" y="0"/>
-          <a:ext cx="0" cy="0"/>
-          <a:chOff x="0" y="0"/>
-          <a:chExt cx="0" cy="0"/>
-        </a:xfrm>
-      </p:grpSpPr>
-      <p:sp>
-        <p:nvSpPr>
-          <p:cNvPr id="141" name="Google Shape;141;g3e5a2f08be3_0_151:notes"/>
-          <p:cNvSpPr>
-            <a:spLocks noGrp="1" noRot="1" noChangeAspect="1"/>
-          </p:cNvSpPr>
-          <p:nvPr>
-            <p:ph type="sldImg" idx="2"/>
-          </p:nvPr>
-        </p:nvSpPr>
-        <p:spPr>
-          <a:xfrm>
-            <a:off x="381300" y="685800"/>
-            <a:ext cx="6096000" cy="3429000"/>
-          </a:xfrm>
-          <a:custGeom>
-            <a:avLst/>
-            <a:gdLst/>
-            <a:ahLst/>
-            <a:cxnLst/>
-            <a:rect l="l" t="t" r="r" b="b"/>
-            <a:pathLst>
-              <a:path w="120000" h="120000" extrusionOk="0">
-                <a:moveTo>
-                  <a:pt x="0" y="0"/>
-                </a:moveTo>
-                <a:lnTo>
-                  <a:pt x="120000" y="0"/>
-                </a:lnTo>
-                <a:lnTo>
-                  <a:pt x="120000" y="120000"/>
-                </a:lnTo>
-                <a:lnTo>
-                  <a:pt x="0" y="120000"/>
-                </a:lnTo>
-                <a:close/>
-              </a:path>
-            </a:pathLst>
-          </a:custGeom>
-        </p:spPr>
-      </p:sp>
-      <p:sp>
-        <p:nvSpPr>
-          <p:cNvPr id="142" name="Google Shape;142;g3e5a2f08be3_0_151:notes"/>
           <p:cNvSpPr txBox="1">
             <a:spLocks noGrp="1"/>
           </p:cNvSpPr>
@@ -1578,7 +1578,7 @@
         </p:nvSpPr>
         <p:spPr>
           <a:xfrm>
-            <a:off x="381300" y="685800"/>
+            <a:off x="381000" y="685800"/>
             <a:ext cx="6096000" cy="3429000"/>
           </a:xfrm>
           <a:custGeom>
@@ -1786,7 +1786,7 @@
         </p:nvSpPr>
         <p:spPr>
           <a:xfrm>
-            <a:off x="381300" y="685800"/>
+            <a:off x="381000" y="685800"/>
             <a:ext cx="6096000" cy="3429000"/>
           </a:xfrm>
           <a:custGeom>
@@ -1890,7 +1890,7 @@
         </p:nvSpPr>
         <p:spPr>
           <a:xfrm>
-            <a:off x="381300" y="685800"/>
+            <a:off x="381000" y="685800"/>
             <a:ext cx="6096000" cy="3429000"/>
           </a:xfrm>
           <a:custGeom>
@@ -1994,7 +1994,7 @@
         </p:nvSpPr>
         <p:spPr>
           <a:xfrm>
-            <a:off x="381300" y="685800"/>
+            <a:off x="381000" y="685800"/>
             <a:ext cx="6096000" cy="3429000"/>
           </a:xfrm>
           <a:custGeom>
@@ -2098,7 +2098,7 @@
         </p:nvSpPr>
         <p:spPr>
           <a:xfrm>
-            <a:off x="381300" y="685800"/>
+            <a:off x="381000" y="685800"/>
             <a:ext cx="6096000" cy="3429000"/>
           </a:xfrm>
           <a:custGeom>
@@ -2202,7 +2202,7 @@
         </p:nvSpPr>
         <p:spPr>
           <a:xfrm>
-            <a:off x="381300" y="685800"/>
+            <a:off x="381000" y="685800"/>
             <a:ext cx="6096000" cy="3429000"/>
           </a:xfrm>
           <a:custGeom>
@@ -2306,7 +2306,7 @@
         </p:nvSpPr>
         <p:spPr>
           <a:xfrm>
-            <a:off x="381300" y="685800"/>
+            <a:off x="381000" y="685800"/>
             <a:ext cx="6096000" cy="3429000"/>
           </a:xfrm>
           <a:custGeom>
@@ -2410,7 +2410,7 @@
         </p:nvSpPr>
         <p:spPr>
           <a:xfrm>
-            <a:off x="381300" y="685800"/>
+            <a:off x="381000" y="685800"/>
             <a:ext cx="6096000" cy="3429000"/>
           </a:xfrm>
           <a:custGeom>
@@ -7303,11 +7303,7 @@
             </a:pPr>
             <a:r>
               <a:rPr lang="pt-PT" sz="4200" dirty="0"/>
-              <a:t>Envelhecimento </a:t>
-            </a:r>
-            <a:r>
-              <a:rPr lang="pt-PT" sz="4200" dirty="0" err="1"/>
-              <a:t>activo</a:t>
+              <a:t>Envelhecimento ativo</a:t>
             </a:r>
             <a:endParaRPr sz="4200" dirty="0"/>
           </a:p>
@@ -7324,15 +7320,7 @@
             </a:pPr>
             <a:r>
               <a:rPr lang="pt-PT" sz="2650" dirty="0"/>
-              <a:t>Agentes e Sistemas </a:t>
-            </a:r>
-            <a:r>
-              <a:rPr lang="pt-PT" sz="2650" dirty="0" err="1"/>
-              <a:t>MultiAgentes</a:t>
-            </a:r>
-            <a:r>
-              <a:rPr lang="pt-PT" sz="2650" dirty="0"/>
-              <a:t> -</a:t>
+              <a:t>Agentes e Sistemas Multiagente -</a:t>
             </a:r>
             <a:endParaRPr sz="2650" dirty="0"/>
           </a:p>
@@ -7562,6 +7550,101 @@
 </file>
 
 <file path=ppt/slides/slide10.xml><?xml version="1.0" encoding="utf-8"?>
+<p:sld xmlns:a="http://schemas.openxmlformats.org/drawingml/2006/main" xmlns:r="http://schemas.openxmlformats.org/officeDocument/2006/relationships" xmlns:p="http://schemas.openxmlformats.org/presentationml/2006/main">
+  <p:cSld>
+    <p:spTree>
+      <p:nvGrpSpPr>
+        <p:cNvPr id="1" name="Shape 125"/>
+        <p:cNvGrpSpPr/>
+        <p:nvPr/>
+      </p:nvGrpSpPr>
+      <p:grpSpPr>
+        <a:xfrm>
+          <a:off x="0" y="0"/>
+          <a:ext cx="0" cy="0"/>
+          <a:chOff x="0" y="0"/>
+          <a:chExt cx="0" cy="0"/>
+        </a:xfrm>
+      </p:grpSpPr>
+      <p:sp>
+        <p:nvSpPr>
+          <p:cNvPr id="126" name="Google Shape;126;p23"/>
+          <p:cNvSpPr txBox="1">
+            <a:spLocks noGrp="1"/>
+          </p:cNvSpPr>
+          <p:nvPr>
+            <p:ph type="title"/>
+          </p:nvPr>
+        </p:nvSpPr>
+        <p:spPr>
+          <a:xfrm>
+            <a:off x="311700" y="445025"/>
+            <a:ext cx="8520600" cy="572700"/>
+          </a:xfrm>
+          <a:prstGeom prst="rect">
+            <a:avLst/>
+          </a:prstGeom>
+        </p:spPr>
+        <p:txBody>
+          <a:bodyPr spcFirstLastPara="1" wrap="square" lIns="91425" tIns="91425" rIns="91425" bIns="91425" anchor="t" anchorCtr="0">
+            <a:normAutofit fontScale="90000"/>
+          </a:bodyPr>
+          <a:lstStyle/>
+          <a:p>
+            <a:pPr marL="0" lvl="0" indent="0" algn="l" rtl="0">
+              <a:spcBef>
+                <a:spcPts val="0"/>
+              </a:spcBef>
+              <a:spcAft>
+                <a:spcPts val="0"/>
+              </a:spcAft>
+              <a:buNone/>
+            </a:pPr>
+            <a:r>
+              <a:rPr lang="pt-PT"/>
+              <a:t>Diagrama de Colaboração: Sensor Activity</a:t>
+            </a:r>
+            <a:endParaRPr/>
+          </a:p>
+        </p:txBody>
+      </p:sp>
+      <p:pic>
+        <p:nvPicPr>
+          <p:cNvPr id="127" name="Google Shape;127;p23" title="Dance4Life_Collab_SA.png"/>
+          <p:cNvPicPr preferRelativeResize="0"/>
+          <p:nvPr/>
+        </p:nvPicPr>
+        <p:blipFill>
+          <a:blip r:embed="rId3">
+            <a:alphaModFix/>
+          </a:blip>
+          <a:stretch>
+            <a:fillRect/>
+          </a:stretch>
+        </p:blipFill>
+        <p:spPr>
+          <a:xfrm>
+            <a:off x="3179038" y="1115075"/>
+            <a:ext cx="2785937" cy="3820974"/>
+          </a:xfrm>
+          <a:prstGeom prst="rect">
+            <a:avLst/>
+          </a:prstGeom>
+          <a:noFill/>
+          <a:ln>
+            <a:noFill/>
+          </a:ln>
+        </p:spPr>
+      </p:pic>
+    </p:spTree>
+  </p:cSld>
+  <p:clrMapOvr>
+    <a:masterClrMapping/>
+  </p:clrMapOvr>
+</p:sld>
+</file>
+
+<file path=ppt/slides/slide11.xml><?xml version="1.0" encoding="utf-8"?>
 <p:sld xmlns:a="http://schemas.openxmlformats.org/drawingml/2006/main" xmlns:r="http://schemas.openxmlformats.org/officeDocument/2006/relationships" xmlns:p="http://schemas.openxmlformats.org/presentationml/2006/main">
   <p:cSld>
     <p:spTree>
@@ -7638,101 +7721,6 @@
           <a:xfrm>
             <a:off x="1852213" y="1177975"/>
             <a:ext cx="5439583" cy="3820975"/>
-          </a:xfrm>
-          <a:prstGeom prst="rect">
-            <a:avLst/>
-          </a:prstGeom>
-          <a:noFill/>
-          <a:ln>
-            <a:noFill/>
-          </a:ln>
-        </p:spPr>
-      </p:pic>
-    </p:spTree>
-  </p:cSld>
-  <p:clrMapOvr>
-    <a:masterClrMapping/>
-  </p:clrMapOvr>
-</p:sld>
-</file>
-
-<file path=ppt/slides/slide11.xml><?xml version="1.0" encoding="utf-8"?>
-<p:sld xmlns:a="http://schemas.openxmlformats.org/drawingml/2006/main" xmlns:r="http://schemas.openxmlformats.org/officeDocument/2006/relationships" xmlns:p="http://schemas.openxmlformats.org/presentationml/2006/main">
-  <p:cSld>
-    <p:spTree>
-      <p:nvGrpSpPr>
-        <p:cNvPr id="1" name="Shape 125"/>
-        <p:cNvGrpSpPr/>
-        <p:nvPr/>
-      </p:nvGrpSpPr>
-      <p:grpSpPr>
-        <a:xfrm>
-          <a:off x="0" y="0"/>
-          <a:ext cx="0" cy="0"/>
-          <a:chOff x="0" y="0"/>
-          <a:chExt cx="0" cy="0"/>
-        </a:xfrm>
-      </p:grpSpPr>
-      <p:sp>
-        <p:nvSpPr>
-          <p:cNvPr id="126" name="Google Shape;126;p23"/>
-          <p:cNvSpPr txBox="1">
-            <a:spLocks noGrp="1"/>
-          </p:cNvSpPr>
-          <p:nvPr>
-            <p:ph type="title"/>
-          </p:nvPr>
-        </p:nvSpPr>
-        <p:spPr>
-          <a:xfrm>
-            <a:off x="311700" y="445025"/>
-            <a:ext cx="8520600" cy="572700"/>
-          </a:xfrm>
-          <a:prstGeom prst="rect">
-            <a:avLst/>
-          </a:prstGeom>
-        </p:spPr>
-        <p:txBody>
-          <a:bodyPr spcFirstLastPara="1" wrap="square" lIns="91425" tIns="91425" rIns="91425" bIns="91425" anchor="t" anchorCtr="0">
-            <a:normAutofit fontScale="90000"/>
-          </a:bodyPr>
-          <a:lstStyle/>
-          <a:p>
-            <a:pPr marL="0" lvl="0" indent="0" algn="l" rtl="0">
-              <a:spcBef>
-                <a:spcPts val="0"/>
-              </a:spcBef>
-              <a:spcAft>
-                <a:spcPts val="0"/>
-              </a:spcAft>
-              <a:buNone/>
-            </a:pPr>
-            <a:r>
-              <a:rPr lang="pt-PT"/>
-              <a:t>Diagrama de Colaboração: Sensor Activity</a:t>
-            </a:r>
-            <a:endParaRPr/>
-          </a:p>
-        </p:txBody>
-      </p:sp>
-      <p:pic>
-        <p:nvPicPr>
-          <p:cNvPr id="127" name="Google Shape;127;p23" title="Dance4Life_Collab_SA.png"/>
-          <p:cNvPicPr preferRelativeResize="0"/>
-          <p:nvPr/>
-        </p:nvPicPr>
-        <p:blipFill>
-          <a:blip r:embed="rId3">
-            <a:alphaModFix/>
-          </a:blip>
-          <a:stretch>
-            <a:fillRect/>
-          </a:stretch>
-        </p:blipFill>
-        <p:spPr>
-          <a:xfrm>
-            <a:off x="3179038" y="1115075"/>
-            <a:ext cx="2785937" cy="3820974"/>
           </a:xfrm>
           <a:prstGeom prst="rect">
             <a:avLst/>
@@ -7851,6 +7839,101 @@
   <p:cSld>
     <p:spTree>
       <p:nvGrpSpPr>
+        <p:cNvPr id="1" name="Shape 143"/>
+        <p:cNvGrpSpPr/>
+        <p:nvPr/>
+      </p:nvGrpSpPr>
+      <p:grpSpPr>
+        <a:xfrm>
+          <a:off x="0" y="0"/>
+          <a:ext cx="0" cy="0"/>
+          <a:chOff x="0" y="0"/>
+          <a:chExt cx="0" cy="0"/>
+        </a:xfrm>
+      </p:grpSpPr>
+      <p:sp>
+        <p:nvSpPr>
+          <p:cNvPr id="144" name="Google Shape;144;p26"/>
+          <p:cNvSpPr txBox="1">
+            <a:spLocks noGrp="1"/>
+          </p:cNvSpPr>
+          <p:nvPr>
+            <p:ph type="title"/>
+          </p:nvPr>
+        </p:nvSpPr>
+        <p:spPr>
+          <a:xfrm>
+            <a:off x="311700" y="445025"/>
+            <a:ext cx="8520600" cy="572700"/>
+          </a:xfrm>
+          <a:prstGeom prst="rect">
+            <a:avLst/>
+          </a:prstGeom>
+        </p:spPr>
+        <p:txBody>
+          <a:bodyPr spcFirstLastPara="1" wrap="square" lIns="91425" tIns="91425" rIns="91425" bIns="91425" anchor="t" anchorCtr="0">
+            <a:normAutofit fontScale="90000"/>
+          </a:bodyPr>
+          <a:lstStyle/>
+          <a:p>
+            <a:pPr marL="0" lvl="0" indent="0" algn="l" rtl="0">
+              <a:spcBef>
+                <a:spcPts val="0"/>
+              </a:spcBef>
+              <a:spcAft>
+                <a:spcPts val="0"/>
+              </a:spcAft>
+              <a:buNone/>
+            </a:pPr>
+            <a:r>
+              <a:rPr lang="pt-PT"/>
+              <a:t>Diagrama de Actividades: Sensor Activity</a:t>
+            </a:r>
+            <a:endParaRPr/>
+          </a:p>
+        </p:txBody>
+      </p:sp>
+      <p:pic>
+        <p:nvPicPr>
+          <p:cNvPr id="145" name="Google Shape;145;p26" title="Dance4Life_SA.png"/>
+          <p:cNvPicPr preferRelativeResize="0"/>
+          <p:nvPr/>
+        </p:nvPicPr>
+        <p:blipFill>
+          <a:blip r:embed="rId3">
+            <a:alphaModFix/>
+          </a:blip>
+          <a:stretch>
+            <a:fillRect/>
+          </a:stretch>
+        </p:blipFill>
+        <p:spPr>
+          <a:xfrm>
+            <a:off x="2144775" y="1154400"/>
+            <a:ext cx="4854441" cy="3820976"/>
+          </a:xfrm>
+          <a:prstGeom prst="rect">
+            <a:avLst/>
+          </a:prstGeom>
+          <a:noFill/>
+          <a:ln>
+            <a:noFill/>
+          </a:ln>
+        </p:spPr>
+      </p:pic>
+    </p:spTree>
+  </p:cSld>
+  <p:clrMapOvr>
+    <a:masterClrMapping/>
+  </p:clrMapOvr>
+</p:sld>
+</file>
+
+<file path=ppt/slides/slide14.xml><?xml version="1.0" encoding="utf-8"?>
+<p:sld xmlns:a="http://schemas.openxmlformats.org/drawingml/2006/main" xmlns:r="http://schemas.openxmlformats.org/officeDocument/2006/relationships" xmlns:p="http://schemas.openxmlformats.org/presentationml/2006/main">
+  <p:cSld>
+    <p:spTree>
+      <p:nvGrpSpPr>
         <p:cNvPr id="1" name="Shape 137"/>
         <p:cNvGrpSpPr/>
         <p:nvPr/>
@@ -7923,101 +8006,6 @@
           <a:xfrm>
             <a:off x="1364888" y="1170125"/>
             <a:ext cx="6414223" cy="3820973"/>
-          </a:xfrm>
-          <a:prstGeom prst="rect">
-            <a:avLst/>
-          </a:prstGeom>
-          <a:noFill/>
-          <a:ln>
-            <a:noFill/>
-          </a:ln>
-        </p:spPr>
-      </p:pic>
-    </p:spTree>
-  </p:cSld>
-  <p:clrMapOvr>
-    <a:masterClrMapping/>
-  </p:clrMapOvr>
-</p:sld>
-</file>
-
-<file path=ppt/slides/slide14.xml><?xml version="1.0" encoding="utf-8"?>
-<p:sld xmlns:a="http://schemas.openxmlformats.org/drawingml/2006/main" xmlns:r="http://schemas.openxmlformats.org/officeDocument/2006/relationships" xmlns:p="http://schemas.openxmlformats.org/presentationml/2006/main">
-  <p:cSld>
-    <p:spTree>
-      <p:nvGrpSpPr>
-        <p:cNvPr id="1" name="Shape 143"/>
-        <p:cNvGrpSpPr/>
-        <p:nvPr/>
-      </p:nvGrpSpPr>
-      <p:grpSpPr>
-        <a:xfrm>
-          <a:off x="0" y="0"/>
-          <a:ext cx="0" cy="0"/>
-          <a:chOff x="0" y="0"/>
-          <a:chExt cx="0" cy="0"/>
-        </a:xfrm>
-      </p:grpSpPr>
-      <p:sp>
-        <p:nvSpPr>
-          <p:cNvPr id="144" name="Google Shape;144;p26"/>
-          <p:cNvSpPr txBox="1">
-            <a:spLocks noGrp="1"/>
-          </p:cNvSpPr>
-          <p:nvPr>
-            <p:ph type="title"/>
-          </p:nvPr>
-        </p:nvSpPr>
-        <p:spPr>
-          <a:xfrm>
-            <a:off x="311700" y="445025"/>
-            <a:ext cx="8520600" cy="572700"/>
-          </a:xfrm>
-          <a:prstGeom prst="rect">
-            <a:avLst/>
-          </a:prstGeom>
-        </p:spPr>
-        <p:txBody>
-          <a:bodyPr spcFirstLastPara="1" wrap="square" lIns="91425" tIns="91425" rIns="91425" bIns="91425" anchor="t" anchorCtr="0">
-            <a:normAutofit fontScale="90000"/>
-          </a:bodyPr>
-          <a:lstStyle/>
-          <a:p>
-            <a:pPr marL="0" lvl="0" indent="0" algn="l" rtl="0">
-              <a:spcBef>
-                <a:spcPts val="0"/>
-              </a:spcBef>
-              <a:spcAft>
-                <a:spcPts val="0"/>
-              </a:spcAft>
-              <a:buNone/>
-            </a:pPr>
-            <a:r>
-              <a:rPr lang="pt-PT"/>
-              <a:t>Diagrama de Actividades: Sensor Activity</a:t>
-            </a:r>
-            <a:endParaRPr/>
-          </a:p>
-        </p:txBody>
-      </p:sp>
-      <p:pic>
-        <p:nvPicPr>
-          <p:cNvPr id="145" name="Google Shape;145;p26" title="Dance4Life_SA.png"/>
-          <p:cNvPicPr preferRelativeResize="0"/>
-          <p:nvPr/>
-        </p:nvPicPr>
-        <p:blipFill>
-          <a:blip r:embed="rId3">
-            <a:alphaModFix/>
-          </a:blip>
-          <a:stretch>
-            <a:fillRect/>
-          </a:stretch>
-        </p:blipFill>
-        <p:spPr>
-          <a:xfrm>
-            <a:off x="2144775" y="1154400"/>
-            <a:ext cx="4854441" cy="3820976"/>
           </a:xfrm>
           <a:prstGeom prst="rect">
             <a:avLst/>
@@ -8301,7 +8289,7 @@
         </p:blipFill>
         <p:spPr>
           <a:xfrm>
-            <a:off x="1495113" y="1162250"/>
+            <a:off x="1680850" y="1269407"/>
             <a:ext cx="6153779" cy="3820974"/>
           </a:xfrm>
           <a:prstGeom prst="rect">
@@ -8574,7 +8562,7 @@
         </p:spPr>
         <p:txBody>
           <a:bodyPr spcFirstLastPara="1" wrap="square" lIns="91425" tIns="91425" rIns="91425" bIns="91425" anchor="t" anchorCtr="0">
-            <a:normAutofit lnSpcReduction="20000"/>
+            <a:normAutofit fontScale="92500" lnSpcReduction="20000"/>
           </a:bodyPr>
           <a:lstStyle/>
           <a:p>
@@ -8728,7 +8716,7 @@
         </p:spPr>
         <p:txBody>
           <a:bodyPr spcFirstLastPara="1" wrap="square" lIns="91425" tIns="91425" rIns="91425" bIns="91425" anchor="t" anchorCtr="0">
-            <a:normAutofit/>
+            <a:normAutofit lnSpcReduction="10000"/>
           </a:bodyPr>
           <a:lstStyle/>
           <a:p>
@@ -8858,7 +8846,7 @@
         </p:spPr>
         <p:txBody>
           <a:bodyPr spcFirstLastPara="1" wrap="square" lIns="91425" tIns="91425" rIns="91425" bIns="91425" anchor="t" anchorCtr="0">
-            <a:normAutofit lnSpcReduction="20000"/>
+            <a:normAutofit fontScale="92500" lnSpcReduction="20000"/>
           </a:bodyPr>
           <a:lstStyle/>
           <a:p>
@@ -9109,7 +9097,7 @@
         </p:spPr>
         <p:txBody>
           <a:bodyPr spcFirstLastPara="1" wrap="square" lIns="91425" tIns="91425" rIns="91425" bIns="91425" anchor="t" anchorCtr="0">
-            <a:normAutofit fontScale="77500"/>
+            <a:normAutofit fontScale="77500" lnSpcReduction="10000"/>
           </a:bodyPr>
           <a:lstStyle/>
           <a:p>
@@ -9321,7 +9309,7 @@
         </p:spPr>
         <p:txBody>
           <a:bodyPr spcFirstLastPara="1" wrap="square" lIns="91425" tIns="91425" rIns="91425" bIns="91425" anchor="t" anchorCtr="0">
-            <a:normAutofit fontScale="70000"/>
+            <a:normAutofit fontScale="70000" lnSpcReduction="20000"/>
           </a:bodyPr>
           <a:lstStyle/>
           <a:p>
@@ -9603,7 +9591,7 @@
         </p:spPr>
         <p:txBody>
           <a:bodyPr spcFirstLastPara="1" wrap="square" lIns="91425" tIns="91425" rIns="91425" bIns="91425" anchor="t" anchorCtr="0">
-            <a:normAutofit lnSpcReduction="20000"/>
+            <a:normAutofit fontScale="85000" lnSpcReduction="20000"/>
           </a:bodyPr>
           <a:lstStyle/>
           <a:p>
@@ -9943,44 +9931,6 @@
           </a:p>
         </p:txBody>
       </p:sp>
-      <p:sp>
-        <p:nvSpPr>
-          <p:cNvPr id="91" name="Google Shape;91;p18"/>
-          <p:cNvSpPr txBox="1">
-            <a:spLocks noGrp="1"/>
-          </p:cNvSpPr>
-          <p:nvPr>
-            <p:ph type="body" idx="1"/>
-          </p:nvPr>
-        </p:nvSpPr>
-        <p:spPr>
-          <a:xfrm>
-            <a:off x="311700" y="1152475"/>
-            <a:ext cx="8520600" cy="3416400"/>
-          </a:xfrm>
-          <a:prstGeom prst="rect">
-            <a:avLst/>
-          </a:prstGeom>
-        </p:spPr>
-        <p:txBody>
-          <a:bodyPr spcFirstLastPara="1" wrap="square" lIns="91425" tIns="91425" rIns="91425" bIns="91425" anchor="t" anchorCtr="0">
-            <a:normAutofit/>
-          </a:bodyPr>
-          <a:lstStyle/>
-          <a:p>
-            <a:pPr marL="0" lvl="0" indent="0" algn="l" rtl="0">
-              <a:spcBef>
-                <a:spcPts val="0"/>
-              </a:spcBef>
-              <a:spcAft>
-                <a:spcPts val="1200"/>
-              </a:spcAft>
-              <a:buNone/>
-            </a:pPr>
-            <a:endParaRPr/>
-          </a:p>
-        </p:txBody>
-      </p:sp>
       <p:pic>
         <p:nvPicPr>
           <p:cNvPr id="92" name="Google Shape;92;p18"/>
@@ -10104,44 +10054,6 @@
           </a:p>
         </p:txBody>
       </p:sp>
-      <p:sp>
-        <p:nvSpPr>
-          <p:cNvPr id="99" name="Google Shape;99;p19"/>
-          <p:cNvSpPr txBox="1">
-            <a:spLocks noGrp="1"/>
-          </p:cNvSpPr>
-          <p:nvPr>
-            <p:ph type="body" idx="1"/>
-          </p:nvPr>
-        </p:nvSpPr>
-        <p:spPr>
-          <a:xfrm>
-            <a:off x="311700" y="1152475"/>
-            <a:ext cx="8520600" cy="3416400"/>
-          </a:xfrm>
-          <a:prstGeom prst="rect">
-            <a:avLst/>
-          </a:prstGeom>
-        </p:spPr>
-        <p:txBody>
-          <a:bodyPr spcFirstLastPara="1" wrap="square" lIns="91425" tIns="91425" rIns="91425" bIns="91425" anchor="t" anchorCtr="0">
-            <a:normAutofit/>
-          </a:bodyPr>
-          <a:lstStyle/>
-          <a:p>
-            <a:pPr marL="0" lvl="0" indent="0" algn="l" rtl="0">
-              <a:spcBef>
-                <a:spcPts val="0"/>
-              </a:spcBef>
-              <a:spcAft>
-                <a:spcPts val="1200"/>
-              </a:spcAft>
-              <a:buNone/>
-            </a:pPr>
-            <a:endParaRPr/>
-          </a:p>
-        </p:txBody>
-      </p:sp>
       <p:pic>
         <p:nvPicPr>
           <p:cNvPr id="100" name="Google Shape;100;p19" title="Dance4Life_Classes.png"/>
@@ -10158,7 +10070,7 @@
         </p:blipFill>
         <p:spPr>
           <a:xfrm>
-            <a:off x="966000" y="1017725"/>
+            <a:off x="823125" y="1074875"/>
             <a:ext cx="7211994" cy="4125775"/>
           </a:xfrm>
           <a:prstGeom prst="rect">
@@ -10258,7 +10170,7 @@
         </p:spPr>
         <p:txBody>
           <a:bodyPr spcFirstLastPara="1" wrap="square" lIns="91425" tIns="91425" rIns="91425" bIns="91425" anchor="t" anchorCtr="0">
-            <a:normAutofit fontScale="85000" lnSpcReduction="20000"/>
+            <a:normAutofit fontScale="77500" lnSpcReduction="20000"/>
           </a:bodyPr>
           <a:lstStyle/>
           <a:p>
